--- a/data/talent-etl/presentation/ACME_Talent_Lake.pptx
+++ b/data/talent-etl/presentation/ACME_Talent_Lake.pptx
@@ -14,6 +14,7 @@
     <p:sldId id="262" r:id="rId14"/>
     <p:sldId id="263" r:id="rId15"/>
     <p:sldId id="264" r:id="rId16"/>
+    <p:sldId id="265" r:id="rId17"/>
   </p:sldIdLst>
   <p:sldSz cx="12191695" cy="6858000" type="screen4x3"/>
   <p:notesSz cx="6858000" cy="9144000"/>
@@ -1671,6 +1672,76 @@
 </p:notes>
 </file>
 
+<file path=ppt/notesSlides/notesSlide10.xml><?xml version="1.0" encoding="utf-8"?>
+<p:notes xmlns:a="http://schemas.openxmlformats.org/drawingml/2006/main" xmlns:p="http://schemas.openxmlformats.org/presentationml/2006/main" xmlns:r="http://schemas.openxmlformats.org/officeDocument/2006/relationships">
+  <p:cSld>
+    <p:spTree>
+      <p:nvGrpSpPr>
+        <p:cNvPr id="1" name=""/>
+        <p:cNvGrpSpPr/>
+        <p:nvPr/>
+      </p:nvGrpSpPr>
+      <p:grpSpPr>
+        <a:xfrm>
+          <a:off x="0" y="0"/>
+          <a:ext cx="0" cy="0"/>
+          <a:chOff x="0" y="0"/>
+          <a:chExt cx="0" cy="0"/>
+        </a:xfrm>
+      </p:grpSpPr>
+      <p:sp>
+        <p:nvSpPr>
+          <p:cNvPr id="2" name="Slide Image Placeholder 1"/>
+          <p:cNvSpPr>
+            <a:spLocks noGrp="1"/>
+          </p:cNvSpPr>
+          <p:nvPr>
+            <p:ph type="sldImg" idx="2"/>
+          </p:nvPr>
+        </p:nvSpPr>
+        <p:spPr/>
+      </p:sp>
+      <p:sp>
+        <p:nvSpPr>
+          <p:cNvPr id="3" name="Notes Placeholder 2"/>
+          <p:cNvSpPr>
+            <a:spLocks noGrp="1"/>
+          </p:cNvSpPr>
+          <p:nvPr>
+            <p:ph type="body" idx="3" sz="quarter"/>
+          </p:nvPr>
+        </p:nvSpPr>
+        <p:spPr/>
+        <p:txBody>
+          <a:bodyPr/>
+          <a:lstStyle/>
+          <a:p>
+            <a:r>
+              <a:t>Key decisions: pandas because the data is small and pure functions are testable; one code path via LocalStack S3; quarantine instead of dropping; a transparent attrition score. Limits: two review periods, 27 teams for Q6, a weak potential rating, 143 unusable events, plain-HTTP dashboard. Next: change history (SCD Type 2), the four small infra changes, scheduling, SQL over Gold and HTTPS. Then demo: cloud_run.sh, the dashboard, the notebook.</a:t>
+            </a:r>
+          </a:p>
+        </p:txBody>
+      </p:sp>
+      <p:sp>
+        <p:nvSpPr>
+          <p:cNvPr id="4" name="Slide Number Placeholder 3"/>
+          <p:cNvSpPr>
+            <a:spLocks noGrp="1"/>
+          </p:cNvSpPr>
+          <p:nvPr>
+            <p:ph type="sldNum" idx="5" sz="quarter"/>
+          </p:nvPr>
+        </p:nvSpPr>
+        <p:spPr/>
+      </p:sp>
+    </p:spTree>
+  </p:cSld>
+  <p:clrMapOvr>
+    <a:masterClrMapping/>
+  </p:clrMapOvr>
+</p:notes>
+</file>
+
 <file path=ppt/notesSlides/notesSlide2.xml><?xml version="1.0" encoding="utf-8"?>
 <p:notes xmlns:a="http://schemas.openxmlformats.org/drawingml/2006/main" xmlns:p="http://schemas.openxmlformats.org/presentationml/2006/main" xmlns:r="http://schemas.openxmlformats.org/officeDocument/2006/relationships">
   <p:cSld>
@@ -1926,7 +1997,7 @@
           <a:lstStyle/>
           <a:p>
             <a:r>
-              <a:t>Gold is organised by question. Each table is a pure function of Silver with business rules as named constants, so a threshold is a one-line change. Before publishing, row counts must match the Silver population, totals must add back up, and every row must obey its rule. Lineage exists at run, row and column level, so any Gold number traces back to a source file and line.</a:t>
+              <a:t>Every Silver dataset gets a quarantine rate. Below 5% it publishes normally. From 5% it still publishes but raises a warning in the log, the data-quality report, the run manifest and a dashboard banner. From 50%, for example 500 of 1,000 rows, the source is probably broken: the rejects are still saved as evidence, but the previous good Silver data is kept, the run stops and Gold is not rebuilt. Both thresholds are environment variables. Today every dataset is OK; the highest is learning activity at about 1%. An end-to-end test lowers the threshold to 0.5% to prove a critical batch keeps the previous data.</a:t>
             </a:r>
           </a:p>
         </p:txBody>
@@ -1996,7 +2067,7 @@
           <a:lstStyle/>
           <a:p>
             <a:r>
-              <a:t>Q1: average latest rating 3.41; 898 improved, 872 stable, 230 declined. Q2: a critical gap is two or more levels short, or any shortfall where the role needs level 4+; 465 gaps across 441 people, Stakeholder Management most common, HR department highest share (28%). Q3: ready now = high potential, readiness 'Ready Now', no critical gaps; 124 people; 28 high-potential employees are at high attrition risk. Q4: 1.75 courses per person, 41% quiz pass rate, 232 with no learning activity at all.</a:t>
+              <a:t>Gold is organised by question. Each table is a pure function of Silver with business rules as named constants, so a threshold is a one-line change. Before publishing, row counts must match the Silver population, totals must add back up, and every row must obey its rule. Lineage exists at run, row and column level, so any Gold number traces back to a source file and line.</a:t>
             </a:r>
           </a:p>
         </p:txBody>
@@ -2066,7 +2137,7 @@
           <a:lstStyle/>
           <a:p>
             <a:r>
-              <a:t>Q5 is a transparent points score: rating fell +2, latest rating 2 or below +2, negative manager comment +1, no learning in 180 days +1, manager flag High +2 or Medium +1; 5 or more is High. Managers flagged 311 as high risk; only 145 also show performance warning signs, and 67 score high without a flag. Q6 is team level because projects belong to teams: on-time teams have 56% high performers versus 43% for all-delayed teams, from 27 teams. Q7: Stakeholder Management has the weakest coverage of required levels at 65%; a third of assessments are at level 1–2.</a:t>
+              <a:t>Q1: average latest rating 3.41; 898 improved, 872 stable, 230 declined. Q2: a critical gap is two or more levels short, or any shortfall where the role needs level 4+; 465 gaps across 441 people, Stakeholder Management most common, HR department highest share (28%). Q3: ready now = high potential, readiness 'Ready Now', no critical gaps; 124 people; 28 high-potential employees are at high attrition risk. Q4: 1.75 courses per person, 41% quiz pass rate, 232 with no learning activity at all.</a:t>
             </a:r>
           </a:p>
         </p:txBody>
@@ -2136,7 +2207,7 @@
           <a:lstStyle/>
           <a:p>
             <a:r>
-              <a:t>job.py is identical locally and in AWS; environment variables decide the rest. In AWS it runs as a Kubernetes Job on the workshop EKS cluster, reads Aurora and writes Amazon S3: 60 seconds, identical answers. The stock EKS template only supports a single-file job with no settings or AWS access; I kept infra/ and bin/ untouched and closed each gap with small scripts in the project. 60 automated tests, including end-to-end runs.</a:t>
+              <a:t>Q5 is a transparent points score: rating fell +2, latest rating 2 or below +2, negative manager comment +1, no learning in 180 days +1, manager flag High +2 or Medium +1; 5 or more is High. Managers flagged 311 as high risk; only 145 also show performance warning signs, and 67 score high without a flag. Q6 is team level because projects belong to teams: on-time teams have 56% high performers versus 43% for all-delayed teams, from 27 teams. Q7: Stakeholder Management has the weakest coverage of required levels at 65%; a third of assessments are at level 1–2.</a:t>
             </a:r>
           </a:p>
         </p:txBody>
@@ -2206,7 +2277,7 @@
           <a:lstStyle/>
           <a:p>
             <a:r>
-              <a:t>Key decisions: pandas because the data is small and pure functions are testable; one code path via LocalStack S3; quarantine instead of dropping; a transparent attrition score. Limits: two review periods, 27 teams for Q6, a weak potential rating, 143 unusable events, plain-HTTP dashboard. Next: change history (SCD Type 2), the four small infra changes, scheduling, SQL over Gold and HTTPS. Then demo: cloud_run.sh, the dashboard, the notebook.</a:t>
+              <a:t>job.py is identical locally and in AWS; environment variables decide the rest. In AWS it runs as a Kubernetes Job on the workshop EKS cluster, reads Aurora and writes Amazon S3: 60 seconds, identical answers. The stock EKS template only supports a single-file job with no settings or AWS access; I kept infra/ and bin/ untouched and closed each gap with small scripts in the project. 60 automated tests, including end-to-end runs.</a:t>
             </a:r>
           </a:p>
         </p:txBody>
@@ -5720,6 +5791,943 @@
 </p:sld>
 </file>
 
+<file path=ppt/slides/slide10.xml><?xml version="1.0" encoding="utf-8"?>
+<p:sld xmlns:a="http://schemas.openxmlformats.org/drawingml/2006/main" xmlns:p="http://schemas.openxmlformats.org/presentationml/2006/main" xmlns:r="http://schemas.openxmlformats.org/officeDocument/2006/relationships">
+  <p:cSld>
+    <p:bg>
+      <p:bgPr>
+        <a:solidFill>
+          <a:srgbClr val="FFFFFF"/>
+        </a:solidFill>
+        <a:effectLst/>
+      </p:bgPr>
+    </p:bg>
+    <p:spTree>
+      <p:nvGrpSpPr>
+        <p:cNvPr id="1" name=""/>
+        <p:cNvGrpSpPr/>
+        <p:nvPr/>
+      </p:nvGrpSpPr>
+      <p:grpSpPr/>
+      <p:sp>
+        <p:nvSpPr>
+          <p:cNvPr id="2" name="TextBox 1"/>
+          <p:cNvSpPr txBox="1"/>
+          <p:nvPr/>
+        </p:nvSpPr>
+        <p:spPr>
+          <a:xfrm>
+            <a:off x="548640" y="292608"/>
+            <a:ext cx="8229600" cy="274320"/>
+          </a:xfrm>
+          <a:prstGeom prst="rect">
+            <a:avLst/>
+          </a:prstGeom>
+          <a:noFill/>
+        </p:spPr>
+        <p:txBody>
+          <a:bodyPr wrap="square" anchor="t" lIns="18288" rIns="18288" tIns="18288" bIns="18288">
+            <a:spAutoFit/>
+          </a:bodyPr>
+          <a:lstStyle/>
+          <a:p>
+            <a:pPr algn="l">
+              <a:spcAft>
+                <a:spcPts val="400"/>
+              </a:spcAft>
+            </a:pPr>
+            <a:r>
+              <a:rPr sz="1100" b="0">
+                <a:solidFill>
+                  <a:srgbClr val="1D4E89"/>
+                </a:solidFill>
+                <a:latin typeface="Segoe UI Semibold"/>
+              </a:rPr>
+              <a:t>DECISIONS &amp; NEXT STEPS</a:t>
+            </a:r>
+          </a:p>
+        </p:txBody>
+      </p:sp>
+      <p:sp>
+        <p:nvSpPr>
+          <p:cNvPr id="3" name="TextBox 2"/>
+          <p:cNvSpPr txBox="1"/>
+          <p:nvPr/>
+        </p:nvSpPr>
+        <p:spPr>
+          <a:xfrm>
+            <a:off x="548640" y="566928"/>
+            <a:ext cx="11064240" cy="731520"/>
+          </a:xfrm>
+          <a:prstGeom prst="rect">
+            <a:avLst/>
+          </a:prstGeom>
+          <a:noFill/>
+        </p:spPr>
+        <p:txBody>
+          <a:bodyPr wrap="square" anchor="t" lIns="18288" rIns="18288" tIns="18288" bIns="18288">
+            <a:spAutoFit/>
+          </a:bodyPr>
+          <a:lstStyle/>
+          <a:p>
+            <a:pPr algn="l">
+              <a:spcAft>
+                <a:spcPts val="400"/>
+              </a:spcAft>
+            </a:pPr>
+            <a:r>
+              <a:rPr sz="2600" b="0">
+                <a:solidFill>
+                  <a:srgbClr val="17202A"/>
+                </a:solidFill>
+                <a:latin typeface="Segoe UI Semibold"/>
+              </a:rPr>
+              <a:t>Choices, limits and what comes next</a:t>
+            </a:r>
+          </a:p>
+        </p:txBody>
+      </p:sp>
+      <p:sp>
+        <p:nvSpPr>
+          <p:cNvPr id="4" name="Rounded Rectangle 3"/>
+          <p:cNvSpPr/>
+          <p:nvPr/>
+        </p:nvSpPr>
+        <p:spPr>
+          <a:xfrm>
+            <a:off x="548640" y="1463040"/>
+            <a:ext cx="3593592" cy="3063240"/>
+          </a:xfrm>
+          <a:prstGeom prst="roundRect">
+            <a:avLst>
+              <a:gd name="adj" fmla="val 6000"/>
+            </a:avLst>
+          </a:prstGeom>
+          <a:solidFill>
+            <a:srgbClr val="FFFFFF"/>
+          </a:solidFill>
+          <a:ln w="12700">
+            <a:solidFill>
+              <a:srgbClr val="D4DAE1"/>
+            </a:solidFill>
+          </a:ln>
+        </p:spPr>
+        <p:txBody>
+          <a:bodyPr rtlCol="0" anchor="ctr"/>
+          <a:lstStyle/>
+          <a:p/>
+        </p:txBody>
+      </p:sp>
+      <p:sp>
+        <p:nvSpPr>
+          <p:cNvPr id="5" name="TextBox 4"/>
+          <p:cNvSpPr txBox="1"/>
+          <p:nvPr/>
+        </p:nvSpPr>
+        <p:spPr>
+          <a:xfrm>
+            <a:off x="713232" y="1591056"/>
+            <a:ext cx="3264408" cy="365760"/>
+          </a:xfrm>
+          <a:prstGeom prst="rect">
+            <a:avLst/>
+          </a:prstGeom>
+          <a:noFill/>
+        </p:spPr>
+        <p:txBody>
+          <a:bodyPr wrap="square" anchor="t" lIns="18288" rIns="18288" tIns="18288" bIns="18288">
+            <a:spAutoFit/>
+          </a:bodyPr>
+          <a:lstStyle/>
+          <a:p>
+            <a:pPr algn="l">
+              <a:spcAft>
+                <a:spcPts val="400"/>
+              </a:spcAft>
+            </a:pPr>
+            <a:r>
+              <a:rPr sz="1400" b="0">
+                <a:solidFill>
+                  <a:srgbClr val="17202A"/>
+                </a:solidFill>
+                <a:latin typeface="Segoe UI Semibold"/>
+              </a:rPr>
+              <a:t>Decisions</a:t>
+            </a:r>
+          </a:p>
+        </p:txBody>
+      </p:sp>
+      <p:sp>
+        <p:nvSpPr>
+          <p:cNvPr id="6" name="TextBox 5"/>
+          <p:cNvSpPr txBox="1"/>
+          <p:nvPr/>
+        </p:nvSpPr>
+        <p:spPr>
+          <a:xfrm>
+            <a:off x="713232" y="1965960"/>
+            <a:ext cx="3264408" cy="2468880"/>
+          </a:xfrm>
+          <a:prstGeom prst="rect">
+            <a:avLst/>
+          </a:prstGeom>
+          <a:noFill/>
+        </p:spPr>
+        <p:txBody>
+          <a:bodyPr wrap="square" anchor="t" lIns="18288" rIns="18288" tIns="18288" bIns="18288">
+            <a:spAutoFit/>
+          </a:bodyPr>
+          <a:lstStyle/>
+          <a:p>
+            <a:pPr algn="l">
+              <a:spcAft>
+                <a:spcPts val="500"/>
+              </a:spcAft>
+            </a:pPr>
+            <a:r>
+              <a:rPr sz="1150" b="0">
+                <a:solidFill>
+                  <a:srgbClr val="4B5765"/>
+                </a:solidFill>
+                <a:latin typeface="Segoe UI"/>
+              </a:rPr>
+              <a:t>pandas + Parquet: seconds at this size, easy to test, Spark-ready layout</a:t>
+            </a:r>
+          </a:p>
+          <a:p>
+            <a:pPr algn="l">
+              <a:spcAft>
+                <a:spcPts val="500"/>
+              </a:spcAft>
+            </a:pPr>
+            <a:r>
+              <a:rPr sz="1150" b="0">
+                <a:solidFill>
+                  <a:srgbClr val="4B5765"/>
+                </a:solidFill>
+                <a:latin typeface="Segoe UI"/>
+              </a:rPr>
+              <a:t>LocalStack S3: one code path for local and cloud</a:t>
+            </a:r>
+          </a:p>
+          <a:p>
+            <a:pPr algn="l">
+              <a:spcAft>
+                <a:spcPts val="500"/>
+              </a:spcAft>
+            </a:pPr>
+            <a:r>
+              <a:rPr sz="1150" b="0">
+                <a:solidFill>
+                  <a:srgbClr val="4B5765"/>
+                </a:solidFill>
+                <a:latin typeface="Segoe UI"/>
+              </a:rPr>
+              <a:t>Quarantine, never drop: evidence kept, counts reconcile</a:t>
+            </a:r>
+          </a:p>
+          <a:p>
+            <a:pPr algn="l">
+              <a:spcAft>
+                <a:spcPts val="500"/>
+              </a:spcAft>
+            </a:pPr>
+            <a:r>
+              <a:rPr sz="1150" b="0">
+                <a:solidFill>
+                  <a:srgbClr val="4B5765"/>
+                </a:solidFill>
+                <a:latin typeface="Segoe UI"/>
+              </a:rPr>
+              <a:t>Transparent attrition score: managers see why</a:t>
+            </a:r>
+          </a:p>
+        </p:txBody>
+      </p:sp>
+      <p:sp>
+        <p:nvSpPr>
+          <p:cNvPr id="7" name="Rounded Rectangle 6"/>
+          <p:cNvSpPr/>
+          <p:nvPr/>
+        </p:nvSpPr>
+        <p:spPr>
+          <a:xfrm>
+            <a:off x="4297679" y="1463040"/>
+            <a:ext cx="3593592" cy="3063240"/>
+          </a:xfrm>
+          <a:prstGeom prst="roundRect">
+            <a:avLst>
+              <a:gd name="adj" fmla="val 6000"/>
+            </a:avLst>
+          </a:prstGeom>
+          <a:solidFill>
+            <a:srgbClr val="FFFFFF"/>
+          </a:solidFill>
+          <a:ln w="12700">
+            <a:solidFill>
+              <a:srgbClr val="D4DAE1"/>
+            </a:solidFill>
+          </a:ln>
+        </p:spPr>
+        <p:txBody>
+          <a:bodyPr rtlCol="0" anchor="ctr"/>
+          <a:lstStyle/>
+          <a:p/>
+        </p:txBody>
+      </p:sp>
+      <p:sp>
+        <p:nvSpPr>
+          <p:cNvPr id="8" name="TextBox 7"/>
+          <p:cNvSpPr txBox="1"/>
+          <p:nvPr/>
+        </p:nvSpPr>
+        <p:spPr>
+          <a:xfrm>
+            <a:off x="4462271" y="1591056"/>
+            <a:ext cx="3264408" cy="365760"/>
+          </a:xfrm>
+          <a:prstGeom prst="rect">
+            <a:avLst/>
+          </a:prstGeom>
+          <a:noFill/>
+        </p:spPr>
+        <p:txBody>
+          <a:bodyPr wrap="square" anchor="t" lIns="18288" rIns="18288" tIns="18288" bIns="18288">
+            <a:spAutoFit/>
+          </a:bodyPr>
+          <a:lstStyle/>
+          <a:p>
+            <a:pPr algn="l">
+              <a:spcAft>
+                <a:spcPts val="400"/>
+              </a:spcAft>
+            </a:pPr>
+            <a:r>
+              <a:rPr sz="1400" b="0">
+                <a:solidFill>
+                  <a:srgbClr val="B0412D"/>
+                </a:solidFill>
+                <a:latin typeface="Segoe UI Semibold"/>
+              </a:rPr>
+              <a:t>Limitations</a:t>
+            </a:r>
+          </a:p>
+        </p:txBody>
+      </p:sp>
+      <p:sp>
+        <p:nvSpPr>
+          <p:cNvPr id="9" name="TextBox 8"/>
+          <p:cNvSpPr txBox="1"/>
+          <p:nvPr/>
+        </p:nvSpPr>
+        <p:spPr>
+          <a:xfrm>
+            <a:off x="4462271" y="1965960"/>
+            <a:ext cx="3264408" cy="2468880"/>
+          </a:xfrm>
+          <a:prstGeom prst="rect">
+            <a:avLst/>
+          </a:prstGeom>
+          <a:noFill/>
+        </p:spPr>
+        <p:txBody>
+          <a:bodyPr wrap="square" anchor="t" lIns="18288" rIns="18288" tIns="18288" bIns="18288">
+            <a:spAutoFit/>
+          </a:bodyPr>
+          <a:lstStyle/>
+          <a:p>
+            <a:pPr algn="l">
+              <a:spcAft>
+                <a:spcPts val="500"/>
+              </a:spcAft>
+            </a:pPr>
+            <a:r>
+              <a:rPr sz="1150" b="0">
+                <a:solidFill>
+                  <a:srgbClr val="4B5765"/>
+                </a:solidFill>
+                <a:latin typeface="Segoe UI"/>
+              </a:rPr>
+              <a:t>Two review periods: one trend step per person</a:t>
+            </a:r>
+          </a:p>
+          <a:p>
+            <a:pPr algn="l">
+              <a:spcAft>
+                <a:spcPts val="500"/>
+              </a:spcAft>
+            </a:pPr>
+            <a:r>
+              <a:rPr sz="1150" b="0">
+                <a:solidFill>
+                  <a:srgbClr val="4B5765"/>
+                </a:solidFill>
+                <a:latin typeface="Segoe UI"/>
+              </a:rPr>
+              <a:t>Q6 rests on 27 teams: indicative only</a:t>
+            </a:r>
+          </a:p>
+          <a:p>
+            <a:pPr algn="l">
+              <a:spcAft>
+                <a:spcPts val="500"/>
+              </a:spcAft>
+            </a:pPr>
+            <a:r>
+              <a:rPr sz="1150" b="0">
+                <a:solidFill>
+                  <a:srgbClr val="4B5765"/>
+                </a:solidFill>
+                <a:latin typeface="Segoe UI"/>
+              </a:rPr>
+              <a:t>Manager potential barely tracks performance</a:t>
+            </a:r>
+          </a:p>
+          <a:p>
+            <a:pPr algn="l">
+              <a:spcAft>
+                <a:spcPts val="500"/>
+              </a:spcAft>
+            </a:pPr>
+            <a:r>
+              <a:rPr sz="1150" b="0">
+                <a:solidFill>
+                  <a:srgbClr val="4B5765"/>
+                </a:solidFill>
+                <a:latin typeface="Segoe UI"/>
+              </a:rPr>
+              <a:t>143 events unusable until the source fixes them</a:t>
+            </a:r>
+          </a:p>
+        </p:txBody>
+      </p:sp>
+      <p:sp>
+        <p:nvSpPr>
+          <p:cNvPr id="10" name="Rounded Rectangle 9"/>
+          <p:cNvSpPr/>
+          <p:nvPr/>
+        </p:nvSpPr>
+        <p:spPr>
+          <a:xfrm>
+            <a:off x="8046719" y="1463040"/>
+            <a:ext cx="3593592" cy="3063240"/>
+          </a:xfrm>
+          <a:prstGeom prst="roundRect">
+            <a:avLst>
+              <a:gd name="adj" fmla="val 6000"/>
+            </a:avLst>
+          </a:prstGeom>
+          <a:solidFill>
+            <a:srgbClr val="FFFFFF"/>
+          </a:solidFill>
+          <a:ln w="12700">
+            <a:solidFill>
+              <a:srgbClr val="D4DAE1"/>
+            </a:solidFill>
+          </a:ln>
+        </p:spPr>
+        <p:txBody>
+          <a:bodyPr rtlCol="0" anchor="ctr"/>
+          <a:lstStyle/>
+          <a:p/>
+        </p:txBody>
+      </p:sp>
+      <p:sp>
+        <p:nvSpPr>
+          <p:cNvPr id="11" name="TextBox 10"/>
+          <p:cNvSpPr txBox="1"/>
+          <p:nvPr/>
+        </p:nvSpPr>
+        <p:spPr>
+          <a:xfrm>
+            <a:off x="8211311" y="1591056"/>
+            <a:ext cx="3264408" cy="365760"/>
+          </a:xfrm>
+          <a:prstGeom prst="rect">
+            <a:avLst/>
+          </a:prstGeom>
+          <a:noFill/>
+        </p:spPr>
+        <p:txBody>
+          <a:bodyPr wrap="square" anchor="t" lIns="18288" rIns="18288" tIns="18288" bIns="18288">
+            <a:spAutoFit/>
+          </a:bodyPr>
+          <a:lstStyle/>
+          <a:p>
+            <a:pPr algn="l">
+              <a:spcAft>
+                <a:spcPts val="400"/>
+              </a:spcAft>
+            </a:pPr>
+            <a:r>
+              <a:rPr sz="1400" b="0">
+                <a:solidFill>
+                  <a:srgbClr val="2D7449"/>
+                </a:solidFill>
+                <a:latin typeface="Segoe UI Semibold"/>
+              </a:rPr>
+              <a:t>Next steps</a:t>
+            </a:r>
+          </a:p>
+        </p:txBody>
+      </p:sp>
+      <p:sp>
+        <p:nvSpPr>
+          <p:cNvPr id="12" name="TextBox 11"/>
+          <p:cNvSpPr txBox="1"/>
+          <p:nvPr/>
+        </p:nvSpPr>
+        <p:spPr>
+          <a:xfrm>
+            <a:off x="8211311" y="1965960"/>
+            <a:ext cx="3264408" cy="2468880"/>
+          </a:xfrm>
+          <a:prstGeom prst="rect">
+            <a:avLst/>
+          </a:prstGeom>
+          <a:noFill/>
+        </p:spPr>
+        <p:txBody>
+          <a:bodyPr wrap="square" anchor="t" lIns="18288" rIns="18288" tIns="18288" bIns="18288">
+            <a:spAutoFit/>
+          </a:bodyPr>
+          <a:lstStyle/>
+          <a:p>
+            <a:pPr algn="l">
+              <a:spcAft>
+                <a:spcPts val="500"/>
+              </a:spcAft>
+            </a:pPr>
+            <a:r>
+              <a:rPr sz="1150" b="0">
+                <a:solidFill>
+                  <a:srgbClr val="4B5765"/>
+                </a:solidFill>
+                <a:latin typeface="Segoe UI"/>
+              </a:rPr>
+              <a:t>Change history (SCD Type 2) for HR records</a:t>
+            </a:r>
+          </a:p>
+          <a:p>
+            <a:pPr algn="l">
+              <a:spcAft>
+                <a:spcPts val="500"/>
+              </a:spcAft>
+            </a:pPr>
+            <a:r>
+              <a:rPr sz="1150" b="0">
+                <a:solidFill>
+                  <a:srgbClr val="4B5765"/>
+                </a:solidFill>
+                <a:latin typeface="Segoe UI"/>
+              </a:rPr>
+              <a:t>Four small infra/ changes so deploy-backend.sh runs the job</a:t>
+            </a:r>
+          </a:p>
+          <a:p>
+            <a:pPr algn="l">
+              <a:spcAft>
+                <a:spcPts val="500"/>
+              </a:spcAft>
+            </a:pPr>
+            <a:r>
+              <a:rPr sz="1150" b="0">
+                <a:solidFill>
+                  <a:srgbClr val="4B5765"/>
+                </a:solidFill>
+                <a:latin typeface="Segoe UI"/>
+              </a:rPr>
+              <a:t>Scheduled runs (CronJob) with alerts</a:t>
+            </a:r>
+          </a:p>
+          <a:p>
+            <a:pPr algn="l">
+              <a:spcAft>
+                <a:spcPts val="500"/>
+              </a:spcAft>
+            </a:pPr>
+            <a:r>
+              <a:rPr sz="1150" b="0">
+                <a:solidFill>
+                  <a:srgbClr val="4B5765"/>
+                </a:solidFill>
+                <a:latin typeface="Segoe UI"/>
+              </a:rPr>
+              <a:t>SQL over Gold; HTTPS and sign-in for the dashboard</a:t>
+            </a:r>
+          </a:p>
+        </p:txBody>
+      </p:sp>
+      <p:sp>
+        <p:nvSpPr>
+          <p:cNvPr id="13" name="Rounded Rectangle 12"/>
+          <p:cNvSpPr/>
+          <p:nvPr/>
+        </p:nvSpPr>
+        <p:spPr>
+          <a:xfrm>
+            <a:off x="548640" y="4709160"/>
+            <a:ext cx="11091672" cy="1463040"/>
+          </a:xfrm>
+          <a:prstGeom prst="roundRect">
+            <a:avLst>
+              <a:gd name="adj" fmla="val 6000"/>
+            </a:avLst>
+          </a:prstGeom>
+          <a:solidFill>
+            <a:srgbClr val="F4F6F8"/>
+          </a:solidFill>
+          <a:ln>
+            <a:noFill/>
+          </a:ln>
+        </p:spPr>
+        <p:txBody>
+          <a:bodyPr rtlCol="0" anchor="ctr"/>
+          <a:lstStyle/>
+          <a:p/>
+        </p:txBody>
+      </p:sp>
+      <p:sp>
+        <p:nvSpPr>
+          <p:cNvPr id="14" name="TextBox 13"/>
+          <p:cNvSpPr txBox="1"/>
+          <p:nvPr/>
+        </p:nvSpPr>
+        <p:spPr>
+          <a:xfrm>
+            <a:off x="777240" y="4846320"/>
+            <a:ext cx="1463040" cy="365760"/>
+          </a:xfrm>
+          <a:prstGeom prst="rect">
+            <a:avLst/>
+          </a:prstGeom>
+          <a:noFill/>
+        </p:spPr>
+        <p:txBody>
+          <a:bodyPr wrap="square" anchor="t" lIns="18288" rIns="18288" tIns="18288" bIns="18288">
+            <a:spAutoFit/>
+          </a:bodyPr>
+          <a:lstStyle/>
+          <a:p>
+            <a:pPr algn="l">
+              <a:spcAft>
+                <a:spcPts val="400"/>
+              </a:spcAft>
+            </a:pPr>
+            <a:r>
+              <a:rPr sz="1200" b="0">
+                <a:solidFill>
+                  <a:srgbClr val="4B5765"/>
+                </a:solidFill>
+                <a:latin typeface="Segoe UI Semibold"/>
+              </a:rPr>
+              <a:t>Code</a:t>
+            </a:r>
+          </a:p>
+        </p:txBody>
+      </p:sp>
+      <p:sp>
+        <p:nvSpPr>
+          <p:cNvPr id="15" name="TextBox 14"/>
+          <p:cNvSpPr txBox="1"/>
+          <p:nvPr/>
+        </p:nvSpPr>
+        <p:spPr>
+          <a:xfrm>
+            <a:off x="2286000" y="4846320"/>
+            <a:ext cx="9235440" cy="365760"/>
+          </a:xfrm>
+          <a:prstGeom prst="rect">
+            <a:avLst/>
+          </a:prstGeom>
+          <a:noFill/>
+        </p:spPr>
+        <p:txBody>
+          <a:bodyPr wrap="square" anchor="t" lIns="18288" rIns="18288" tIns="18288" bIns="18288">
+            <a:spAutoFit/>
+          </a:bodyPr>
+          <a:lstStyle/>
+          <a:p>
+            <a:pPr algn="l">
+              <a:spcAft>
+                <a:spcPts val="400"/>
+              </a:spcAft>
+            </a:pPr>
+            <a:r>
+              <a:rPr sz="1200" b="0">
+                <a:solidFill>
+                  <a:srgbClr val="1D4E89"/>
+                </a:solidFill>
+                <a:latin typeface="Consolas"/>
+              </a:rPr>
+              <a:t>github.com/palash27114/palash-workshop-participant</a:t>
+            </a:r>
+          </a:p>
+        </p:txBody>
+      </p:sp>
+      <p:sp>
+        <p:nvSpPr>
+          <p:cNvPr id="16" name="TextBox 15"/>
+          <p:cNvSpPr txBox="1"/>
+          <p:nvPr/>
+        </p:nvSpPr>
+        <p:spPr>
+          <a:xfrm>
+            <a:off x="777240" y="5257800"/>
+            <a:ext cx="1463040" cy="365760"/>
+          </a:xfrm>
+          <a:prstGeom prst="rect">
+            <a:avLst/>
+          </a:prstGeom>
+          <a:noFill/>
+        </p:spPr>
+        <p:txBody>
+          <a:bodyPr wrap="square" anchor="t" lIns="18288" rIns="18288" tIns="18288" bIns="18288">
+            <a:spAutoFit/>
+          </a:bodyPr>
+          <a:lstStyle/>
+          <a:p>
+            <a:pPr algn="l">
+              <a:spcAft>
+                <a:spcPts val="400"/>
+              </a:spcAft>
+            </a:pPr>
+            <a:r>
+              <a:rPr sz="1200" b="0">
+                <a:solidFill>
+                  <a:srgbClr val="4B5765"/>
+                </a:solidFill>
+                <a:latin typeface="Segoe UI Semibold"/>
+              </a:rPr>
+              <a:t>Dashboard</a:t>
+            </a:r>
+          </a:p>
+        </p:txBody>
+      </p:sp>
+      <p:sp>
+        <p:nvSpPr>
+          <p:cNvPr id="17" name="TextBox 16"/>
+          <p:cNvSpPr txBox="1"/>
+          <p:nvPr/>
+        </p:nvSpPr>
+        <p:spPr>
+          <a:xfrm>
+            <a:off x="2286000" y="5257800"/>
+            <a:ext cx="9235440" cy="365760"/>
+          </a:xfrm>
+          <a:prstGeom prst="rect">
+            <a:avLst/>
+          </a:prstGeom>
+          <a:noFill/>
+        </p:spPr>
+        <p:txBody>
+          <a:bodyPr wrap="square" anchor="t" lIns="18288" rIns="18288" tIns="18288" bIns="18288">
+            <a:spAutoFit/>
+          </a:bodyPr>
+          <a:lstStyle/>
+          <a:p>
+            <a:pPr algn="l">
+              <a:spcAft>
+                <a:spcPts val="400"/>
+              </a:spcAft>
+            </a:pPr>
+            <a:r>
+              <a:rPr sz="1200" b="0">
+                <a:solidFill>
+                  <a:srgbClr val="1D4E89"/>
+                </a:solidFill>
+                <a:latin typeface="Consolas"/>
+              </a:rPr>
+              <a:t>http://a7040ba0173884c8ea4e7917083a0a9d-1383856101.ap-south-1.elb.amazonaws.com</a:t>
+            </a:r>
+          </a:p>
+        </p:txBody>
+      </p:sp>
+      <p:sp>
+        <p:nvSpPr>
+          <p:cNvPr id="18" name="TextBox 17"/>
+          <p:cNvSpPr txBox="1"/>
+          <p:nvPr/>
+        </p:nvSpPr>
+        <p:spPr>
+          <a:xfrm>
+            <a:off x="777240" y="5669280"/>
+            <a:ext cx="1463040" cy="365760"/>
+          </a:xfrm>
+          <a:prstGeom prst="rect">
+            <a:avLst/>
+          </a:prstGeom>
+          <a:noFill/>
+        </p:spPr>
+        <p:txBody>
+          <a:bodyPr wrap="square" anchor="t" lIns="18288" rIns="18288" tIns="18288" bIns="18288">
+            <a:spAutoFit/>
+          </a:bodyPr>
+          <a:lstStyle/>
+          <a:p>
+            <a:pPr algn="l">
+              <a:spcAft>
+                <a:spcPts val="400"/>
+              </a:spcAft>
+            </a:pPr>
+            <a:r>
+              <a:rPr sz="1200" b="0">
+                <a:solidFill>
+                  <a:srgbClr val="4B5765"/>
+                </a:solidFill>
+                <a:latin typeface="Segoe UI Semibold"/>
+              </a:rPr>
+              <a:t>Run in AWS</a:t>
+            </a:r>
+          </a:p>
+        </p:txBody>
+      </p:sp>
+      <p:sp>
+        <p:nvSpPr>
+          <p:cNvPr id="19" name="TextBox 18"/>
+          <p:cNvSpPr txBox="1"/>
+          <p:nvPr/>
+        </p:nvSpPr>
+        <p:spPr>
+          <a:xfrm>
+            <a:off x="2286000" y="5669280"/>
+            <a:ext cx="9235440" cy="365760"/>
+          </a:xfrm>
+          <a:prstGeom prst="rect">
+            <a:avLst/>
+          </a:prstGeom>
+          <a:noFill/>
+        </p:spPr>
+        <p:txBody>
+          <a:bodyPr wrap="square" anchor="t" lIns="18288" rIns="18288" tIns="18288" bIns="18288">
+            <a:spAutoFit/>
+          </a:bodyPr>
+          <a:lstStyle/>
+          <a:p>
+            <a:pPr algn="l">
+              <a:spcAft>
+                <a:spcPts val="400"/>
+              </a:spcAft>
+            </a:pPr>
+            <a:r>
+              <a:rPr sz="1200" b="0">
+                <a:solidFill>
+                  <a:srgbClr val="1D4E89"/>
+                </a:solidFill>
+                <a:latin typeface="Consolas"/>
+              </a:rPr>
+              <a:t>data/talent-etl/deploy/cloud_run.sh</a:t>
+            </a:r>
+          </a:p>
+        </p:txBody>
+      </p:sp>
+      <p:cxnSp>
+        <p:nvCxnSpPr>
+          <p:cNvPr id="20" name="Connector 19"/>
+          <p:cNvCxnSpPr/>
+          <p:nvPr/>
+        </p:nvCxnSpPr>
+        <p:spPr>
+          <a:xfrm>
+            <a:off x="548640" y="6400800"/>
+            <a:ext cx="11094415" cy="0"/>
+          </a:xfrm>
+          <a:prstGeom prst="line">
+            <a:avLst/>
+          </a:prstGeom>
+          <a:ln w="9525">
+            <a:solidFill>
+              <a:srgbClr val="D4DAE1"/>
+            </a:solidFill>
+          </a:ln>
+        </p:spPr>
+      </p:cxnSp>
+      <p:sp>
+        <p:nvSpPr>
+          <p:cNvPr id="21" name="TextBox 20"/>
+          <p:cNvSpPr txBox="1"/>
+          <p:nvPr/>
+        </p:nvSpPr>
+        <p:spPr>
+          <a:xfrm>
+            <a:off x="548640" y="6455664"/>
+            <a:ext cx="7315200" cy="274320"/>
+          </a:xfrm>
+          <a:prstGeom prst="rect">
+            <a:avLst/>
+          </a:prstGeom>
+          <a:noFill/>
+        </p:spPr>
+        <p:txBody>
+          <a:bodyPr wrap="square" anchor="t" lIns="18288" rIns="18288" tIns="18288" bIns="18288">
+            <a:spAutoFit/>
+          </a:bodyPr>
+          <a:lstStyle/>
+          <a:p>
+            <a:pPr algn="l">
+              <a:spcAft>
+                <a:spcPts val="400"/>
+              </a:spcAft>
+            </a:pPr>
+            <a:r>
+              <a:rPr sz="900" b="0">
+                <a:solidFill>
+                  <a:srgbClr val="8A94A0"/>
+                </a:solidFill>
+                <a:latin typeface="Segoe UI"/>
+              </a:rPr>
+              <a:t>ACME Talent Lake  ·  Data Engineer track  ·  Coding Workshop 2026</a:t>
+            </a:r>
+          </a:p>
+        </p:txBody>
+      </p:sp>
+      <p:sp>
+        <p:nvSpPr>
+          <p:cNvPr id="22" name="TextBox 21"/>
+          <p:cNvSpPr txBox="1"/>
+          <p:nvPr/>
+        </p:nvSpPr>
+        <p:spPr>
+          <a:xfrm>
+            <a:off x="10698480" y="6455664"/>
+            <a:ext cx="941832" cy="274320"/>
+          </a:xfrm>
+          <a:prstGeom prst="rect">
+            <a:avLst/>
+          </a:prstGeom>
+          <a:noFill/>
+        </p:spPr>
+        <p:txBody>
+          <a:bodyPr wrap="square" anchor="t" lIns="18288" rIns="18288" tIns="18288" bIns="18288">
+            <a:spAutoFit/>
+          </a:bodyPr>
+          <a:lstStyle/>
+          <a:p>
+            <a:pPr algn="r">
+              <a:spcAft>
+                <a:spcPts val="400"/>
+              </a:spcAft>
+            </a:pPr>
+            <a:r>
+              <a:rPr sz="900" b="0">
+                <a:solidFill>
+                  <a:srgbClr val="8A94A0"/>
+                </a:solidFill>
+                <a:latin typeface="Segoe UI"/>
+              </a:rPr>
+              <a:t>10 / 10</a:t>
+            </a:r>
+          </a:p>
+        </p:txBody>
+      </p:sp>
+    </p:spTree>
+  </p:cSld>
+  <p:clrMapOvr>
+    <a:masterClrMapping/>
+  </p:clrMapOvr>
+</p:sld>
+</file>
+
 <file path=ppt/slides/slide2.xml><?xml version="1.0" encoding="utf-8"?>
 <p:sld xmlns:a="http://schemas.openxmlformats.org/drawingml/2006/main" xmlns:p="http://schemas.openxmlformats.org/presentationml/2006/main" xmlns:r="http://schemas.openxmlformats.org/officeDocument/2006/relationships">
   <p:cSld>
@@ -6746,7 +7754,7 @@
                 </a:solidFill>
                 <a:latin typeface="Segoe UI"/>
               </a:rPr>
-              <a:t>2 / 9</a:t>
+              <a:t>2 / 10</a:t>
             </a:r>
           </a:p>
         </p:txBody>
@@ -8827,7 +9835,7 @@
                 </a:solidFill>
                 <a:latin typeface="Segoe UI"/>
               </a:rPr>
-              <a:t>3 / 9</a:t>
+              <a:t>3 / 10</a:t>
             </a:r>
           </a:p>
         </p:txBody>
@@ -10381,7 +11389,7 @@
                 </a:solidFill>
                 <a:latin typeface="Segoe UI"/>
               </a:rPr>
-              <a:t>4 / 9</a:t>
+              <a:t>4 / 10</a:t>
             </a:r>
           </a:p>
         </p:txBody>
@@ -10395,6 +11403,2791 @@
 </file>
 
 <file path=ppt/slides/slide5.xml><?xml version="1.0" encoding="utf-8"?>
+<p:sld xmlns:a="http://schemas.openxmlformats.org/drawingml/2006/main" xmlns:p="http://schemas.openxmlformats.org/presentationml/2006/main" xmlns:r="http://schemas.openxmlformats.org/officeDocument/2006/relationships">
+  <p:cSld>
+    <p:bg>
+      <p:bgPr>
+        <a:solidFill>
+          <a:srgbClr val="FFFFFF"/>
+        </a:solidFill>
+        <a:effectLst/>
+      </p:bgPr>
+    </p:bg>
+    <p:spTree>
+      <p:nvGrpSpPr>
+        <p:cNvPr id="1" name=""/>
+        <p:cNvGrpSpPr/>
+        <p:nvPr/>
+      </p:nvGrpSpPr>
+      <p:grpSpPr/>
+      <p:sp>
+        <p:nvSpPr>
+          <p:cNvPr id="2" name="TextBox 1"/>
+          <p:cNvSpPr txBox="1"/>
+          <p:nvPr/>
+        </p:nvSpPr>
+        <p:spPr>
+          <a:xfrm>
+            <a:off x="548640" y="292608"/>
+            <a:ext cx="8229600" cy="274320"/>
+          </a:xfrm>
+          <a:prstGeom prst="rect">
+            <a:avLst/>
+          </a:prstGeom>
+          <a:noFill/>
+        </p:spPr>
+        <p:txBody>
+          <a:bodyPr wrap="square" anchor="t" lIns="18288" rIns="18288" tIns="18288" bIns="18288">
+            <a:spAutoFit/>
+          </a:bodyPr>
+          <a:lstStyle/>
+          <a:p>
+            <a:pPr algn="l">
+              <a:spcAft>
+                <a:spcPts val="400"/>
+              </a:spcAft>
+            </a:pPr>
+            <a:r>
+              <a:rPr sz="1100" b="0">
+                <a:solidFill>
+                  <a:srgbClr val="1D4E89"/>
+                </a:solidFill>
+                <a:latin typeface="Segoe UI Semibold"/>
+              </a:rPr>
+              <a:t>PIPELINE HEALTH &amp; ALERTS</a:t>
+            </a:r>
+          </a:p>
+        </p:txBody>
+      </p:sp>
+      <p:sp>
+        <p:nvSpPr>
+          <p:cNvPr id="3" name="TextBox 2"/>
+          <p:cNvSpPr txBox="1"/>
+          <p:nvPr/>
+        </p:nvSpPr>
+        <p:spPr>
+          <a:xfrm>
+            <a:off x="548640" y="566928"/>
+            <a:ext cx="11064240" cy="731520"/>
+          </a:xfrm>
+          <a:prstGeom prst="rect">
+            <a:avLst/>
+          </a:prstGeom>
+          <a:noFill/>
+        </p:spPr>
+        <p:txBody>
+          <a:bodyPr wrap="square" anchor="t" lIns="18288" rIns="18288" tIns="18288" bIns="18288">
+            <a:spAutoFit/>
+          </a:bodyPr>
+          <a:lstStyle/>
+          <a:p>
+            <a:pPr algn="l">
+              <a:spcAft>
+                <a:spcPts val="400"/>
+              </a:spcAft>
+            </a:pPr>
+            <a:r>
+              <a:rPr sz="2600" b="0">
+                <a:solidFill>
+                  <a:srgbClr val="17202A"/>
+                </a:solidFill>
+                <a:latin typeface="Segoe UI Semibold"/>
+              </a:rPr>
+              <a:t>Every run is scored, and a broken batch can't reach the answers</a:t>
+            </a:r>
+          </a:p>
+        </p:txBody>
+      </p:sp>
+      <p:graphicFrame>
+        <p:nvGraphicFramePr>
+          <p:cNvPr id="4" name="Table 3"/>
+          <p:cNvGraphicFramePr>
+            <a:graphicFrameLocks noGrp="1"/>
+          </p:cNvGraphicFramePr>
+          <p:nvPr/>
+        </p:nvGraphicFramePr>
+        <p:xfrm>
+          <a:off x="548640" y="1463040"/>
+          <a:ext cx="6309360" cy="3456432"/>
+        </p:xfrm>
+        <a:graphic>
+          <a:graphicData uri="http://schemas.openxmlformats.org/drawingml/2006/table">
+            <a:tbl>
+              <a:tblPr firstRow="1">
+                <a:tableStyleId>{5C22544A-7EE6-4342-B048-85BDC9FD1C3A}</a:tableStyleId>
+              </a:tblPr>
+              <a:tblGrid>
+                <a:gridCol w="2514600"/>
+                <a:gridCol w="1005840"/>
+                <a:gridCol w="1188720"/>
+                <a:gridCol w="777240"/>
+                <a:gridCol w="822960"/>
+              </a:tblGrid>
+              <a:tr h="384048">
+                <a:tc>
+                  <a:txBody>
+                    <a:bodyPr wrap="square"/>
+                    <a:lstStyle/>
+                    <a:p>
+                      <a:pPr algn="l"/>
+                      <a:r>
+                        <a:rPr sz="1050" b="1">
+                          <a:solidFill>
+                            <a:srgbClr val="4B5765"/>
+                          </a:solidFill>
+                          <a:latin typeface="Segoe UI Semibold"/>
+                        </a:rPr>
+                        <a:t>Dataset</a:t>
+                      </a:r>
+                    </a:p>
+                  </a:txBody>
+                  <a:tcPr marL="82296" marR="82296" marT="36576" marB="36576" anchor="ctr">
+                    <a:solidFill>
+                      <a:srgbClr val="F4F6F8"/>
+                    </a:solidFill>
+                    <a:lnL w="6350">
+                      <a:solidFill>
+                        <a:srgbClr val="D4DAE1"/>
+                      </a:solidFill>
+                    </a:lnL>
+                    <a:lnR w="6350">
+                      <a:solidFill>
+                        <a:srgbClr val="D4DAE1"/>
+                      </a:solidFill>
+                    </a:lnR>
+                    <a:lnT w="6350">
+                      <a:solidFill>
+                        <a:srgbClr val="D4DAE1"/>
+                      </a:solidFill>
+                    </a:lnT>
+                    <a:lnB w="6350">
+                      <a:solidFill>
+                        <a:srgbClr val="D4DAE1"/>
+                      </a:solidFill>
+                    </a:lnB>
+                  </a:tcPr>
+                </a:tc>
+                <a:tc>
+                  <a:txBody>
+                    <a:bodyPr wrap="square"/>
+                    <a:lstStyle/>
+                    <a:p>
+                      <a:pPr algn="l"/>
+                      <a:r>
+                        <a:rPr sz="1050" b="1">
+                          <a:solidFill>
+                            <a:srgbClr val="4B5765"/>
+                          </a:solidFill>
+                          <a:latin typeface="Segoe UI Semibold"/>
+                        </a:rPr>
+                        <a:t>Rows in</a:t>
+                      </a:r>
+                    </a:p>
+                  </a:txBody>
+                  <a:tcPr marL="82296" marR="82296" marT="36576" marB="36576" anchor="ctr">
+                    <a:solidFill>
+                      <a:srgbClr val="F4F6F8"/>
+                    </a:solidFill>
+                    <a:lnL w="6350">
+                      <a:solidFill>
+                        <a:srgbClr val="D4DAE1"/>
+                      </a:solidFill>
+                    </a:lnL>
+                    <a:lnR w="6350">
+                      <a:solidFill>
+                        <a:srgbClr val="D4DAE1"/>
+                      </a:solidFill>
+                    </a:lnR>
+                    <a:lnT w="6350">
+                      <a:solidFill>
+                        <a:srgbClr val="D4DAE1"/>
+                      </a:solidFill>
+                    </a:lnT>
+                    <a:lnB w="6350">
+                      <a:solidFill>
+                        <a:srgbClr val="D4DAE1"/>
+                      </a:solidFill>
+                    </a:lnB>
+                  </a:tcPr>
+                </a:tc>
+                <a:tc>
+                  <a:txBody>
+                    <a:bodyPr wrap="square"/>
+                    <a:lstStyle/>
+                    <a:p>
+                      <a:pPr algn="l"/>
+                      <a:r>
+                        <a:rPr sz="1050" b="1">
+                          <a:solidFill>
+                            <a:srgbClr val="4B5765"/>
+                          </a:solidFill>
+                          <a:latin typeface="Segoe UI Semibold"/>
+                        </a:rPr>
+                        <a:t>Quarantined</a:t>
+                      </a:r>
+                    </a:p>
+                  </a:txBody>
+                  <a:tcPr marL="82296" marR="82296" marT="36576" marB="36576" anchor="ctr">
+                    <a:solidFill>
+                      <a:srgbClr val="F4F6F8"/>
+                    </a:solidFill>
+                    <a:lnL w="6350">
+                      <a:solidFill>
+                        <a:srgbClr val="D4DAE1"/>
+                      </a:solidFill>
+                    </a:lnL>
+                    <a:lnR w="6350">
+                      <a:solidFill>
+                        <a:srgbClr val="D4DAE1"/>
+                      </a:solidFill>
+                    </a:lnR>
+                    <a:lnT w="6350">
+                      <a:solidFill>
+                        <a:srgbClr val="D4DAE1"/>
+                      </a:solidFill>
+                    </a:lnT>
+                    <a:lnB w="6350">
+                      <a:solidFill>
+                        <a:srgbClr val="D4DAE1"/>
+                      </a:solidFill>
+                    </a:lnB>
+                  </a:tcPr>
+                </a:tc>
+                <a:tc>
+                  <a:txBody>
+                    <a:bodyPr wrap="square"/>
+                    <a:lstStyle/>
+                    <a:p>
+                      <a:pPr algn="l"/>
+                      <a:r>
+                        <a:rPr sz="1050" b="1">
+                          <a:solidFill>
+                            <a:srgbClr val="4B5765"/>
+                          </a:solidFill>
+                          <a:latin typeface="Segoe UI Semibold"/>
+                        </a:rPr>
+                        <a:t>Rate</a:t>
+                      </a:r>
+                    </a:p>
+                  </a:txBody>
+                  <a:tcPr marL="82296" marR="82296" marT="36576" marB="36576" anchor="ctr">
+                    <a:solidFill>
+                      <a:srgbClr val="F4F6F8"/>
+                    </a:solidFill>
+                    <a:lnL w="6350">
+                      <a:solidFill>
+                        <a:srgbClr val="D4DAE1"/>
+                      </a:solidFill>
+                    </a:lnL>
+                    <a:lnR w="6350">
+                      <a:solidFill>
+                        <a:srgbClr val="D4DAE1"/>
+                      </a:solidFill>
+                    </a:lnR>
+                    <a:lnT w="6350">
+                      <a:solidFill>
+                        <a:srgbClr val="D4DAE1"/>
+                      </a:solidFill>
+                    </a:lnT>
+                    <a:lnB w="6350">
+                      <a:solidFill>
+                        <a:srgbClr val="D4DAE1"/>
+                      </a:solidFill>
+                    </a:lnB>
+                  </a:tcPr>
+                </a:tc>
+                <a:tc>
+                  <a:txBody>
+                    <a:bodyPr wrap="square"/>
+                    <a:lstStyle/>
+                    <a:p>
+                      <a:pPr algn="l"/>
+                      <a:r>
+                        <a:rPr sz="1050" b="1">
+                          <a:solidFill>
+                            <a:srgbClr val="4B5765"/>
+                          </a:solidFill>
+                          <a:latin typeface="Segoe UI Semibold"/>
+                        </a:rPr>
+                        <a:t>Status</a:t>
+                      </a:r>
+                    </a:p>
+                  </a:txBody>
+                  <a:tcPr marL="82296" marR="82296" marT="36576" marB="36576" anchor="ctr">
+                    <a:solidFill>
+                      <a:srgbClr val="F4F6F8"/>
+                    </a:solidFill>
+                    <a:lnL w="6350">
+                      <a:solidFill>
+                        <a:srgbClr val="D4DAE1"/>
+                      </a:solidFill>
+                    </a:lnL>
+                    <a:lnR w="6350">
+                      <a:solidFill>
+                        <a:srgbClr val="D4DAE1"/>
+                      </a:solidFill>
+                    </a:lnR>
+                    <a:lnT w="6350">
+                      <a:solidFill>
+                        <a:srgbClr val="D4DAE1"/>
+                      </a:solidFill>
+                    </a:lnT>
+                    <a:lnB w="6350">
+                      <a:solidFill>
+                        <a:srgbClr val="D4DAE1"/>
+                      </a:solidFill>
+                    </a:lnB>
+                  </a:tcPr>
+                </a:tc>
+              </a:tr>
+              <a:tr h="384048">
+                <a:tc>
+                  <a:txBody>
+                    <a:bodyPr wrap="square"/>
+                    <a:lstStyle/>
+                    <a:p>
+                      <a:pPr algn="l"/>
+                      <a:r>
+                        <a:rPr sz="1150" b="0">
+                          <a:solidFill>
+                            <a:srgbClr val="17202A"/>
+                          </a:solidFill>
+                          <a:latin typeface="Segoe UI"/>
+                        </a:rPr>
+                        <a:t>teams</a:t>
+                      </a:r>
+                    </a:p>
+                  </a:txBody>
+                  <a:tcPr marL="82296" marR="82296" marT="36576" marB="36576" anchor="ctr">
+                    <a:solidFill>
+                      <a:srgbClr val="FFFFFF"/>
+                    </a:solidFill>
+                    <a:lnL w="6350">
+                      <a:solidFill>
+                        <a:srgbClr val="D4DAE1"/>
+                      </a:solidFill>
+                    </a:lnL>
+                    <a:lnR w="6350">
+                      <a:solidFill>
+                        <a:srgbClr val="D4DAE1"/>
+                      </a:solidFill>
+                    </a:lnR>
+                    <a:lnT w="6350">
+                      <a:solidFill>
+                        <a:srgbClr val="D4DAE1"/>
+                      </a:solidFill>
+                    </a:lnT>
+                    <a:lnB w="6350">
+                      <a:solidFill>
+                        <a:srgbClr val="D4DAE1"/>
+                      </a:solidFill>
+                    </a:lnB>
+                  </a:tcPr>
+                </a:tc>
+                <a:tc>
+                  <a:txBody>
+                    <a:bodyPr wrap="square"/>
+                    <a:lstStyle/>
+                    <a:p>
+                      <a:pPr algn="r"/>
+                      <a:r>
+                        <a:rPr sz="1150" b="0">
+                          <a:solidFill>
+                            <a:srgbClr val="17202A"/>
+                          </a:solidFill>
+                          <a:latin typeface="Segoe UI"/>
+                        </a:rPr>
+                        <a:t>100</a:t>
+                      </a:r>
+                    </a:p>
+                  </a:txBody>
+                  <a:tcPr marL="82296" marR="82296" marT="36576" marB="36576" anchor="ctr">
+                    <a:solidFill>
+                      <a:srgbClr val="FFFFFF"/>
+                    </a:solidFill>
+                    <a:lnL w="6350">
+                      <a:solidFill>
+                        <a:srgbClr val="D4DAE1"/>
+                      </a:solidFill>
+                    </a:lnL>
+                    <a:lnR w="6350">
+                      <a:solidFill>
+                        <a:srgbClr val="D4DAE1"/>
+                      </a:solidFill>
+                    </a:lnR>
+                    <a:lnT w="6350">
+                      <a:solidFill>
+                        <a:srgbClr val="D4DAE1"/>
+                      </a:solidFill>
+                    </a:lnT>
+                    <a:lnB w="6350">
+                      <a:solidFill>
+                        <a:srgbClr val="D4DAE1"/>
+                      </a:solidFill>
+                    </a:lnB>
+                  </a:tcPr>
+                </a:tc>
+                <a:tc>
+                  <a:txBody>
+                    <a:bodyPr wrap="square"/>
+                    <a:lstStyle/>
+                    <a:p>
+                      <a:pPr algn="r"/>
+                      <a:r>
+                        <a:rPr sz="1150" b="0">
+                          <a:solidFill>
+                            <a:srgbClr val="17202A"/>
+                          </a:solidFill>
+                          <a:latin typeface="Segoe UI"/>
+                        </a:rPr>
+                        <a:t>0</a:t>
+                      </a:r>
+                    </a:p>
+                  </a:txBody>
+                  <a:tcPr marL="82296" marR="82296" marT="36576" marB="36576" anchor="ctr">
+                    <a:solidFill>
+                      <a:srgbClr val="FFFFFF"/>
+                    </a:solidFill>
+                    <a:lnL w="6350">
+                      <a:solidFill>
+                        <a:srgbClr val="D4DAE1"/>
+                      </a:solidFill>
+                    </a:lnL>
+                    <a:lnR w="6350">
+                      <a:solidFill>
+                        <a:srgbClr val="D4DAE1"/>
+                      </a:solidFill>
+                    </a:lnR>
+                    <a:lnT w="6350">
+                      <a:solidFill>
+                        <a:srgbClr val="D4DAE1"/>
+                      </a:solidFill>
+                    </a:lnT>
+                    <a:lnB w="6350">
+                      <a:solidFill>
+                        <a:srgbClr val="D4DAE1"/>
+                      </a:solidFill>
+                    </a:lnB>
+                  </a:tcPr>
+                </a:tc>
+                <a:tc>
+                  <a:txBody>
+                    <a:bodyPr wrap="square"/>
+                    <a:lstStyle/>
+                    <a:p>
+                      <a:pPr algn="r"/>
+                      <a:r>
+                        <a:rPr sz="1150" b="0">
+                          <a:solidFill>
+                            <a:srgbClr val="17202A"/>
+                          </a:solidFill>
+                          <a:latin typeface="Segoe UI"/>
+                        </a:rPr>
+                        <a:t>0.00%</a:t>
+                      </a:r>
+                    </a:p>
+                  </a:txBody>
+                  <a:tcPr marL="82296" marR="82296" marT="36576" marB="36576" anchor="ctr">
+                    <a:solidFill>
+                      <a:srgbClr val="FFFFFF"/>
+                    </a:solidFill>
+                    <a:lnL w="6350">
+                      <a:solidFill>
+                        <a:srgbClr val="D4DAE1"/>
+                      </a:solidFill>
+                    </a:lnL>
+                    <a:lnR w="6350">
+                      <a:solidFill>
+                        <a:srgbClr val="D4DAE1"/>
+                      </a:solidFill>
+                    </a:lnR>
+                    <a:lnT w="6350">
+                      <a:solidFill>
+                        <a:srgbClr val="D4DAE1"/>
+                      </a:solidFill>
+                    </a:lnT>
+                    <a:lnB w="6350">
+                      <a:solidFill>
+                        <a:srgbClr val="D4DAE1"/>
+                      </a:solidFill>
+                    </a:lnB>
+                  </a:tcPr>
+                </a:tc>
+                <a:tc>
+                  <a:txBody>
+                    <a:bodyPr wrap="square"/>
+                    <a:lstStyle/>
+                    <a:p>
+                      <a:pPr algn="l"/>
+                      <a:r>
+                        <a:rPr sz="1150" b="0">
+                          <a:solidFill>
+                            <a:srgbClr val="2D7449"/>
+                          </a:solidFill>
+                          <a:latin typeface="Segoe UI Semibold"/>
+                        </a:rPr>
+                        <a:t>OK</a:t>
+                      </a:r>
+                    </a:p>
+                  </a:txBody>
+                  <a:tcPr marL="82296" marR="82296" marT="36576" marB="36576" anchor="ctr">
+                    <a:solidFill>
+                      <a:srgbClr val="FFFFFF"/>
+                    </a:solidFill>
+                    <a:lnL w="6350">
+                      <a:solidFill>
+                        <a:srgbClr val="D4DAE1"/>
+                      </a:solidFill>
+                    </a:lnL>
+                    <a:lnR w="6350">
+                      <a:solidFill>
+                        <a:srgbClr val="D4DAE1"/>
+                      </a:solidFill>
+                    </a:lnR>
+                    <a:lnT w="6350">
+                      <a:solidFill>
+                        <a:srgbClr val="D4DAE1"/>
+                      </a:solidFill>
+                    </a:lnT>
+                    <a:lnB w="6350">
+                      <a:solidFill>
+                        <a:srgbClr val="D4DAE1"/>
+                      </a:solidFill>
+                    </a:lnB>
+                  </a:tcPr>
+                </a:tc>
+              </a:tr>
+              <a:tr h="384048">
+                <a:tc>
+                  <a:txBody>
+                    <a:bodyPr wrap="square"/>
+                    <a:lstStyle/>
+                    <a:p>
+                      <a:pPr algn="l"/>
+                      <a:r>
+                        <a:rPr sz="1150" b="0">
+                          <a:solidFill>
+                            <a:srgbClr val="17202A"/>
+                          </a:solidFill>
+                          <a:latin typeface="Segoe UI"/>
+                        </a:rPr>
+                        <a:t>competencies</a:t>
+                      </a:r>
+                    </a:p>
+                  </a:txBody>
+                  <a:tcPr marL="82296" marR="82296" marT="36576" marB="36576" anchor="ctr">
+                    <a:solidFill>
+                      <a:srgbClr val="FFFFFF"/>
+                    </a:solidFill>
+                    <a:lnL w="6350">
+                      <a:solidFill>
+                        <a:srgbClr val="D4DAE1"/>
+                      </a:solidFill>
+                    </a:lnL>
+                    <a:lnR w="6350">
+                      <a:solidFill>
+                        <a:srgbClr val="D4DAE1"/>
+                      </a:solidFill>
+                    </a:lnR>
+                    <a:lnT w="6350">
+                      <a:solidFill>
+                        <a:srgbClr val="D4DAE1"/>
+                      </a:solidFill>
+                    </a:lnT>
+                    <a:lnB w="6350">
+                      <a:solidFill>
+                        <a:srgbClr val="D4DAE1"/>
+                      </a:solidFill>
+                    </a:lnB>
+                  </a:tcPr>
+                </a:tc>
+                <a:tc>
+                  <a:txBody>
+                    <a:bodyPr wrap="square"/>
+                    <a:lstStyle/>
+                    <a:p>
+                      <a:pPr algn="r"/>
+                      <a:r>
+                        <a:rPr sz="1150" b="0">
+                          <a:solidFill>
+                            <a:srgbClr val="17202A"/>
+                          </a:solidFill>
+                          <a:latin typeface="Segoe UI"/>
+                        </a:rPr>
+                        <a:t>40</a:t>
+                      </a:r>
+                    </a:p>
+                  </a:txBody>
+                  <a:tcPr marL="82296" marR="82296" marT="36576" marB="36576" anchor="ctr">
+                    <a:solidFill>
+                      <a:srgbClr val="FFFFFF"/>
+                    </a:solidFill>
+                    <a:lnL w="6350">
+                      <a:solidFill>
+                        <a:srgbClr val="D4DAE1"/>
+                      </a:solidFill>
+                    </a:lnL>
+                    <a:lnR w="6350">
+                      <a:solidFill>
+                        <a:srgbClr val="D4DAE1"/>
+                      </a:solidFill>
+                    </a:lnR>
+                    <a:lnT w="6350">
+                      <a:solidFill>
+                        <a:srgbClr val="D4DAE1"/>
+                      </a:solidFill>
+                    </a:lnT>
+                    <a:lnB w="6350">
+                      <a:solidFill>
+                        <a:srgbClr val="D4DAE1"/>
+                      </a:solidFill>
+                    </a:lnB>
+                  </a:tcPr>
+                </a:tc>
+                <a:tc>
+                  <a:txBody>
+                    <a:bodyPr wrap="square"/>
+                    <a:lstStyle/>
+                    <a:p>
+                      <a:pPr algn="r"/>
+                      <a:r>
+                        <a:rPr sz="1150" b="0">
+                          <a:solidFill>
+                            <a:srgbClr val="17202A"/>
+                          </a:solidFill>
+                          <a:latin typeface="Segoe UI"/>
+                        </a:rPr>
+                        <a:t>0</a:t>
+                      </a:r>
+                    </a:p>
+                  </a:txBody>
+                  <a:tcPr marL="82296" marR="82296" marT="36576" marB="36576" anchor="ctr">
+                    <a:solidFill>
+                      <a:srgbClr val="FFFFFF"/>
+                    </a:solidFill>
+                    <a:lnL w="6350">
+                      <a:solidFill>
+                        <a:srgbClr val="D4DAE1"/>
+                      </a:solidFill>
+                    </a:lnL>
+                    <a:lnR w="6350">
+                      <a:solidFill>
+                        <a:srgbClr val="D4DAE1"/>
+                      </a:solidFill>
+                    </a:lnR>
+                    <a:lnT w="6350">
+                      <a:solidFill>
+                        <a:srgbClr val="D4DAE1"/>
+                      </a:solidFill>
+                    </a:lnT>
+                    <a:lnB w="6350">
+                      <a:solidFill>
+                        <a:srgbClr val="D4DAE1"/>
+                      </a:solidFill>
+                    </a:lnB>
+                  </a:tcPr>
+                </a:tc>
+                <a:tc>
+                  <a:txBody>
+                    <a:bodyPr wrap="square"/>
+                    <a:lstStyle/>
+                    <a:p>
+                      <a:pPr algn="r"/>
+                      <a:r>
+                        <a:rPr sz="1150" b="0">
+                          <a:solidFill>
+                            <a:srgbClr val="17202A"/>
+                          </a:solidFill>
+                          <a:latin typeface="Segoe UI"/>
+                        </a:rPr>
+                        <a:t>0.00%</a:t>
+                      </a:r>
+                    </a:p>
+                  </a:txBody>
+                  <a:tcPr marL="82296" marR="82296" marT="36576" marB="36576" anchor="ctr">
+                    <a:solidFill>
+                      <a:srgbClr val="FFFFFF"/>
+                    </a:solidFill>
+                    <a:lnL w="6350">
+                      <a:solidFill>
+                        <a:srgbClr val="D4DAE1"/>
+                      </a:solidFill>
+                    </a:lnL>
+                    <a:lnR w="6350">
+                      <a:solidFill>
+                        <a:srgbClr val="D4DAE1"/>
+                      </a:solidFill>
+                    </a:lnR>
+                    <a:lnT w="6350">
+                      <a:solidFill>
+                        <a:srgbClr val="D4DAE1"/>
+                      </a:solidFill>
+                    </a:lnT>
+                    <a:lnB w="6350">
+                      <a:solidFill>
+                        <a:srgbClr val="D4DAE1"/>
+                      </a:solidFill>
+                    </a:lnB>
+                  </a:tcPr>
+                </a:tc>
+                <a:tc>
+                  <a:txBody>
+                    <a:bodyPr wrap="square"/>
+                    <a:lstStyle/>
+                    <a:p>
+                      <a:pPr algn="l"/>
+                      <a:r>
+                        <a:rPr sz="1150" b="0">
+                          <a:solidFill>
+                            <a:srgbClr val="2D7449"/>
+                          </a:solidFill>
+                          <a:latin typeface="Segoe UI Semibold"/>
+                        </a:rPr>
+                        <a:t>OK</a:t>
+                      </a:r>
+                    </a:p>
+                  </a:txBody>
+                  <a:tcPr marL="82296" marR="82296" marT="36576" marB="36576" anchor="ctr">
+                    <a:solidFill>
+                      <a:srgbClr val="FFFFFF"/>
+                    </a:solidFill>
+                    <a:lnL w="6350">
+                      <a:solidFill>
+                        <a:srgbClr val="D4DAE1"/>
+                      </a:solidFill>
+                    </a:lnL>
+                    <a:lnR w="6350">
+                      <a:solidFill>
+                        <a:srgbClr val="D4DAE1"/>
+                      </a:solidFill>
+                    </a:lnR>
+                    <a:lnT w="6350">
+                      <a:solidFill>
+                        <a:srgbClr val="D4DAE1"/>
+                      </a:solidFill>
+                    </a:lnT>
+                    <a:lnB w="6350">
+                      <a:solidFill>
+                        <a:srgbClr val="D4DAE1"/>
+                      </a:solidFill>
+                    </a:lnB>
+                  </a:tcPr>
+                </a:tc>
+              </a:tr>
+              <a:tr h="384048">
+                <a:tc>
+                  <a:txBody>
+                    <a:bodyPr wrap="square"/>
+                    <a:lstStyle/>
+                    <a:p>
+                      <a:pPr algn="l"/>
+                      <a:r>
+                        <a:rPr sz="1150" b="0">
+                          <a:solidFill>
+                            <a:srgbClr val="17202A"/>
+                          </a:solidFill>
+                          <a:latin typeface="Segoe UI"/>
+                        </a:rPr>
+                        <a:t>employees</a:t>
+                      </a:r>
+                    </a:p>
+                  </a:txBody>
+                  <a:tcPr marL="82296" marR="82296" marT="36576" marB="36576" anchor="ctr">
+                    <a:solidFill>
+                      <a:srgbClr val="FFFFFF"/>
+                    </a:solidFill>
+                    <a:lnL w="6350">
+                      <a:solidFill>
+                        <a:srgbClr val="D4DAE1"/>
+                      </a:solidFill>
+                    </a:lnL>
+                    <a:lnR w="6350">
+                      <a:solidFill>
+                        <a:srgbClr val="D4DAE1"/>
+                      </a:solidFill>
+                    </a:lnR>
+                    <a:lnT w="6350">
+                      <a:solidFill>
+                        <a:srgbClr val="D4DAE1"/>
+                      </a:solidFill>
+                    </a:lnT>
+                    <a:lnB w="6350">
+                      <a:solidFill>
+                        <a:srgbClr val="D4DAE1"/>
+                      </a:solidFill>
+                    </a:lnB>
+                  </a:tcPr>
+                </a:tc>
+                <a:tc>
+                  <a:txBody>
+                    <a:bodyPr wrap="square"/>
+                    <a:lstStyle/>
+                    <a:p>
+                      <a:pPr algn="r"/>
+                      <a:r>
+                        <a:rPr sz="1150" b="0">
+                          <a:solidFill>
+                            <a:srgbClr val="17202A"/>
+                          </a:solidFill>
+                          <a:latin typeface="Segoe UI"/>
+                        </a:rPr>
+                        <a:t>2,000</a:t>
+                      </a:r>
+                    </a:p>
+                  </a:txBody>
+                  <a:tcPr marL="82296" marR="82296" marT="36576" marB="36576" anchor="ctr">
+                    <a:solidFill>
+                      <a:srgbClr val="FFFFFF"/>
+                    </a:solidFill>
+                    <a:lnL w="6350">
+                      <a:solidFill>
+                        <a:srgbClr val="D4DAE1"/>
+                      </a:solidFill>
+                    </a:lnL>
+                    <a:lnR w="6350">
+                      <a:solidFill>
+                        <a:srgbClr val="D4DAE1"/>
+                      </a:solidFill>
+                    </a:lnR>
+                    <a:lnT w="6350">
+                      <a:solidFill>
+                        <a:srgbClr val="D4DAE1"/>
+                      </a:solidFill>
+                    </a:lnT>
+                    <a:lnB w="6350">
+                      <a:solidFill>
+                        <a:srgbClr val="D4DAE1"/>
+                      </a:solidFill>
+                    </a:lnB>
+                  </a:tcPr>
+                </a:tc>
+                <a:tc>
+                  <a:txBody>
+                    <a:bodyPr wrap="square"/>
+                    <a:lstStyle/>
+                    <a:p>
+                      <a:pPr algn="r"/>
+                      <a:r>
+                        <a:rPr sz="1150" b="0">
+                          <a:solidFill>
+                            <a:srgbClr val="17202A"/>
+                          </a:solidFill>
+                          <a:latin typeface="Segoe UI"/>
+                        </a:rPr>
+                        <a:t>0</a:t>
+                      </a:r>
+                    </a:p>
+                  </a:txBody>
+                  <a:tcPr marL="82296" marR="82296" marT="36576" marB="36576" anchor="ctr">
+                    <a:solidFill>
+                      <a:srgbClr val="FFFFFF"/>
+                    </a:solidFill>
+                    <a:lnL w="6350">
+                      <a:solidFill>
+                        <a:srgbClr val="D4DAE1"/>
+                      </a:solidFill>
+                    </a:lnL>
+                    <a:lnR w="6350">
+                      <a:solidFill>
+                        <a:srgbClr val="D4DAE1"/>
+                      </a:solidFill>
+                    </a:lnR>
+                    <a:lnT w="6350">
+                      <a:solidFill>
+                        <a:srgbClr val="D4DAE1"/>
+                      </a:solidFill>
+                    </a:lnT>
+                    <a:lnB w="6350">
+                      <a:solidFill>
+                        <a:srgbClr val="D4DAE1"/>
+                      </a:solidFill>
+                    </a:lnB>
+                  </a:tcPr>
+                </a:tc>
+                <a:tc>
+                  <a:txBody>
+                    <a:bodyPr wrap="square"/>
+                    <a:lstStyle/>
+                    <a:p>
+                      <a:pPr algn="r"/>
+                      <a:r>
+                        <a:rPr sz="1150" b="0">
+                          <a:solidFill>
+                            <a:srgbClr val="17202A"/>
+                          </a:solidFill>
+                          <a:latin typeface="Segoe UI"/>
+                        </a:rPr>
+                        <a:t>0.00%</a:t>
+                      </a:r>
+                    </a:p>
+                  </a:txBody>
+                  <a:tcPr marL="82296" marR="82296" marT="36576" marB="36576" anchor="ctr">
+                    <a:solidFill>
+                      <a:srgbClr val="FFFFFF"/>
+                    </a:solidFill>
+                    <a:lnL w="6350">
+                      <a:solidFill>
+                        <a:srgbClr val="D4DAE1"/>
+                      </a:solidFill>
+                    </a:lnL>
+                    <a:lnR w="6350">
+                      <a:solidFill>
+                        <a:srgbClr val="D4DAE1"/>
+                      </a:solidFill>
+                    </a:lnR>
+                    <a:lnT w="6350">
+                      <a:solidFill>
+                        <a:srgbClr val="D4DAE1"/>
+                      </a:solidFill>
+                    </a:lnT>
+                    <a:lnB w="6350">
+                      <a:solidFill>
+                        <a:srgbClr val="D4DAE1"/>
+                      </a:solidFill>
+                    </a:lnB>
+                  </a:tcPr>
+                </a:tc>
+                <a:tc>
+                  <a:txBody>
+                    <a:bodyPr wrap="square"/>
+                    <a:lstStyle/>
+                    <a:p>
+                      <a:pPr algn="l"/>
+                      <a:r>
+                        <a:rPr sz="1150" b="0">
+                          <a:solidFill>
+                            <a:srgbClr val="2D7449"/>
+                          </a:solidFill>
+                          <a:latin typeface="Segoe UI Semibold"/>
+                        </a:rPr>
+                        <a:t>OK</a:t>
+                      </a:r>
+                    </a:p>
+                  </a:txBody>
+                  <a:tcPr marL="82296" marR="82296" marT="36576" marB="36576" anchor="ctr">
+                    <a:solidFill>
+                      <a:srgbClr val="FFFFFF"/>
+                    </a:solidFill>
+                    <a:lnL w="6350">
+                      <a:solidFill>
+                        <a:srgbClr val="D4DAE1"/>
+                      </a:solidFill>
+                    </a:lnL>
+                    <a:lnR w="6350">
+                      <a:solidFill>
+                        <a:srgbClr val="D4DAE1"/>
+                      </a:solidFill>
+                    </a:lnR>
+                    <a:lnT w="6350">
+                      <a:solidFill>
+                        <a:srgbClr val="D4DAE1"/>
+                      </a:solidFill>
+                    </a:lnT>
+                    <a:lnB w="6350">
+                      <a:solidFill>
+                        <a:srgbClr val="D4DAE1"/>
+                      </a:solidFill>
+                    </a:lnB>
+                  </a:tcPr>
+                </a:tc>
+              </a:tr>
+              <a:tr h="384048">
+                <a:tc>
+                  <a:txBody>
+                    <a:bodyPr wrap="square"/>
+                    <a:lstStyle/>
+                    <a:p>
+                      <a:pPr algn="l"/>
+                      <a:r>
+                        <a:rPr sz="1150" b="0">
+                          <a:solidFill>
+                            <a:srgbClr val="17202A"/>
+                          </a:solidFill>
+                          <a:latin typeface="Segoe UI"/>
+                        </a:rPr>
+                        <a:t>projects</a:t>
+                      </a:r>
+                    </a:p>
+                  </a:txBody>
+                  <a:tcPr marL="82296" marR="82296" marT="36576" marB="36576" anchor="ctr">
+                    <a:solidFill>
+                      <a:srgbClr val="FFFFFF"/>
+                    </a:solidFill>
+                    <a:lnL w="6350">
+                      <a:solidFill>
+                        <a:srgbClr val="D4DAE1"/>
+                      </a:solidFill>
+                    </a:lnL>
+                    <a:lnR w="6350">
+                      <a:solidFill>
+                        <a:srgbClr val="D4DAE1"/>
+                      </a:solidFill>
+                    </a:lnR>
+                    <a:lnT w="6350">
+                      <a:solidFill>
+                        <a:srgbClr val="D4DAE1"/>
+                      </a:solidFill>
+                    </a:lnT>
+                    <a:lnB w="6350">
+                      <a:solidFill>
+                        <a:srgbClr val="D4DAE1"/>
+                      </a:solidFill>
+                    </a:lnB>
+                  </a:tcPr>
+                </a:tc>
+                <a:tc>
+                  <a:txBody>
+                    <a:bodyPr wrap="square"/>
+                    <a:lstStyle/>
+                    <a:p>
+                      <a:pPr algn="r"/>
+                      <a:r>
+                        <a:rPr sz="1150" b="0">
+                          <a:solidFill>
+                            <a:srgbClr val="17202A"/>
+                          </a:solidFill>
+                          <a:latin typeface="Segoe UI"/>
+                        </a:rPr>
+                        <a:t>33</a:t>
+                      </a:r>
+                    </a:p>
+                  </a:txBody>
+                  <a:tcPr marL="82296" marR="82296" marT="36576" marB="36576" anchor="ctr">
+                    <a:solidFill>
+                      <a:srgbClr val="FFFFFF"/>
+                    </a:solidFill>
+                    <a:lnL w="6350">
+                      <a:solidFill>
+                        <a:srgbClr val="D4DAE1"/>
+                      </a:solidFill>
+                    </a:lnL>
+                    <a:lnR w="6350">
+                      <a:solidFill>
+                        <a:srgbClr val="D4DAE1"/>
+                      </a:solidFill>
+                    </a:lnR>
+                    <a:lnT w="6350">
+                      <a:solidFill>
+                        <a:srgbClr val="D4DAE1"/>
+                      </a:solidFill>
+                    </a:lnT>
+                    <a:lnB w="6350">
+                      <a:solidFill>
+                        <a:srgbClr val="D4DAE1"/>
+                      </a:solidFill>
+                    </a:lnB>
+                  </a:tcPr>
+                </a:tc>
+                <a:tc>
+                  <a:txBody>
+                    <a:bodyPr wrap="square"/>
+                    <a:lstStyle/>
+                    <a:p>
+                      <a:pPr algn="r"/>
+                      <a:r>
+                        <a:rPr sz="1150" b="0">
+                          <a:solidFill>
+                            <a:srgbClr val="17202A"/>
+                          </a:solidFill>
+                          <a:latin typeface="Segoe UI"/>
+                        </a:rPr>
+                        <a:t>0</a:t>
+                      </a:r>
+                    </a:p>
+                  </a:txBody>
+                  <a:tcPr marL="82296" marR="82296" marT="36576" marB="36576" anchor="ctr">
+                    <a:solidFill>
+                      <a:srgbClr val="FFFFFF"/>
+                    </a:solidFill>
+                    <a:lnL w="6350">
+                      <a:solidFill>
+                        <a:srgbClr val="D4DAE1"/>
+                      </a:solidFill>
+                    </a:lnL>
+                    <a:lnR w="6350">
+                      <a:solidFill>
+                        <a:srgbClr val="D4DAE1"/>
+                      </a:solidFill>
+                    </a:lnR>
+                    <a:lnT w="6350">
+                      <a:solidFill>
+                        <a:srgbClr val="D4DAE1"/>
+                      </a:solidFill>
+                    </a:lnT>
+                    <a:lnB w="6350">
+                      <a:solidFill>
+                        <a:srgbClr val="D4DAE1"/>
+                      </a:solidFill>
+                    </a:lnB>
+                  </a:tcPr>
+                </a:tc>
+                <a:tc>
+                  <a:txBody>
+                    <a:bodyPr wrap="square"/>
+                    <a:lstStyle/>
+                    <a:p>
+                      <a:pPr algn="r"/>
+                      <a:r>
+                        <a:rPr sz="1150" b="0">
+                          <a:solidFill>
+                            <a:srgbClr val="17202A"/>
+                          </a:solidFill>
+                          <a:latin typeface="Segoe UI"/>
+                        </a:rPr>
+                        <a:t>0.00%</a:t>
+                      </a:r>
+                    </a:p>
+                  </a:txBody>
+                  <a:tcPr marL="82296" marR="82296" marT="36576" marB="36576" anchor="ctr">
+                    <a:solidFill>
+                      <a:srgbClr val="FFFFFF"/>
+                    </a:solidFill>
+                    <a:lnL w="6350">
+                      <a:solidFill>
+                        <a:srgbClr val="D4DAE1"/>
+                      </a:solidFill>
+                    </a:lnL>
+                    <a:lnR w="6350">
+                      <a:solidFill>
+                        <a:srgbClr val="D4DAE1"/>
+                      </a:solidFill>
+                    </a:lnR>
+                    <a:lnT w="6350">
+                      <a:solidFill>
+                        <a:srgbClr val="D4DAE1"/>
+                      </a:solidFill>
+                    </a:lnT>
+                    <a:lnB w="6350">
+                      <a:solidFill>
+                        <a:srgbClr val="D4DAE1"/>
+                      </a:solidFill>
+                    </a:lnB>
+                  </a:tcPr>
+                </a:tc>
+                <a:tc>
+                  <a:txBody>
+                    <a:bodyPr wrap="square"/>
+                    <a:lstStyle/>
+                    <a:p>
+                      <a:pPr algn="l"/>
+                      <a:r>
+                        <a:rPr sz="1150" b="0">
+                          <a:solidFill>
+                            <a:srgbClr val="2D7449"/>
+                          </a:solidFill>
+                          <a:latin typeface="Segoe UI Semibold"/>
+                        </a:rPr>
+                        <a:t>OK</a:t>
+                      </a:r>
+                    </a:p>
+                  </a:txBody>
+                  <a:tcPr marL="82296" marR="82296" marT="36576" marB="36576" anchor="ctr">
+                    <a:solidFill>
+                      <a:srgbClr val="FFFFFF"/>
+                    </a:solidFill>
+                    <a:lnL w="6350">
+                      <a:solidFill>
+                        <a:srgbClr val="D4DAE1"/>
+                      </a:solidFill>
+                    </a:lnL>
+                    <a:lnR w="6350">
+                      <a:solidFill>
+                        <a:srgbClr val="D4DAE1"/>
+                      </a:solidFill>
+                    </a:lnR>
+                    <a:lnT w="6350">
+                      <a:solidFill>
+                        <a:srgbClr val="D4DAE1"/>
+                      </a:solidFill>
+                    </a:lnT>
+                    <a:lnB w="6350">
+                      <a:solidFill>
+                        <a:srgbClr val="D4DAE1"/>
+                      </a:solidFill>
+                    </a:lnB>
+                  </a:tcPr>
+                </a:tc>
+              </a:tr>
+              <a:tr h="384048">
+                <a:tc>
+                  <a:txBody>
+                    <a:bodyPr wrap="square"/>
+                    <a:lstStyle/>
+                    <a:p>
+                      <a:pPr algn="l"/>
+                      <a:r>
+                        <a:rPr sz="1150" b="0">
+                          <a:solidFill>
+                            <a:srgbClr val="17202A"/>
+                          </a:solidFill>
+                          <a:latin typeface="Segoe UI"/>
+                        </a:rPr>
+                        <a:t>performance_reviews</a:t>
+                      </a:r>
+                    </a:p>
+                  </a:txBody>
+                  <a:tcPr marL="82296" marR="82296" marT="36576" marB="36576" anchor="ctr">
+                    <a:solidFill>
+                      <a:srgbClr val="FFFFFF"/>
+                    </a:solidFill>
+                    <a:lnL w="6350">
+                      <a:solidFill>
+                        <a:srgbClr val="D4DAE1"/>
+                      </a:solidFill>
+                    </a:lnL>
+                    <a:lnR w="6350">
+                      <a:solidFill>
+                        <a:srgbClr val="D4DAE1"/>
+                      </a:solidFill>
+                    </a:lnR>
+                    <a:lnT w="6350">
+                      <a:solidFill>
+                        <a:srgbClr val="D4DAE1"/>
+                      </a:solidFill>
+                    </a:lnT>
+                    <a:lnB w="6350">
+                      <a:solidFill>
+                        <a:srgbClr val="D4DAE1"/>
+                      </a:solidFill>
+                    </a:lnB>
+                  </a:tcPr>
+                </a:tc>
+                <a:tc>
+                  <a:txBody>
+                    <a:bodyPr wrap="square"/>
+                    <a:lstStyle/>
+                    <a:p>
+                      <a:pPr algn="r"/>
+                      <a:r>
+                        <a:rPr sz="1150" b="0">
+                          <a:solidFill>
+                            <a:srgbClr val="17202A"/>
+                          </a:solidFill>
+                          <a:latin typeface="Segoe UI"/>
+                        </a:rPr>
+                        <a:t>4,000</a:t>
+                      </a:r>
+                    </a:p>
+                  </a:txBody>
+                  <a:tcPr marL="82296" marR="82296" marT="36576" marB="36576" anchor="ctr">
+                    <a:solidFill>
+                      <a:srgbClr val="FFFFFF"/>
+                    </a:solidFill>
+                    <a:lnL w="6350">
+                      <a:solidFill>
+                        <a:srgbClr val="D4DAE1"/>
+                      </a:solidFill>
+                    </a:lnL>
+                    <a:lnR w="6350">
+                      <a:solidFill>
+                        <a:srgbClr val="D4DAE1"/>
+                      </a:solidFill>
+                    </a:lnR>
+                    <a:lnT w="6350">
+                      <a:solidFill>
+                        <a:srgbClr val="D4DAE1"/>
+                      </a:solidFill>
+                    </a:lnT>
+                    <a:lnB w="6350">
+                      <a:solidFill>
+                        <a:srgbClr val="D4DAE1"/>
+                      </a:solidFill>
+                    </a:lnB>
+                  </a:tcPr>
+                </a:tc>
+                <a:tc>
+                  <a:txBody>
+                    <a:bodyPr wrap="square"/>
+                    <a:lstStyle/>
+                    <a:p>
+                      <a:pPr algn="r"/>
+                      <a:r>
+                        <a:rPr sz="1150" b="0">
+                          <a:solidFill>
+                            <a:srgbClr val="17202A"/>
+                          </a:solidFill>
+                          <a:latin typeface="Segoe UI"/>
+                        </a:rPr>
+                        <a:t>0</a:t>
+                      </a:r>
+                    </a:p>
+                  </a:txBody>
+                  <a:tcPr marL="82296" marR="82296" marT="36576" marB="36576" anchor="ctr">
+                    <a:solidFill>
+                      <a:srgbClr val="FFFFFF"/>
+                    </a:solidFill>
+                    <a:lnL w="6350">
+                      <a:solidFill>
+                        <a:srgbClr val="D4DAE1"/>
+                      </a:solidFill>
+                    </a:lnL>
+                    <a:lnR w="6350">
+                      <a:solidFill>
+                        <a:srgbClr val="D4DAE1"/>
+                      </a:solidFill>
+                    </a:lnR>
+                    <a:lnT w="6350">
+                      <a:solidFill>
+                        <a:srgbClr val="D4DAE1"/>
+                      </a:solidFill>
+                    </a:lnT>
+                    <a:lnB w="6350">
+                      <a:solidFill>
+                        <a:srgbClr val="D4DAE1"/>
+                      </a:solidFill>
+                    </a:lnB>
+                  </a:tcPr>
+                </a:tc>
+                <a:tc>
+                  <a:txBody>
+                    <a:bodyPr wrap="square"/>
+                    <a:lstStyle/>
+                    <a:p>
+                      <a:pPr algn="r"/>
+                      <a:r>
+                        <a:rPr sz="1150" b="0">
+                          <a:solidFill>
+                            <a:srgbClr val="17202A"/>
+                          </a:solidFill>
+                          <a:latin typeface="Segoe UI"/>
+                        </a:rPr>
+                        <a:t>0.00%</a:t>
+                      </a:r>
+                    </a:p>
+                  </a:txBody>
+                  <a:tcPr marL="82296" marR="82296" marT="36576" marB="36576" anchor="ctr">
+                    <a:solidFill>
+                      <a:srgbClr val="FFFFFF"/>
+                    </a:solidFill>
+                    <a:lnL w="6350">
+                      <a:solidFill>
+                        <a:srgbClr val="D4DAE1"/>
+                      </a:solidFill>
+                    </a:lnL>
+                    <a:lnR w="6350">
+                      <a:solidFill>
+                        <a:srgbClr val="D4DAE1"/>
+                      </a:solidFill>
+                    </a:lnR>
+                    <a:lnT w="6350">
+                      <a:solidFill>
+                        <a:srgbClr val="D4DAE1"/>
+                      </a:solidFill>
+                    </a:lnT>
+                    <a:lnB w="6350">
+                      <a:solidFill>
+                        <a:srgbClr val="D4DAE1"/>
+                      </a:solidFill>
+                    </a:lnB>
+                  </a:tcPr>
+                </a:tc>
+                <a:tc>
+                  <a:txBody>
+                    <a:bodyPr wrap="square"/>
+                    <a:lstStyle/>
+                    <a:p>
+                      <a:pPr algn="l"/>
+                      <a:r>
+                        <a:rPr sz="1150" b="0">
+                          <a:solidFill>
+                            <a:srgbClr val="2D7449"/>
+                          </a:solidFill>
+                          <a:latin typeface="Segoe UI Semibold"/>
+                        </a:rPr>
+                        <a:t>OK</a:t>
+                      </a:r>
+                    </a:p>
+                  </a:txBody>
+                  <a:tcPr marL="82296" marR="82296" marT="36576" marB="36576" anchor="ctr">
+                    <a:solidFill>
+                      <a:srgbClr val="FFFFFF"/>
+                    </a:solidFill>
+                    <a:lnL w="6350">
+                      <a:solidFill>
+                        <a:srgbClr val="D4DAE1"/>
+                      </a:solidFill>
+                    </a:lnL>
+                    <a:lnR w="6350">
+                      <a:solidFill>
+                        <a:srgbClr val="D4DAE1"/>
+                      </a:solidFill>
+                    </a:lnR>
+                    <a:lnT w="6350">
+                      <a:solidFill>
+                        <a:srgbClr val="D4DAE1"/>
+                      </a:solidFill>
+                    </a:lnT>
+                    <a:lnB w="6350">
+                      <a:solidFill>
+                        <a:srgbClr val="D4DAE1"/>
+                      </a:solidFill>
+                    </a:lnB>
+                  </a:tcPr>
+                </a:tc>
+              </a:tr>
+              <a:tr h="384048">
+                <a:tc>
+                  <a:txBody>
+                    <a:bodyPr wrap="square"/>
+                    <a:lstStyle/>
+                    <a:p>
+                      <a:pPr algn="l"/>
+                      <a:r>
+                        <a:rPr sz="1150" b="0">
+                          <a:solidFill>
+                            <a:srgbClr val="17202A"/>
+                          </a:solidFill>
+                          <a:latin typeface="Segoe UI"/>
+                        </a:rPr>
+                        <a:t>competency_assessments</a:t>
+                      </a:r>
+                    </a:p>
+                  </a:txBody>
+                  <a:tcPr marL="82296" marR="82296" marT="36576" marB="36576" anchor="ctr">
+                    <a:solidFill>
+                      <a:srgbClr val="FFFFFF"/>
+                    </a:solidFill>
+                    <a:lnL w="6350">
+                      <a:solidFill>
+                        <a:srgbClr val="D4DAE1"/>
+                      </a:solidFill>
+                    </a:lnL>
+                    <a:lnR w="6350">
+                      <a:solidFill>
+                        <a:srgbClr val="D4DAE1"/>
+                      </a:solidFill>
+                    </a:lnR>
+                    <a:lnT w="6350">
+                      <a:solidFill>
+                        <a:srgbClr val="D4DAE1"/>
+                      </a:solidFill>
+                    </a:lnT>
+                    <a:lnB w="6350">
+                      <a:solidFill>
+                        <a:srgbClr val="D4DAE1"/>
+                      </a:solidFill>
+                    </a:lnB>
+                  </a:tcPr>
+                </a:tc>
+                <a:tc>
+                  <a:txBody>
+                    <a:bodyPr wrap="square"/>
+                    <a:lstStyle/>
+                    <a:p>
+                      <a:pPr algn="r"/>
+                      <a:r>
+                        <a:rPr sz="1150" b="0">
+                          <a:solidFill>
+                            <a:srgbClr val="17202A"/>
+                          </a:solidFill>
+                          <a:latin typeface="Segoe UI"/>
+                        </a:rPr>
+                        <a:t>4,000</a:t>
+                      </a:r>
+                    </a:p>
+                  </a:txBody>
+                  <a:tcPr marL="82296" marR="82296" marT="36576" marB="36576" anchor="ctr">
+                    <a:solidFill>
+                      <a:srgbClr val="FFFFFF"/>
+                    </a:solidFill>
+                    <a:lnL w="6350">
+                      <a:solidFill>
+                        <a:srgbClr val="D4DAE1"/>
+                      </a:solidFill>
+                    </a:lnL>
+                    <a:lnR w="6350">
+                      <a:solidFill>
+                        <a:srgbClr val="D4DAE1"/>
+                      </a:solidFill>
+                    </a:lnR>
+                    <a:lnT w="6350">
+                      <a:solidFill>
+                        <a:srgbClr val="D4DAE1"/>
+                      </a:solidFill>
+                    </a:lnT>
+                    <a:lnB w="6350">
+                      <a:solidFill>
+                        <a:srgbClr val="D4DAE1"/>
+                      </a:solidFill>
+                    </a:lnB>
+                  </a:tcPr>
+                </a:tc>
+                <a:tc>
+                  <a:txBody>
+                    <a:bodyPr wrap="square"/>
+                    <a:lstStyle/>
+                    <a:p>
+                      <a:pPr algn="r"/>
+                      <a:r>
+                        <a:rPr sz="1150" b="0">
+                          <a:solidFill>
+                            <a:srgbClr val="17202A"/>
+                          </a:solidFill>
+                          <a:latin typeface="Segoe UI"/>
+                        </a:rPr>
+                        <a:t>0</a:t>
+                      </a:r>
+                    </a:p>
+                  </a:txBody>
+                  <a:tcPr marL="82296" marR="82296" marT="36576" marB="36576" anchor="ctr">
+                    <a:solidFill>
+                      <a:srgbClr val="FFFFFF"/>
+                    </a:solidFill>
+                    <a:lnL w="6350">
+                      <a:solidFill>
+                        <a:srgbClr val="D4DAE1"/>
+                      </a:solidFill>
+                    </a:lnL>
+                    <a:lnR w="6350">
+                      <a:solidFill>
+                        <a:srgbClr val="D4DAE1"/>
+                      </a:solidFill>
+                    </a:lnR>
+                    <a:lnT w="6350">
+                      <a:solidFill>
+                        <a:srgbClr val="D4DAE1"/>
+                      </a:solidFill>
+                    </a:lnT>
+                    <a:lnB w="6350">
+                      <a:solidFill>
+                        <a:srgbClr val="D4DAE1"/>
+                      </a:solidFill>
+                    </a:lnB>
+                  </a:tcPr>
+                </a:tc>
+                <a:tc>
+                  <a:txBody>
+                    <a:bodyPr wrap="square"/>
+                    <a:lstStyle/>
+                    <a:p>
+                      <a:pPr algn="r"/>
+                      <a:r>
+                        <a:rPr sz="1150" b="0">
+                          <a:solidFill>
+                            <a:srgbClr val="17202A"/>
+                          </a:solidFill>
+                          <a:latin typeface="Segoe UI"/>
+                        </a:rPr>
+                        <a:t>0.00%</a:t>
+                      </a:r>
+                    </a:p>
+                  </a:txBody>
+                  <a:tcPr marL="82296" marR="82296" marT="36576" marB="36576" anchor="ctr">
+                    <a:solidFill>
+                      <a:srgbClr val="FFFFFF"/>
+                    </a:solidFill>
+                    <a:lnL w="6350">
+                      <a:solidFill>
+                        <a:srgbClr val="D4DAE1"/>
+                      </a:solidFill>
+                    </a:lnL>
+                    <a:lnR w="6350">
+                      <a:solidFill>
+                        <a:srgbClr val="D4DAE1"/>
+                      </a:solidFill>
+                    </a:lnR>
+                    <a:lnT w="6350">
+                      <a:solidFill>
+                        <a:srgbClr val="D4DAE1"/>
+                      </a:solidFill>
+                    </a:lnT>
+                    <a:lnB w="6350">
+                      <a:solidFill>
+                        <a:srgbClr val="D4DAE1"/>
+                      </a:solidFill>
+                    </a:lnB>
+                  </a:tcPr>
+                </a:tc>
+                <a:tc>
+                  <a:txBody>
+                    <a:bodyPr wrap="square"/>
+                    <a:lstStyle/>
+                    <a:p>
+                      <a:pPr algn="l"/>
+                      <a:r>
+                        <a:rPr sz="1150" b="0">
+                          <a:solidFill>
+                            <a:srgbClr val="2D7449"/>
+                          </a:solidFill>
+                          <a:latin typeface="Segoe UI Semibold"/>
+                        </a:rPr>
+                        <a:t>OK</a:t>
+                      </a:r>
+                    </a:p>
+                  </a:txBody>
+                  <a:tcPr marL="82296" marR="82296" marT="36576" marB="36576" anchor="ctr">
+                    <a:solidFill>
+                      <a:srgbClr val="FFFFFF"/>
+                    </a:solidFill>
+                    <a:lnL w="6350">
+                      <a:solidFill>
+                        <a:srgbClr val="D4DAE1"/>
+                      </a:solidFill>
+                    </a:lnL>
+                    <a:lnR w="6350">
+                      <a:solidFill>
+                        <a:srgbClr val="D4DAE1"/>
+                      </a:solidFill>
+                    </a:lnR>
+                    <a:lnT w="6350">
+                      <a:solidFill>
+                        <a:srgbClr val="D4DAE1"/>
+                      </a:solidFill>
+                    </a:lnT>
+                    <a:lnB w="6350">
+                      <a:solidFill>
+                        <a:srgbClr val="D4DAE1"/>
+                      </a:solidFill>
+                    </a:lnB>
+                  </a:tcPr>
+                </a:tc>
+              </a:tr>
+              <a:tr h="384048">
+                <a:tc>
+                  <a:txBody>
+                    <a:bodyPr wrap="square"/>
+                    <a:lstStyle/>
+                    <a:p>
+                      <a:pPr algn="l"/>
+                      <a:r>
+                        <a:rPr sz="1150" b="0">
+                          <a:solidFill>
+                            <a:srgbClr val="17202A"/>
+                          </a:solidFill>
+                          <a:latin typeface="Segoe UI"/>
+                        </a:rPr>
+                        <a:t>talent_review</a:t>
+                      </a:r>
+                    </a:p>
+                  </a:txBody>
+                  <a:tcPr marL="82296" marR="82296" marT="36576" marB="36576" anchor="ctr">
+                    <a:solidFill>
+                      <a:srgbClr val="FFFFFF"/>
+                    </a:solidFill>
+                    <a:lnL w="6350">
+                      <a:solidFill>
+                        <a:srgbClr val="D4DAE1"/>
+                      </a:solidFill>
+                    </a:lnL>
+                    <a:lnR w="6350">
+                      <a:solidFill>
+                        <a:srgbClr val="D4DAE1"/>
+                      </a:solidFill>
+                    </a:lnR>
+                    <a:lnT w="6350">
+                      <a:solidFill>
+                        <a:srgbClr val="D4DAE1"/>
+                      </a:solidFill>
+                    </a:lnT>
+                    <a:lnB w="6350">
+                      <a:solidFill>
+                        <a:srgbClr val="D4DAE1"/>
+                      </a:solidFill>
+                    </a:lnB>
+                  </a:tcPr>
+                </a:tc>
+                <a:tc>
+                  <a:txBody>
+                    <a:bodyPr wrap="square"/>
+                    <a:lstStyle/>
+                    <a:p>
+                      <a:pPr algn="r"/>
+                      <a:r>
+                        <a:rPr sz="1150" b="0">
+                          <a:solidFill>
+                            <a:srgbClr val="17202A"/>
+                          </a:solidFill>
+                          <a:latin typeface="Segoe UI"/>
+                        </a:rPr>
+                        <a:t>2,000</a:t>
+                      </a:r>
+                    </a:p>
+                  </a:txBody>
+                  <a:tcPr marL="82296" marR="82296" marT="36576" marB="36576" anchor="ctr">
+                    <a:solidFill>
+                      <a:srgbClr val="FFFFFF"/>
+                    </a:solidFill>
+                    <a:lnL w="6350">
+                      <a:solidFill>
+                        <a:srgbClr val="D4DAE1"/>
+                      </a:solidFill>
+                    </a:lnL>
+                    <a:lnR w="6350">
+                      <a:solidFill>
+                        <a:srgbClr val="D4DAE1"/>
+                      </a:solidFill>
+                    </a:lnR>
+                    <a:lnT w="6350">
+                      <a:solidFill>
+                        <a:srgbClr val="D4DAE1"/>
+                      </a:solidFill>
+                    </a:lnT>
+                    <a:lnB w="6350">
+                      <a:solidFill>
+                        <a:srgbClr val="D4DAE1"/>
+                      </a:solidFill>
+                    </a:lnB>
+                  </a:tcPr>
+                </a:tc>
+                <a:tc>
+                  <a:txBody>
+                    <a:bodyPr wrap="square"/>
+                    <a:lstStyle/>
+                    <a:p>
+                      <a:pPr algn="r"/>
+                      <a:r>
+                        <a:rPr sz="1150" b="0">
+                          <a:solidFill>
+                            <a:srgbClr val="17202A"/>
+                          </a:solidFill>
+                          <a:latin typeface="Segoe UI"/>
+                        </a:rPr>
+                        <a:t>0</a:t>
+                      </a:r>
+                    </a:p>
+                  </a:txBody>
+                  <a:tcPr marL="82296" marR="82296" marT="36576" marB="36576" anchor="ctr">
+                    <a:solidFill>
+                      <a:srgbClr val="FFFFFF"/>
+                    </a:solidFill>
+                    <a:lnL w="6350">
+                      <a:solidFill>
+                        <a:srgbClr val="D4DAE1"/>
+                      </a:solidFill>
+                    </a:lnL>
+                    <a:lnR w="6350">
+                      <a:solidFill>
+                        <a:srgbClr val="D4DAE1"/>
+                      </a:solidFill>
+                    </a:lnR>
+                    <a:lnT w="6350">
+                      <a:solidFill>
+                        <a:srgbClr val="D4DAE1"/>
+                      </a:solidFill>
+                    </a:lnT>
+                    <a:lnB w="6350">
+                      <a:solidFill>
+                        <a:srgbClr val="D4DAE1"/>
+                      </a:solidFill>
+                    </a:lnB>
+                  </a:tcPr>
+                </a:tc>
+                <a:tc>
+                  <a:txBody>
+                    <a:bodyPr wrap="square"/>
+                    <a:lstStyle/>
+                    <a:p>
+                      <a:pPr algn="r"/>
+                      <a:r>
+                        <a:rPr sz="1150" b="0">
+                          <a:solidFill>
+                            <a:srgbClr val="17202A"/>
+                          </a:solidFill>
+                          <a:latin typeface="Segoe UI"/>
+                        </a:rPr>
+                        <a:t>0.00%</a:t>
+                      </a:r>
+                    </a:p>
+                  </a:txBody>
+                  <a:tcPr marL="82296" marR="82296" marT="36576" marB="36576" anchor="ctr">
+                    <a:solidFill>
+                      <a:srgbClr val="FFFFFF"/>
+                    </a:solidFill>
+                    <a:lnL w="6350">
+                      <a:solidFill>
+                        <a:srgbClr val="D4DAE1"/>
+                      </a:solidFill>
+                    </a:lnL>
+                    <a:lnR w="6350">
+                      <a:solidFill>
+                        <a:srgbClr val="D4DAE1"/>
+                      </a:solidFill>
+                    </a:lnR>
+                    <a:lnT w="6350">
+                      <a:solidFill>
+                        <a:srgbClr val="D4DAE1"/>
+                      </a:solidFill>
+                    </a:lnT>
+                    <a:lnB w="6350">
+                      <a:solidFill>
+                        <a:srgbClr val="D4DAE1"/>
+                      </a:solidFill>
+                    </a:lnB>
+                  </a:tcPr>
+                </a:tc>
+                <a:tc>
+                  <a:txBody>
+                    <a:bodyPr wrap="square"/>
+                    <a:lstStyle/>
+                    <a:p>
+                      <a:pPr algn="l"/>
+                      <a:r>
+                        <a:rPr sz="1150" b="0">
+                          <a:solidFill>
+                            <a:srgbClr val="2D7449"/>
+                          </a:solidFill>
+                          <a:latin typeface="Segoe UI Semibold"/>
+                        </a:rPr>
+                        <a:t>OK</a:t>
+                      </a:r>
+                    </a:p>
+                  </a:txBody>
+                  <a:tcPr marL="82296" marR="82296" marT="36576" marB="36576" anchor="ctr">
+                    <a:solidFill>
+                      <a:srgbClr val="FFFFFF"/>
+                    </a:solidFill>
+                    <a:lnL w="6350">
+                      <a:solidFill>
+                        <a:srgbClr val="D4DAE1"/>
+                      </a:solidFill>
+                    </a:lnL>
+                    <a:lnR w="6350">
+                      <a:solidFill>
+                        <a:srgbClr val="D4DAE1"/>
+                      </a:solidFill>
+                    </a:lnR>
+                    <a:lnT w="6350">
+                      <a:solidFill>
+                        <a:srgbClr val="D4DAE1"/>
+                      </a:solidFill>
+                    </a:lnT>
+                    <a:lnB w="6350">
+                      <a:solidFill>
+                        <a:srgbClr val="D4DAE1"/>
+                      </a:solidFill>
+                    </a:lnB>
+                  </a:tcPr>
+                </a:tc>
+              </a:tr>
+              <a:tr h="384048">
+                <a:tc>
+                  <a:txBody>
+                    <a:bodyPr wrap="square"/>
+                    <a:lstStyle/>
+                    <a:p>
+                      <a:pPr algn="l"/>
+                      <a:r>
+                        <a:rPr sz="1150" b="0">
+                          <a:solidFill>
+                            <a:srgbClr val="17202A"/>
+                          </a:solidFill>
+                          <a:latin typeface="Segoe UI"/>
+                        </a:rPr>
+                        <a:t>learning_activity</a:t>
+                      </a:r>
+                    </a:p>
+                  </a:txBody>
+                  <a:tcPr marL="82296" marR="82296" marT="36576" marB="36576" anchor="ctr">
+                    <a:solidFill>
+                      <a:srgbClr val="FFFFFF"/>
+                    </a:solidFill>
+                    <a:lnL w="6350">
+                      <a:solidFill>
+                        <a:srgbClr val="D4DAE1"/>
+                      </a:solidFill>
+                    </a:lnL>
+                    <a:lnR w="6350">
+                      <a:solidFill>
+                        <a:srgbClr val="D4DAE1"/>
+                      </a:solidFill>
+                    </a:lnR>
+                    <a:lnT w="6350">
+                      <a:solidFill>
+                        <a:srgbClr val="D4DAE1"/>
+                      </a:solidFill>
+                    </a:lnT>
+                    <a:lnB w="6350">
+                      <a:solidFill>
+                        <a:srgbClr val="D4DAE1"/>
+                      </a:solidFill>
+                    </a:lnB>
+                  </a:tcPr>
+                </a:tc>
+                <a:tc>
+                  <a:txBody>
+                    <a:bodyPr wrap="square"/>
+                    <a:lstStyle/>
+                    <a:p>
+                      <a:pPr algn="r"/>
+                      <a:r>
+                        <a:rPr sz="1150" b="0">
+                          <a:solidFill>
+                            <a:srgbClr val="17202A"/>
+                          </a:solidFill>
+                          <a:latin typeface="Segoe UI"/>
+                        </a:rPr>
+                        <a:t>29,868</a:t>
+                      </a:r>
+                    </a:p>
+                  </a:txBody>
+                  <a:tcPr marL="82296" marR="82296" marT="36576" marB="36576" anchor="ctr">
+                    <a:solidFill>
+                      <a:srgbClr val="FFFFFF"/>
+                    </a:solidFill>
+                    <a:lnL w="6350">
+                      <a:solidFill>
+                        <a:srgbClr val="D4DAE1"/>
+                      </a:solidFill>
+                    </a:lnL>
+                    <a:lnR w="6350">
+                      <a:solidFill>
+                        <a:srgbClr val="D4DAE1"/>
+                      </a:solidFill>
+                    </a:lnR>
+                    <a:lnT w="6350">
+                      <a:solidFill>
+                        <a:srgbClr val="D4DAE1"/>
+                      </a:solidFill>
+                    </a:lnT>
+                    <a:lnB w="6350">
+                      <a:solidFill>
+                        <a:srgbClr val="D4DAE1"/>
+                      </a:solidFill>
+                    </a:lnB>
+                  </a:tcPr>
+                </a:tc>
+                <a:tc>
+                  <a:txBody>
+                    <a:bodyPr wrap="square"/>
+                    <a:lstStyle/>
+                    <a:p>
+                      <a:pPr algn="r"/>
+                      <a:r>
+                        <a:rPr sz="1150" b="0">
+                          <a:solidFill>
+                            <a:srgbClr val="17202A"/>
+                          </a:solidFill>
+                          <a:latin typeface="Segoe UI"/>
+                        </a:rPr>
+                        <a:t>294</a:t>
+                      </a:r>
+                    </a:p>
+                  </a:txBody>
+                  <a:tcPr marL="82296" marR="82296" marT="36576" marB="36576" anchor="ctr">
+                    <a:solidFill>
+                      <a:srgbClr val="FFFFFF"/>
+                    </a:solidFill>
+                    <a:lnL w="6350">
+                      <a:solidFill>
+                        <a:srgbClr val="D4DAE1"/>
+                      </a:solidFill>
+                    </a:lnL>
+                    <a:lnR w="6350">
+                      <a:solidFill>
+                        <a:srgbClr val="D4DAE1"/>
+                      </a:solidFill>
+                    </a:lnR>
+                    <a:lnT w="6350">
+                      <a:solidFill>
+                        <a:srgbClr val="D4DAE1"/>
+                      </a:solidFill>
+                    </a:lnT>
+                    <a:lnB w="6350">
+                      <a:solidFill>
+                        <a:srgbClr val="D4DAE1"/>
+                      </a:solidFill>
+                    </a:lnB>
+                  </a:tcPr>
+                </a:tc>
+                <a:tc>
+                  <a:txBody>
+                    <a:bodyPr wrap="square"/>
+                    <a:lstStyle/>
+                    <a:p>
+                      <a:pPr algn="r"/>
+                      <a:r>
+                        <a:rPr sz="1150" b="0">
+                          <a:solidFill>
+                            <a:srgbClr val="17202A"/>
+                          </a:solidFill>
+                          <a:latin typeface="Segoe UI"/>
+                        </a:rPr>
+                        <a:t>0.98%</a:t>
+                      </a:r>
+                    </a:p>
+                  </a:txBody>
+                  <a:tcPr marL="82296" marR="82296" marT="36576" marB="36576" anchor="ctr">
+                    <a:solidFill>
+                      <a:srgbClr val="FFFFFF"/>
+                    </a:solidFill>
+                    <a:lnL w="6350">
+                      <a:solidFill>
+                        <a:srgbClr val="D4DAE1"/>
+                      </a:solidFill>
+                    </a:lnL>
+                    <a:lnR w="6350">
+                      <a:solidFill>
+                        <a:srgbClr val="D4DAE1"/>
+                      </a:solidFill>
+                    </a:lnR>
+                    <a:lnT w="6350">
+                      <a:solidFill>
+                        <a:srgbClr val="D4DAE1"/>
+                      </a:solidFill>
+                    </a:lnT>
+                    <a:lnB w="6350">
+                      <a:solidFill>
+                        <a:srgbClr val="D4DAE1"/>
+                      </a:solidFill>
+                    </a:lnB>
+                  </a:tcPr>
+                </a:tc>
+                <a:tc>
+                  <a:txBody>
+                    <a:bodyPr wrap="square"/>
+                    <a:lstStyle/>
+                    <a:p>
+                      <a:pPr algn="l"/>
+                      <a:r>
+                        <a:rPr sz="1150" b="0">
+                          <a:solidFill>
+                            <a:srgbClr val="2D7449"/>
+                          </a:solidFill>
+                          <a:latin typeface="Segoe UI Semibold"/>
+                        </a:rPr>
+                        <a:t>OK</a:t>
+                      </a:r>
+                    </a:p>
+                  </a:txBody>
+                  <a:tcPr marL="82296" marR="82296" marT="36576" marB="36576" anchor="ctr">
+                    <a:solidFill>
+                      <a:srgbClr val="FFFFFF"/>
+                    </a:solidFill>
+                    <a:lnL w="6350">
+                      <a:solidFill>
+                        <a:srgbClr val="D4DAE1"/>
+                      </a:solidFill>
+                    </a:lnL>
+                    <a:lnR w="6350">
+                      <a:solidFill>
+                        <a:srgbClr val="D4DAE1"/>
+                      </a:solidFill>
+                    </a:lnR>
+                    <a:lnT w="6350">
+                      <a:solidFill>
+                        <a:srgbClr val="D4DAE1"/>
+                      </a:solidFill>
+                    </a:lnT>
+                    <a:lnB w="6350">
+                      <a:solidFill>
+                        <a:srgbClr val="D4DAE1"/>
+                      </a:solidFill>
+                    </a:lnB>
+                  </a:tcPr>
+                </a:tc>
+              </a:tr>
+            </a:tbl>
+          </a:graphicData>
+        </a:graphic>
+      </p:graphicFrame>
+      <p:sp>
+        <p:nvSpPr>
+          <p:cNvPr id="5" name="TextBox 4"/>
+          <p:cNvSpPr txBox="1"/>
+          <p:nvPr/>
+        </p:nvSpPr>
+        <p:spPr>
+          <a:xfrm>
+            <a:off x="548640" y="5029200"/>
+            <a:ext cx="6309360" cy="365760"/>
+          </a:xfrm>
+          <a:prstGeom prst="rect">
+            <a:avLst/>
+          </a:prstGeom>
+          <a:noFill/>
+        </p:spPr>
+        <p:txBody>
+          <a:bodyPr wrap="square" anchor="t" lIns="18288" rIns="18288" tIns="18288" bIns="18288">
+            <a:spAutoFit/>
+          </a:bodyPr>
+          <a:lstStyle/>
+          <a:p>
+            <a:pPr algn="l">
+              <a:spcAft>
+                <a:spcPts val="400"/>
+              </a:spcAft>
+            </a:pPr>
+            <a:r>
+              <a:rPr sz="1200" b="0">
+                <a:solidFill>
+                  <a:srgbClr val="4B5765"/>
+                </a:solidFill>
+                <a:latin typeface="Segoe UI"/>
+              </a:rPr>
+              <a:t>Last cloud run: 0 alerts. Highest rate: learning_activity 0.98%.</a:t>
+            </a:r>
+          </a:p>
+        </p:txBody>
+      </p:sp>
+      <p:sp>
+        <p:nvSpPr>
+          <p:cNvPr id="6" name="TextBox 5"/>
+          <p:cNvSpPr txBox="1"/>
+          <p:nvPr/>
+        </p:nvSpPr>
+        <p:spPr>
+          <a:xfrm>
+            <a:off x="7223760" y="1444752"/>
+            <a:ext cx="4389120" cy="365760"/>
+          </a:xfrm>
+          <a:prstGeom prst="rect">
+            <a:avLst/>
+          </a:prstGeom>
+          <a:noFill/>
+        </p:spPr>
+        <p:txBody>
+          <a:bodyPr wrap="square" anchor="t" lIns="18288" rIns="18288" tIns="18288" bIns="18288">
+            <a:spAutoFit/>
+          </a:bodyPr>
+          <a:lstStyle/>
+          <a:p>
+            <a:pPr algn="l">
+              <a:spcAft>
+                <a:spcPts val="400"/>
+              </a:spcAft>
+            </a:pPr>
+            <a:r>
+              <a:rPr sz="1400" b="0">
+                <a:solidFill>
+                  <a:srgbClr val="17202A"/>
+                </a:solidFill>
+                <a:latin typeface="Segoe UI Semibold"/>
+              </a:rPr>
+              <a:t>Alert rules (configurable)</a:t>
+            </a:r>
+          </a:p>
+        </p:txBody>
+      </p:sp>
+      <p:sp>
+        <p:nvSpPr>
+          <p:cNvPr id="7" name="Rounded Rectangle 6"/>
+          <p:cNvSpPr/>
+          <p:nvPr/>
+        </p:nvSpPr>
+        <p:spPr>
+          <a:xfrm>
+            <a:off x="7223760" y="1874519"/>
+            <a:ext cx="4416552" cy="786384"/>
+          </a:xfrm>
+          <a:prstGeom prst="roundRect">
+            <a:avLst>
+              <a:gd name="adj" fmla="val 6000"/>
+            </a:avLst>
+          </a:prstGeom>
+          <a:solidFill>
+            <a:srgbClr val="DFF0E5"/>
+          </a:solidFill>
+          <a:ln>
+            <a:noFill/>
+          </a:ln>
+        </p:spPr>
+        <p:txBody>
+          <a:bodyPr rtlCol="0" anchor="ctr"/>
+          <a:lstStyle/>
+          <a:p/>
+        </p:txBody>
+      </p:sp>
+      <p:sp>
+        <p:nvSpPr>
+          <p:cNvPr id="8" name="TextBox 7"/>
+          <p:cNvSpPr txBox="1"/>
+          <p:nvPr/>
+        </p:nvSpPr>
+        <p:spPr>
+          <a:xfrm>
+            <a:off x="7406640" y="1965960"/>
+            <a:ext cx="1371600" cy="274320"/>
+          </a:xfrm>
+          <a:prstGeom prst="rect">
+            <a:avLst/>
+          </a:prstGeom>
+          <a:noFill/>
+        </p:spPr>
+        <p:txBody>
+          <a:bodyPr wrap="square" anchor="t" lIns="18288" rIns="18288" tIns="18288" bIns="18288">
+            <a:spAutoFit/>
+          </a:bodyPr>
+          <a:lstStyle/>
+          <a:p>
+            <a:pPr algn="l">
+              <a:spcAft>
+                <a:spcPts val="400"/>
+              </a:spcAft>
+            </a:pPr>
+            <a:r>
+              <a:rPr sz="1200" b="0">
+                <a:solidFill>
+                  <a:srgbClr val="2D7449"/>
+                </a:solidFill>
+                <a:latin typeface="Segoe UI Semibold"/>
+              </a:rPr>
+              <a:t>OK</a:t>
+            </a:r>
+          </a:p>
+        </p:txBody>
+      </p:sp>
+      <p:sp>
+        <p:nvSpPr>
+          <p:cNvPr id="9" name="TextBox 8"/>
+          <p:cNvSpPr txBox="1"/>
+          <p:nvPr/>
+        </p:nvSpPr>
+        <p:spPr>
+          <a:xfrm>
+            <a:off x="8778240" y="1965960"/>
+            <a:ext cx="2743200" cy="274320"/>
+          </a:xfrm>
+          <a:prstGeom prst="rect">
+            <a:avLst/>
+          </a:prstGeom>
+          <a:noFill/>
+        </p:spPr>
+        <p:txBody>
+          <a:bodyPr wrap="square" anchor="t" lIns="18288" rIns="18288" tIns="18288" bIns="18288">
+            <a:spAutoFit/>
+          </a:bodyPr>
+          <a:lstStyle/>
+          <a:p>
+            <a:pPr algn="l">
+              <a:spcAft>
+                <a:spcPts val="400"/>
+              </a:spcAft>
+            </a:pPr>
+            <a:r>
+              <a:rPr sz="1200" b="0">
+                <a:solidFill>
+                  <a:srgbClr val="17202A"/>
+                </a:solidFill>
+                <a:latin typeface="Segoe UI Semibold"/>
+              </a:rPr>
+              <a:t>below 5%</a:t>
+            </a:r>
+          </a:p>
+        </p:txBody>
+      </p:sp>
+      <p:sp>
+        <p:nvSpPr>
+          <p:cNvPr id="10" name="TextBox 9"/>
+          <p:cNvSpPr txBox="1"/>
+          <p:nvPr/>
+        </p:nvSpPr>
+        <p:spPr>
+          <a:xfrm>
+            <a:off x="7406640" y="2286000"/>
+            <a:ext cx="4114800" cy="365760"/>
+          </a:xfrm>
+          <a:prstGeom prst="rect">
+            <a:avLst/>
+          </a:prstGeom>
+          <a:noFill/>
+        </p:spPr>
+        <p:txBody>
+          <a:bodyPr wrap="square" anchor="t" lIns="18288" rIns="18288" tIns="18288" bIns="18288">
+            <a:spAutoFit/>
+          </a:bodyPr>
+          <a:lstStyle/>
+          <a:p>
+            <a:pPr algn="l">
+              <a:spcAft>
+                <a:spcPts val="400"/>
+              </a:spcAft>
+            </a:pPr>
+            <a:r>
+              <a:rPr sz="1100" b="0">
+                <a:solidFill>
+                  <a:srgbClr val="4B5765"/>
+                </a:solidFill>
+                <a:latin typeface="Segoe UI"/>
+              </a:rPr>
+              <a:t>publish normally</a:t>
+            </a:r>
+          </a:p>
+        </p:txBody>
+      </p:sp>
+      <p:sp>
+        <p:nvSpPr>
+          <p:cNvPr id="11" name="Rounded Rectangle 10"/>
+          <p:cNvSpPr/>
+          <p:nvPr/>
+        </p:nvSpPr>
+        <p:spPr>
+          <a:xfrm>
+            <a:off x="7223760" y="2770632"/>
+            <a:ext cx="4416552" cy="786384"/>
+          </a:xfrm>
+          <a:prstGeom prst="roundRect">
+            <a:avLst>
+              <a:gd name="adj" fmla="val 6000"/>
+            </a:avLst>
+          </a:prstGeom>
+          <a:solidFill>
+            <a:srgbClr val="FBF0D9"/>
+          </a:solidFill>
+          <a:ln>
+            <a:noFill/>
+          </a:ln>
+        </p:spPr>
+        <p:txBody>
+          <a:bodyPr rtlCol="0" anchor="ctr"/>
+          <a:lstStyle/>
+          <a:p/>
+        </p:txBody>
+      </p:sp>
+      <p:sp>
+        <p:nvSpPr>
+          <p:cNvPr id="12" name="TextBox 11"/>
+          <p:cNvSpPr txBox="1"/>
+          <p:nvPr/>
+        </p:nvSpPr>
+        <p:spPr>
+          <a:xfrm>
+            <a:off x="7406640" y="2862072"/>
+            <a:ext cx="1371600" cy="274320"/>
+          </a:xfrm>
+          <a:prstGeom prst="rect">
+            <a:avLst/>
+          </a:prstGeom>
+          <a:noFill/>
+        </p:spPr>
+        <p:txBody>
+          <a:bodyPr wrap="square" anchor="t" lIns="18288" rIns="18288" tIns="18288" bIns="18288">
+            <a:spAutoFit/>
+          </a:bodyPr>
+          <a:lstStyle/>
+          <a:p>
+            <a:pPr algn="l">
+              <a:spcAft>
+                <a:spcPts val="400"/>
+              </a:spcAft>
+            </a:pPr>
+            <a:r>
+              <a:rPr sz="1200" b="0">
+                <a:solidFill>
+                  <a:srgbClr val="B7791F"/>
+                </a:solidFill>
+                <a:latin typeface="Segoe UI Semibold"/>
+              </a:rPr>
+              <a:t>WARNING</a:t>
+            </a:r>
+          </a:p>
+        </p:txBody>
+      </p:sp>
+      <p:sp>
+        <p:nvSpPr>
+          <p:cNvPr id="13" name="TextBox 12"/>
+          <p:cNvSpPr txBox="1"/>
+          <p:nvPr/>
+        </p:nvSpPr>
+        <p:spPr>
+          <a:xfrm>
+            <a:off x="8778240" y="2862072"/>
+            <a:ext cx="2743200" cy="274320"/>
+          </a:xfrm>
+          <a:prstGeom prst="rect">
+            <a:avLst/>
+          </a:prstGeom>
+          <a:noFill/>
+        </p:spPr>
+        <p:txBody>
+          <a:bodyPr wrap="square" anchor="t" lIns="18288" rIns="18288" tIns="18288" bIns="18288">
+            <a:spAutoFit/>
+          </a:bodyPr>
+          <a:lstStyle/>
+          <a:p>
+            <a:pPr algn="l">
+              <a:spcAft>
+                <a:spcPts val="400"/>
+              </a:spcAft>
+            </a:pPr>
+            <a:r>
+              <a:rPr sz="1200" b="0">
+                <a:solidFill>
+                  <a:srgbClr val="17202A"/>
+                </a:solidFill>
+                <a:latin typeface="Segoe UI Semibold"/>
+              </a:rPr>
+              <a:t>from 5%</a:t>
+            </a:r>
+          </a:p>
+        </p:txBody>
+      </p:sp>
+      <p:sp>
+        <p:nvSpPr>
+          <p:cNvPr id="14" name="TextBox 13"/>
+          <p:cNvSpPr txBox="1"/>
+          <p:nvPr/>
+        </p:nvSpPr>
+        <p:spPr>
+          <a:xfrm>
+            <a:off x="7406640" y="3182112"/>
+            <a:ext cx="4114800" cy="365760"/>
+          </a:xfrm>
+          <a:prstGeom prst="rect">
+            <a:avLst/>
+          </a:prstGeom>
+          <a:noFill/>
+        </p:spPr>
+        <p:txBody>
+          <a:bodyPr wrap="square" anchor="t" lIns="18288" rIns="18288" tIns="18288" bIns="18288">
+            <a:spAutoFit/>
+          </a:bodyPr>
+          <a:lstStyle/>
+          <a:p>
+            <a:pPr algn="l">
+              <a:spcAft>
+                <a:spcPts val="400"/>
+              </a:spcAft>
+            </a:pPr>
+            <a:r>
+              <a:rPr sz="1100" b="0">
+                <a:solidFill>
+                  <a:srgbClr val="4B5765"/>
+                </a:solidFill>
+                <a:latin typeface="Segoe UI"/>
+              </a:rPr>
+              <a:t>publish, and alert in log, report, manifest and dashboard</a:t>
+            </a:r>
+          </a:p>
+        </p:txBody>
+      </p:sp>
+      <p:sp>
+        <p:nvSpPr>
+          <p:cNvPr id="15" name="Rounded Rectangle 14"/>
+          <p:cNvSpPr/>
+          <p:nvPr/>
+        </p:nvSpPr>
+        <p:spPr>
+          <a:xfrm>
+            <a:off x="7223760" y="3666744"/>
+            <a:ext cx="4416552" cy="786384"/>
+          </a:xfrm>
+          <a:prstGeom prst="roundRect">
+            <a:avLst>
+              <a:gd name="adj" fmla="val 6000"/>
+            </a:avLst>
+          </a:prstGeom>
+          <a:solidFill>
+            <a:srgbClr val="F8E2DC"/>
+          </a:solidFill>
+          <a:ln>
+            <a:noFill/>
+          </a:ln>
+        </p:spPr>
+        <p:txBody>
+          <a:bodyPr rtlCol="0" anchor="ctr"/>
+          <a:lstStyle/>
+          <a:p/>
+        </p:txBody>
+      </p:sp>
+      <p:sp>
+        <p:nvSpPr>
+          <p:cNvPr id="16" name="TextBox 15"/>
+          <p:cNvSpPr txBox="1"/>
+          <p:nvPr/>
+        </p:nvSpPr>
+        <p:spPr>
+          <a:xfrm>
+            <a:off x="7406640" y="3758183"/>
+            <a:ext cx="1371600" cy="274320"/>
+          </a:xfrm>
+          <a:prstGeom prst="rect">
+            <a:avLst/>
+          </a:prstGeom>
+          <a:noFill/>
+        </p:spPr>
+        <p:txBody>
+          <a:bodyPr wrap="square" anchor="t" lIns="18288" rIns="18288" tIns="18288" bIns="18288">
+            <a:spAutoFit/>
+          </a:bodyPr>
+          <a:lstStyle/>
+          <a:p>
+            <a:pPr algn="l">
+              <a:spcAft>
+                <a:spcPts val="400"/>
+              </a:spcAft>
+            </a:pPr>
+            <a:r>
+              <a:rPr sz="1200" b="0">
+                <a:solidFill>
+                  <a:srgbClr val="B0412D"/>
+                </a:solidFill>
+                <a:latin typeface="Segoe UI Semibold"/>
+              </a:rPr>
+              <a:t>CRITICAL</a:t>
+            </a:r>
+          </a:p>
+        </p:txBody>
+      </p:sp>
+      <p:sp>
+        <p:nvSpPr>
+          <p:cNvPr id="17" name="TextBox 16"/>
+          <p:cNvSpPr txBox="1"/>
+          <p:nvPr/>
+        </p:nvSpPr>
+        <p:spPr>
+          <a:xfrm>
+            <a:off x="8778240" y="3758183"/>
+            <a:ext cx="2743200" cy="274320"/>
+          </a:xfrm>
+          <a:prstGeom prst="rect">
+            <a:avLst/>
+          </a:prstGeom>
+          <a:noFill/>
+        </p:spPr>
+        <p:txBody>
+          <a:bodyPr wrap="square" anchor="t" lIns="18288" rIns="18288" tIns="18288" bIns="18288">
+            <a:spAutoFit/>
+          </a:bodyPr>
+          <a:lstStyle/>
+          <a:p>
+            <a:pPr algn="l">
+              <a:spcAft>
+                <a:spcPts val="400"/>
+              </a:spcAft>
+            </a:pPr>
+            <a:r>
+              <a:rPr sz="1200" b="0">
+                <a:solidFill>
+                  <a:srgbClr val="17202A"/>
+                </a:solidFill>
+                <a:latin typeface="Segoe UI Semibold"/>
+              </a:rPr>
+              <a:t>from 50%</a:t>
+            </a:r>
+          </a:p>
+        </p:txBody>
+      </p:sp>
+      <p:sp>
+        <p:nvSpPr>
+          <p:cNvPr id="18" name="TextBox 17"/>
+          <p:cNvSpPr txBox="1"/>
+          <p:nvPr/>
+        </p:nvSpPr>
+        <p:spPr>
+          <a:xfrm>
+            <a:off x="7406640" y="4078224"/>
+            <a:ext cx="4114800" cy="365760"/>
+          </a:xfrm>
+          <a:prstGeom prst="rect">
+            <a:avLst/>
+          </a:prstGeom>
+          <a:noFill/>
+        </p:spPr>
+        <p:txBody>
+          <a:bodyPr wrap="square" anchor="t" lIns="18288" rIns="18288" tIns="18288" bIns="18288">
+            <a:spAutoFit/>
+          </a:bodyPr>
+          <a:lstStyle/>
+          <a:p>
+            <a:pPr algn="l">
+              <a:spcAft>
+                <a:spcPts val="400"/>
+              </a:spcAft>
+            </a:pPr>
+            <a:r>
+              <a:rPr sz="1100" b="0">
+                <a:solidFill>
+                  <a:srgbClr val="4B5765"/>
+                </a:solidFill>
+                <a:latin typeface="Segoe UI"/>
+              </a:rPr>
+              <a:t>keep previous Silver and Gold, stop the run, alert</a:t>
+            </a:r>
+          </a:p>
+        </p:txBody>
+      </p:sp>
+      <p:sp>
+        <p:nvSpPr>
+          <p:cNvPr id="19" name="Rounded Rectangle 18"/>
+          <p:cNvSpPr/>
+          <p:nvPr/>
+        </p:nvSpPr>
+        <p:spPr>
+          <a:xfrm>
+            <a:off x="7223760" y="4617720"/>
+            <a:ext cx="4416552" cy="1554480"/>
+          </a:xfrm>
+          <a:prstGeom prst="roundRect">
+            <a:avLst>
+              <a:gd name="adj" fmla="val 6000"/>
+            </a:avLst>
+          </a:prstGeom>
+          <a:solidFill>
+            <a:srgbClr val="F4F6F8"/>
+          </a:solidFill>
+          <a:ln>
+            <a:noFill/>
+          </a:ln>
+        </p:spPr>
+        <p:txBody>
+          <a:bodyPr rtlCol="0" anchor="ctr"/>
+          <a:lstStyle/>
+          <a:p/>
+        </p:txBody>
+      </p:sp>
+      <p:sp>
+        <p:nvSpPr>
+          <p:cNvPr id="20" name="TextBox 19"/>
+          <p:cNvSpPr txBox="1"/>
+          <p:nvPr/>
+        </p:nvSpPr>
+        <p:spPr>
+          <a:xfrm>
+            <a:off x="7406640" y="4709160"/>
+            <a:ext cx="4114800" cy="1417320"/>
+          </a:xfrm>
+          <a:prstGeom prst="rect">
+            <a:avLst/>
+          </a:prstGeom>
+          <a:noFill/>
+        </p:spPr>
+        <p:txBody>
+          <a:bodyPr wrap="square" anchor="t" lIns="18288" rIns="18288" tIns="18288" bIns="18288">
+            <a:spAutoFit/>
+          </a:bodyPr>
+          <a:lstStyle/>
+          <a:p>
+            <a:pPr algn="l">
+              <a:spcAft>
+                <a:spcPts val="500"/>
+              </a:spcAft>
+            </a:pPr>
+            <a:r>
+              <a:rPr sz="1100" b="0">
+                <a:solidFill>
+                  <a:srgbClr val="17202A"/>
+                </a:solidFill>
+                <a:latin typeface="Segoe UI Semibold"/>
+              </a:rPr>
+              <a:t>Example: 500 of 1,000 rows quarantined = 50% → critical</a:t>
+            </a:r>
+          </a:p>
+          <a:p>
+            <a:pPr algn="l">
+              <a:spcAft>
+                <a:spcPts val="500"/>
+              </a:spcAft>
+            </a:pPr>
+            <a:r>
+              <a:rPr sz="1100" b="0">
+                <a:solidFill>
+                  <a:srgbClr val="4B5765"/>
+                </a:solidFill>
+                <a:latin typeface="Segoe UI"/>
+              </a:rPr>
+              <a:t>Proven by an end-to-end test: with the limit lowered to 0.5%, the real batch (about 1%) trips it; the run fails and the previous Silver data stays.</a:t>
+            </a:r>
+          </a:p>
+        </p:txBody>
+      </p:sp>
+      <p:cxnSp>
+        <p:nvCxnSpPr>
+          <p:cNvPr id="21" name="Connector 20"/>
+          <p:cNvCxnSpPr/>
+          <p:nvPr/>
+        </p:nvCxnSpPr>
+        <p:spPr>
+          <a:xfrm>
+            <a:off x="548640" y="6400800"/>
+            <a:ext cx="11094415" cy="0"/>
+          </a:xfrm>
+          <a:prstGeom prst="line">
+            <a:avLst/>
+          </a:prstGeom>
+          <a:ln w="9525">
+            <a:solidFill>
+              <a:srgbClr val="D4DAE1"/>
+            </a:solidFill>
+          </a:ln>
+        </p:spPr>
+      </p:cxnSp>
+      <p:sp>
+        <p:nvSpPr>
+          <p:cNvPr id="22" name="TextBox 21"/>
+          <p:cNvSpPr txBox="1"/>
+          <p:nvPr/>
+        </p:nvSpPr>
+        <p:spPr>
+          <a:xfrm>
+            <a:off x="548640" y="6455664"/>
+            <a:ext cx="7315200" cy="274320"/>
+          </a:xfrm>
+          <a:prstGeom prst="rect">
+            <a:avLst/>
+          </a:prstGeom>
+          <a:noFill/>
+        </p:spPr>
+        <p:txBody>
+          <a:bodyPr wrap="square" anchor="t" lIns="18288" rIns="18288" tIns="18288" bIns="18288">
+            <a:spAutoFit/>
+          </a:bodyPr>
+          <a:lstStyle/>
+          <a:p>
+            <a:pPr algn="l">
+              <a:spcAft>
+                <a:spcPts val="400"/>
+              </a:spcAft>
+            </a:pPr>
+            <a:r>
+              <a:rPr sz="900" b="0">
+                <a:solidFill>
+                  <a:srgbClr val="8A94A0"/>
+                </a:solidFill>
+                <a:latin typeface="Segoe UI"/>
+              </a:rPr>
+              <a:t>ACME Talent Lake  ·  Data Engineer track  ·  Coding Workshop 2026</a:t>
+            </a:r>
+          </a:p>
+        </p:txBody>
+      </p:sp>
+      <p:sp>
+        <p:nvSpPr>
+          <p:cNvPr id="23" name="TextBox 22"/>
+          <p:cNvSpPr txBox="1"/>
+          <p:nvPr/>
+        </p:nvSpPr>
+        <p:spPr>
+          <a:xfrm>
+            <a:off x="10698480" y="6455664"/>
+            <a:ext cx="941832" cy="274320"/>
+          </a:xfrm>
+          <a:prstGeom prst="rect">
+            <a:avLst/>
+          </a:prstGeom>
+          <a:noFill/>
+        </p:spPr>
+        <p:txBody>
+          <a:bodyPr wrap="square" anchor="t" lIns="18288" rIns="18288" tIns="18288" bIns="18288">
+            <a:spAutoFit/>
+          </a:bodyPr>
+          <a:lstStyle/>
+          <a:p>
+            <a:pPr algn="r">
+              <a:spcAft>
+                <a:spcPts val="400"/>
+              </a:spcAft>
+            </a:pPr>
+            <a:r>
+              <a:rPr sz="900" b="0">
+                <a:solidFill>
+                  <a:srgbClr val="8A94A0"/>
+                </a:solidFill>
+                <a:latin typeface="Segoe UI"/>
+              </a:rPr>
+              <a:t>5 / 10</a:t>
+            </a:r>
+          </a:p>
+        </p:txBody>
+      </p:sp>
+    </p:spTree>
+  </p:cSld>
+  <p:clrMapOvr>
+    <a:masterClrMapping/>
+  </p:clrMapOvr>
+</p:sld>
+</file>
+
+<file path=ppt/slides/slide6.xml><?xml version="1.0" encoding="utf-8"?>
 <p:sld xmlns:a="http://schemas.openxmlformats.org/drawingml/2006/main" xmlns:p="http://schemas.openxmlformats.org/presentationml/2006/main" xmlns:r="http://schemas.openxmlformats.org/officeDocument/2006/relationships">
   <p:cSld>
     <p:bg>
@@ -12720,1238 +16513,7 @@
                 </a:solidFill>
                 <a:latin typeface="Segoe UI"/>
               </a:rPr>
-              <a:t>5 / 9</a:t>
-            </a:r>
-          </a:p>
-        </p:txBody>
-      </p:sp>
-    </p:spTree>
-  </p:cSld>
-  <p:clrMapOvr>
-    <a:masterClrMapping/>
-  </p:clrMapOvr>
-</p:sld>
-</file>
-
-<file path=ppt/slides/slide6.xml><?xml version="1.0" encoding="utf-8"?>
-<p:sld xmlns:a="http://schemas.openxmlformats.org/drawingml/2006/main" xmlns:p="http://schemas.openxmlformats.org/presentationml/2006/main" xmlns:r="http://schemas.openxmlformats.org/officeDocument/2006/relationships">
-  <p:cSld>
-    <p:bg>
-      <p:bgPr>
-        <a:solidFill>
-          <a:srgbClr val="FFFFFF"/>
-        </a:solidFill>
-        <a:effectLst/>
-      </p:bgPr>
-    </p:bg>
-    <p:spTree>
-      <p:nvGrpSpPr>
-        <p:cNvPr id="1" name=""/>
-        <p:cNvGrpSpPr/>
-        <p:nvPr/>
-      </p:nvGrpSpPr>
-      <p:grpSpPr/>
-      <p:sp>
-        <p:nvSpPr>
-          <p:cNvPr id="2" name="TextBox 1"/>
-          <p:cNvSpPr txBox="1"/>
-          <p:nvPr/>
-        </p:nvSpPr>
-        <p:spPr>
-          <a:xfrm>
-            <a:off x="548640" y="292608"/>
-            <a:ext cx="8229600" cy="274320"/>
-          </a:xfrm>
-          <a:prstGeom prst="rect">
-            <a:avLst/>
-          </a:prstGeom>
-          <a:noFill/>
-        </p:spPr>
-        <p:txBody>
-          <a:bodyPr wrap="square" anchor="t" lIns="18288" rIns="18288" tIns="18288" bIns="18288">
-            <a:spAutoFit/>
-          </a:bodyPr>
-          <a:lstStyle/>
-          <a:p>
-            <a:pPr algn="l">
-              <a:spcAft>
-                <a:spcPts val="400"/>
-              </a:spcAft>
-            </a:pPr>
-            <a:r>
-              <a:rPr sz="1100" b="0">
-                <a:solidFill>
-                  <a:srgbClr val="1D4E89"/>
-                </a:solidFill>
-                <a:latin typeface="Segoe UI Semibold"/>
-              </a:rPr>
-              <a:t>FINDINGS · Q1–Q4</a:t>
-            </a:r>
-          </a:p>
-        </p:txBody>
-      </p:sp>
-      <p:sp>
-        <p:nvSpPr>
-          <p:cNvPr id="3" name="TextBox 2"/>
-          <p:cNvSpPr txBox="1"/>
-          <p:nvPr/>
-        </p:nvSpPr>
-        <p:spPr>
-          <a:xfrm>
-            <a:off x="548640" y="566928"/>
-            <a:ext cx="11064240" cy="731520"/>
-          </a:xfrm>
-          <a:prstGeom prst="rect">
-            <a:avLst/>
-          </a:prstGeom>
-          <a:noFill/>
-        </p:spPr>
-        <p:txBody>
-          <a:bodyPr wrap="square" anchor="t" lIns="18288" rIns="18288" tIns="18288" bIns="18288">
-            <a:spAutoFit/>
-          </a:bodyPr>
-          <a:lstStyle/>
-          <a:p>
-            <a:pPr algn="l">
-              <a:spcAft>
-                <a:spcPts val="400"/>
-              </a:spcAft>
-            </a:pPr>
-            <a:r>
-              <a:rPr sz="2600" b="0">
-                <a:solidFill>
-                  <a:srgbClr val="17202A"/>
-                </a:solidFill>
-                <a:latin typeface="Segoe UI Semibold"/>
-              </a:rPr>
-              <a:t>230 declining · 441 with gaps · 124 ready · 232 not learning</a:t>
-            </a:r>
-          </a:p>
-        </p:txBody>
-      </p:sp>
-      <p:sp>
-        <p:nvSpPr>
-          <p:cNvPr id="4" name="TextBox 3"/>
-          <p:cNvSpPr txBox="1"/>
-          <p:nvPr/>
-        </p:nvSpPr>
-        <p:spPr>
-          <a:xfrm>
-            <a:off x="548640" y="1417320"/>
-            <a:ext cx="5422392" cy="320040"/>
-          </a:xfrm>
-          <a:prstGeom prst="rect">
-            <a:avLst/>
-          </a:prstGeom>
-          <a:noFill/>
-        </p:spPr>
-        <p:txBody>
-          <a:bodyPr wrap="square" anchor="t" lIns="18288" rIns="18288" tIns="18288" bIns="18288">
-            <a:spAutoFit/>
-          </a:bodyPr>
-          <a:lstStyle/>
-          <a:p>
-            <a:pPr algn="l">
-              <a:spcAft>
-                <a:spcPts val="400"/>
-              </a:spcAft>
-            </a:pPr>
-            <a:r>
-              <a:rPr sz="1300" b="0">
-                <a:solidFill>
-                  <a:srgbClr val="17202A"/>
-                </a:solidFill>
-                <a:latin typeface="Segoe UI Semibold"/>
-              </a:rPr>
-              <a:t>Q1 · Change since previous review</a:t>
-            </a:r>
-          </a:p>
-        </p:txBody>
-      </p:sp>
-      <p:graphicFrame>
-        <p:nvGraphicFramePr>
-          <p:cNvPr id="5" name="Chart 4"/>
-          <p:cNvGraphicFramePr>
-            <a:graphicFrameLocks noGrp="1"/>
-          </p:cNvGraphicFramePr>
-          <p:nvPr/>
-        </p:nvGraphicFramePr>
-        <p:xfrm>
-          <a:off x="457200" y="1737360"/>
-          <a:ext cx="3566160" cy="1874519"/>
-        </p:xfrm>
-        <a:graphic>
-          <a:graphicData uri="http://schemas.openxmlformats.org/drawingml/2006/chart">
-            <c:chart xmlns:c="http://schemas.openxmlformats.org/drawingml/2006/chart" r:id="rId3"/>
-          </a:graphicData>
-        </a:graphic>
-      </p:graphicFrame>
-      <p:sp>
-        <p:nvSpPr>
-          <p:cNvPr id="6" name="TextBox 5"/>
-          <p:cNvSpPr txBox="1"/>
-          <p:nvPr/>
-        </p:nvSpPr>
-        <p:spPr>
-          <a:xfrm>
-            <a:off x="4206240" y="1920240"/>
-            <a:ext cx="1737360" cy="548640"/>
-          </a:xfrm>
-          <a:prstGeom prst="rect">
-            <a:avLst/>
-          </a:prstGeom>
-          <a:noFill/>
-        </p:spPr>
-        <p:txBody>
-          <a:bodyPr wrap="square" anchor="t" lIns="18288" rIns="18288" tIns="18288" bIns="18288">
-            <a:spAutoFit/>
-          </a:bodyPr>
-          <a:lstStyle/>
-          <a:p>
-            <a:pPr algn="l">
-              <a:spcAft>
-                <a:spcPts val="400"/>
-              </a:spcAft>
-            </a:pPr>
-            <a:r>
-              <a:rPr sz="2600" b="0">
-                <a:solidFill>
-                  <a:srgbClr val="17202A"/>
-                </a:solidFill>
-                <a:latin typeface="Segoe UI Semibold"/>
-              </a:rPr>
-              <a:t>3.41</a:t>
-            </a:r>
-          </a:p>
-        </p:txBody>
-      </p:sp>
-      <p:sp>
-        <p:nvSpPr>
-          <p:cNvPr id="7" name="TextBox 6"/>
-          <p:cNvSpPr txBox="1"/>
-          <p:nvPr/>
-        </p:nvSpPr>
-        <p:spPr>
-          <a:xfrm>
-            <a:off x="4206240" y="2487168"/>
-            <a:ext cx="1737360" cy="457200"/>
-          </a:xfrm>
-          <a:prstGeom prst="rect">
-            <a:avLst/>
-          </a:prstGeom>
-          <a:noFill/>
-        </p:spPr>
-        <p:txBody>
-          <a:bodyPr wrap="square" anchor="t" lIns="18288" rIns="18288" tIns="18288" bIns="18288">
-            <a:spAutoFit/>
-          </a:bodyPr>
-          <a:lstStyle/>
-          <a:p>
-            <a:pPr algn="l">
-              <a:spcAft>
-                <a:spcPts val="400"/>
-              </a:spcAft>
-            </a:pPr>
-            <a:r>
-              <a:rPr sz="1100" b="0">
-                <a:solidFill>
-                  <a:srgbClr val="4B5765"/>
-                </a:solidFill>
-                <a:latin typeface="Segoe UI"/>
-              </a:rPr>
-              <a:t>average latest rating</a:t>
-            </a:r>
-          </a:p>
-        </p:txBody>
-      </p:sp>
-      <p:sp>
-        <p:nvSpPr>
-          <p:cNvPr id="8" name="TextBox 7"/>
-          <p:cNvSpPr txBox="1"/>
-          <p:nvPr/>
-        </p:nvSpPr>
-        <p:spPr>
-          <a:xfrm>
-            <a:off x="4206240" y="2834640"/>
-            <a:ext cx="1737360" cy="548640"/>
-          </a:xfrm>
-          <a:prstGeom prst="rect">
-            <a:avLst/>
-          </a:prstGeom>
-          <a:noFill/>
-        </p:spPr>
-        <p:txBody>
-          <a:bodyPr wrap="square" anchor="t" lIns="18288" rIns="18288" tIns="18288" bIns="18288">
-            <a:spAutoFit/>
-          </a:bodyPr>
-          <a:lstStyle/>
-          <a:p>
-            <a:pPr algn="l">
-              <a:spcAft>
-                <a:spcPts val="400"/>
-              </a:spcAft>
-            </a:pPr>
-            <a:r>
-              <a:rPr sz="2600" b="0">
-                <a:solidFill>
-                  <a:srgbClr val="B0412D"/>
-                </a:solidFill>
-                <a:latin typeface="Segoe UI Semibold"/>
-              </a:rPr>
-              <a:t>84</a:t>
-            </a:r>
-          </a:p>
-        </p:txBody>
-      </p:sp>
-      <p:sp>
-        <p:nvSpPr>
-          <p:cNvPr id="9" name="TextBox 8"/>
-          <p:cNvSpPr txBox="1"/>
-          <p:nvPr/>
-        </p:nvSpPr>
-        <p:spPr>
-          <a:xfrm>
-            <a:off x="4206240" y="3401568"/>
-            <a:ext cx="1737360" cy="457200"/>
-          </a:xfrm>
-          <a:prstGeom prst="rect">
-            <a:avLst/>
-          </a:prstGeom>
-          <a:noFill/>
-        </p:spPr>
-        <p:txBody>
-          <a:bodyPr wrap="square" anchor="t" lIns="18288" rIns="18288" tIns="18288" bIns="18288">
-            <a:spAutoFit/>
-          </a:bodyPr>
-          <a:lstStyle/>
-          <a:p>
-            <a:pPr algn="l">
-              <a:spcAft>
-                <a:spcPts val="400"/>
-              </a:spcAft>
-            </a:pPr>
-            <a:r>
-              <a:rPr sz="1100" b="0">
-                <a:solidFill>
-                  <a:srgbClr val="4B5765"/>
-                </a:solidFill>
-                <a:latin typeface="Segoe UI"/>
-              </a:rPr>
-              <a:t>dropped 2+ points</a:t>
-            </a:r>
-          </a:p>
-        </p:txBody>
-      </p:sp>
-      <p:sp>
-        <p:nvSpPr>
-          <p:cNvPr id="10" name="TextBox 9"/>
-          <p:cNvSpPr txBox="1"/>
-          <p:nvPr/>
-        </p:nvSpPr>
-        <p:spPr>
-          <a:xfrm>
-            <a:off x="6217920" y="1417320"/>
-            <a:ext cx="5422392" cy="320040"/>
-          </a:xfrm>
-          <a:prstGeom prst="rect">
-            <a:avLst/>
-          </a:prstGeom>
-          <a:noFill/>
-        </p:spPr>
-        <p:txBody>
-          <a:bodyPr wrap="square" anchor="t" lIns="18288" rIns="18288" tIns="18288" bIns="18288">
-            <a:spAutoFit/>
-          </a:bodyPr>
-          <a:lstStyle/>
-          <a:p>
-            <a:pPr algn="l">
-              <a:spcAft>
-                <a:spcPts val="400"/>
-              </a:spcAft>
-            </a:pPr>
-            <a:r>
-              <a:rPr sz="1300" b="0">
-                <a:solidFill>
-                  <a:srgbClr val="17202A"/>
-                </a:solidFill>
-                <a:latin typeface="Segoe UI Semibold"/>
-              </a:rPr>
-              <a:t>Q2 · Most critical skill gaps</a:t>
-            </a:r>
-          </a:p>
-        </p:txBody>
-      </p:sp>
-      <p:graphicFrame>
-        <p:nvGraphicFramePr>
-          <p:cNvPr id="11" name="Chart 10"/>
-          <p:cNvGraphicFramePr>
-            <a:graphicFrameLocks noGrp="1"/>
-          </p:cNvGraphicFramePr>
-          <p:nvPr/>
-        </p:nvGraphicFramePr>
-        <p:xfrm>
-          <a:off x="6126480" y="1737360"/>
-          <a:ext cx="3566160" cy="1874519"/>
-        </p:xfrm>
-        <a:graphic>
-          <a:graphicData uri="http://schemas.openxmlformats.org/drawingml/2006/chart">
-            <c:chart xmlns:c="http://schemas.openxmlformats.org/drawingml/2006/chart" r:id="rId4"/>
-          </a:graphicData>
-        </a:graphic>
-      </p:graphicFrame>
-      <p:sp>
-        <p:nvSpPr>
-          <p:cNvPr id="12" name="TextBox 11"/>
-          <p:cNvSpPr txBox="1"/>
-          <p:nvPr/>
-        </p:nvSpPr>
-        <p:spPr>
-          <a:xfrm>
-            <a:off x="9875520" y="1920240"/>
-            <a:ext cx="1737360" cy="548640"/>
-          </a:xfrm>
-          <a:prstGeom prst="rect">
-            <a:avLst/>
-          </a:prstGeom>
-          <a:noFill/>
-        </p:spPr>
-        <p:txBody>
-          <a:bodyPr wrap="square" anchor="t" lIns="18288" rIns="18288" tIns="18288" bIns="18288">
-            <a:spAutoFit/>
-          </a:bodyPr>
-          <a:lstStyle/>
-          <a:p>
-            <a:pPr algn="l">
-              <a:spcAft>
-                <a:spcPts val="400"/>
-              </a:spcAft>
-            </a:pPr>
-            <a:r>
-              <a:rPr sz="2600" b="0">
-                <a:solidFill>
-                  <a:srgbClr val="17202A"/>
-                </a:solidFill>
-                <a:latin typeface="Segoe UI Semibold"/>
-              </a:rPr>
-              <a:t>465</a:t>
-            </a:r>
-          </a:p>
-        </p:txBody>
-      </p:sp>
-      <p:sp>
-        <p:nvSpPr>
-          <p:cNvPr id="13" name="TextBox 12"/>
-          <p:cNvSpPr txBox="1"/>
-          <p:nvPr/>
-        </p:nvSpPr>
-        <p:spPr>
-          <a:xfrm>
-            <a:off x="9875520" y="2487168"/>
-            <a:ext cx="1737360" cy="457200"/>
-          </a:xfrm>
-          <a:prstGeom prst="rect">
-            <a:avLst/>
-          </a:prstGeom>
-          <a:noFill/>
-        </p:spPr>
-        <p:txBody>
-          <a:bodyPr wrap="square" anchor="t" lIns="18288" rIns="18288" tIns="18288" bIns="18288">
-            <a:spAutoFit/>
-          </a:bodyPr>
-          <a:lstStyle/>
-          <a:p>
-            <a:pPr algn="l">
-              <a:spcAft>
-                <a:spcPts val="400"/>
-              </a:spcAft>
-            </a:pPr>
-            <a:r>
-              <a:rPr sz="1100" b="0">
-                <a:solidFill>
-                  <a:srgbClr val="4B5765"/>
-                </a:solidFill>
-                <a:latin typeface="Segoe UI"/>
-              </a:rPr>
-              <a:t>gaps across 441 people</a:t>
-            </a:r>
-          </a:p>
-        </p:txBody>
-      </p:sp>
-      <p:sp>
-        <p:nvSpPr>
-          <p:cNvPr id="14" name="TextBox 13"/>
-          <p:cNvSpPr txBox="1"/>
-          <p:nvPr/>
-        </p:nvSpPr>
-        <p:spPr>
-          <a:xfrm>
-            <a:off x="9875520" y="2834640"/>
-            <a:ext cx="1737360" cy="548640"/>
-          </a:xfrm>
-          <a:prstGeom prst="rect">
-            <a:avLst/>
-          </a:prstGeom>
-          <a:noFill/>
-        </p:spPr>
-        <p:txBody>
-          <a:bodyPr wrap="square" anchor="t" lIns="18288" rIns="18288" tIns="18288" bIns="18288">
-            <a:spAutoFit/>
-          </a:bodyPr>
-          <a:lstStyle/>
-          <a:p>
-            <a:pPr algn="l">
-              <a:spcAft>
-                <a:spcPts val="400"/>
-              </a:spcAft>
-            </a:pPr>
-            <a:r>
-              <a:rPr sz="2600" b="0">
-                <a:solidFill>
-                  <a:srgbClr val="B0412D"/>
-                </a:solidFill>
-                <a:latin typeface="Segoe UI Semibold"/>
-              </a:rPr>
-              <a:t>28%</a:t>
-            </a:r>
-          </a:p>
-        </p:txBody>
-      </p:sp>
-      <p:sp>
-        <p:nvSpPr>
-          <p:cNvPr id="15" name="TextBox 14"/>
-          <p:cNvSpPr txBox="1"/>
-          <p:nvPr/>
-        </p:nvSpPr>
-        <p:spPr>
-          <a:xfrm>
-            <a:off x="9875520" y="3401568"/>
-            <a:ext cx="1737360" cy="457200"/>
-          </a:xfrm>
-          <a:prstGeom prst="rect">
-            <a:avLst/>
-          </a:prstGeom>
-          <a:noFill/>
-        </p:spPr>
-        <p:txBody>
-          <a:bodyPr wrap="square" anchor="t" lIns="18288" rIns="18288" tIns="18288" bIns="18288">
-            <a:spAutoFit/>
-          </a:bodyPr>
-          <a:lstStyle/>
-          <a:p>
-            <a:pPr algn="l">
-              <a:spcAft>
-                <a:spcPts val="400"/>
-              </a:spcAft>
-            </a:pPr>
-            <a:r>
-              <a:rPr sz="1100" b="0">
-                <a:solidFill>
-                  <a:srgbClr val="4B5765"/>
-                </a:solidFill>
-                <a:latin typeface="Segoe UI"/>
-              </a:rPr>
-              <a:t>of Human Resources affected</a:t>
-            </a:r>
-          </a:p>
-        </p:txBody>
-      </p:sp>
-      <p:sp>
-        <p:nvSpPr>
-          <p:cNvPr id="16" name="TextBox 15"/>
-          <p:cNvSpPr txBox="1"/>
-          <p:nvPr/>
-        </p:nvSpPr>
-        <p:spPr>
-          <a:xfrm>
-            <a:off x="548640" y="3931920"/>
-            <a:ext cx="5422392" cy="320040"/>
-          </a:xfrm>
-          <a:prstGeom prst="rect">
-            <a:avLst/>
-          </a:prstGeom>
-          <a:noFill/>
-        </p:spPr>
-        <p:txBody>
-          <a:bodyPr wrap="square" anchor="t" lIns="18288" rIns="18288" tIns="18288" bIns="18288">
-            <a:spAutoFit/>
-          </a:bodyPr>
-          <a:lstStyle/>
-          <a:p>
-            <a:pPr algn="l">
-              <a:spcAft>
-                <a:spcPts val="400"/>
-              </a:spcAft>
-            </a:pPr>
-            <a:r>
-              <a:rPr sz="1300" b="0">
-                <a:solidFill>
-                  <a:srgbClr val="17202A"/>
-                </a:solidFill>
-                <a:latin typeface="Segoe UI Semibold"/>
-              </a:rPr>
-              <a:t>Q3 · Promotion pipeline</a:t>
-            </a:r>
-          </a:p>
-        </p:txBody>
-      </p:sp>
-      <p:graphicFrame>
-        <p:nvGraphicFramePr>
-          <p:cNvPr id="17" name="Chart 16"/>
-          <p:cNvGraphicFramePr>
-            <a:graphicFrameLocks noGrp="1"/>
-          </p:cNvGraphicFramePr>
-          <p:nvPr/>
-        </p:nvGraphicFramePr>
-        <p:xfrm>
-          <a:off x="457200" y="4251959"/>
-          <a:ext cx="3566160" cy="1874519"/>
-        </p:xfrm>
-        <a:graphic>
-          <a:graphicData uri="http://schemas.openxmlformats.org/drawingml/2006/chart">
-            <c:chart xmlns:c="http://schemas.openxmlformats.org/drawingml/2006/chart" r:id="rId5"/>
-          </a:graphicData>
-        </a:graphic>
-      </p:graphicFrame>
-      <p:sp>
-        <p:nvSpPr>
-          <p:cNvPr id="18" name="TextBox 17"/>
-          <p:cNvSpPr txBox="1"/>
-          <p:nvPr/>
-        </p:nvSpPr>
-        <p:spPr>
-          <a:xfrm>
-            <a:off x="4206240" y="4434840"/>
-            <a:ext cx="1737360" cy="548640"/>
-          </a:xfrm>
-          <a:prstGeom prst="rect">
-            <a:avLst/>
-          </a:prstGeom>
-          <a:noFill/>
-        </p:spPr>
-        <p:txBody>
-          <a:bodyPr wrap="square" anchor="t" lIns="18288" rIns="18288" tIns="18288" bIns="18288">
-            <a:spAutoFit/>
-          </a:bodyPr>
-          <a:lstStyle/>
-          <a:p>
-            <a:pPr algn="l">
-              <a:spcAft>
-                <a:spcPts val="400"/>
-              </a:spcAft>
-            </a:pPr>
-            <a:r>
-              <a:rPr sz="2600" b="0">
-                <a:solidFill>
-                  <a:srgbClr val="B0412D"/>
-                </a:solidFill>
-                <a:latin typeface="Segoe UI Semibold"/>
-              </a:rPr>
-              <a:t>28</a:t>
-            </a:r>
-          </a:p>
-        </p:txBody>
-      </p:sp>
-      <p:sp>
-        <p:nvSpPr>
-          <p:cNvPr id="19" name="TextBox 18"/>
-          <p:cNvSpPr txBox="1"/>
-          <p:nvPr/>
-        </p:nvSpPr>
-        <p:spPr>
-          <a:xfrm>
-            <a:off x="4206240" y="5001768"/>
-            <a:ext cx="1737360" cy="457200"/>
-          </a:xfrm>
-          <a:prstGeom prst="rect">
-            <a:avLst/>
-          </a:prstGeom>
-          <a:noFill/>
-        </p:spPr>
-        <p:txBody>
-          <a:bodyPr wrap="square" anchor="t" lIns="18288" rIns="18288" tIns="18288" bIns="18288">
-            <a:spAutoFit/>
-          </a:bodyPr>
-          <a:lstStyle/>
-          <a:p>
-            <a:pPr algn="l">
-              <a:spcAft>
-                <a:spcPts val="400"/>
-              </a:spcAft>
-            </a:pPr>
-            <a:r>
-              <a:rPr sz="1100" b="0">
-                <a:solidFill>
-                  <a:srgbClr val="4B5765"/>
-                </a:solidFill>
-                <a:latin typeface="Segoe UI"/>
-              </a:rPr>
-              <a:t>high-potential people at high attrition risk</a:t>
-            </a:r>
-          </a:p>
-        </p:txBody>
-      </p:sp>
-      <p:sp>
-        <p:nvSpPr>
-          <p:cNvPr id="20" name="TextBox 19"/>
-          <p:cNvSpPr txBox="1"/>
-          <p:nvPr/>
-        </p:nvSpPr>
-        <p:spPr>
-          <a:xfrm>
-            <a:off x="6217920" y="3931920"/>
-            <a:ext cx="5422392" cy="320040"/>
-          </a:xfrm>
-          <a:prstGeom prst="rect">
-            <a:avLst/>
-          </a:prstGeom>
-          <a:noFill/>
-        </p:spPr>
-        <p:txBody>
-          <a:bodyPr wrap="square" anchor="t" lIns="18288" rIns="18288" tIns="18288" bIns="18288">
-            <a:spAutoFit/>
-          </a:bodyPr>
-          <a:lstStyle/>
-          <a:p>
-            <a:pPr algn="l">
-              <a:spcAft>
-                <a:spcPts val="400"/>
-              </a:spcAft>
-            </a:pPr>
-            <a:r>
-              <a:rPr sz="1300" b="0">
-                <a:solidFill>
-                  <a:srgbClr val="17202A"/>
-                </a:solidFill>
-                <a:latin typeface="Segoe UI Semibold"/>
-              </a:rPr>
-              <a:t>Q4 · Training and development</a:t>
-            </a:r>
-          </a:p>
-        </p:txBody>
-      </p:sp>
-      <p:sp>
-        <p:nvSpPr>
-          <p:cNvPr id="21" name="Rounded Rectangle 20"/>
-          <p:cNvSpPr/>
-          <p:nvPr/>
-        </p:nvSpPr>
-        <p:spPr>
-          <a:xfrm>
-            <a:off x="6217920" y="4343400"/>
-            <a:ext cx="2633472" cy="886968"/>
-          </a:xfrm>
-          <a:prstGeom prst="roundRect">
-            <a:avLst>
-              <a:gd name="adj" fmla="val 6000"/>
-            </a:avLst>
-          </a:prstGeom>
-          <a:solidFill>
-            <a:srgbClr val="F4F6F8"/>
-          </a:solidFill>
-          <a:ln>
-            <a:noFill/>
-          </a:ln>
-        </p:spPr>
-        <p:txBody>
-          <a:bodyPr rtlCol="0" anchor="ctr"/>
-          <a:lstStyle/>
-          <a:p/>
-        </p:txBody>
-      </p:sp>
-      <p:sp>
-        <p:nvSpPr>
-          <p:cNvPr id="22" name="TextBox 21"/>
-          <p:cNvSpPr txBox="1"/>
-          <p:nvPr/>
-        </p:nvSpPr>
-        <p:spPr>
-          <a:xfrm>
-            <a:off x="6382512" y="4398264"/>
-            <a:ext cx="2377440" cy="457200"/>
-          </a:xfrm>
-          <a:prstGeom prst="rect">
-            <a:avLst/>
-          </a:prstGeom>
-          <a:noFill/>
-        </p:spPr>
-        <p:txBody>
-          <a:bodyPr wrap="square" anchor="t" lIns="18288" rIns="18288" tIns="18288" bIns="18288">
-            <a:spAutoFit/>
-          </a:bodyPr>
-          <a:lstStyle/>
-          <a:p>
-            <a:pPr algn="l">
-              <a:spcAft>
-                <a:spcPts val="400"/>
-              </a:spcAft>
-            </a:pPr>
-            <a:r>
-              <a:rPr sz="2200" b="0">
-                <a:solidFill>
-                  <a:srgbClr val="17202A"/>
-                </a:solidFill>
-                <a:latin typeface="Segoe UI Semibold"/>
-              </a:rPr>
-              <a:t>1.75</a:t>
-            </a:r>
-          </a:p>
-        </p:txBody>
-      </p:sp>
-      <p:sp>
-        <p:nvSpPr>
-          <p:cNvPr id="23" name="TextBox 22"/>
-          <p:cNvSpPr txBox="1"/>
-          <p:nvPr/>
-        </p:nvSpPr>
-        <p:spPr>
-          <a:xfrm>
-            <a:off x="6382512" y="4855464"/>
-            <a:ext cx="2377440" cy="320040"/>
-          </a:xfrm>
-          <a:prstGeom prst="rect">
-            <a:avLst/>
-          </a:prstGeom>
-          <a:noFill/>
-        </p:spPr>
-        <p:txBody>
-          <a:bodyPr wrap="square" anchor="t" lIns="18288" rIns="18288" tIns="18288" bIns="18288">
-            <a:spAutoFit/>
-          </a:bodyPr>
-          <a:lstStyle/>
-          <a:p>
-            <a:pPr algn="l">
-              <a:spcAft>
-                <a:spcPts val="400"/>
-              </a:spcAft>
-            </a:pPr>
-            <a:r>
-              <a:rPr sz="1050" b="0">
-                <a:solidFill>
-                  <a:srgbClr val="4B5765"/>
-                </a:solidFill>
-                <a:latin typeface="Segoe UI"/>
-              </a:rPr>
-              <a:t>courses per employee</a:t>
-            </a:r>
-          </a:p>
-        </p:txBody>
-      </p:sp>
-      <p:sp>
-        <p:nvSpPr>
-          <p:cNvPr id="24" name="Rounded Rectangle 23"/>
-          <p:cNvSpPr/>
-          <p:nvPr/>
-        </p:nvSpPr>
-        <p:spPr>
-          <a:xfrm>
-            <a:off x="8942832" y="4343400"/>
-            <a:ext cx="2633472" cy="886968"/>
-          </a:xfrm>
-          <a:prstGeom prst="roundRect">
-            <a:avLst>
-              <a:gd name="adj" fmla="val 6000"/>
-            </a:avLst>
-          </a:prstGeom>
-          <a:solidFill>
-            <a:srgbClr val="F4F6F8"/>
-          </a:solidFill>
-          <a:ln>
-            <a:noFill/>
-          </a:ln>
-        </p:spPr>
-        <p:txBody>
-          <a:bodyPr rtlCol="0" anchor="ctr"/>
-          <a:lstStyle/>
-          <a:p/>
-        </p:txBody>
-      </p:sp>
-      <p:sp>
-        <p:nvSpPr>
-          <p:cNvPr id="25" name="TextBox 24"/>
-          <p:cNvSpPr txBox="1"/>
-          <p:nvPr/>
-        </p:nvSpPr>
-        <p:spPr>
-          <a:xfrm>
-            <a:off x="9107424" y="4398264"/>
-            <a:ext cx="2377440" cy="457200"/>
-          </a:xfrm>
-          <a:prstGeom prst="rect">
-            <a:avLst/>
-          </a:prstGeom>
-          <a:noFill/>
-        </p:spPr>
-        <p:txBody>
-          <a:bodyPr wrap="square" anchor="t" lIns="18288" rIns="18288" tIns="18288" bIns="18288">
-            <a:spAutoFit/>
-          </a:bodyPr>
-          <a:lstStyle/>
-          <a:p>
-            <a:pPr algn="l">
-              <a:spcAft>
-                <a:spcPts val="400"/>
-              </a:spcAft>
-            </a:pPr>
-            <a:r>
-              <a:rPr sz="2200" b="0">
-                <a:solidFill>
-                  <a:srgbClr val="17202A"/>
-                </a:solidFill>
-                <a:latin typeface="Segoe UI Semibold"/>
-              </a:rPr>
-              <a:t>1,764</a:t>
-            </a:r>
-          </a:p>
-        </p:txBody>
-      </p:sp>
-      <p:sp>
-        <p:nvSpPr>
-          <p:cNvPr id="26" name="TextBox 25"/>
-          <p:cNvSpPr txBox="1"/>
-          <p:nvPr/>
-        </p:nvSpPr>
-        <p:spPr>
-          <a:xfrm>
-            <a:off x="9107424" y="4855464"/>
-            <a:ext cx="2377440" cy="320040"/>
-          </a:xfrm>
-          <a:prstGeom prst="rect">
-            <a:avLst/>
-          </a:prstGeom>
-          <a:noFill/>
-        </p:spPr>
-        <p:txBody>
-          <a:bodyPr wrap="square" anchor="t" lIns="18288" rIns="18288" tIns="18288" bIns="18288">
-            <a:spAutoFit/>
-          </a:bodyPr>
-          <a:lstStyle/>
-          <a:p>
-            <a:pPr algn="l">
-              <a:spcAft>
-                <a:spcPts val="400"/>
-              </a:spcAft>
-            </a:pPr>
-            <a:r>
-              <a:rPr sz="1050" b="0">
-                <a:solidFill>
-                  <a:srgbClr val="4B5765"/>
-                </a:solidFill>
-                <a:latin typeface="Segoe UI"/>
-              </a:rPr>
-              <a:t>certifications</a:t>
-            </a:r>
-          </a:p>
-        </p:txBody>
-      </p:sp>
-      <p:sp>
-        <p:nvSpPr>
-          <p:cNvPr id="27" name="Rounded Rectangle 26"/>
-          <p:cNvSpPr/>
-          <p:nvPr/>
-        </p:nvSpPr>
-        <p:spPr>
-          <a:xfrm>
-            <a:off x="6217920" y="5321808"/>
-            <a:ext cx="2633472" cy="886968"/>
-          </a:xfrm>
-          <a:prstGeom prst="roundRect">
-            <a:avLst>
-              <a:gd name="adj" fmla="val 6000"/>
-            </a:avLst>
-          </a:prstGeom>
-          <a:solidFill>
-            <a:srgbClr val="F4F6F8"/>
-          </a:solidFill>
-          <a:ln>
-            <a:noFill/>
-          </a:ln>
-        </p:spPr>
-        <p:txBody>
-          <a:bodyPr rtlCol="0" anchor="ctr"/>
-          <a:lstStyle/>
-          <a:p/>
-        </p:txBody>
-      </p:sp>
-      <p:sp>
-        <p:nvSpPr>
-          <p:cNvPr id="28" name="TextBox 27"/>
-          <p:cNvSpPr txBox="1"/>
-          <p:nvPr/>
-        </p:nvSpPr>
-        <p:spPr>
-          <a:xfrm>
-            <a:off x="6382512" y="5376672"/>
-            <a:ext cx="2377440" cy="457200"/>
-          </a:xfrm>
-          <a:prstGeom prst="rect">
-            <a:avLst/>
-          </a:prstGeom>
-          <a:noFill/>
-        </p:spPr>
-        <p:txBody>
-          <a:bodyPr wrap="square" anchor="t" lIns="18288" rIns="18288" tIns="18288" bIns="18288">
-            <a:spAutoFit/>
-          </a:bodyPr>
-          <a:lstStyle/>
-          <a:p>
-            <a:pPr algn="l">
-              <a:spcAft>
-                <a:spcPts val="400"/>
-              </a:spcAft>
-            </a:pPr>
-            <a:r>
-              <a:rPr sz="2200" b="0">
-                <a:solidFill>
-                  <a:srgbClr val="17202A"/>
-                </a:solidFill>
-                <a:latin typeface="Segoe UI Semibold"/>
-              </a:rPr>
-              <a:t>41%</a:t>
-            </a:r>
-          </a:p>
-        </p:txBody>
-      </p:sp>
-      <p:sp>
-        <p:nvSpPr>
-          <p:cNvPr id="29" name="TextBox 28"/>
-          <p:cNvSpPr txBox="1"/>
-          <p:nvPr/>
-        </p:nvSpPr>
-        <p:spPr>
-          <a:xfrm>
-            <a:off x="6382512" y="5833872"/>
-            <a:ext cx="2377440" cy="320040"/>
-          </a:xfrm>
-          <a:prstGeom prst="rect">
-            <a:avLst/>
-          </a:prstGeom>
-          <a:noFill/>
-        </p:spPr>
-        <p:txBody>
-          <a:bodyPr wrap="square" anchor="t" lIns="18288" rIns="18288" tIns="18288" bIns="18288">
-            <a:spAutoFit/>
-          </a:bodyPr>
-          <a:lstStyle/>
-          <a:p>
-            <a:pPr algn="l">
-              <a:spcAft>
-                <a:spcPts val="400"/>
-              </a:spcAft>
-            </a:pPr>
-            <a:r>
-              <a:rPr sz="1050" b="0">
-                <a:solidFill>
-                  <a:srgbClr val="4B5765"/>
-                </a:solidFill>
-                <a:latin typeface="Segoe UI"/>
-              </a:rPr>
-              <a:t>quiz pass rate</a:t>
-            </a:r>
-          </a:p>
-        </p:txBody>
-      </p:sp>
-      <p:sp>
-        <p:nvSpPr>
-          <p:cNvPr id="30" name="Rounded Rectangle 29"/>
-          <p:cNvSpPr/>
-          <p:nvPr/>
-        </p:nvSpPr>
-        <p:spPr>
-          <a:xfrm>
-            <a:off x="8942832" y="5321808"/>
-            <a:ext cx="2633472" cy="886968"/>
-          </a:xfrm>
-          <a:prstGeom prst="roundRect">
-            <a:avLst>
-              <a:gd name="adj" fmla="val 6000"/>
-            </a:avLst>
-          </a:prstGeom>
-          <a:solidFill>
-            <a:srgbClr val="F4F6F8"/>
-          </a:solidFill>
-          <a:ln>
-            <a:noFill/>
-          </a:ln>
-        </p:spPr>
-        <p:txBody>
-          <a:bodyPr rtlCol="0" anchor="ctr"/>
-          <a:lstStyle/>
-          <a:p/>
-        </p:txBody>
-      </p:sp>
-      <p:sp>
-        <p:nvSpPr>
-          <p:cNvPr id="31" name="TextBox 30"/>
-          <p:cNvSpPr txBox="1"/>
-          <p:nvPr/>
-        </p:nvSpPr>
-        <p:spPr>
-          <a:xfrm>
-            <a:off x="9107424" y="5376672"/>
-            <a:ext cx="2377440" cy="457200"/>
-          </a:xfrm>
-          <a:prstGeom prst="rect">
-            <a:avLst/>
-          </a:prstGeom>
-          <a:noFill/>
-        </p:spPr>
-        <p:txBody>
-          <a:bodyPr wrap="square" anchor="t" lIns="18288" rIns="18288" tIns="18288" bIns="18288">
-            <a:spAutoFit/>
-          </a:bodyPr>
-          <a:lstStyle/>
-          <a:p>
-            <a:pPr algn="l">
-              <a:spcAft>
-                <a:spcPts val="400"/>
-              </a:spcAft>
-            </a:pPr>
-            <a:r>
-              <a:rPr sz="2200" b="0">
-                <a:solidFill>
-                  <a:srgbClr val="B0412D"/>
-                </a:solidFill>
-                <a:latin typeface="Segoe UI Semibold"/>
-              </a:rPr>
-              <a:t>232</a:t>
-            </a:r>
-          </a:p>
-        </p:txBody>
-      </p:sp>
-      <p:sp>
-        <p:nvSpPr>
-          <p:cNvPr id="32" name="TextBox 31"/>
-          <p:cNvSpPr txBox="1"/>
-          <p:nvPr/>
-        </p:nvSpPr>
-        <p:spPr>
-          <a:xfrm>
-            <a:off x="9107424" y="5833872"/>
-            <a:ext cx="2377440" cy="320040"/>
-          </a:xfrm>
-          <a:prstGeom prst="rect">
-            <a:avLst/>
-          </a:prstGeom>
-          <a:noFill/>
-        </p:spPr>
-        <p:txBody>
-          <a:bodyPr wrap="square" anchor="t" lIns="18288" rIns="18288" tIns="18288" bIns="18288">
-            <a:spAutoFit/>
-          </a:bodyPr>
-          <a:lstStyle/>
-          <a:p>
-            <a:pPr algn="l">
-              <a:spcAft>
-                <a:spcPts val="400"/>
-              </a:spcAft>
-            </a:pPr>
-            <a:r>
-              <a:rPr sz="1050" b="0">
-                <a:solidFill>
-                  <a:srgbClr val="4B5765"/>
-                </a:solidFill>
-                <a:latin typeface="Segoe UI"/>
-              </a:rPr>
-              <a:t>with no learning activity</a:t>
-            </a:r>
-          </a:p>
-        </p:txBody>
-      </p:sp>
-      <p:cxnSp>
-        <p:nvCxnSpPr>
-          <p:cNvPr id="33" name="Connector 32"/>
-          <p:cNvCxnSpPr/>
-          <p:nvPr/>
-        </p:nvCxnSpPr>
-        <p:spPr>
-          <a:xfrm>
-            <a:off x="548640" y="6400800"/>
-            <a:ext cx="11094415" cy="0"/>
-          </a:xfrm>
-          <a:prstGeom prst="line">
-            <a:avLst/>
-          </a:prstGeom>
-          <a:ln w="9525">
-            <a:solidFill>
-              <a:srgbClr val="D4DAE1"/>
-            </a:solidFill>
-          </a:ln>
-        </p:spPr>
-      </p:cxnSp>
-      <p:sp>
-        <p:nvSpPr>
-          <p:cNvPr id="34" name="TextBox 33"/>
-          <p:cNvSpPr txBox="1"/>
-          <p:nvPr/>
-        </p:nvSpPr>
-        <p:spPr>
-          <a:xfrm>
-            <a:off x="548640" y="6455664"/>
-            <a:ext cx="7315200" cy="274320"/>
-          </a:xfrm>
-          <a:prstGeom prst="rect">
-            <a:avLst/>
-          </a:prstGeom>
-          <a:noFill/>
-        </p:spPr>
-        <p:txBody>
-          <a:bodyPr wrap="square" anchor="t" lIns="18288" rIns="18288" tIns="18288" bIns="18288">
-            <a:spAutoFit/>
-          </a:bodyPr>
-          <a:lstStyle/>
-          <a:p>
-            <a:pPr algn="l">
-              <a:spcAft>
-                <a:spcPts val="400"/>
-              </a:spcAft>
-            </a:pPr>
-            <a:r>
-              <a:rPr sz="900" b="0">
-                <a:solidFill>
-                  <a:srgbClr val="8A94A0"/>
-                </a:solidFill>
-                <a:latin typeface="Segoe UI"/>
-              </a:rPr>
-              <a:t>ACME Talent Lake  ·  Data Engineer track  ·  Coding Workshop 2026</a:t>
-            </a:r>
-          </a:p>
-        </p:txBody>
-      </p:sp>
-      <p:sp>
-        <p:nvSpPr>
-          <p:cNvPr id="35" name="TextBox 34"/>
-          <p:cNvSpPr txBox="1"/>
-          <p:nvPr/>
-        </p:nvSpPr>
-        <p:spPr>
-          <a:xfrm>
-            <a:off x="10698480" y="6455664"/>
-            <a:ext cx="941832" cy="274320"/>
-          </a:xfrm>
-          <a:prstGeom prst="rect">
-            <a:avLst/>
-          </a:prstGeom>
-          <a:noFill/>
-        </p:spPr>
-        <p:txBody>
-          <a:bodyPr wrap="square" anchor="t" lIns="18288" rIns="18288" tIns="18288" bIns="18288">
-            <a:spAutoFit/>
-          </a:bodyPr>
-          <a:lstStyle/>
-          <a:p>
-            <a:pPr algn="r">
-              <a:spcAft>
-                <a:spcPts val="400"/>
-              </a:spcAft>
-            </a:pPr>
-            <a:r>
-              <a:rPr sz="900" b="0">
-                <a:solidFill>
-                  <a:srgbClr val="8A94A0"/>
-                </a:solidFill>
-                <a:latin typeface="Segoe UI"/>
-              </a:rPr>
-              <a:t>6 / 9</a:t>
+              <a:t>6 / 10</a:t>
             </a:r>
           </a:p>
         </p:txBody>
@@ -14016,6 +16578,1237 @@
                 </a:solidFill>
                 <a:latin typeface="Segoe UI Semibold"/>
               </a:rPr>
+              <a:t>FINDINGS · Q1–Q4</a:t>
+            </a:r>
+          </a:p>
+        </p:txBody>
+      </p:sp>
+      <p:sp>
+        <p:nvSpPr>
+          <p:cNvPr id="3" name="TextBox 2"/>
+          <p:cNvSpPr txBox="1"/>
+          <p:nvPr/>
+        </p:nvSpPr>
+        <p:spPr>
+          <a:xfrm>
+            <a:off x="548640" y="566928"/>
+            <a:ext cx="11064240" cy="731520"/>
+          </a:xfrm>
+          <a:prstGeom prst="rect">
+            <a:avLst/>
+          </a:prstGeom>
+          <a:noFill/>
+        </p:spPr>
+        <p:txBody>
+          <a:bodyPr wrap="square" anchor="t" lIns="18288" rIns="18288" tIns="18288" bIns="18288">
+            <a:spAutoFit/>
+          </a:bodyPr>
+          <a:lstStyle/>
+          <a:p>
+            <a:pPr algn="l">
+              <a:spcAft>
+                <a:spcPts val="400"/>
+              </a:spcAft>
+            </a:pPr>
+            <a:r>
+              <a:rPr sz="2600" b="0">
+                <a:solidFill>
+                  <a:srgbClr val="17202A"/>
+                </a:solidFill>
+                <a:latin typeface="Segoe UI Semibold"/>
+              </a:rPr>
+              <a:t>230 declining · 441 with gaps · 124 ready · 232 not learning</a:t>
+            </a:r>
+          </a:p>
+        </p:txBody>
+      </p:sp>
+      <p:sp>
+        <p:nvSpPr>
+          <p:cNvPr id="4" name="TextBox 3"/>
+          <p:cNvSpPr txBox="1"/>
+          <p:nvPr/>
+        </p:nvSpPr>
+        <p:spPr>
+          <a:xfrm>
+            <a:off x="548640" y="1417320"/>
+            <a:ext cx="5422392" cy="320040"/>
+          </a:xfrm>
+          <a:prstGeom prst="rect">
+            <a:avLst/>
+          </a:prstGeom>
+          <a:noFill/>
+        </p:spPr>
+        <p:txBody>
+          <a:bodyPr wrap="square" anchor="t" lIns="18288" rIns="18288" tIns="18288" bIns="18288">
+            <a:spAutoFit/>
+          </a:bodyPr>
+          <a:lstStyle/>
+          <a:p>
+            <a:pPr algn="l">
+              <a:spcAft>
+                <a:spcPts val="400"/>
+              </a:spcAft>
+            </a:pPr>
+            <a:r>
+              <a:rPr sz="1300" b="0">
+                <a:solidFill>
+                  <a:srgbClr val="17202A"/>
+                </a:solidFill>
+                <a:latin typeface="Segoe UI Semibold"/>
+              </a:rPr>
+              <a:t>Q1 · Change since previous review</a:t>
+            </a:r>
+          </a:p>
+        </p:txBody>
+      </p:sp>
+      <p:graphicFrame>
+        <p:nvGraphicFramePr>
+          <p:cNvPr id="5" name="Chart 4"/>
+          <p:cNvGraphicFramePr>
+            <a:graphicFrameLocks noGrp="1"/>
+          </p:cNvGraphicFramePr>
+          <p:nvPr/>
+        </p:nvGraphicFramePr>
+        <p:xfrm>
+          <a:off x="457200" y="1737360"/>
+          <a:ext cx="3566160" cy="1874519"/>
+        </p:xfrm>
+        <a:graphic>
+          <a:graphicData uri="http://schemas.openxmlformats.org/drawingml/2006/chart">
+            <c:chart xmlns:c="http://schemas.openxmlformats.org/drawingml/2006/chart" r:id="rId3"/>
+          </a:graphicData>
+        </a:graphic>
+      </p:graphicFrame>
+      <p:sp>
+        <p:nvSpPr>
+          <p:cNvPr id="6" name="TextBox 5"/>
+          <p:cNvSpPr txBox="1"/>
+          <p:nvPr/>
+        </p:nvSpPr>
+        <p:spPr>
+          <a:xfrm>
+            <a:off x="4206240" y="1920240"/>
+            <a:ext cx="1737360" cy="548640"/>
+          </a:xfrm>
+          <a:prstGeom prst="rect">
+            <a:avLst/>
+          </a:prstGeom>
+          <a:noFill/>
+        </p:spPr>
+        <p:txBody>
+          <a:bodyPr wrap="square" anchor="t" lIns="18288" rIns="18288" tIns="18288" bIns="18288">
+            <a:spAutoFit/>
+          </a:bodyPr>
+          <a:lstStyle/>
+          <a:p>
+            <a:pPr algn="l">
+              <a:spcAft>
+                <a:spcPts val="400"/>
+              </a:spcAft>
+            </a:pPr>
+            <a:r>
+              <a:rPr sz="2600" b="0">
+                <a:solidFill>
+                  <a:srgbClr val="17202A"/>
+                </a:solidFill>
+                <a:latin typeface="Segoe UI Semibold"/>
+              </a:rPr>
+              <a:t>3.41</a:t>
+            </a:r>
+          </a:p>
+        </p:txBody>
+      </p:sp>
+      <p:sp>
+        <p:nvSpPr>
+          <p:cNvPr id="7" name="TextBox 6"/>
+          <p:cNvSpPr txBox="1"/>
+          <p:nvPr/>
+        </p:nvSpPr>
+        <p:spPr>
+          <a:xfrm>
+            <a:off x="4206240" y="2487168"/>
+            <a:ext cx="1737360" cy="457200"/>
+          </a:xfrm>
+          <a:prstGeom prst="rect">
+            <a:avLst/>
+          </a:prstGeom>
+          <a:noFill/>
+        </p:spPr>
+        <p:txBody>
+          <a:bodyPr wrap="square" anchor="t" lIns="18288" rIns="18288" tIns="18288" bIns="18288">
+            <a:spAutoFit/>
+          </a:bodyPr>
+          <a:lstStyle/>
+          <a:p>
+            <a:pPr algn="l">
+              <a:spcAft>
+                <a:spcPts val="400"/>
+              </a:spcAft>
+            </a:pPr>
+            <a:r>
+              <a:rPr sz="1100" b="0">
+                <a:solidFill>
+                  <a:srgbClr val="4B5765"/>
+                </a:solidFill>
+                <a:latin typeface="Segoe UI"/>
+              </a:rPr>
+              <a:t>average latest rating</a:t>
+            </a:r>
+          </a:p>
+        </p:txBody>
+      </p:sp>
+      <p:sp>
+        <p:nvSpPr>
+          <p:cNvPr id="8" name="TextBox 7"/>
+          <p:cNvSpPr txBox="1"/>
+          <p:nvPr/>
+        </p:nvSpPr>
+        <p:spPr>
+          <a:xfrm>
+            <a:off x="4206240" y="2834640"/>
+            <a:ext cx="1737360" cy="548640"/>
+          </a:xfrm>
+          <a:prstGeom prst="rect">
+            <a:avLst/>
+          </a:prstGeom>
+          <a:noFill/>
+        </p:spPr>
+        <p:txBody>
+          <a:bodyPr wrap="square" anchor="t" lIns="18288" rIns="18288" tIns="18288" bIns="18288">
+            <a:spAutoFit/>
+          </a:bodyPr>
+          <a:lstStyle/>
+          <a:p>
+            <a:pPr algn="l">
+              <a:spcAft>
+                <a:spcPts val="400"/>
+              </a:spcAft>
+            </a:pPr>
+            <a:r>
+              <a:rPr sz="2600" b="0">
+                <a:solidFill>
+                  <a:srgbClr val="B0412D"/>
+                </a:solidFill>
+                <a:latin typeface="Segoe UI Semibold"/>
+              </a:rPr>
+              <a:t>84</a:t>
+            </a:r>
+          </a:p>
+        </p:txBody>
+      </p:sp>
+      <p:sp>
+        <p:nvSpPr>
+          <p:cNvPr id="9" name="TextBox 8"/>
+          <p:cNvSpPr txBox="1"/>
+          <p:nvPr/>
+        </p:nvSpPr>
+        <p:spPr>
+          <a:xfrm>
+            <a:off x="4206240" y="3401568"/>
+            <a:ext cx="1737360" cy="457200"/>
+          </a:xfrm>
+          <a:prstGeom prst="rect">
+            <a:avLst/>
+          </a:prstGeom>
+          <a:noFill/>
+        </p:spPr>
+        <p:txBody>
+          <a:bodyPr wrap="square" anchor="t" lIns="18288" rIns="18288" tIns="18288" bIns="18288">
+            <a:spAutoFit/>
+          </a:bodyPr>
+          <a:lstStyle/>
+          <a:p>
+            <a:pPr algn="l">
+              <a:spcAft>
+                <a:spcPts val="400"/>
+              </a:spcAft>
+            </a:pPr>
+            <a:r>
+              <a:rPr sz="1100" b="0">
+                <a:solidFill>
+                  <a:srgbClr val="4B5765"/>
+                </a:solidFill>
+                <a:latin typeface="Segoe UI"/>
+              </a:rPr>
+              <a:t>dropped 2+ points</a:t>
+            </a:r>
+          </a:p>
+        </p:txBody>
+      </p:sp>
+      <p:sp>
+        <p:nvSpPr>
+          <p:cNvPr id="10" name="TextBox 9"/>
+          <p:cNvSpPr txBox="1"/>
+          <p:nvPr/>
+        </p:nvSpPr>
+        <p:spPr>
+          <a:xfrm>
+            <a:off x="6217920" y="1417320"/>
+            <a:ext cx="5422392" cy="320040"/>
+          </a:xfrm>
+          <a:prstGeom prst="rect">
+            <a:avLst/>
+          </a:prstGeom>
+          <a:noFill/>
+        </p:spPr>
+        <p:txBody>
+          <a:bodyPr wrap="square" anchor="t" lIns="18288" rIns="18288" tIns="18288" bIns="18288">
+            <a:spAutoFit/>
+          </a:bodyPr>
+          <a:lstStyle/>
+          <a:p>
+            <a:pPr algn="l">
+              <a:spcAft>
+                <a:spcPts val="400"/>
+              </a:spcAft>
+            </a:pPr>
+            <a:r>
+              <a:rPr sz="1300" b="0">
+                <a:solidFill>
+                  <a:srgbClr val="17202A"/>
+                </a:solidFill>
+                <a:latin typeface="Segoe UI Semibold"/>
+              </a:rPr>
+              <a:t>Q2 · Most critical skill gaps</a:t>
+            </a:r>
+          </a:p>
+        </p:txBody>
+      </p:sp>
+      <p:graphicFrame>
+        <p:nvGraphicFramePr>
+          <p:cNvPr id="11" name="Chart 10"/>
+          <p:cNvGraphicFramePr>
+            <a:graphicFrameLocks noGrp="1"/>
+          </p:cNvGraphicFramePr>
+          <p:nvPr/>
+        </p:nvGraphicFramePr>
+        <p:xfrm>
+          <a:off x="6126480" y="1737360"/>
+          <a:ext cx="3566160" cy="1874519"/>
+        </p:xfrm>
+        <a:graphic>
+          <a:graphicData uri="http://schemas.openxmlformats.org/drawingml/2006/chart">
+            <c:chart xmlns:c="http://schemas.openxmlformats.org/drawingml/2006/chart" r:id="rId4"/>
+          </a:graphicData>
+        </a:graphic>
+      </p:graphicFrame>
+      <p:sp>
+        <p:nvSpPr>
+          <p:cNvPr id="12" name="TextBox 11"/>
+          <p:cNvSpPr txBox="1"/>
+          <p:nvPr/>
+        </p:nvSpPr>
+        <p:spPr>
+          <a:xfrm>
+            <a:off x="9875520" y="1920240"/>
+            <a:ext cx="1737360" cy="548640"/>
+          </a:xfrm>
+          <a:prstGeom prst="rect">
+            <a:avLst/>
+          </a:prstGeom>
+          <a:noFill/>
+        </p:spPr>
+        <p:txBody>
+          <a:bodyPr wrap="square" anchor="t" lIns="18288" rIns="18288" tIns="18288" bIns="18288">
+            <a:spAutoFit/>
+          </a:bodyPr>
+          <a:lstStyle/>
+          <a:p>
+            <a:pPr algn="l">
+              <a:spcAft>
+                <a:spcPts val="400"/>
+              </a:spcAft>
+            </a:pPr>
+            <a:r>
+              <a:rPr sz="2600" b="0">
+                <a:solidFill>
+                  <a:srgbClr val="17202A"/>
+                </a:solidFill>
+                <a:latin typeface="Segoe UI Semibold"/>
+              </a:rPr>
+              <a:t>465</a:t>
+            </a:r>
+          </a:p>
+        </p:txBody>
+      </p:sp>
+      <p:sp>
+        <p:nvSpPr>
+          <p:cNvPr id="13" name="TextBox 12"/>
+          <p:cNvSpPr txBox="1"/>
+          <p:nvPr/>
+        </p:nvSpPr>
+        <p:spPr>
+          <a:xfrm>
+            <a:off x="9875520" y="2487168"/>
+            <a:ext cx="1737360" cy="457200"/>
+          </a:xfrm>
+          <a:prstGeom prst="rect">
+            <a:avLst/>
+          </a:prstGeom>
+          <a:noFill/>
+        </p:spPr>
+        <p:txBody>
+          <a:bodyPr wrap="square" anchor="t" lIns="18288" rIns="18288" tIns="18288" bIns="18288">
+            <a:spAutoFit/>
+          </a:bodyPr>
+          <a:lstStyle/>
+          <a:p>
+            <a:pPr algn="l">
+              <a:spcAft>
+                <a:spcPts val="400"/>
+              </a:spcAft>
+            </a:pPr>
+            <a:r>
+              <a:rPr sz="1100" b="0">
+                <a:solidFill>
+                  <a:srgbClr val="4B5765"/>
+                </a:solidFill>
+                <a:latin typeface="Segoe UI"/>
+              </a:rPr>
+              <a:t>gaps across 441 people</a:t>
+            </a:r>
+          </a:p>
+        </p:txBody>
+      </p:sp>
+      <p:sp>
+        <p:nvSpPr>
+          <p:cNvPr id="14" name="TextBox 13"/>
+          <p:cNvSpPr txBox="1"/>
+          <p:nvPr/>
+        </p:nvSpPr>
+        <p:spPr>
+          <a:xfrm>
+            <a:off x="9875520" y="2834640"/>
+            <a:ext cx="1737360" cy="548640"/>
+          </a:xfrm>
+          <a:prstGeom prst="rect">
+            <a:avLst/>
+          </a:prstGeom>
+          <a:noFill/>
+        </p:spPr>
+        <p:txBody>
+          <a:bodyPr wrap="square" anchor="t" lIns="18288" rIns="18288" tIns="18288" bIns="18288">
+            <a:spAutoFit/>
+          </a:bodyPr>
+          <a:lstStyle/>
+          <a:p>
+            <a:pPr algn="l">
+              <a:spcAft>
+                <a:spcPts val="400"/>
+              </a:spcAft>
+            </a:pPr>
+            <a:r>
+              <a:rPr sz="2600" b="0">
+                <a:solidFill>
+                  <a:srgbClr val="B0412D"/>
+                </a:solidFill>
+                <a:latin typeface="Segoe UI Semibold"/>
+              </a:rPr>
+              <a:t>28%</a:t>
+            </a:r>
+          </a:p>
+        </p:txBody>
+      </p:sp>
+      <p:sp>
+        <p:nvSpPr>
+          <p:cNvPr id="15" name="TextBox 14"/>
+          <p:cNvSpPr txBox="1"/>
+          <p:nvPr/>
+        </p:nvSpPr>
+        <p:spPr>
+          <a:xfrm>
+            <a:off x="9875520" y="3401568"/>
+            <a:ext cx="1737360" cy="457200"/>
+          </a:xfrm>
+          <a:prstGeom prst="rect">
+            <a:avLst/>
+          </a:prstGeom>
+          <a:noFill/>
+        </p:spPr>
+        <p:txBody>
+          <a:bodyPr wrap="square" anchor="t" lIns="18288" rIns="18288" tIns="18288" bIns="18288">
+            <a:spAutoFit/>
+          </a:bodyPr>
+          <a:lstStyle/>
+          <a:p>
+            <a:pPr algn="l">
+              <a:spcAft>
+                <a:spcPts val="400"/>
+              </a:spcAft>
+            </a:pPr>
+            <a:r>
+              <a:rPr sz="1100" b="0">
+                <a:solidFill>
+                  <a:srgbClr val="4B5765"/>
+                </a:solidFill>
+                <a:latin typeface="Segoe UI"/>
+              </a:rPr>
+              <a:t>of Human Resources affected</a:t>
+            </a:r>
+          </a:p>
+        </p:txBody>
+      </p:sp>
+      <p:sp>
+        <p:nvSpPr>
+          <p:cNvPr id="16" name="TextBox 15"/>
+          <p:cNvSpPr txBox="1"/>
+          <p:nvPr/>
+        </p:nvSpPr>
+        <p:spPr>
+          <a:xfrm>
+            <a:off x="548640" y="3931920"/>
+            <a:ext cx="5422392" cy="320040"/>
+          </a:xfrm>
+          <a:prstGeom prst="rect">
+            <a:avLst/>
+          </a:prstGeom>
+          <a:noFill/>
+        </p:spPr>
+        <p:txBody>
+          <a:bodyPr wrap="square" anchor="t" lIns="18288" rIns="18288" tIns="18288" bIns="18288">
+            <a:spAutoFit/>
+          </a:bodyPr>
+          <a:lstStyle/>
+          <a:p>
+            <a:pPr algn="l">
+              <a:spcAft>
+                <a:spcPts val="400"/>
+              </a:spcAft>
+            </a:pPr>
+            <a:r>
+              <a:rPr sz="1300" b="0">
+                <a:solidFill>
+                  <a:srgbClr val="17202A"/>
+                </a:solidFill>
+                <a:latin typeface="Segoe UI Semibold"/>
+              </a:rPr>
+              <a:t>Q3 · Promotion pipeline</a:t>
+            </a:r>
+          </a:p>
+        </p:txBody>
+      </p:sp>
+      <p:graphicFrame>
+        <p:nvGraphicFramePr>
+          <p:cNvPr id="17" name="Chart 16"/>
+          <p:cNvGraphicFramePr>
+            <a:graphicFrameLocks noGrp="1"/>
+          </p:cNvGraphicFramePr>
+          <p:nvPr/>
+        </p:nvGraphicFramePr>
+        <p:xfrm>
+          <a:off x="457200" y="4251959"/>
+          <a:ext cx="3566160" cy="1874519"/>
+        </p:xfrm>
+        <a:graphic>
+          <a:graphicData uri="http://schemas.openxmlformats.org/drawingml/2006/chart">
+            <c:chart xmlns:c="http://schemas.openxmlformats.org/drawingml/2006/chart" r:id="rId5"/>
+          </a:graphicData>
+        </a:graphic>
+      </p:graphicFrame>
+      <p:sp>
+        <p:nvSpPr>
+          <p:cNvPr id="18" name="TextBox 17"/>
+          <p:cNvSpPr txBox="1"/>
+          <p:nvPr/>
+        </p:nvSpPr>
+        <p:spPr>
+          <a:xfrm>
+            <a:off x="4206240" y="4434840"/>
+            <a:ext cx="1737360" cy="548640"/>
+          </a:xfrm>
+          <a:prstGeom prst="rect">
+            <a:avLst/>
+          </a:prstGeom>
+          <a:noFill/>
+        </p:spPr>
+        <p:txBody>
+          <a:bodyPr wrap="square" anchor="t" lIns="18288" rIns="18288" tIns="18288" bIns="18288">
+            <a:spAutoFit/>
+          </a:bodyPr>
+          <a:lstStyle/>
+          <a:p>
+            <a:pPr algn="l">
+              <a:spcAft>
+                <a:spcPts val="400"/>
+              </a:spcAft>
+            </a:pPr>
+            <a:r>
+              <a:rPr sz="2600" b="0">
+                <a:solidFill>
+                  <a:srgbClr val="B0412D"/>
+                </a:solidFill>
+                <a:latin typeface="Segoe UI Semibold"/>
+              </a:rPr>
+              <a:t>28</a:t>
+            </a:r>
+          </a:p>
+        </p:txBody>
+      </p:sp>
+      <p:sp>
+        <p:nvSpPr>
+          <p:cNvPr id="19" name="TextBox 18"/>
+          <p:cNvSpPr txBox="1"/>
+          <p:nvPr/>
+        </p:nvSpPr>
+        <p:spPr>
+          <a:xfrm>
+            <a:off x="4206240" y="5001768"/>
+            <a:ext cx="1737360" cy="457200"/>
+          </a:xfrm>
+          <a:prstGeom prst="rect">
+            <a:avLst/>
+          </a:prstGeom>
+          <a:noFill/>
+        </p:spPr>
+        <p:txBody>
+          <a:bodyPr wrap="square" anchor="t" lIns="18288" rIns="18288" tIns="18288" bIns="18288">
+            <a:spAutoFit/>
+          </a:bodyPr>
+          <a:lstStyle/>
+          <a:p>
+            <a:pPr algn="l">
+              <a:spcAft>
+                <a:spcPts val="400"/>
+              </a:spcAft>
+            </a:pPr>
+            <a:r>
+              <a:rPr sz="1100" b="0">
+                <a:solidFill>
+                  <a:srgbClr val="4B5765"/>
+                </a:solidFill>
+                <a:latin typeface="Segoe UI"/>
+              </a:rPr>
+              <a:t>high-potential people at high attrition risk</a:t>
+            </a:r>
+          </a:p>
+        </p:txBody>
+      </p:sp>
+      <p:sp>
+        <p:nvSpPr>
+          <p:cNvPr id="20" name="TextBox 19"/>
+          <p:cNvSpPr txBox="1"/>
+          <p:nvPr/>
+        </p:nvSpPr>
+        <p:spPr>
+          <a:xfrm>
+            <a:off x="6217920" y="3931920"/>
+            <a:ext cx="5422392" cy="320040"/>
+          </a:xfrm>
+          <a:prstGeom prst="rect">
+            <a:avLst/>
+          </a:prstGeom>
+          <a:noFill/>
+        </p:spPr>
+        <p:txBody>
+          <a:bodyPr wrap="square" anchor="t" lIns="18288" rIns="18288" tIns="18288" bIns="18288">
+            <a:spAutoFit/>
+          </a:bodyPr>
+          <a:lstStyle/>
+          <a:p>
+            <a:pPr algn="l">
+              <a:spcAft>
+                <a:spcPts val="400"/>
+              </a:spcAft>
+            </a:pPr>
+            <a:r>
+              <a:rPr sz="1300" b="0">
+                <a:solidFill>
+                  <a:srgbClr val="17202A"/>
+                </a:solidFill>
+                <a:latin typeface="Segoe UI Semibold"/>
+              </a:rPr>
+              <a:t>Q4 · Training and development</a:t>
+            </a:r>
+          </a:p>
+        </p:txBody>
+      </p:sp>
+      <p:sp>
+        <p:nvSpPr>
+          <p:cNvPr id="21" name="Rounded Rectangle 20"/>
+          <p:cNvSpPr/>
+          <p:nvPr/>
+        </p:nvSpPr>
+        <p:spPr>
+          <a:xfrm>
+            <a:off x="6217920" y="4343400"/>
+            <a:ext cx="2633472" cy="886968"/>
+          </a:xfrm>
+          <a:prstGeom prst="roundRect">
+            <a:avLst>
+              <a:gd name="adj" fmla="val 6000"/>
+            </a:avLst>
+          </a:prstGeom>
+          <a:solidFill>
+            <a:srgbClr val="F4F6F8"/>
+          </a:solidFill>
+          <a:ln>
+            <a:noFill/>
+          </a:ln>
+        </p:spPr>
+        <p:txBody>
+          <a:bodyPr rtlCol="0" anchor="ctr"/>
+          <a:lstStyle/>
+          <a:p/>
+        </p:txBody>
+      </p:sp>
+      <p:sp>
+        <p:nvSpPr>
+          <p:cNvPr id="22" name="TextBox 21"/>
+          <p:cNvSpPr txBox="1"/>
+          <p:nvPr/>
+        </p:nvSpPr>
+        <p:spPr>
+          <a:xfrm>
+            <a:off x="6382512" y="4398264"/>
+            <a:ext cx="2377440" cy="457200"/>
+          </a:xfrm>
+          <a:prstGeom prst="rect">
+            <a:avLst/>
+          </a:prstGeom>
+          <a:noFill/>
+        </p:spPr>
+        <p:txBody>
+          <a:bodyPr wrap="square" anchor="t" lIns="18288" rIns="18288" tIns="18288" bIns="18288">
+            <a:spAutoFit/>
+          </a:bodyPr>
+          <a:lstStyle/>
+          <a:p>
+            <a:pPr algn="l">
+              <a:spcAft>
+                <a:spcPts val="400"/>
+              </a:spcAft>
+            </a:pPr>
+            <a:r>
+              <a:rPr sz="2200" b="0">
+                <a:solidFill>
+                  <a:srgbClr val="17202A"/>
+                </a:solidFill>
+                <a:latin typeface="Segoe UI Semibold"/>
+              </a:rPr>
+              <a:t>1.75</a:t>
+            </a:r>
+          </a:p>
+        </p:txBody>
+      </p:sp>
+      <p:sp>
+        <p:nvSpPr>
+          <p:cNvPr id="23" name="TextBox 22"/>
+          <p:cNvSpPr txBox="1"/>
+          <p:nvPr/>
+        </p:nvSpPr>
+        <p:spPr>
+          <a:xfrm>
+            <a:off x="6382512" y="4855464"/>
+            <a:ext cx="2377440" cy="320040"/>
+          </a:xfrm>
+          <a:prstGeom prst="rect">
+            <a:avLst/>
+          </a:prstGeom>
+          <a:noFill/>
+        </p:spPr>
+        <p:txBody>
+          <a:bodyPr wrap="square" anchor="t" lIns="18288" rIns="18288" tIns="18288" bIns="18288">
+            <a:spAutoFit/>
+          </a:bodyPr>
+          <a:lstStyle/>
+          <a:p>
+            <a:pPr algn="l">
+              <a:spcAft>
+                <a:spcPts val="400"/>
+              </a:spcAft>
+            </a:pPr>
+            <a:r>
+              <a:rPr sz="1050" b="0">
+                <a:solidFill>
+                  <a:srgbClr val="4B5765"/>
+                </a:solidFill>
+                <a:latin typeface="Segoe UI"/>
+              </a:rPr>
+              <a:t>courses per employee</a:t>
+            </a:r>
+          </a:p>
+        </p:txBody>
+      </p:sp>
+      <p:sp>
+        <p:nvSpPr>
+          <p:cNvPr id="24" name="Rounded Rectangle 23"/>
+          <p:cNvSpPr/>
+          <p:nvPr/>
+        </p:nvSpPr>
+        <p:spPr>
+          <a:xfrm>
+            <a:off x="8942832" y="4343400"/>
+            <a:ext cx="2633472" cy="886968"/>
+          </a:xfrm>
+          <a:prstGeom prst="roundRect">
+            <a:avLst>
+              <a:gd name="adj" fmla="val 6000"/>
+            </a:avLst>
+          </a:prstGeom>
+          <a:solidFill>
+            <a:srgbClr val="F4F6F8"/>
+          </a:solidFill>
+          <a:ln>
+            <a:noFill/>
+          </a:ln>
+        </p:spPr>
+        <p:txBody>
+          <a:bodyPr rtlCol="0" anchor="ctr"/>
+          <a:lstStyle/>
+          <a:p/>
+        </p:txBody>
+      </p:sp>
+      <p:sp>
+        <p:nvSpPr>
+          <p:cNvPr id="25" name="TextBox 24"/>
+          <p:cNvSpPr txBox="1"/>
+          <p:nvPr/>
+        </p:nvSpPr>
+        <p:spPr>
+          <a:xfrm>
+            <a:off x="9107424" y="4398264"/>
+            <a:ext cx="2377440" cy="457200"/>
+          </a:xfrm>
+          <a:prstGeom prst="rect">
+            <a:avLst/>
+          </a:prstGeom>
+          <a:noFill/>
+        </p:spPr>
+        <p:txBody>
+          <a:bodyPr wrap="square" anchor="t" lIns="18288" rIns="18288" tIns="18288" bIns="18288">
+            <a:spAutoFit/>
+          </a:bodyPr>
+          <a:lstStyle/>
+          <a:p>
+            <a:pPr algn="l">
+              <a:spcAft>
+                <a:spcPts val="400"/>
+              </a:spcAft>
+            </a:pPr>
+            <a:r>
+              <a:rPr sz="2200" b="0">
+                <a:solidFill>
+                  <a:srgbClr val="17202A"/>
+                </a:solidFill>
+                <a:latin typeface="Segoe UI Semibold"/>
+              </a:rPr>
+              <a:t>1,764</a:t>
+            </a:r>
+          </a:p>
+        </p:txBody>
+      </p:sp>
+      <p:sp>
+        <p:nvSpPr>
+          <p:cNvPr id="26" name="TextBox 25"/>
+          <p:cNvSpPr txBox="1"/>
+          <p:nvPr/>
+        </p:nvSpPr>
+        <p:spPr>
+          <a:xfrm>
+            <a:off x="9107424" y="4855464"/>
+            <a:ext cx="2377440" cy="320040"/>
+          </a:xfrm>
+          <a:prstGeom prst="rect">
+            <a:avLst/>
+          </a:prstGeom>
+          <a:noFill/>
+        </p:spPr>
+        <p:txBody>
+          <a:bodyPr wrap="square" anchor="t" lIns="18288" rIns="18288" tIns="18288" bIns="18288">
+            <a:spAutoFit/>
+          </a:bodyPr>
+          <a:lstStyle/>
+          <a:p>
+            <a:pPr algn="l">
+              <a:spcAft>
+                <a:spcPts val="400"/>
+              </a:spcAft>
+            </a:pPr>
+            <a:r>
+              <a:rPr sz="1050" b="0">
+                <a:solidFill>
+                  <a:srgbClr val="4B5765"/>
+                </a:solidFill>
+                <a:latin typeface="Segoe UI"/>
+              </a:rPr>
+              <a:t>certifications</a:t>
+            </a:r>
+          </a:p>
+        </p:txBody>
+      </p:sp>
+      <p:sp>
+        <p:nvSpPr>
+          <p:cNvPr id="27" name="Rounded Rectangle 26"/>
+          <p:cNvSpPr/>
+          <p:nvPr/>
+        </p:nvSpPr>
+        <p:spPr>
+          <a:xfrm>
+            <a:off x="6217920" y="5321808"/>
+            <a:ext cx="2633472" cy="886968"/>
+          </a:xfrm>
+          <a:prstGeom prst="roundRect">
+            <a:avLst>
+              <a:gd name="adj" fmla="val 6000"/>
+            </a:avLst>
+          </a:prstGeom>
+          <a:solidFill>
+            <a:srgbClr val="F4F6F8"/>
+          </a:solidFill>
+          <a:ln>
+            <a:noFill/>
+          </a:ln>
+        </p:spPr>
+        <p:txBody>
+          <a:bodyPr rtlCol="0" anchor="ctr"/>
+          <a:lstStyle/>
+          <a:p/>
+        </p:txBody>
+      </p:sp>
+      <p:sp>
+        <p:nvSpPr>
+          <p:cNvPr id="28" name="TextBox 27"/>
+          <p:cNvSpPr txBox="1"/>
+          <p:nvPr/>
+        </p:nvSpPr>
+        <p:spPr>
+          <a:xfrm>
+            <a:off x="6382512" y="5376672"/>
+            <a:ext cx="2377440" cy="457200"/>
+          </a:xfrm>
+          <a:prstGeom prst="rect">
+            <a:avLst/>
+          </a:prstGeom>
+          <a:noFill/>
+        </p:spPr>
+        <p:txBody>
+          <a:bodyPr wrap="square" anchor="t" lIns="18288" rIns="18288" tIns="18288" bIns="18288">
+            <a:spAutoFit/>
+          </a:bodyPr>
+          <a:lstStyle/>
+          <a:p>
+            <a:pPr algn="l">
+              <a:spcAft>
+                <a:spcPts val="400"/>
+              </a:spcAft>
+            </a:pPr>
+            <a:r>
+              <a:rPr sz="2200" b="0">
+                <a:solidFill>
+                  <a:srgbClr val="17202A"/>
+                </a:solidFill>
+                <a:latin typeface="Segoe UI Semibold"/>
+              </a:rPr>
+              <a:t>41%</a:t>
+            </a:r>
+          </a:p>
+        </p:txBody>
+      </p:sp>
+      <p:sp>
+        <p:nvSpPr>
+          <p:cNvPr id="29" name="TextBox 28"/>
+          <p:cNvSpPr txBox="1"/>
+          <p:nvPr/>
+        </p:nvSpPr>
+        <p:spPr>
+          <a:xfrm>
+            <a:off x="6382512" y="5833872"/>
+            <a:ext cx="2377440" cy="320040"/>
+          </a:xfrm>
+          <a:prstGeom prst="rect">
+            <a:avLst/>
+          </a:prstGeom>
+          <a:noFill/>
+        </p:spPr>
+        <p:txBody>
+          <a:bodyPr wrap="square" anchor="t" lIns="18288" rIns="18288" tIns="18288" bIns="18288">
+            <a:spAutoFit/>
+          </a:bodyPr>
+          <a:lstStyle/>
+          <a:p>
+            <a:pPr algn="l">
+              <a:spcAft>
+                <a:spcPts val="400"/>
+              </a:spcAft>
+            </a:pPr>
+            <a:r>
+              <a:rPr sz="1050" b="0">
+                <a:solidFill>
+                  <a:srgbClr val="4B5765"/>
+                </a:solidFill>
+                <a:latin typeface="Segoe UI"/>
+              </a:rPr>
+              <a:t>quiz pass rate</a:t>
+            </a:r>
+          </a:p>
+        </p:txBody>
+      </p:sp>
+      <p:sp>
+        <p:nvSpPr>
+          <p:cNvPr id="30" name="Rounded Rectangle 29"/>
+          <p:cNvSpPr/>
+          <p:nvPr/>
+        </p:nvSpPr>
+        <p:spPr>
+          <a:xfrm>
+            <a:off x="8942832" y="5321808"/>
+            <a:ext cx="2633472" cy="886968"/>
+          </a:xfrm>
+          <a:prstGeom prst="roundRect">
+            <a:avLst>
+              <a:gd name="adj" fmla="val 6000"/>
+            </a:avLst>
+          </a:prstGeom>
+          <a:solidFill>
+            <a:srgbClr val="F4F6F8"/>
+          </a:solidFill>
+          <a:ln>
+            <a:noFill/>
+          </a:ln>
+        </p:spPr>
+        <p:txBody>
+          <a:bodyPr rtlCol="0" anchor="ctr"/>
+          <a:lstStyle/>
+          <a:p/>
+        </p:txBody>
+      </p:sp>
+      <p:sp>
+        <p:nvSpPr>
+          <p:cNvPr id="31" name="TextBox 30"/>
+          <p:cNvSpPr txBox="1"/>
+          <p:nvPr/>
+        </p:nvSpPr>
+        <p:spPr>
+          <a:xfrm>
+            <a:off x="9107424" y="5376672"/>
+            <a:ext cx="2377440" cy="457200"/>
+          </a:xfrm>
+          <a:prstGeom prst="rect">
+            <a:avLst/>
+          </a:prstGeom>
+          <a:noFill/>
+        </p:spPr>
+        <p:txBody>
+          <a:bodyPr wrap="square" anchor="t" lIns="18288" rIns="18288" tIns="18288" bIns="18288">
+            <a:spAutoFit/>
+          </a:bodyPr>
+          <a:lstStyle/>
+          <a:p>
+            <a:pPr algn="l">
+              <a:spcAft>
+                <a:spcPts val="400"/>
+              </a:spcAft>
+            </a:pPr>
+            <a:r>
+              <a:rPr sz="2200" b="0">
+                <a:solidFill>
+                  <a:srgbClr val="B0412D"/>
+                </a:solidFill>
+                <a:latin typeface="Segoe UI Semibold"/>
+              </a:rPr>
+              <a:t>232</a:t>
+            </a:r>
+          </a:p>
+        </p:txBody>
+      </p:sp>
+      <p:sp>
+        <p:nvSpPr>
+          <p:cNvPr id="32" name="TextBox 31"/>
+          <p:cNvSpPr txBox="1"/>
+          <p:nvPr/>
+        </p:nvSpPr>
+        <p:spPr>
+          <a:xfrm>
+            <a:off x="9107424" y="5833872"/>
+            <a:ext cx="2377440" cy="320040"/>
+          </a:xfrm>
+          <a:prstGeom prst="rect">
+            <a:avLst/>
+          </a:prstGeom>
+          <a:noFill/>
+        </p:spPr>
+        <p:txBody>
+          <a:bodyPr wrap="square" anchor="t" lIns="18288" rIns="18288" tIns="18288" bIns="18288">
+            <a:spAutoFit/>
+          </a:bodyPr>
+          <a:lstStyle/>
+          <a:p>
+            <a:pPr algn="l">
+              <a:spcAft>
+                <a:spcPts val="400"/>
+              </a:spcAft>
+            </a:pPr>
+            <a:r>
+              <a:rPr sz="1050" b="0">
+                <a:solidFill>
+                  <a:srgbClr val="4B5765"/>
+                </a:solidFill>
+                <a:latin typeface="Segoe UI"/>
+              </a:rPr>
+              <a:t>with no learning activity</a:t>
+            </a:r>
+          </a:p>
+        </p:txBody>
+      </p:sp>
+      <p:cxnSp>
+        <p:nvCxnSpPr>
+          <p:cNvPr id="33" name="Connector 32"/>
+          <p:cNvCxnSpPr/>
+          <p:nvPr/>
+        </p:nvCxnSpPr>
+        <p:spPr>
+          <a:xfrm>
+            <a:off x="548640" y="6400800"/>
+            <a:ext cx="11094415" cy="0"/>
+          </a:xfrm>
+          <a:prstGeom prst="line">
+            <a:avLst/>
+          </a:prstGeom>
+          <a:ln w="9525">
+            <a:solidFill>
+              <a:srgbClr val="D4DAE1"/>
+            </a:solidFill>
+          </a:ln>
+        </p:spPr>
+      </p:cxnSp>
+      <p:sp>
+        <p:nvSpPr>
+          <p:cNvPr id="34" name="TextBox 33"/>
+          <p:cNvSpPr txBox="1"/>
+          <p:nvPr/>
+        </p:nvSpPr>
+        <p:spPr>
+          <a:xfrm>
+            <a:off x="548640" y="6455664"/>
+            <a:ext cx="7315200" cy="274320"/>
+          </a:xfrm>
+          <a:prstGeom prst="rect">
+            <a:avLst/>
+          </a:prstGeom>
+          <a:noFill/>
+        </p:spPr>
+        <p:txBody>
+          <a:bodyPr wrap="square" anchor="t" lIns="18288" rIns="18288" tIns="18288" bIns="18288">
+            <a:spAutoFit/>
+          </a:bodyPr>
+          <a:lstStyle/>
+          <a:p>
+            <a:pPr algn="l">
+              <a:spcAft>
+                <a:spcPts val="400"/>
+              </a:spcAft>
+            </a:pPr>
+            <a:r>
+              <a:rPr sz="900" b="0">
+                <a:solidFill>
+                  <a:srgbClr val="8A94A0"/>
+                </a:solidFill>
+                <a:latin typeface="Segoe UI"/>
+              </a:rPr>
+              <a:t>ACME Talent Lake  ·  Data Engineer track  ·  Coding Workshop 2026</a:t>
+            </a:r>
+          </a:p>
+        </p:txBody>
+      </p:sp>
+      <p:sp>
+        <p:nvSpPr>
+          <p:cNvPr id="35" name="TextBox 34"/>
+          <p:cNvSpPr txBox="1"/>
+          <p:nvPr/>
+        </p:nvSpPr>
+        <p:spPr>
+          <a:xfrm>
+            <a:off x="10698480" y="6455664"/>
+            <a:ext cx="941832" cy="274320"/>
+          </a:xfrm>
+          <a:prstGeom prst="rect">
+            <a:avLst/>
+          </a:prstGeom>
+          <a:noFill/>
+        </p:spPr>
+        <p:txBody>
+          <a:bodyPr wrap="square" anchor="t" lIns="18288" rIns="18288" tIns="18288" bIns="18288">
+            <a:spAutoFit/>
+          </a:bodyPr>
+          <a:lstStyle/>
+          <a:p>
+            <a:pPr algn="r">
+              <a:spcAft>
+                <a:spcPts val="400"/>
+              </a:spcAft>
+            </a:pPr>
+            <a:r>
+              <a:rPr sz="900" b="0">
+                <a:solidFill>
+                  <a:srgbClr val="8A94A0"/>
+                </a:solidFill>
+                <a:latin typeface="Segoe UI"/>
+              </a:rPr>
+              <a:t>7 / 10</a:t>
+            </a:r>
+          </a:p>
+        </p:txBody>
+      </p:sp>
+    </p:spTree>
+  </p:cSld>
+  <p:clrMapOvr>
+    <a:masterClrMapping/>
+  </p:clrMapOvr>
+</p:sld>
+</file>
+
+<file path=ppt/slides/slide8.xml><?xml version="1.0" encoding="utf-8"?>
+<p:sld xmlns:a="http://schemas.openxmlformats.org/drawingml/2006/main" xmlns:p="http://schemas.openxmlformats.org/presentationml/2006/main" xmlns:r="http://schemas.openxmlformats.org/officeDocument/2006/relationships">
+  <p:cSld>
+    <p:bg>
+      <p:bgPr>
+        <a:solidFill>
+          <a:srgbClr val="FFFFFF"/>
+        </a:solidFill>
+        <a:effectLst/>
+      </p:bgPr>
+    </p:bg>
+    <p:spTree>
+      <p:nvGrpSpPr>
+        <p:cNvPr id="1" name=""/>
+        <p:cNvGrpSpPr/>
+        <p:nvPr/>
+      </p:nvGrpSpPr>
+      <p:grpSpPr/>
+      <p:sp>
+        <p:nvSpPr>
+          <p:cNvPr id="2" name="TextBox 1"/>
+          <p:cNvSpPr txBox="1"/>
+          <p:nvPr/>
+        </p:nvSpPr>
+        <p:spPr>
+          <a:xfrm>
+            <a:off x="548640" y="292608"/>
+            <a:ext cx="8229600" cy="274320"/>
+          </a:xfrm>
+          <a:prstGeom prst="rect">
+            <a:avLst/>
+          </a:prstGeom>
+          <a:noFill/>
+        </p:spPr>
+        <p:txBody>
+          <a:bodyPr wrap="square" anchor="t" lIns="18288" rIns="18288" tIns="18288" bIns="18288">
+            <a:spAutoFit/>
+          </a:bodyPr>
+          <a:lstStyle/>
+          <a:p>
+            <a:pPr algn="l">
+              <a:spcAft>
+                <a:spcPts val="400"/>
+              </a:spcAft>
+            </a:pPr>
+            <a:r>
+              <a:rPr sz="1100" b="0">
+                <a:solidFill>
+                  <a:srgbClr val="1D4E89"/>
+                </a:solidFill>
+                <a:latin typeface="Segoe UI Semibold"/>
+              </a:rPr>
               <a:t>FINDINGS · Q5–Q7</a:t>
             </a:r>
           </a:p>
@@ -14912,7 +18705,7 @@
                 </a:solidFill>
                 <a:latin typeface="Segoe UI"/>
               </a:rPr>
-              <a:t>7 / 9</a:t>
+              <a:t>8 / 10</a:t>
             </a:r>
           </a:p>
         </p:txBody>
@@ -14925,7 +18718,7 @@
 </p:sld>
 </file>
 
-<file path=ppt/slides/slide8.xml><?xml version="1.0" encoding="utf-8"?>
+<file path=ppt/slides/slide9.xml><?xml version="1.0" encoding="utf-8"?>
 <p:sld xmlns:a="http://schemas.openxmlformats.org/drawingml/2006/main" xmlns:p="http://schemas.openxmlformats.org/presentationml/2006/main" xmlns:r="http://schemas.openxmlformats.org/officeDocument/2006/relationships">
   <p:cSld>
     <p:bg>
@@ -16240,7 +20033,7 @@
                 </a:solidFill>
                 <a:latin typeface="Segoe UI Semibold"/>
               </a:rPr>
-              <a:t>60</a:t>
+              <a:t>68</a:t>
             </a:r>
           </a:p>
         </p:txBody>
@@ -16318,7 +20111,7 @@
                 </a:solidFill>
                 <a:latin typeface="Segoe UI"/>
               </a:rPr>
-              <a:t>Contracts 15 · Silver 13 · Gold 17 · Bronze 6 · Dashboard 5 · Integration 4</a:t>
+              <a:t>Contracts 15 · Silver 20 · Gold 17 · Bronze 6 · Dashboard 5 · Integration 5</a:t>
             </a:r>
           </a:p>
           <a:p>
@@ -16433,944 +20226,7 @@
                 </a:solidFill>
                 <a:latin typeface="Segoe UI"/>
               </a:rPr>
-              <a:t>8 / 9</a:t>
-            </a:r>
-          </a:p>
-        </p:txBody>
-      </p:sp>
-    </p:spTree>
-  </p:cSld>
-  <p:clrMapOvr>
-    <a:masterClrMapping/>
-  </p:clrMapOvr>
-</p:sld>
-</file>
-
-<file path=ppt/slides/slide9.xml><?xml version="1.0" encoding="utf-8"?>
-<p:sld xmlns:a="http://schemas.openxmlformats.org/drawingml/2006/main" xmlns:p="http://schemas.openxmlformats.org/presentationml/2006/main" xmlns:r="http://schemas.openxmlformats.org/officeDocument/2006/relationships">
-  <p:cSld>
-    <p:bg>
-      <p:bgPr>
-        <a:solidFill>
-          <a:srgbClr val="FFFFFF"/>
-        </a:solidFill>
-        <a:effectLst/>
-      </p:bgPr>
-    </p:bg>
-    <p:spTree>
-      <p:nvGrpSpPr>
-        <p:cNvPr id="1" name=""/>
-        <p:cNvGrpSpPr/>
-        <p:nvPr/>
-      </p:nvGrpSpPr>
-      <p:grpSpPr/>
-      <p:sp>
-        <p:nvSpPr>
-          <p:cNvPr id="2" name="TextBox 1"/>
-          <p:cNvSpPr txBox="1"/>
-          <p:nvPr/>
-        </p:nvSpPr>
-        <p:spPr>
-          <a:xfrm>
-            <a:off x="548640" y="292608"/>
-            <a:ext cx="8229600" cy="274320"/>
-          </a:xfrm>
-          <a:prstGeom prst="rect">
-            <a:avLst/>
-          </a:prstGeom>
-          <a:noFill/>
-        </p:spPr>
-        <p:txBody>
-          <a:bodyPr wrap="square" anchor="t" lIns="18288" rIns="18288" tIns="18288" bIns="18288">
-            <a:spAutoFit/>
-          </a:bodyPr>
-          <a:lstStyle/>
-          <a:p>
-            <a:pPr algn="l">
-              <a:spcAft>
-                <a:spcPts val="400"/>
-              </a:spcAft>
-            </a:pPr>
-            <a:r>
-              <a:rPr sz="1100" b="0">
-                <a:solidFill>
-                  <a:srgbClr val="1D4E89"/>
-                </a:solidFill>
-                <a:latin typeface="Segoe UI Semibold"/>
-              </a:rPr>
-              <a:t>DECISIONS &amp; NEXT STEPS</a:t>
-            </a:r>
-          </a:p>
-        </p:txBody>
-      </p:sp>
-      <p:sp>
-        <p:nvSpPr>
-          <p:cNvPr id="3" name="TextBox 2"/>
-          <p:cNvSpPr txBox="1"/>
-          <p:nvPr/>
-        </p:nvSpPr>
-        <p:spPr>
-          <a:xfrm>
-            <a:off x="548640" y="566928"/>
-            <a:ext cx="11064240" cy="731520"/>
-          </a:xfrm>
-          <a:prstGeom prst="rect">
-            <a:avLst/>
-          </a:prstGeom>
-          <a:noFill/>
-        </p:spPr>
-        <p:txBody>
-          <a:bodyPr wrap="square" anchor="t" lIns="18288" rIns="18288" tIns="18288" bIns="18288">
-            <a:spAutoFit/>
-          </a:bodyPr>
-          <a:lstStyle/>
-          <a:p>
-            <a:pPr algn="l">
-              <a:spcAft>
-                <a:spcPts val="400"/>
-              </a:spcAft>
-            </a:pPr>
-            <a:r>
-              <a:rPr sz="2600" b="0">
-                <a:solidFill>
-                  <a:srgbClr val="17202A"/>
-                </a:solidFill>
-                <a:latin typeface="Segoe UI Semibold"/>
-              </a:rPr>
-              <a:t>Choices, limits and what comes next</a:t>
-            </a:r>
-          </a:p>
-        </p:txBody>
-      </p:sp>
-      <p:sp>
-        <p:nvSpPr>
-          <p:cNvPr id="4" name="Rounded Rectangle 3"/>
-          <p:cNvSpPr/>
-          <p:nvPr/>
-        </p:nvSpPr>
-        <p:spPr>
-          <a:xfrm>
-            <a:off x="548640" y="1463040"/>
-            <a:ext cx="3593592" cy="3063240"/>
-          </a:xfrm>
-          <a:prstGeom prst="roundRect">
-            <a:avLst>
-              <a:gd name="adj" fmla="val 6000"/>
-            </a:avLst>
-          </a:prstGeom>
-          <a:solidFill>
-            <a:srgbClr val="FFFFFF"/>
-          </a:solidFill>
-          <a:ln w="12700">
-            <a:solidFill>
-              <a:srgbClr val="D4DAE1"/>
-            </a:solidFill>
-          </a:ln>
-        </p:spPr>
-        <p:txBody>
-          <a:bodyPr rtlCol="0" anchor="ctr"/>
-          <a:lstStyle/>
-          <a:p/>
-        </p:txBody>
-      </p:sp>
-      <p:sp>
-        <p:nvSpPr>
-          <p:cNvPr id="5" name="TextBox 4"/>
-          <p:cNvSpPr txBox="1"/>
-          <p:nvPr/>
-        </p:nvSpPr>
-        <p:spPr>
-          <a:xfrm>
-            <a:off x="713232" y="1591056"/>
-            <a:ext cx="3264408" cy="365760"/>
-          </a:xfrm>
-          <a:prstGeom prst="rect">
-            <a:avLst/>
-          </a:prstGeom>
-          <a:noFill/>
-        </p:spPr>
-        <p:txBody>
-          <a:bodyPr wrap="square" anchor="t" lIns="18288" rIns="18288" tIns="18288" bIns="18288">
-            <a:spAutoFit/>
-          </a:bodyPr>
-          <a:lstStyle/>
-          <a:p>
-            <a:pPr algn="l">
-              <a:spcAft>
-                <a:spcPts val="400"/>
-              </a:spcAft>
-            </a:pPr>
-            <a:r>
-              <a:rPr sz="1400" b="0">
-                <a:solidFill>
-                  <a:srgbClr val="17202A"/>
-                </a:solidFill>
-                <a:latin typeface="Segoe UI Semibold"/>
-              </a:rPr>
-              <a:t>Decisions</a:t>
-            </a:r>
-          </a:p>
-        </p:txBody>
-      </p:sp>
-      <p:sp>
-        <p:nvSpPr>
-          <p:cNvPr id="6" name="TextBox 5"/>
-          <p:cNvSpPr txBox="1"/>
-          <p:nvPr/>
-        </p:nvSpPr>
-        <p:spPr>
-          <a:xfrm>
-            <a:off x="713232" y="1965960"/>
-            <a:ext cx="3264408" cy="2468880"/>
-          </a:xfrm>
-          <a:prstGeom prst="rect">
-            <a:avLst/>
-          </a:prstGeom>
-          <a:noFill/>
-        </p:spPr>
-        <p:txBody>
-          <a:bodyPr wrap="square" anchor="t" lIns="18288" rIns="18288" tIns="18288" bIns="18288">
-            <a:spAutoFit/>
-          </a:bodyPr>
-          <a:lstStyle/>
-          <a:p>
-            <a:pPr algn="l">
-              <a:spcAft>
-                <a:spcPts val="500"/>
-              </a:spcAft>
-            </a:pPr>
-            <a:r>
-              <a:rPr sz="1150" b="0">
-                <a:solidFill>
-                  <a:srgbClr val="4B5765"/>
-                </a:solidFill>
-                <a:latin typeface="Segoe UI"/>
-              </a:rPr>
-              <a:t>pandas + Parquet: seconds at this size, easy to test, Spark-ready layout</a:t>
-            </a:r>
-          </a:p>
-          <a:p>
-            <a:pPr algn="l">
-              <a:spcAft>
-                <a:spcPts val="500"/>
-              </a:spcAft>
-            </a:pPr>
-            <a:r>
-              <a:rPr sz="1150" b="0">
-                <a:solidFill>
-                  <a:srgbClr val="4B5765"/>
-                </a:solidFill>
-                <a:latin typeface="Segoe UI"/>
-              </a:rPr>
-              <a:t>LocalStack S3: one code path for local and cloud</a:t>
-            </a:r>
-          </a:p>
-          <a:p>
-            <a:pPr algn="l">
-              <a:spcAft>
-                <a:spcPts val="500"/>
-              </a:spcAft>
-            </a:pPr>
-            <a:r>
-              <a:rPr sz="1150" b="0">
-                <a:solidFill>
-                  <a:srgbClr val="4B5765"/>
-                </a:solidFill>
-                <a:latin typeface="Segoe UI"/>
-              </a:rPr>
-              <a:t>Quarantine, never drop: evidence kept, counts reconcile</a:t>
-            </a:r>
-          </a:p>
-          <a:p>
-            <a:pPr algn="l">
-              <a:spcAft>
-                <a:spcPts val="500"/>
-              </a:spcAft>
-            </a:pPr>
-            <a:r>
-              <a:rPr sz="1150" b="0">
-                <a:solidFill>
-                  <a:srgbClr val="4B5765"/>
-                </a:solidFill>
-                <a:latin typeface="Segoe UI"/>
-              </a:rPr>
-              <a:t>Transparent attrition score: managers see why</a:t>
-            </a:r>
-          </a:p>
-        </p:txBody>
-      </p:sp>
-      <p:sp>
-        <p:nvSpPr>
-          <p:cNvPr id="7" name="Rounded Rectangle 6"/>
-          <p:cNvSpPr/>
-          <p:nvPr/>
-        </p:nvSpPr>
-        <p:spPr>
-          <a:xfrm>
-            <a:off x="4297679" y="1463040"/>
-            <a:ext cx="3593592" cy="3063240"/>
-          </a:xfrm>
-          <a:prstGeom prst="roundRect">
-            <a:avLst>
-              <a:gd name="adj" fmla="val 6000"/>
-            </a:avLst>
-          </a:prstGeom>
-          <a:solidFill>
-            <a:srgbClr val="FFFFFF"/>
-          </a:solidFill>
-          <a:ln w="12700">
-            <a:solidFill>
-              <a:srgbClr val="D4DAE1"/>
-            </a:solidFill>
-          </a:ln>
-        </p:spPr>
-        <p:txBody>
-          <a:bodyPr rtlCol="0" anchor="ctr"/>
-          <a:lstStyle/>
-          <a:p/>
-        </p:txBody>
-      </p:sp>
-      <p:sp>
-        <p:nvSpPr>
-          <p:cNvPr id="8" name="TextBox 7"/>
-          <p:cNvSpPr txBox="1"/>
-          <p:nvPr/>
-        </p:nvSpPr>
-        <p:spPr>
-          <a:xfrm>
-            <a:off x="4462271" y="1591056"/>
-            <a:ext cx="3264408" cy="365760"/>
-          </a:xfrm>
-          <a:prstGeom prst="rect">
-            <a:avLst/>
-          </a:prstGeom>
-          <a:noFill/>
-        </p:spPr>
-        <p:txBody>
-          <a:bodyPr wrap="square" anchor="t" lIns="18288" rIns="18288" tIns="18288" bIns="18288">
-            <a:spAutoFit/>
-          </a:bodyPr>
-          <a:lstStyle/>
-          <a:p>
-            <a:pPr algn="l">
-              <a:spcAft>
-                <a:spcPts val="400"/>
-              </a:spcAft>
-            </a:pPr>
-            <a:r>
-              <a:rPr sz="1400" b="0">
-                <a:solidFill>
-                  <a:srgbClr val="B0412D"/>
-                </a:solidFill>
-                <a:latin typeface="Segoe UI Semibold"/>
-              </a:rPr>
-              <a:t>Limitations</a:t>
-            </a:r>
-          </a:p>
-        </p:txBody>
-      </p:sp>
-      <p:sp>
-        <p:nvSpPr>
-          <p:cNvPr id="9" name="TextBox 8"/>
-          <p:cNvSpPr txBox="1"/>
-          <p:nvPr/>
-        </p:nvSpPr>
-        <p:spPr>
-          <a:xfrm>
-            <a:off x="4462271" y="1965960"/>
-            <a:ext cx="3264408" cy="2468880"/>
-          </a:xfrm>
-          <a:prstGeom prst="rect">
-            <a:avLst/>
-          </a:prstGeom>
-          <a:noFill/>
-        </p:spPr>
-        <p:txBody>
-          <a:bodyPr wrap="square" anchor="t" lIns="18288" rIns="18288" tIns="18288" bIns="18288">
-            <a:spAutoFit/>
-          </a:bodyPr>
-          <a:lstStyle/>
-          <a:p>
-            <a:pPr algn="l">
-              <a:spcAft>
-                <a:spcPts val="500"/>
-              </a:spcAft>
-            </a:pPr>
-            <a:r>
-              <a:rPr sz="1150" b="0">
-                <a:solidFill>
-                  <a:srgbClr val="4B5765"/>
-                </a:solidFill>
-                <a:latin typeface="Segoe UI"/>
-              </a:rPr>
-              <a:t>Two review periods: one trend step per person</a:t>
-            </a:r>
-          </a:p>
-          <a:p>
-            <a:pPr algn="l">
-              <a:spcAft>
-                <a:spcPts val="500"/>
-              </a:spcAft>
-            </a:pPr>
-            <a:r>
-              <a:rPr sz="1150" b="0">
-                <a:solidFill>
-                  <a:srgbClr val="4B5765"/>
-                </a:solidFill>
-                <a:latin typeface="Segoe UI"/>
-              </a:rPr>
-              <a:t>Q6 rests on 27 teams: indicative only</a:t>
-            </a:r>
-          </a:p>
-          <a:p>
-            <a:pPr algn="l">
-              <a:spcAft>
-                <a:spcPts val="500"/>
-              </a:spcAft>
-            </a:pPr>
-            <a:r>
-              <a:rPr sz="1150" b="0">
-                <a:solidFill>
-                  <a:srgbClr val="4B5765"/>
-                </a:solidFill>
-                <a:latin typeface="Segoe UI"/>
-              </a:rPr>
-              <a:t>Manager potential barely tracks performance</a:t>
-            </a:r>
-          </a:p>
-          <a:p>
-            <a:pPr algn="l">
-              <a:spcAft>
-                <a:spcPts val="500"/>
-              </a:spcAft>
-            </a:pPr>
-            <a:r>
-              <a:rPr sz="1150" b="0">
-                <a:solidFill>
-                  <a:srgbClr val="4B5765"/>
-                </a:solidFill>
-                <a:latin typeface="Segoe UI"/>
-              </a:rPr>
-              <a:t>143 events unusable until the source fixes them</a:t>
-            </a:r>
-          </a:p>
-        </p:txBody>
-      </p:sp>
-      <p:sp>
-        <p:nvSpPr>
-          <p:cNvPr id="10" name="Rounded Rectangle 9"/>
-          <p:cNvSpPr/>
-          <p:nvPr/>
-        </p:nvSpPr>
-        <p:spPr>
-          <a:xfrm>
-            <a:off x="8046719" y="1463040"/>
-            <a:ext cx="3593592" cy="3063240"/>
-          </a:xfrm>
-          <a:prstGeom prst="roundRect">
-            <a:avLst>
-              <a:gd name="adj" fmla="val 6000"/>
-            </a:avLst>
-          </a:prstGeom>
-          <a:solidFill>
-            <a:srgbClr val="FFFFFF"/>
-          </a:solidFill>
-          <a:ln w="12700">
-            <a:solidFill>
-              <a:srgbClr val="D4DAE1"/>
-            </a:solidFill>
-          </a:ln>
-        </p:spPr>
-        <p:txBody>
-          <a:bodyPr rtlCol="0" anchor="ctr"/>
-          <a:lstStyle/>
-          <a:p/>
-        </p:txBody>
-      </p:sp>
-      <p:sp>
-        <p:nvSpPr>
-          <p:cNvPr id="11" name="TextBox 10"/>
-          <p:cNvSpPr txBox="1"/>
-          <p:nvPr/>
-        </p:nvSpPr>
-        <p:spPr>
-          <a:xfrm>
-            <a:off x="8211311" y="1591056"/>
-            <a:ext cx="3264408" cy="365760"/>
-          </a:xfrm>
-          <a:prstGeom prst="rect">
-            <a:avLst/>
-          </a:prstGeom>
-          <a:noFill/>
-        </p:spPr>
-        <p:txBody>
-          <a:bodyPr wrap="square" anchor="t" lIns="18288" rIns="18288" tIns="18288" bIns="18288">
-            <a:spAutoFit/>
-          </a:bodyPr>
-          <a:lstStyle/>
-          <a:p>
-            <a:pPr algn="l">
-              <a:spcAft>
-                <a:spcPts val="400"/>
-              </a:spcAft>
-            </a:pPr>
-            <a:r>
-              <a:rPr sz="1400" b="0">
-                <a:solidFill>
-                  <a:srgbClr val="2D7449"/>
-                </a:solidFill>
-                <a:latin typeface="Segoe UI Semibold"/>
-              </a:rPr>
-              <a:t>Next steps</a:t>
-            </a:r>
-          </a:p>
-        </p:txBody>
-      </p:sp>
-      <p:sp>
-        <p:nvSpPr>
-          <p:cNvPr id="12" name="TextBox 11"/>
-          <p:cNvSpPr txBox="1"/>
-          <p:nvPr/>
-        </p:nvSpPr>
-        <p:spPr>
-          <a:xfrm>
-            <a:off x="8211311" y="1965960"/>
-            <a:ext cx="3264408" cy="2468880"/>
-          </a:xfrm>
-          <a:prstGeom prst="rect">
-            <a:avLst/>
-          </a:prstGeom>
-          <a:noFill/>
-        </p:spPr>
-        <p:txBody>
-          <a:bodyPr wrap="square" anchor="t" lIns="18288" rIns="18288" tIns="18288" bIns="18288">
-            <a:spAutoFit/>
-          </a:bodyPr>
-          <a:lstStyle/>
-          <a:p>
-            <a:pPr algn="l">
-              <a:spcAft>
-                <a:spcPts val="500"/>
-              </a:spcAft>
-            </a:pPr>
-            <a:r>
-              <a:rPr sz="1150" b="0">
-                <a:solidFill>
-                  <a:srgbClr val="4B5765"/>
-                </a:solidFill>
-                <a:latin typeface="Segoe UI"/>
-              </a:rPr>
-              <a:t>Change history (SCD Type 2) for HR records</a:t>
-            </a:r>
-          </a:p>
-          <a:p>
-            <a:pPr algn="l">
-              <a:spcAft>
-                <a:spcPts val="500"/>
-              </a:spcAft>
-            </a:pPr>
-            <a:r>
-              <a:rPr sz="1150" b="0">
-                <a:solidFill>
-                  <a:srgbClr val="4B5765"/>
-                </a:solidFill>
-                <a:latin typeface="Segoe UI"/>
-              </a:rPr>
-              <a:t>Four small infra/ changes so deploy-backend.sh runs the job</a:t>
-            </a:r>
-          </a:p>
-          <a:p>
-            <a:pPr algn="l">
-              <a:spcAft>
-                <a:spcPts val="500"/>
-              </a:spcAft>
-            </a:pPr>
-            <a:r>
-              <a:rPr sz="1150" b="0">
-                <a:solidFill>
-                  <a:srgbClr val="4B5765"/>
-                </a:solidFill>
-                <a:latin typeface="Segoe UI"/>
-              </a:rPr>
-              <a:t>Scheduled runs (CronJob) with alerts</a:t>
-            </a:r>
-          </a:p>
-          <a:p>
-            <a:pPr algn="l">
-              <a:spcAft>
-                <a:spcPts val="500"/>
-              </a:spcAft>
-            </a:pPr>
-            <a:r>
-              <a:rPr sz="1150" b="0">
-                <a:solidFill>
-                  <a:srgbClr val="4B5765"/>
-                </a:solidFill>
-                <a:latin typeface="Segoe UI"/>
-              </a:rPr>
-              <a:t>SQL over Gold; HTTPS and sign-in for the dashboard</a:t>
-            </a:r>
-          </a:p>
-        </p:txBody>
-      </p:sp>
-      <p:sp>
-        <p:nvSpPr>
-          <p:cNvPr id="13" name="Rounded Rectangle 12"/>
-          <p:cNvSpPr/>
-          <p:nvPr/>
-        </p:nvSpPr>
-        <p:spPr>
-          <a:xfrm>
-            <a:off x="548640" y="4709160"/>
-            <a:ext cx="11091672" cy="1463040"/>
-          </a:xfrm>
-          <a:prstGeom prst="roundRect">
-            <a:avLst>
-              <a:gd name="adj" fmla="val 6000"/>
-            </a:avLst>
-          </a:prstGeom>
-          <a:solidFill>
-            <a:srgbClr val="F4F6F8"/>
-          </a:solidFill>
-          <a:ln>
-            <a:noFill/>
-          </a:ln>
-        </p:spPr>
-        <p:txBody>
-          <a:bodyPr rtlCol="0" anchor="ctr"/>
-          <a:lstStyle/>
-          <a:p/>
-        </p:txBody>
-      </p:sp>
-      <p:sp>
-        <p:nvSpPr>
-          <p:cNvPr id="14" name="TextBox 13"/>
-          <p:cNvSpPr txBox="1"/>
-          <p:nvPr/>
-        </p:nvSpPr>
-        <p:spPr>
-          <a:xfrm>
-            <a:off x="777240" y="4846320"/>
-            <a:ext cx="1463040" cy="365760"/>
-          </a:xfrm>
-          <a:prstGeom prst="rect">
-            <a:avLst/>
-          </a:prstGeom>
-          <a:noFill/>
-        </p:spPr>
-        <p:txBody>
-          <a:bodyPr wrap="square" anchor="t" lIns="18288" rIns="18288" tIns="18288" bIns="18288">
-            <a:spAutoFit/>
-          </a:bodyPr>
-          <a:lstStyle/>
-          <a:p>
-            <a:pPr algn="l">
-              <a:spcAft>
-                <a:spcPts val="400"/>
-              </a:spcAft>
-            </a:pPr>
-            <a:r>
-              <a:rPr sz="1200" b="0">
-                <a:solidFill>
-                  <a:srgbClr val="4B5765"/>
-                </a:solidFill>
-                <a:latin typeface="Segoe UI Semibold"/>
-              </a:rPr>
-              <a:t>Code</a:t>
-            </a:r>
-          </a:p>
-        </p:txBody>
-      </p:sp>
-      <p:sp>
-        <p:nvSpPr>
-          <p:cNvPr id="15" name="TextBox 14"/>
-          <p:cNvSpPr txBox="1"/>
-          <p:nvPr/>
-        </p:nvSpPr>
-        <p:spPr>
-          <a:xfrm>
-            <a:off x="2286000" y="4846320"/>
-            <a:ext cx="9235440" cy="365760"/>
-          </a:xfrm>
-          <a:prstGeom prst="rect">
-            <a:avLst/>
-          </a:prstGeom>
-          <a:noFill/>
-        </p:spPr>
-        <p:txBody>
-          <a:bodyPr wrap="square" anchor="t" lIns="18288" rIns="18288" tIns="18288" bIns="18288">
-            <a:spAutoFit/>
-          </a:bodyPr>
-          <a:lstStyle/>
-          <a:p>
-            <a:pPr algn="l">
-              <a:spcAft>
-                <a:spcPts val="400"/>
-              </a:spcAft>
-            </a:pPr>
-            <a:r>
-              <a:rPr sz="1200" b="0">
-                <a:solidFill>
-                  <a:srgbClr val="1D4E89"/>
-                </a:solidFill>
-                <a:latin typeface="Consolas"/>
-              </a:rPr>
-              <a:t>github.com/palash27114/palash-workshop-participant</a:t>
-            </a:r>
-          </a:p>
-        </p:txBody>
-      </p:sp>
-      <p:sp>
-        <p:nvSpPr>
-          <p:cNvPr id="16" name="TextBox 15"/>
-          <p:cNvSpPr txBox="1"/>
-          <p:nvPr/>
-        </p:nvSpPr>
-        <p:spPr>
-          <a:xfrm>
-            <a:off x="777240" y="5257800"/>
-            <a:ext cx="1463040" cy="365760"/>
-          </a:xfrm>
-          <a:prstGeom prst="rect">
-            <a:avLst/>
-          </a:prstGeom>
-          <a:noFill/>
-        </p:spPr>
-        <p:txBody>
-          <a:bodyPr wrap="square" anchor="t" lIns="18288" rIns="18288" tIns="18288" bIns="18288">
-            <a:spAutoFit/>
-          </a:bodyPr>
-          <a:lstStyle/>
-          <a:p>
-            <a:pPr algn="l">
-              <a:spcAft>
-                <a:spcPts val="400"/>
-              </a:spcAft>
-            </a:pPr>
-            <a:r>
-              <a:rPr sz="1200" b="0">
-                <a:solidFill>
-                  <a:srgbClr val="4B5765"/>
-                </a:solidFill>
-                <a:latin typeface="Segoe UI Semibold"/>
-              </a:rPr>
-              <a:t>Dashboard</a:t>
-            </a:r>
-          </a:p>
-        </p:txBody>
-      </p:sp>
-      <p:sp>
-        <p:nvSpPr>
-          <p:cNvPr id="17" name="TextBox 16"/>
-          <p:cNvSpPr txBox="1"/>
-          <p:nvPr/>
-        </p:nvSpPr>
-        <p:spPr>
-          <a:xfrm>
-            <a:off x="2286000" y="5257800"/>
-            <a:ext cx="9235440" cy="365760"/>
-          </a:xfrm>
-          <a:prstGeom prst="rect">
-            <a:avLst/>
-          </a:prstGeom>
-          <a:noFill/>
-        </p:spPr>
-        <p:txBody>
-          <a:bodyPr wrap="square" anchor="t" lIns="18288" rIns="18288" tIns="18288" bIns="18288">
-            <a:spAutoFit/>
-          </a:bodyPr>
-          <a:lstStyle/>
-          <a:p>
-            <a:pPr algn="l">
-              <a:spcAft>
-                <a:spcPts val="400"/>
-              </a:spcAft>
-            </a:pPr>
-            <a:r>
-              <a:rPr sz="1200" b="0">
-                <a:solidFill>
-                  <a:srgbClr val="1D4E89"/>
-                </a:solidFill>
-                <a:latin typeface="Consolas"/>
-              </a:rPr>
-              <a:t>http://a7040ba0173884c8ea4e7917083a0a9d-1383856101.ap-south-1.elb.amazonaws.com</a:t>
-            </a:r>
-          </a:p>
-        </p:txBody>
-      </p:sp>
-      <p:sp>
-        <p:nvSpPr>
-          <p:cNvPr id="18" name="TextBox 17"/>
-          <p:cNvSpPr txBox="1"/>
-          <p:nvPr/>
-        </p:nvSpPr>
-        <p:spPr>
-          <a:xfrm>
-            <a:off x="777240" y="5669280"/>
-            <a:ext cx="1463040" cy="365760"/>
-          </a:xfrm>
-          <a:prstGeom prst="rect">
-            <a:avLst/>
-          </a:prstGeom>
-          <a:noFill/>
-        </p:spPr>
-        <p:txBody>
-          <a:bodyPr wrap="square" anchor="t" lIns="18288" rIns="18288" tIns="18288" bIns="18288">
-            <a:spAutoFit/>
-          </a:bodyPr>
-          <a:lstStyle/>
-          <a:p>
-            <a:pPr algn="l">
-              <a:spcAft>
-                <a:spcPts val="400"/>
-              </a:spcAft>
-            </a:pPr>
-            <a:r>
-              <a:rPr sz="1200" b="0">
-                <a:solidFill>
-                  <a:srgbClr val="4B5765"/>
-                </a:solidFill>
-                <a:latin typeface="Segoe UI Semibold"/>
-              </a:rPr>
-              <a:t>Run in AWS</a:t>
-            </a:r>
-          </a:p>
-        </p:txBody>
-      </p:sp>
-      <p:sp>
-        <p:nvSpPr>
-          <p:cNvPr id="19" name="TextBox 18"/>
-          <p:cNvSpPr txBox="1"/>
-          <p:nvPr/>
-        </p:nvSpPr>
-        <p:spPr>
-          <a:xfrm>
-            <a:off x="2286000" y="5669280"/>
-            <a:ext cx="9235440" cy="365760"/>
-          </a:xfrm>
-          <a:prstGeom prst="rect">
-            <a:avLst/>
-          </a:prstGeom>
-          <a:noFill/>
-        </p:spPr>
-        <p:txBody>
-          <a:bodyPr wrap="square" anchor="t" lIns="18288" rIns="18288" tIns="18288" bIns="18288">
-            <a:spAutoFit/>
-          </a:bodyPr>
-          <a:lstStyle/>
-          <a:p>
-            <a:pPr algn="l">
-              <a:spcAft>
-                <a:spcPts val="400"/>
-              </a:spcAft>
-            </a:pPr>
-            <a:r>
-              <a:rPr sz="1200" b="0">
-                <a:solidFill>
-                  <a:srgbClr val="1D4E89"/>
-                </a:solidFill>
-                <a:latin typeface="Consolas"/>
-              </a:rPr>
-              <a:t>data/talent-etl/deploy/cloud_run.sh</a:t>
-            </a:r>
-          </a:p>
-        </p:txBody>
-      </p:sp>
-      <p:cxnSp>
-        <p:nvCxnSpPr>
-          <p:cNvPr id="20" name="Connector 19"/>
-          <p:cNvCxnSpPr/>
-          <p:nvPr/>
-        </p:nvCxnSpPr>
-        <p:spPr>
-          <a:xfrm>
-            <a:off x="548640" y="6400800"/>
-            <a:ext cx="11094415" cy="0"/>
-          </a:xfrm>
-          <a:prstGeom prst="line">
-            <a:avLst/>
-          </a:prstGeom>
-          <a:ln w="9525">
-            <a:solidFill>
-              <a:srgbClr val="D4DAE1"/>
-            </a:solidFill>
-          </a:ln>
-        </p:spPr>
-      </p:cxnSp>
-      <p:sp>
-        <p:nvSpPr>
-          <p:cNvPr id="21" name="TextBox 20"/>
-          <p:cNvSpPr txBox="1"/>
-          <p:nvPr/>
-        </p:nvSpPr>
-        <p:spPr>
-          <a:xfrm>
-            <a:off x="548640" y="6455664"/>
-            <a:ext cx="7315200" cy="274320"/>
-          </a:xfrm>
-          <a:prstGeom prst="rect">
-            <a:avLst/>
-          </a:prstGeom>
-          <a:noFill/>
-        </p:spPr>
-        <p:txBody>
-          <a:bodyPr wrap="square" anchor="t" lIns="18288" rIns="18288" tIns="18288" bIns="18288">
-            <a:spAutoFit/>
-          </a:bodyPr>
-          <a:lstStyle/>
-          <a:p>
-            <a:pPr algn="l">
-              <a:spcAft>
-                <a:spcPts val="400"/>
-              </a:spcAft>
-            </a:pPr>
-            <a:r>
-              <a:rPr sz="900" b="0">
-                <a:solidFill>
-                  <a:srgbClr val="8A94A0"/>
-                </a:solidFill>
-                <a:latin typeface="Segoe UI"/>
-              </a:rPr>
-              <a:t>ACME Talent Lake  ·  Data Engineer track  ·  Coding Workshop 2026</a:t>
-            </a:r>
-          </a:p>
-        </p:txBody>
-      </p:sp>
-      <p:sp>
-        <p:nvSpPr>
-          <p:cNvPr id="22" name="TextBox 21"/>
-          <p:cNvSpPr txBox="1"/>
-          <p:nvPr/>
-        </p:nvSpPr>
-        <p:spPr>
-          <a:xfrm>
-            <a:off x="10698480" y="6455664"/>
-            <a:ext cx="941832" cy="274320"/>
-          </a:xfrm>
-          <a:prstGeom prst="rect">
-            <a:avLst/>
-          </a:prstGeom>
-          <a:noFill/>
-        </p:spPr>
-        <p:txBody>
-          <a:bodyPr wrap="square" anchor="t" lIns="18288" rIns="18288" tIns="18288" bIns="18288">
-            <a:spAutoFit/>
-          </a:bodyPr>
-          <a:lstStyle/>
-          <a:p>
-            <a:pPr algn="r">
-              <a:spcAft>
-                <a:spcPts val="400"/>
-              </a:spcAft>
-            </a:pPr>
-            <a:r>
-              <a:rPr sz="900" b="0">
-                <a:solidFill>
-                  <a:srgbClr val="8A94A0"/>
-                </a:solidFill>
-                <a:latin typeface="Segoe UI"/>
-              </a:rPr>
-              <a:t>9 / 9</a:t>
+              <a:t>9 / 10</a:t>
             </a:r>
           </a:p>
         </p:txBody>

--- a/data/talent-etl/presentation/ACME_Talent_Lake.pptx
+++ b/data/talent-etl/presentation/ACME_Talent_Lake.pptx
@@ -15,6 +15,7 @@
     <p:sldId id="263" r:id="rId15"/>
     <p:sldId id="264" r:id="rId16"/>
     <p:sldId id="265" r:id="rId17"/>
+    <p:sldId id="266" r:id="rId18"/>
   </p:sldIdLst>
   <p:sldSz cx="12191695" cy="6858000" type="screen4x3"/>
   <p:notesSz cx="6858000" cy="9144000"/>
@@ -1717,6 +1718,76 @@
           <a:lstStyle/>
           <a:p>
             <a:r>
+              <a:t>job.py is identical locally and in AWS; environment variables decide the rest. In AWS it runs as a Kubernetes Job on the workshop EKS cluster, reads Aurora and writes Amazon S3: 60 seconds, identical answers. The stock EKS template only supports a single-file job with no settings or AWS access; I kept infra/ and bin/ untouched and closed each gap with small scripts in the project. 60 automated tests, including end-to-end runs.</a:t>
+            </a:r>
+          </a:p>
+        </p:txBody>
+      </p:sp>
+      <p:sp>
+        <p:nvSpPr>
+          <p:cNvPr id="4" name="Slide Number Placeholder 3"/>
+          <p:cNvSpPr>
+            <a:spLocks noGrp="1"/>
+          </p:cNvSpPr>
+          <p:nvPr>
+            <p:ph type="sldNum" idx="5" sz="quarter"/>
+          </p:nvPr>
+        </p:nvSpPr>
+        <p:spPr/>
+      </p:sp>
+    </p:spTree>
+  </p:cSld>
+  <p:clrMapOvr>
+    <a:masterClrMapping/>
+  </p:clrMapOvr>
+</p:notes>
+</file>
+
+<file path=ppt/notesSlides/notesSlide11.xml><?xml version="1.0" encoding="utf-8"?>
+<p:notes xmlns:a="http://schemas.openxmlformats.org/drawingml/2006/main" xmlns:p="http://schemas.openxmlformats.org/presentationml/2006/main" xmlns:r="http://schemas.openxmlformats.org/officeDocument/2006/relationships">
+  <p:cSld>
+    <p:spTree>
+      <p:nvGrpSpPr>
+        <p:cNvPr id="1" name=""/>
+        <p:cNvGrpSpPr/>
+        <p:nvPr/>
+      </p:nvGrpSpPr>
+      <p:grpSpPr>
+        <a:xfrm>
+          <a:off x="0" y="0"/>
+          <a:ext cx="0" cy="0"/>
+          <a:chOff x="0" y="0"/>
+          <a:chExt cx="0" cy="0"/>
+        </a:xfrm>
+      </p:grpSpPr>
+      <p:sp>
+        <p:nvSpPr>
+          <p:cNvPr id="2" name="Slide Image Placeholder 1"/>
+          <p:cNvSpPr>
+            <a:spLocks noGrp="1"/>
+          </p:cNvSpPr>
+          <p:nvPr>
+            <p:ph type="sldImg" idx="2"/>
+          </p:nvPr>
+        </p:nvSpPr>
+        <p:spPr/>
+      </p:sp>
+      <p:sp>
+        <p:nvSpPr>
+          <p:cNvPr id="3" name="Notes Placeholder 2"/>
+          <p:cNvSpPr>
+            <a:spLocks noGrp="1"/>
+          </p:cNvSpPr>
+          <p:nvPr>
+            <p:ph type="body" idx="3" sz="quarter"/>
+          </p:nvPr>
+        </p:nvSpPr>
+        <p:spPr/>
+        <p:txBody>
+          <a:bodyPr/>
+          <a:lstStyle/>
+          <a:p>
+            <a:r>
               <a:t>Key decisions: pandas because the data is small and pure functions are testable; one code path via LocalStack S3; quarantine instead of dropping; a transparent attrition score. Limits: two review periods, 27 teams for Q6, a weak potential rating, 143 unusable events, plain-HTTP dashboard. Next: change history (SCD Type 2), the four small infra changes, scheduling, SQL over Gold and HTTPS. Then demo: cloud_run.sh, the dashboard, the notebook.</a:t>
             </a:r>
           </a:p>
@@ -2067,7 +2138,7 @@
           <a:lstStyle/>
           <a:p>
             <a:r>
-              <a:t>Gold is organised by question. Each table is a pure function of Silver with business rules as named constants, so a threshold is a one-line change. Before publishing, row counts must match the Silver population, totals must add back up, and every row must obey its rule. Lineage exists at run, row and column level, so any Gold number traces back to a source file and line.</a:t>
+              <a:t>Before loading anything, the pipeline asks each source whether it changed since the last run. For S3 files this is built today: each file's ETag is compared with the watermark in _state, and an unchanged file is skipped (a rerun copied 0 of 783 files). For PostgreSQL the design compares a checksum of each table export with the MD5 already stored in the last Bronze manifest; if nothing changed anywhere, the run records a no-op and skips Silver and Gold. Results are identical either way, because every layer is idempotent; change detection only saves work and avoids duplicate snapshots.</a:t>
             </a:r>
           </a:p>
         </p:txBody>
@@ -2137,7 +2208,7 @@
           <a:lstStyle/>
           <a:p>
             <a:r>
-              <a:t>Q1: average latest rating 3.41; 898 improved, 872 stable, 230 declined. Q2: a critical gap is two or more levels short, or any shortfall where the role needs level 4+; 465 gaps across 441 people, Stakeholder Management most common, HR department highest share (28%). Q3: ready now = high potential, readiness 'Ready Now', no critical gaps; 124 people; 28 high-potential employees are at high attrition risk. Q4: 1.75 courses per person, 41% quiz pass rate, 232 with no learning activity at all.</a:t>
+              <a:t>Gold is organised by question. Each table is a pure function of Silver with business rules as named constants, so a threshold is a one-line change. Before publishing, row counts must match the Silver population, totals must add back up, and every row must obey its rule. Lineage exists at run, row and column level, so any Gold number traces back to a source file and line.</a:t>
             </a:r>
           </a:p>
         </p:txBody>
@@ -2207,7 +2278,7 @@
           <a:lstStyle/>
           <a:p>
             <a:r>
-              <a:t>Q5 is a transparent points score: rating fell +2, latest rating 2 or below +2, negative manager comment +1, no learning in 180 days +1, manager flag High +2 or Medium +1; 5 or more is High. Managers flagged 311 as high risk; only 145 also show performance warning signs, and 67 score high without a flag. Q6 is team level because projects belong to teams: on-time teams have 56% high performers versus 43% for all-delayed teams, from 27 teams. Q7: Stakeholder Management has the weakest coverage of required levels at 65%; a third of assessments are at level 1–2.</a:t>
+              <a:t>Q1: average latest rating 3.41; 898 improved, 872 stable, 230 declined. Q2: a critical gap is two or more levels short, or any shortfall where the role needs level 4+; 465 gaps across 441 people, Stakeholder Management most common, HR department highest share (28%). Q3: ready now = high potential, readiness 'Ready Now', no critical gaps; 124 people; 28 high-potential employees are at high attrition risk. Q4: 1.75 courses per person, 41% quiz pass rate, 232 with no learning activity at all.</a:t>
             </a:r>
           </a:p>
         </p:txBody>
@@ -2277,7 +2348,7 @@
           <a:lstStyle/>
           <a:p>
             <a:r>
-              <a:t>job.py is identical locally and in AWS; environment variables decide the rest. In AWS it runs as a Kubernetes Job on the workshop EKS cluster, reads Aurora and writes Amazon S3: 60 seconds, identical answers. The stock EKS template only supports a single-file job with no settings or AWS access; I kept infra/ and bin/ untouched and closed each gap with small scripts in the project. 60 automated tests, including end-to-end runs.</a:t>
+              <a:t>Q5 is a transparent points score: rating fell +2, latest rating 2 or below +2, negative manager comment +1, no learning in 180 days +1, manager flag High +2 or Medium +1; 5 or more is High. Managers flagged 311 as high risk; only 145 also show performance warning signs, and 67 score high without a flag. Q6 is team level because projects belong to teams: on-time teams have 56% high performers versus 43% for all-delayed teams, from 27 teams. Q7: Stakeholder Management has the weakest coverage of required levels at 65%; a third of assessments are at level 1–2.</a:t>
             </a:r>
           </a:p>
         </p:txBody>
@@ -5843,6 +5914,1527 @@
                 </a:solidFill>
                 <a:latin typeface="Segoe UI Semibold"/>
               </a:rPr>
+              <a:t>DEPLOYMENT &amp; TESTING</a:t>
+            </a:r>
+          </a:p>
+        </p:txBody>
+      </p:sp>
+      <p:sp>
+        <p:nvSpPr>
+          <p:cNvPr id="3" name="TextBox 2"/>
+          <p:cNvSpPr txBox="1"/>
+          <p:nvPr/>
+        </p:nvSpPr>
+        <p:spPr>
+          <a:xfrm>
+            <a:off x="548640" y="566928"/>
+            <a:ext cx="11064240" cy="731520"/>
+          </a:xfrm>
+          <a:prstGeom prst="rect">
+            <a:avLst/>
+          </a:prstGeom>
+          <a:noFill/>
+        </p:spPr>
+        <p:txBody>
+          <a:bodyPr wrap="square" anchor="t" lIns="18288" rIns="18288" tIns="18288" bIns="18288">
+            <a:spAutoFit/>
+          </a:bodyPr>
+          <a:lstStyle/>
+          <a:p>
+            <a:pPr algn="l">
+              <a:spcAft>
+                <a:spcPts val="400"/>
+              </a:spcAft>
+            </a:pPr>
+            <a:r>
+              <a:rPr sz="2600" b="0">
+                <a:solidFill>
+                  <a:srgbClr val="17202A"/>
+                </a:solidFill>
+                <a:latin typeface="Segoe UI Semibold"/>
+              </a:rPr>
+              <a:t>Same code locally and on AWS, tested at every layer</a:t>
+            </a:r>
+          </a:p>
+        </p:txBody>
+      </p:sp>
+      <p:graphicFrame>
+        <p:nvGraphicFramePr>
+          <p:cNvPr id="4" name="Table 3"/>
+          <p:cNvGraphicFramePr>
+            <a:graphicFrameLocks noGrp="1"/>
+          </p:cNvGraphicFramePr>
+          <p:nvPr/>
+        </p:nvGraphicFramePr>
+        <p:xfrm>
+          <a:off x="548640" y="1463040"/>
+          <a:ext cx="5422392" cy="2286000"/>
+        </p:xfrm>
+        <a:graphic>
+          <a:graphicData uri="http://schemas.openxmlformats.org/drawingml/2006/table">
+            <a:tbl>
+              <a:tblPr firstRow="1">
+                <a:tableStyleId>{5C22544A-7EE6-4342-B048-85BDC9FD1C3A}</a:tableStyleId>
+              </a:tblPr>
+              <a:tblGrid>
+                <a:gridCol w="1234440"/>
+                <a:gridCol w="1901952"/>
+                <a:gridCol w="2286000"/>
+              </a:tblGrid>
+              <a:tr h="457200">
+                <a:tc>
+                  <a:txBody>
+                    <a:bodyPr wrap="square"/>
+                    <a:lstStyle/>
+                    <a:p>
+                      <a:pPr algn="l"/>
+                      <a:r>
+                        <a:rPr sz="1100" b="1">
+                          <a:solidFill>
+                            <a:srgbClr val="4B5765"/>
+                          </a:solidFill>
+                          <a:latin typeface="Segoe UI Semibold"/>
+                        </a:rPr>
+                        <a:t/>
+                      </a:r>
+                    </a:p>
+                  </a:txBody>
+                  <a:tcPr marL="82296" marR="82296" marT="36576" marB="36576" anchor="ctr">
+                    <a:solidFill>
+                      <a:srgbClr val="F4F6F8"/>
+                    </a:solidFill>
+                    <a:lnL w="6350">
+                      <a:solidFill>
+                        <a:srgbClr val="D4DAE1"/>
+                      </a:solidFill>
+                    </a:lnL>
+                    <a:lnR w="6350">
+                      <a:solidFill>
+                        <a:srgbClr val="D4DAE1"/>
+                      </a:solidFill>
+                    </a:lnR>
+                    <a:lnT w="6350">
+                      <a:solidFill>
+                        <a:srgbClr val="D4DAE1"/>
+                      </a:solidFill>
+                    </a:lnT>
+                    <a:lnB w="6350">
+                      <a:solidFill>
+                        <a:srgbClr val="D4DAE1"/>
+                      </a:solidFill>
+                    </a:lnB>
+                  </a:tcPr>
+                </a:tc>
+                <a:tc>
+                  <a:txBody>
+                    <a:bodyPr wrap="square"/>
+                    <a:lstStyle/>
+                    <a:p>
+                      <a:pPr algn="l"/>
+                      <a:r>
+                        <a:rPr sz="1100" b="1">
+                          <a:solidFill>
+                            <a:srgbClr val="4B5765"/>
+                          </a:solidFill>
+                          <a:latin typeface="Segoe UI Semibold"/>
+                        </a:rPr>
+                        <a:t>Local (VDI)</a:t>
+                      </a:r>
+                    </a:p>
+                  </a:txBody>
+                  <a:tcPr marL="82296" marR="82296" marT="36576" marB="36576" anchor="ctr">
+                    <a:solidFill>
+                      <a:srgbClr val="F4F6F8"/>
+                    </a:solidFill>
+                    <a:lnL w="6350">
+                      <a:solidFill>
+                        <a:srgbClr val="D4DAE1"/>
+                      </a:solidFill>
+                    </a:lnL>
+                    <a:lnR w="6350">
+                      <a:solidFill>
+                        <a:srgbClr val="D4DAE1"/>
+                      </a:solidFill>
+                    </a:lnR>
+                    <a:lnT w="6350">
+                      <a:solidFill>
+                        <a:srgbClr val="D4DAE1"/>
+                      </a:solidFill>
+                    </a:lnT>
+                    <a:lnB w="6350">
+                      <a:solidFill>
+                        <a:srgbClr val="D4DAE1"/>
+                      </a:solidFill>
+                    </a:lnB>
+                  </a:tcPr>
+                </a:tc>
+                <a:tc>
+                  <a:txBody>
+                    <a:bodyPr wrap="square"/>
+                    <a:lstStyle/>
+                    <a:p>
+                      <a:pPr algn="l"/>
+                      <a:r>
+                        <a:rPr sz="1100" b="1">
+                          <a:solidFill>
+                            <a:srgbClr val="4B5765"/>
+                          </a:solidFill>
+                          <a:latin typeface="Segoe UI Semibold"/>
+                        </a:rPr>
+                        <a:t>AWS (ap-south-1)</a:t>
+                      </a:r>
+                    </a:p>
+                  </a:txBody>
+                  <a:tcPr marL="82296" marR="82296" marT="36576" marB="36576" anchor="ctr">
+                    <a:solidFill>
+                      <a:srgbClr val="F4F6F8"/>
+                    </a:solidFill>
+                    <a:lnL w="6350">
+                      <a:solidFill>
+                        <a:srgbClr val="D4DAE1"/>
+                      </a:solidFill>
+                    </a:lnL>
+                    <a:lnR w="6350">
+                      <a:solidFill>
+                        <a:srgbClr val="D4DAE1"/>
+                      </a:solidFill>
+                    </a:lnR>
+                    <a:lnT w="6350">
+                      <a:solidFill>
+                        <a:srgbClr val="D4DAE1"/>
+                      </a:solidFill>
+                    </a:lnT>
+                    <a:lnB w="6350">
+                      <a:solidFill>
+                        <a:srgbClr val="D4DAE1"/>
+                      </a:solidFill>
+                    </a:lnB>
+                  </a:tcPr>
+                </a:tc>
+              </a:tr>
+              <a:tr h="457200">
+                <a:tc>
+                  <a:txBody>
+                    <a:bodyPr wrap="square"/>
+                    <a:lstStyle/>
+                    <a:p>
+                      <a:pPr algn="l"/>
+                      <a:r>
+                        <a:rPr sz="1200" b="0">
+                          <a:solidFill>
+                            <a:srgbClr val="17202A"/>
+                          </a:solidFill>
+                          <a:latin typeface="Segoe UI"/>
+                        </a:rPr>
+                        <a:t>Runner</a:t>
+                      </a:r>
+                    </a:p>
+                  </a:txBody>
+                  <a:tcPr marL="82296" marR="82296" marT="36576" marB="36576" anchor="ctr">
+                    <a:solidFill>
+                      <a:srgbClr val="FFFFFF"/>
+                    </a:solidFill>
+                    <a:lnL w="6350">
+                      <a:solidFill>
+                        <a:srgbClr val="D4DAE1"/>
+                      </a:solidFill>
+                    </a:lnL>
+                    <a:lnR w="6350">
+                      <a:solidFill>
+                        <a:srgbClr val="D4DAE1"/>
+                      </a:solidFill>
+                    </a:lnR>
+                    <a:lnT w="6350">
+                      <a:solidFill>
+                        <a:srgbClr val="D4DAE1"/>
+                      </a:solidFill>
+                    </a:lnT>
+                    <a:lnB w="6350">
+                      <a:solidFill>
+                        <a:srgbClr val="D4DAE1"/>
+                      </a:solidFill>
+                    </a:lnB>
+                  </a:tcPr>
+                </a:tc>
+                <a:tc>
+                  <a:txBody>
+                    <a:bodyPr wrap="square"/>
+                    <a:lstStyle/>
+                    <a:p>
+                      <a:pPr algn="l"/>
+                      <a:r>
+                        <a:rPr sz="1200" b="0">
+                          <a:solidFill>
+                            <a:srgbClr val="17202A"/>
+                          </a:solidFill>
+                          <a:latin typeface="Segoe UI"/>
+                        </a:rPr>
+                        <a:t>python job.py</a:t>
+                      </a:r>
+                    </a:p>
+                  </a:txBody>
+                  <a:tcPr marL="82296" marR="82296" marT="36576" marB="36576" anchor="ctr">
+                    <a:solidFill>
+                      <a:srgbClr val="FFFFFF"/>
+                    </a:solidFill>
+                    <a:lnL w="6350">
+                      <a:solidFill>
+                        <a:srgbClr val="D4DAE1"/>
+                      </a:solidFill>
+                    </a:lnL>
+                    <a:lnR w="6350">
+                      <a:solidFill>
+                        <a:srgbClr val="D4DAE1"/>
+                      </a:solidFill>
+                    </a:lnR>
+                    <a:lnT w="6350">
+                      <a:solidFill>
+                        <a:srgbClr val="D4DAE1"/>
+                      </a:solidFill>
+                    </a:lnT>
+                    <a:lnB w="6350">
+                      <a:solidFill>
+                        <a:srgbClr val="D4DAE1"/>
+                      </a:solidFill>
+                    </a:lnB>
+                  </a:tcPr>
+                </a:tc>
+                <a:tc>
+                  <a:txBody>
+                    <a:bodyPr wrap="square"/>
+                    <a:lstStyle/>
+                    <a:p>
+                      <a:pPr algn="l"/>
+                      <a:r>
+                        <a:rPr sz="1200" b="0">
+                          <a:solidFill>
+                            <a:srgbClr val="17202A"/>
+                          </a:solidFill>
+                          <a:latin typeface="Segoe UI"/>
+                        </a:rPr>
+                        <a:t>Kubernetes Job on EKS</a:t>
+                      </a:r>
+                    </a:p>
+                  </a:txBody>
+                  <a:tcPr marL="82296" marR="82296" marT="36576" marB="36576" anchor="ctr">
+                    <a:solidFill>
+                      <a:srgbClr val="FFFFFF"/>
+                    </a:solidFill>
+                    <a:lnL w="6350">
+                      <a:solidFill>
+                        <a:srgbClr val="D4DAE1"/>
+                      </a:solidFill>
+                    </a:lnL>
+                    <a:lnR w="6350">
+                      <a:solidFill>
+                        <a:srgbClr val="D4DAE1"/>
+                      </a:solidFill>
+                    </a:lnR>
+                    <a:lnT w="6350">
+                      <a:solidFill>
+                        <a:srgbClr val="D4DAE1"/>
+                      </a:solidFill>
+                    </a:lnT>
+                    <a:lnB w="6350">
+                      <a:solidFill>
+                        <a:srgbClr val="D4DAE1"/>
+                      </a:solidFill>
+                    </a:lnB>
+                  </a:tcPr>
+                </a:tc>
+              </a:tr>
+              <a:tr h="457200">
+                <a:tc>
+                  <a:txBody>
+                    <a:bodyPr wrap="square"/>
+                    <a:lstStyle/>
+                    <a:p>
+                      <a:pPr algn="l"/>
+                      <a:r>
+                        <a:rPr sz="1200" b="0">
+                          <a:solidFill>
+                            <a:srgbClr val="17202A"/>
+                          </a:solidFill>
+                          <a:latin typeface="Segoe UI"/>
+                        </a:rPr>
+                        <a:t>HR source</a:t>
+                      </a:r>
+                    </a:p>
+                  </a:txBody>
+                  <a:tcPr marL="82296" marR="82296" marT="36576" marB="36576" anchor="ctr">
+                    <a:solidFill>
+                      <a:srgbClr val="FFFFFF"/>
+                    </a:solidFill>
+                    <a:lnL w="6350">
+                      <a:solidFill>
+                        <a:srgbClr val="D4DAE1"/>
+                      </a:solidFill>
+                    </a:lnL>
+                    <a:lnR w="6350">
+                      <a:solidFill>
+                        <a:srgbClr val="D4DAE1"/>
+                      </a:solidFill>
+                    </a:lnR>
+                    <a:lnT w="6350">
+                      <a:solidFill>
+                        <a:srgbClr val="D4DAE1"/>
+                      </a:solidFill>
+                    </a:lnT>
+                    <a:lnB w="6350">
+                      <a:solidFill>
+                        <a:srgbClr val="D4DAE1"/>
+                      </a:solidFill>
+                    </a:lnB>
+                  </a:tcPr>
+                </a:tc>
+                <a:tc>
+                  <a:txBody>
+                    <a:bodyPr wrap="square"/>
+                    <a:lstStyle/>
+                    <a:p>
+                      <a:pPr algn="l"/>
+                      <a:r>
+                        <a:rPr sz="1200" b="0">
+                          <a:solidFill>
+                            <a:srgbClr val="17202A"/>
+                          </a:solidFill>
+                          <a:latin typeface="Segoe UI"/>
+                        </a:rPr>
+                        <a:t>PostgreSQL 18</a:t>
+                      </a:r>
+                    </a:p>
+                  </a:txBody>
+                  <a:tcPr marL="82296" marR="82296" marT="36576" marB="36576" anchor="ctr">
+                    <a:solidFill>
+                      <a:srgbClr val="FFFFFF"/>
+                    </a:solidFill>
+                    <a:lnL w="6350">
+                      <a:solidFill>
+                        <a:srgbClr val="D4DAE1"/>
+                      </a:solidFill>
+                    </a:lnL>
+                    <a:lnR w="6350">
+                      <a:solidFill>
+                        <a:srgbClr val="D4DAE1"/>
+                      </a:solidFill>
+                    </a:lnR>
+                    <a:lnT w="6350">
+                      <a:solidFill>
+                        <a:srgbClr val="D4DAE1"/>
+                      </a:solidFill>
+                    </a:lnT>
+                    <a:lnB w="6350">
+                      <a:solidFill>
+                        <a:srgbClr val="D4DAE1"/>
+                      </a:solidFill>
+                    </a:lnB>
+                  </a:tcPr>
+                </a:tc>
+                <a:tc>
+                  <a:txBody>
+                    <a:bodyPr wrap="square"/>
+                    <a:lstStyle/>
+                    <a:p>
+                      <a:pPr algn="l"/>
+                      <a:r>
+                        <a:rPr sz="1200" b="0">
+                          <a:solidFill>
+                            <a:srgbClr val="17202A"/>
+                          </a:solidFill>
+                          <a:latin typeface="Segoe UI"/>
+                        </a:rPr>
+                        <a:t>Aurora PostgreSQL</a:t>
+                      </a:r>
+                    </a:p>
+                  </a:txBody>
+                  <a:tcPr marL="82296" marR="82296" marT="36576" marB="36576" anchor="ctr">
+                    <a:solidFill>
+                      <a:srgbClr val="FFFFFF"/>
+                    </a:solidFill>
+                    <a:lnL w="6350">
+                      <a:solidFill>
+                        <a:srgbClr val="D4DAE1"/>
+                      </a:solidFill>
+                    </a:lnL>
+                    <a:lnR w="6350">
+                      <a:solidFill>
+                        <a:srgbClr val="D4DAE1"/>
+                      </a:solidFill>
+                    </a:lnR>
+                    <a:lnT w="6350">
+                      <a:solidFill>
+                        <a:srgbClr val="D4DAE1"/>
+                      </a:solidFill>
+                    </a:lnT>
+                    <a:lnB w="6350">
+                      <a:solidFill>
+                        <a:srgbClr val="D4DAE1"/>
+                      </a:solidFill>
+                    </a:lnB>
+                  </a:tcPr>
+                </a:tc>
+              </a:tr>
+              <a:tr h="457200">
+                <a:tc>
+                  <a:txBody>
+                    <a:bodyPr wrap="square"/>
+                    <a:lstStyle/>
+                    <a:p>
+                      <a:pPr algn="l"/>
+                      <a:r>
+                        <a:rPr sz="1200" b="0">
+                          <a:solidFill>
+                            <a:srgbClr val="17202A"/>
+                          </a:solidFill>
+                          <a:latin typeface="Segoe UI"/>
+                        </a:rPr>
+                        <a:t>Data lake</a:t>
+                      </a:r>
+                    </a:p>
+                  </a:txBody>
+                  <a:tcPr marL="82296" marR="82296" marT="36576" marB="36576" anchor="ctr">
+                    <a:solidFill>
+                      <a:srgbClr val="FFFFFF"/>
+                    </a:solidFill>
+                    <a:lnL w="6350">
+                      <a:solidFill>
+                        <a:srgbClr val="D4DAE1"/>
+                      </a:solidFill>
+                    </a:lnL>
+                    <a:lnR w="6350">
+                      <a:solidFill>
+                        <a:srgbClr val="D4DAE1"/>
+                      </a:solidFill>
+                    </a:lnR>
+                    <a:lnT w="6350">
+                      <a:solidFill>
+                        <a:srgbClr val="D4DAE1"/>
+                      </a:solidFill>
+                    </a:lnT>
+                    <a:lnB w="6350">
+                      <a:solidFill>
+                        <a:srgbClr val="D4DAE1"/>
+                      </a:solidFill>
+                    </a:lnB>
+                  </a:tcPr>
+                </a:tc>
+                <a:tc>
+                  <a:txBody>
+                    <a:bodyPr wrap="square"/>
+                    <a:lstStyle/>
+                    <a:p>
+                      <a:pPr algn="l"/>
+                      <a:r>
+                        <a:rPr sz="1200" b="0">
+                          <a:solidFill>
+                            <a:srgbClr val="17202A"/>
+                          </a:solidFill>
+                          <a:latin typeface="Segoe UI"/>
+                        </a:rPr>
+                        <a:t>LocalStack S3</a:t>
+                      </a:r>
+                    </a:p>
+                  </a:txBody>
+                  <a:tcPr marL="82296" marR="82296" marT="36576" marB="36576" anchor="ctr">
+                    <a:solidFill>
+                      <a:srgbClr val="FFFFFF"/>
+                    </a:solidFill>
+                    <a:lnL w="6350">
+                      <a:solidFill>
+                        <a:srgbClr val="D4DAE1"/>
+                      </a:solidFill>
+                    </a:lnL>
+                    <a:lnR w="6350">
+                      <a:solidFill>
+                        <a:srgbClr val="D4DAE1"/>
+                      </a:solidFill>
+                    </a:lnR>
+                    <a:lnT w="6350">
+                      <a:solidFill>
+                        <a:srgbClr val="D4DAE1"/>
+                      </a:solidFill>
+                    </a:lnT>
+                    <a:lnB w="6350">
+                      <a:solidFill>
+                        <a:srgbClr val="D4DAE1"/>
+                      </a:solidFill>
+                    </a:lnB>
+                  </a:tcPr>
+                </a:tc>
+                <a:tc>
+                  <a:txBody>
+                    <a:bodyPr wrap="square"/>
+                    <a:lstStyle/>
+                    <a:p>
+                      <a:pPr algn="l"/>
+                      <a:r>
+                        <a:rPr sz="1200" b="0">
+                          <a:solidFill>
+                            <a:srgbClr val="17202A"/>
+                          </a:solidFill>
+                          <a:latin typeface="Segoe UI"/>
+                        </a:rPr>
+                        <a:t>Amazon S3</a:t>
+                      </a:r>
+                    </a:p>
+                  </a:txBody>
+                  <a:tcPr marL="82296" marR="82296" marT="36576" marB="36576" anchor="ctr">
+                    <a:solidFill>
+                      <a:srgbClr val="FFFFFF"/>
+                    </a:solidFill>
+                    <a:lnL w="6350">
+                      <a:solidFill>
+                        <a:srgbClr val="D4DAE1"/>
+                      </a:solidFill>
+                    </a:lnL>
+                    <a:lnR w="6350">
+                      <a:solidFill>
+                        <a:srgbClr val="D4DAE1"/>
+                      </a:solidFill>
+                    </a:lnR>
+                    <a:lnT w="6350">
+                      <a:solidFill>
+                        <a:srgbClr val="D4DAE1"/>
+                      </a:solidFill>
+                    </a:lnT>
+                    <a:lnB w="6350">
+                      <a:solidFill>
+                        <a:srgbClr val="D4DAE1"/>
+                      </a:solidFill>
+                    </a:lnB>
+                  </a:tcPr>
+                </a:tc>
+              </a:tr>
+              <a:tr h="457200">
+                <a:tc>
+                  <a:txBody>
+                    <a:bodyPr wrap="square"/>
+                    <a:lstStyle/>
+                    <a:p>
+                      <a:pPr algn="l"/>
+                      <a:r>
+                        <a:rPr sz="1200" b="0">
+                          <a:solidFill>
+                            <a:srgbClr val="17202A"/>
+                          </a:solidFill>
+                          <a:latin typeface="Segoe UI"/>
+                        </a:rPr>
+                        <a:t>Dashboard</a:t>
+                      </a:r>
+                    </a:p>
+                  </a:txBody>
+                  <a:tcPr marL="82296" marR="82296" marT="36576" marB="36576" anchor="ctr">
+                    <a:solidFill>
+                      <a:srgbClr val="FFFFFF"/>
+                    </a:solidFill>
+                    <a:lnL w="6350">
+                      <a:solidFill>
+                        <a:srgbClr val="D4DAE1"/>
+                      </a:solidFill>
+                    </a:lnL>
+                    <a:lnR w="6350">
+                      <a:solidFill>
+                        <a:srgbClr val="D4DAE1"/>
+                      </a:solidFill>
+                    </a:lnR>
+                    <a:lnT w="6350">
+                      <a:solidFill>
+                        <a:srgbClr val="D4DAE1"/>
+                      </a:solidFill>
+                    </a:lnT>
+                    <a:lnB w="6350">
+                      <a:solidFill>
+                        <a:srgbClr val="D4DAE1"/>
+                      </a:solidFill>
+                    </a:lnB>
+                  </a:tcPr>
+                </a:tc>
+                <a:tc>
+                  <a:txBody>
+                    <a:bodyPr wrap="square"/>
+                    <a:lstStyle/>
+                    <a:p>
+                      <a:pPr algn="l"/>
+                      <a:r>
+                        <a:rPr sz="1200" b="0">
+                          <a:solidFill>
+                            <a:srgbClr val="17202A"/>
+                          </a:solidFill>
+                          <a:latin typeface="Segoe UI"/>
+                        </a:rPr>
+                        <a:t>localhost:8501</a:t>
+                      </a:r>
+                    </a:p>
+                  </a:txBody>
+                  <a:tcPr marL="82296" marR="82296" marT="36576" marB="36576" anchor="ctr">
+                    <a:solidFill>
+                      <a:srgbClr val="FFFFFF"/>
+                    </a:solidFill>
+                    <a:lnL w="6350">
+                      <a:solidFill>
+                        <a:srgbClr val="D4DAE1"/>
+                      </a:solidFill>
+                    </a:lnL>
+                    <a:lnR w="6350">
+                      <a:solidFill>
+                        <a:srgbClr val="D4DAE1"/>
+                      </a:solidFill>
+                    </a:lnR>
+                    <a:lnT w="6350">
+                      <a:solidFill>
+                        <a:srgbClr val="D4DAE1"/>
+                      </a:solidFill>
+                    </a:lnT>
+                    <a:lnB w="6350">
+                      <a:solidFill>
+                        <a:srgbClr val="D4DAE1"/>
+                      </a:solidFill>
+                    </a:lnB>
+                  </a:tcPr>
+                </a:tc>
+                <a:tc>
+                  <a:txBody>
+                    <a:bodyPr wrap="square"/>
+                    <a:lstStyle/>
+                    <a:p>
+                      <a:pPr algn="l"/>
+                      <a:r>
+                        <a:rPr sz="1200" b="0">
+                          <a:solidFill>
+                            <a:srgbClr val="17202A"/>
+                          </a:solidFill>
+                          <a:latin typeface="Segoe UI"/>
+                        </a:rPr>
+                        <a:t>EKS + load balancer</a:t>
+                      </a:r>
+                    </a:p>
+                  </a:txBody>
+                  <a:tcPr marL="82296" marR="82296" marT="36576" marB="36576" anchor="ctr">
+                    <a:solidFill>
+                      <a:srgbClr val="FFFFFF"/>
+                    </a:solidFill>
+                    <a:lnL w="6350">
+                      <a:solidFill>
+                        <a:srgbClr val="D4DAE1"/>
+                      </a:solidFill>
+                    </a:lnL>
+                    <a:lnR w="6350">
+                      <a:solidFill>
+                        <a:srgbClr val="D4DAE1"/>
+                      </a:solidFill>
+                    </a:lnR>
+                    <a:lnT w="6350">
+                      <a:solidFill>
+                        <a:srgbClr val="D4DAE1"/>
+                      </a:solidFill>
+                    </a:lnT>
+                    <a:lnB w="6350">
+                      <a:solidFill>
+                        <a:srgbClr val="D4DAE1"/>
+                      </a:solidFill>
+                    </a:lnB>
+                  </a:tcPr>
+                </a:tc>
+              </a:tr>
+            </a:tbl>
+          </a:graphicData>
+        </a:graphic>
+      </p:graphicFrame>
+      <p:sp>
+        <p:nvSpPr>
+          <p:cNvPr id="5" name="Rounded Rectangle 4"/>
+          <p:cNvSpPr/>
+          <p:nvPr/>
+        </p:nvSpPr>
+        <p:spPr>
+          <a:xfrm>
+            <a:off x="548640" y="3931920"/>
+            <a:ext cx="5422392" cy="914400"/>
+          </a:xfrm>
+          <a:prstGeom prst="roundRect">
+            <a:avLst>
+              <a:gd name="adj" fmla="val 6000"/>
+            </a:avLst>
+          </a:prstGeom>
+          <a:solidFill>
+            <a:srgbClr val="DFF0E5"/>
+          </a:solidFill>
+          <a:ln>
+            <a:noFill/>
+          </a:ln>
+        </p:spPr>
+        <p:txBody>
+          <a:bodyPr rtlCol="0" anchor="ctr"/>
+          <a:lstStyle/>
+          <a:p/>
+        </p:txBody>
+      </p:sp>
+      <p:sp>
+        <p:nvSpPr>
+          <p:cNvPr id="6" name="TextBox 5"/>
+          <p:cNvSpPr txBox="1"/>
+          <p:nvPr/>
+        </p:nvSpPr>
+        <p:spPr>
+          <a:xfrm>
+            <a:off x="731520" y="4023360"/>
+            <a:ext cx="5120640" cy="777240"/>
+          </a:xfrm>
+          <a:prstGeom prst="rect">
+            <a:avLst/>
+          </a:prstGeom>
+          <a:noFill/>
+        </p:spPr>
+        <p:txBody>
+          <a:bodyPr wrap="square" anchor="t" lIns="18288" rIns="18288" tIns="18288" bIns="18288">
+            <a:spAutoFit/>
+          </a:bodyPr>
+          <a:lstStyle/>
+          <a:p>
+            <a:pPr algn="l">
+              <a:spcAft>
+                <a:spcPts val="300"/>
+              </a:spcAft>
+            </a:pPr>
+            <a:r>
+              <a:rPr sz="1400" b="0">
+                <a:solidFill>
+                  <a:srgbClr val="2D7449"/>
+                </a:solidFill>
+                <a:latin typeface="Segoe UI Semibold"/>
+              </a:rPr>
+              <a:t>Cloud run: 60 s, succeeded</a:t>
+            </a:r>
+          </a:p>
+          <a:p>
+            <a:pPr algn="l">
+              <a:spcAft>
+                <a:spcPts val="300"/>
+              </a:spcAft>
+            </a:pPr>
+            <a:r>
+              <a:rPr sz="1150" b="0">
+                <a:solidFill>
+                  <a:srgbClr val="4B5765"/>
+                </a:solidFill>
+                <a:latin typeface="Segoe UI"/>
+              </a:rPr>
+              <a:t>Identical answers: 3.41 avg · 465 gaps · 124 ready · 212 high risk</a:t>
+            </a:r>
+          </a:p>
+        </p:txBody>
+      </p:sp>
+      <p:sp>
+        <p:nvSpPr>
+          <p:cNvPr id="7" name="TextBox 6"/>
+          <p:cNvSpPr txBox="1"/>
+          <p:nvPr/>
+        </p:nvSpPr>
+        <p:spPr>
+          <a:xfrm>
+            <a:off x="548640" y="5029200"/>
+            <a:ext cx="5422392" cy="1097280"/>
+          </a:xfrm>
+          <a:prstGeom prst="rect">
+            <a:avLst/>
+          </a:prstGeom>
+          <a:noFill/>
+        </p:spPr>
+        <p:txBody>
+          <a:bodyPr wrap="square" anchor="t" lIns="18288" rIns="18288" tIns="18288" bIns="18288">
+            <a:spAutoFit/>
+          </a:bodyPr>
+          <a:lstStyle/>
+          <a:p>
+            <a:pPr algn="l">
+              <a:spcAft>
+                <a:spcPts val="400"/>
+              </a:spcAft>
+            </a:pPr>
+            <a:r>
+              <a:rPr sz="1150" b="0">
+                <a:solidFill>
+                  <a:srgbClr val="4B5765"/>
+                </a:solidFill>
+                <a:latin typeface="Segoe UI"/>
+              </a:rPr>
+              <a:t>The first cloud run caught a real bug: numpy 2.5 needs Python 3.12, the cluster image runs 3.11. Pinned numpy 2.4.6 and checked every module on 3.11.</a:t>
+            </a:r>
+          </a:p>
+        </p:txBody>
+      </p:sp>
+      <p:sp>
+        <p:nvSpPr>
+          <p:cNvPr id="8" name="TextBox 7"/>
+          <p:cNvSpPr txBox="1"/>
+          <p:nvPr/>
+        </p:nvSpPr>
+        <p:spPr>
+          <a:xfrm>
+            <a:off x="6217920" y="1444752"/>
+            <a:ext cx="5422392" cy="365760"/>
+          </a:xfrm>
+          <a:prstGeom prst="rect">
+            <a:avLst/>
+          </a:prstGeom>
+          <a:noFill/>
+        </p:spPr>
+        <p:txBody>
+          <a:bodyPr wrap="square" anchor="t" lIns="18288" rIns="18288" tIns="18288" bIns="18288">
+            <a:spAutoFit/>
+          </a:bodyPr>
+          <a:lstStyle/>
+          <a:p>
+            <a:pPr algn="l">
+              <a:spcAft>
+                <a:spcPts val="400"/>
+              </a:spcAft>
+            </a:pPr>
+            <a:r>
+              <a:rPr sz="1400" b="0">
+                <a:solidFill>
+                  <a:srgbClr val="17202A"/>
+                </a:solidFill>
+                <a:latin typeface="Segoe UI Semibold"/>
+              </a:rPr>
+              <a:t>Stock EKS gaps, closed without editing infra/</a:t>
+            </a:r>
+          </a:p>
+        </p:txBody>
+      </p:sp>
+      <p:sp>
+        <p:nvSpPr>
+          <p:cNvPr id="9" name="TextBox 8"/>
+          <p:cNvSpPr txBox="1"/>
+          <p:nvPr/>
+        </p:nvSpPr>
+        <p:spPr>
+          <a:xfrm>
+            <a:off x="6217920" y="1874519"/>
+            <a:ext cx="2468880" cy="411480"/>
+          </a:xfrm>
+          <a:prstGeom prst="rect">
+            <a:avLst/>
+          </a:prstGeom>
+          <a:noFill/>
+        </p:spPr>
+        <p:txBody>
+          <a:bodyPr wrap="square" anchor="t" lIns="18288" rIns="18288" tIns="18288" bIns="18288">
+            <a:spAutoFit/>
+          </a:bodyPr>
+          <a:lstStyle/>
+          <a:p>
+            <a:pPr algn="l">
+              <a:spcAft>
+                <a:spcPts val="400"/>
+              </a:spcAft>
+            </a:pPr>
+            <a:r>
+              <a:rPr sz="1200" b="0">
+                <a:solidFill>
+                  <a:srgbClr val="4B5765"/>
+                </a:solidFill>
+                <a:latin typeface="Segoe UI"/>
+              </a:rPr>
+              <a:t>Only job.py shipped</a:t>
+            </a:r>
+          </a:p>
+        </p:txBody>
+      </p:sp>
+      <p:sp>
+        <p:nvSpPr>
+          <p:cNvPr id="10" name="TextBox 9"/>
+          <p:cNvSpPr txBox="1"/>
+          <p:nvPr/>
+        </p:nvSpPr>
+        <p:spPr>
+          <a:xfrm>
+            <a:off x="8641080" y="1874519"/>
+            <a:ext cx="3017520" cy="411480"/>
+          </a:xfrm>
+          <a:prstGeom prst="rect">
+            <a:avLst/>
+          </a:prstGeom>
+          <a:noFill/>
+        </p:spPr>
+        <p:txBody>
+          <a:bodyPr wrap="square" anchor="t" lIns="18288" rIns="18288" tIns="18288" bIns="18288">
+            <a:spAutoFit/>
+          </a:bodyPr>
+          <a:lstStyle/>
+          <a:p>
+            <a:pPr algn="l">
+              <a:spcAft>
+                <a:spcPts val="400"/>
+              </a:spcAft>
+            </a:pPr>
+            <a:r>
+              <a:rPr sz="1200" b="0">
+                <a:solidFill>
+                  <a:srgbClr val="17202A"/>
+                </a:solidFill>
+                <a:latin typeface="Segoe UI"/>
+              </a:rPr>
+              <a:t>→  all modules sent as a ConfigMap</a:t>
+            </a:r>
+          </a:p>
+        </p:txBody>
+      </p:sp>
+      <p:sp>
+        <p:nvSpPr>
+          <p:cNvPr id="11" name="TextBox 10"/>
+          <p:cNvSpPr txBox="1"/>
+          <p:nvPr/>
+        </p:nvSpPr>
+        <p:spPr>
+          <a:xfrm>
+            <a:off x="6217920" y="2350008"/>
+            <a:ext cx="2468880" cy="411480"/>
+          </a:xfrm>
+          <a:prstGeom prst="rect">
+            <a:avLst/>
+          </a:prstGeom>
+          <a:noFill/>
+        </p:spPr>
+        <p:txBody>
+          <a:bodyPr wrap="square" anchor="t" lIns="18288" rIns="18288" tIns="18288" bIns="18288">
+            <a:spAutoFit/>
+          </a:bodyPr>
+          <a:lstStyle/>
+          <a:p>
+            <a:pPr algn="l">
+              <a:spcAft>
+                <a:spcPts val="400"/>
+              </a:spcAft>
+            </a:pPr>
+            <a:r>
+              <a:rPr sz="1200" b="0">
+                <a:solidFill>
+                  <a:srgbClr val="4B5765"/>
+                </a:solidFill>
+                <a:latin typeface="Segoe UI"/>
+              </a:rPr>
+              <a:t>No settings or password</a:t>
+            </a:r>
+          </a:p>
+        </p:txBody>
+      </p:sp>
+      <p:sp>
+        <p:nvSpPr>
+          <p:cNvPr id="12" name="TextBox 11"/>
+          <p:cNvSpPr txBox="1"/>
+          <p:nvPr/>
+        </p:nvSpPr>
+        <p:spPr>
+          <a:xfrm>
+            <a:off x="8641080" y="2350008"/>
+            <a:ext cx="3017520" cy="411480"/>
+          </a:xfrm>
+          <a:prstGeom prst="rect">
+            <a:avLst/>
+          </a:prstGeom>
+          <a:noFill/>
+        </p:spPr>
+        <p:txBody>
+          <a:bodyPr wrap="square" anchor="t" lIns="18288" rIns="18288" tIns="18288" bIns="18288">
+            <a:spAutoFit/>
+          </a:bodyPr>
+          <a:lstStyle/>
+          <a:p>
+            <a:pPr algn="l">
+              <a:spcAft>
+                <a:spcPts val="400"/>
+              </a:spcAft>
+            </a:pPr>
+            <a:r>
+              <a:rPr sz="1200" b="0">
+                <a:solidFill>
+                  <a:srgbClr val="17202A"/>
+                </a:solidFill>
+                <a:latin typeface="Segoe UI"/>
+              </a:rPr>
+              <a:t>→  env vars + Kubernetes Secret</a:t>
+            </a:r>
+          </a:p>
+        </p:txBody>
+      </p:sp>
+      <p:sp>
+        <p:nvSpPr>
+          <p:cNvPr id="13" name="TextBox 12"/>
+          <p:cNvSpPr txBox="1"/>
+          <p:nvPr/>
+        </p:nvSpPr>
+        <p:spPr>
+          <a:xfrm>
+            <a:off x="6217920" y="2825496"/>
+            <a:ext cx="2468880" cy="411480"/>
+          </a:xfrm>
+          <a:prstGeom prst="rect">
+            <a:avLst/>
+          </a:prstGeom>
+          <a:noFill/>
+        </p:spPr>
+        <p:txBody>
+          <a:bodyPr wrap="square" anchor="t" lIns="18288" rIns="18288" tIns="18288" bIns="18288">
+            <a:spAutoFit/>
+          </a:bodyPr>
+          <a:lstStyle/>
+          <a:p>
+            <a:pPr algn="l">
+              <a:spcAft>
+                <a:spcPts val="400"/>
+              </a:spcAft>
+            </a:pPr>
+            <a:r>
+              <a:rPr sz="1200" b="0">
+                <a:solidFill>
+                  <a:srgbClr val="4B5765"/>
+                </a:solidFill>
+                <a:latin typeface="Segoe UI"/>
+              </a:rPr>
+              <a:t>No S3 permission</a:t>
+            </a:r>
+          </a:p>
+        </p:txBody>
+      </p:sp>
+      <p:sp>
+        <p:nvSpPr>
+          <p:cNvPr id="14" name="TextBox 13"/>
+          <p:cNvSpPr txBox="1"/>
+          <p:nvPr/>
+        </p:nvSpPr>
+        <p:spPr>
+          <a:xfrm>
+            <a:off x="8641080" y="2825496"/>
+            <a:ext cx="3017520" cy="411480"/>
+          </a:xfrm>
+          <a:prstGeom prst="rect">
+            <a:avLst/>
+          </a:prstGeom>
+          <a:noFill/>
+        </p:spPr>
+        <p:txBody>
+          <a:bodyPr wrap="square" anchor="t" lIns="18288" rIns="18288" tIns="18288" bIns="18288">
+            <a:spAutoFit/>
+          </a:bodyPr>
+          <a:lstStyle/>
+          <a:p>
+            <a:pPr algn="l">
+              <a:spcAft>
+                <a:spcPts val="400"/>
+              </a:spcAft>
+            </a:pPr>
+            <a:r>
+              <a:rPr sz="1200" b="0">
+                <a:solidFill>
+                  <a:srgbClr val="17202A"/>
+                </a:solidFill>
+                <a:latin typeface="Segoe UI"/>
+              </a:rPr>
+              <a:t>→  node-role policy, lake bucket only</a:t>
+            </a:r>
+          </a:p>
+        </p:txBody>
+      </p:sp>
+      <p:sp>
+        <p:nvSpPr>
+          <p:cNvPr id="15" name="TextBox 14"/>
+          <p:cNvSpPr txBox="1"/>
+          <p:nvPr/>
+        </p:nvSpPr>
+        <p:spPr>
+          <a:xfrm>
+            <a:off x="6217920" y="3300984"/>
+            <a:ext cx="2468880" cy="411480"/>
+          </a:xfrm>
+          <a:prstGeom prst="rect">
+            <a:avLst/>
+          </a:prstGeom>
+          <a:noFill/>
+        </p:spPr>
+        <p:txBody>
+          <a:bodyPr wrap="square" anchor="t" lIns="18288" rIns="18288" tIns="18288" bIns="18288">
+            <a:spAutoFit/>
+          </a:bodyPr>
+          <a:lstStyle/>
+          <a:p>
+            <a:pPr algn="l">
+              <a:spcAft>
+                <a:spcPts val="400"/>
+              </a:spcAft>
+            </a:pPr>
+            <a:r>
+              <a:rPr sz="1200" b="0">
+                <a:solidFill>
+                  <a:srgbClr val="4B5765"/>
+                </a:solidFill>
+                <a:latin typeface="Segoe UI"/>
+              </a:rPr>
+              <a:t>No route to Aurora</a:t>
+            </a:r>
+          </a:p>
+        </p:txBody>
+      </p:sp>
+      <p:sp>
+        <p:nvSpPr>
+          <p:cNvPr id="16" name="TextBox 15"/>
+          <p:cNvSpPr txBox="1"/>
+          <p:nvPr/>
+        </p:nvSpPr>
+        <p:spPr>
+          <a:xfrm>
+            <a:off x="8641080" y="3300984"/>
+            <a:ext cx="3017520" cy="411480"/>
+          </a:xfrm>
+          <a:prstGeom prst="rect">
+            <a:avLst/>
+          </a:prstGeom>
+          <a:noFill/>
+        </p:spPr>
+        <p:txBody>
+          <a:bodyPr wrap="square" anchor="t" lIns="18288" rIns="18288" tIns="18288" bIns="18288">
+            <a:spAutoFit/>
+          </a:bodyPr>
+          <a:lstStyle/>
+          <a:p>
+            <a:pPr algn="l">
+              <a:spcAft>
+                <a:spcPts val="400"/>
+              </a:spcAft>
+            </a:pPr>
+            <a:r>
+              <a:rPr sz="1200" b="0">
+                <a:solidFill>
+                  <a:srgbClr val="17202A"/>
+                </a:solidFill>
+                <a:latin typeface="Segoe UI"/>
+              </a:rPr>
+              <a:t>→  EKS security group attached to Aurora</a:t>
+            </a:r>
+          </a:p>
+        </p:txBody>
+      </p:sp>
+      <p:sp>
+        <p:nvSpPr>
+          <p:cNvPr id="17" name="Rounded Rectangle 16"/>
+          <p:cNvSpPr/>
+          <p:nvPr/>
+        </p:nvSpPr>
+        <p:spPr>
+          <a:xfrm>
+            <a:off x="6217920" y="3931920"/>
+            <a:ext cx="5422392" cy="2240280"/>
+          </a:xfrm>
+          <a:prstGeom prst="roundRect">
+            <a:avLst>
+              <a:gd name="adj" fmla="val 6000"/>
+            </a:avLst>
+          </a:prstGeom>
+          <a:solidFill>
+            <a:srgbClr val="F4F6F8"/>
+          </a:solidFill>
+          <a:ln>
+            <a:noFill/>
+          </a:ln>
+        </p:spPr>
+        <p:txBody>
+          <a:bodyPr rtlCol="0" anchor="ctr"/>
+          <a:lstStyle/>
+          <a:p/>
+        </p:txBody>
+      </p:sp>
+      <p:sp>
+        <p:nvSpPr>
+          <p:cNvPr id="18" name="TextBox 17"/>
+          <p:cNvSpPr txBox="1"/>
+          <p:nvPr/>
+        </p:nvSpPr>
+        <p:spPr>
+          <a:xfrm>
+            <a:off x="6400800" y="4023360"/>
+            <a:ext cx="1737360" cy="640080"/>
+          </a:xfrm>
+          <a:prstGeom prst="rect">
+            <a:avLst/>
+          </a:prstGeom>
+          <a:noFill/>
+        </p:spPr>
+        <p:txBody>
+          <a:bodyPr wrap="square" anchor="t" lIns="18288" rIns="18288" tIns="18288" bIns="18288">
+            <a:spAutoFit/>
+          </a:bodyPr>
+          <a:lstStyle/>
+          <a:p>
+            <a:pPr algn="l">
+              <a:spcAft>
+                <a:spcPts val="400"/>
+              </a:spcAft>
+            </a:pPr>
+            <a:r>
+              <a:rPr sz="3600" b="0">
+                <a:solidFill>
+                  <a:srgbClr val="17202A"/>
+                </a:solidFill>
+                <a:latin typeface="Segoe UI Semibold"/>
+              </a:rPr>
+              <a:t>68</a:t>
+            </a:r>
+          </a:p>
+        </p:txBody>
+      </p:sp>
+      <p:sp>
+        <p:nvSpPr>
+          <p:cNvPr id="19" name="TextBox 18"/>
+          <p:cNvSpPr txBox="1"/>
+          <p:nvPr/>
+        </p:nvSpPr>
+        <p:spPr>
+          <a:xfrm>
+            <a:off x="7818120" y="4160520"/>
+            <a:ext cx="3749039" cy="548640"/>
+          </a:xfrm>
+          <a:prstGeom prst="rect">
+            <a:avLst/>
+          </a:prstGeom>
+          <a:noFill/>
+        </p:spPr>
+        <p:txBody>
+          <a:bodyPr wrap="square" anchor="t" lIns="18288" rIns="18288" tIns="18288" bIns="18288">
+            <a:spAutoFit/>
+          </a:bodyPr>
+          <a:lstStyle/>
+          <a:p>
+            <a:pPr algn="l">
+              <a:spcAft>
+                <a:spcPts val="400"/>
+              </a:spcAft>
+            </a:pPr>
+            <a:r>
+              <a:rPr sz="1400" b="0">
+                <a:solidFill>
+                  <a:srgbClr val="4B5765"/>
+                </a:solidFill>
+                <a:latin typeface="Segoe UI"/>
+              </a:rPr>
+              <a:t>automated tests</a:t>
+            </a:r>
+          </a:p>
+        </p:txBody>
+      </p:sp>
+      <p:sp>
+        <p:nvSpPr>
+          <p:cNvPr id="20" name="TextBox 19"/>
+          <p:cNvSpPr txBox="1"/>
+          <p:nvPr/>
+        </p:nvSpPr>
+        <p:spPr>
+          <a:xfrm>
+            <a:off x="6400800" y="4800600"/>
+            <a:ext cx="5120640" cy="1325880"/>
+          </a:xfrm>
+          <a:prstGeom prst="rect">
+            <a:avLst/>
+          </a:prstGeom>
+          <a:noFill/>
+        </p:spPr>
+        <p:txBody>
+          <a:bodyPr wrap="square" anchor="t" lIns="18288" rIns="18288" tIns="18288" bIns="18288">
+            <a:spAutoFit/>
+          </a:bodyPr>
+          <a:lstStyle/>
+          <a:p>
+            <a:pPr algn="l">
+              <a:spcAft>
+                <a:spcPts val="600"/>
+              </a:spcAft>
+            </a:pPr>
+            <a:r>
+              <a:rPr sz="1200" b="0">
+                <a:solidFill>
+                  <a:srgbClr val="4B5765"/>
+                </a:solidFill>
+                <a:latin typeface="Segoe UI"/>
+              </a:rPr>
+              <a:t>Contracts 15 · Silver 20 · Gold 17 · Bronze 6 · Dashboard 5 · Integration 5</a:t>
+            </a:r>
+          </a:p>
+          <a:p>
+            <a:pPr algn="l">
+              <a:spcAft>
+                <a:spcPts val="600"/>
+              </a:spcAft>
+            </a:pPr>
+            <a:r>
+              <a:rPr sz="1100" b="0">
+                <a:solidFill>
+                  <a:srgbClr val="4B5765"/>
+                </a:solidFill>
+                <a:latin typeface="Segoe UI"/>
+              </a:rPr>
+              <a:t>Integration runs end to end on LocalStack + PostgreSQL: reconciliation, idempotency, write-once, changed-file versioning, forced reload.</a:t>
+            </a:r>
+          </a:p>
+        </p:txBody>
+      </p:sp>
+      <p:cxnSp>
+        <p:nvCxnSpPr>
+          <p:cNvPr id="21" name="Connector 20"/>
+          <p:cNvCxnSpPr/>
+          <p:nvPr/>
+        </p:nvCxnSpPr>
+        <p:spPr>
+          <a:xfrm>
+            <a:off x="548640" y="6400800"/>
+            <a:ext cx="11094415" cy="0"/>
+          </a:xfrm>
+          <a:prstGeom prst="line">
+            <a:avLst/>
+          </a:prstGeom>
+          <a:ln w="9525">
+            <a:solidFill>
+              <a:srgbClr val="D4DAE1"/>
+            </a:solidFill>
+          </a:ln>
+        </p:spPr>
+      </p:cxnSp>
+      <p:sp>
+        <p:nvSpPr>
+          <p:cNvPr id="22" name="TextBox 21"/>
+          <p:cNvSpPr txBox="1"/>
+          <p:nvPr/>
+        </p:nvSpPr>
+        <p:spPr>
+          <a:xfrm>
+            <a:off x="548640" y="6455664"/>
+            <a:ext cx="7315200" cy="274320"/>
+          </a:xfrm>
+          <a:prstGeom prst="rect">
+            <a:avLst/>
+          </a:prstGeom>
+          <a:noFill/>
+        </p:spPr>
+        <p:txBody>
+          <a:bodyPr wrap="square" anchor="t" lIns="18288" rIns="18288" tIns="18288" bIns="18288">
+            <a:spAutoFit/>
+          </a:bodyPr>
+          <a:lstStyle/>
+          <a:p>
+            <a:pPr algn="l">
+              <a:spcAft>
+                <a:spcPts val="400"/>
+              </a:spcAft>
+            </a:pPr>
+            <a:r>
+              <a:rPr sz="900" b="0">
+                <a:solidFill>
+                  <a:srgbClr val="8A94A0"/>
+                </a:solidFill>
+                <a:latin typeface="Segoe UI"/>
+              </a:rPr>
+              <a:t>ACME Talent Lake  ·  Data Engineer track  ·  Coding Workshop 2026</a:t>
+            </a:r>
+          </a:p>
+        </p:txBody>
+      </p:sp>
+      <p:sp>
+        <p:nvSpPr>
+          <p:cNvPr id="23" name="TextBox 22"/>
+          <p:cNvSpPr txBox="1"/>
+          <p:nvPr/>
+        </p:nvSpPr>
+        <p:spPr>
+          <a:xfrm>
+            <a:off x="10698480" y="6455664"/>
+            <a:ext cx="941832" cy="274320"/>
+          </a:xfrm>
+          <a:prstGeom prst="rect">
+            <a:avLst/>
+          </a:prstGeom>
+          <a:noFill/>
+        </p:spPr>
+        <p:txBody>
+          <a:bodyPr wrap="square" anchor="t" lIns="18288" rIns="18288" tIns="18288" bIns="18288">
+            <a:spAutoFit/>
+          </a:bodyPr>
+          <a:lstStyle/>
+          <a:p>
+            <a:pPr algn="r">
+              <a:spcAft>
+                <a:spcPts val="400"/>
+              </a:spcAft>
+            </a:pPr>
+            <a:r>
+              <a:rPr sz="900" b="0">
+                <a:solidFill>
+                  <a:srgbClr val="8A94A0"/>
+                </a:solidFill>
+                <a:latin typeface="Segoe UI"/>
+              </a:rPr>
+              <a:t>10 / 11</a:t>
+            </a:r>
+          </a:p>
+        </p:txBody>
+      </p:sp>
+    </p:spTree>
+  </p:cSld>
+  <p:clrMapOvr>
+    <a:masterClrMapping/>
+  </p:clrMapOvr>
+</p:sld>
+</file>
+
+<file path=ppt/slides/slide11.xml><?xml version="1.0" encoding="utf-8"?>
+<p:sld xmlns:a="http://schemas.openxmlformats.org/drawingml/2006/main" xmlns:p="http://schemas.openxmlformats.org/presentationml/2006/main" xmlns:r="http://schemas.openxmlformats.org/officeDocument/2006/relationships">
+  <p:cSld>
+    <p:bg>
+      <p:bgPr>
+        <a:solidFill>
+          <a:srgbClr val="FFFFFF"/>
+        </a:solidFill>
+        <a:effectLst/>
+      </p:bgPr>
+    </p:bg>
+    <p:spTree>
+      <p:nvGrpSpPr>
+        <p:cNvPr id="1" name=""/>
+        <p:cNvGrpSpPr/>
+        <p:nvPr/>
+      </p:nvGrpSpPr>
+      <p:grpSpPr/>
+      <p:sp>
+        <p:nvSpPr>
+          <p:cNvPr id="2" name="TextBox 1"/>
+          <p:cNvSpPr txBox="1"/>
+          <p:nvPr/>
+        </p:nvSpPr>
+        <p:spPr>
+          <a:xfrm>
+            <a:off x="548640" y="292608"/>
+            <a:ext cx="8229600" cy="274320"/>
+          </a:xfrm>
+          <a:prstGeom prst="rect">
+            <a:avLst/>
+          </a:prstGeom>
+          <a:noFill/>
+        </p:spPr>
+        <p:txBody>
+          <a:bodyPr wrap="square" anchor="t" lIns="18288" rIns="18288" tIns="18288" bIns="18288">
+            <a:spAutoFit/>
+          </a:bodyPr>
+          <a:lstStyle/>
+          <a:p>
+            <a:pPr algn="l">
+              <a:spcAft>
+                <a:spcPts val="400"/>
+              </a:spcAft>
+            </a:pPr>
+            <a:r>
+              <a:rPr sz="1100" b="0">
+                <a:solidFill>
+                  <a:srgbClr val="1D4E89"/>
+                </a:solidFill>
+                <a:latin typeface="Segoe UI Semibold"/>
+              </a:rPr>
               <a:t>DECISIONS &amp; NEXT STEPS</a:t>
             </a:r>
           </a:p>
@@ -6715,7 +8307,7 @@
                 </a:solidFill>
                 <a:latin typeface="Segoe UI"/>
               </a:rPr>
-              <a:t>10 / 10</a:t>
+              <a:t>11 / 11</a:t>
             </a:r>
           </a:p>
         </p:txBody>
@@ -7754,7 +9346,7 @@
                 </a:solidFill>
                 <a:latin typeface="Segoe UI"/>
               </a:rPr>
-              <a:t>2 / 10</a:t>
+              <a:t>2 / 11</a:t>
             </a:r>
           </a:p>
         </p:txBody>
@@ -9146,7 +10738,7 @@
                 </a:solidFill>
                 <a:latin typeface="Consolas"/>
               </a:rPr>
-              <a:t>COPY</a:t>
+              <a:t>if changed</a:t>
             </a:r>
           </a:p>
         </p:txBody>
@@ -9207,7 +10799,7 @@
                 </a:solidFill>
                 <a:latin typeface="Consolas"/>
               </a:rPr>
-              <a:t>new</a:t>
+              <a:t>if changed</a:t>
             </a:r>
           </a:p>
         </p:txBody>
@@ -9502,7 +11094,7 @@
                 </a:solidFill>
                 <a:latin typeface="Segoe UI"/>
               </a:rPr>
-              <a:t>Bronze → Silver → Gold under one run id; stops with a non-zero exit if any check fails</a:t>
+              <a:t>Checks each source for changes first; unchanged data is skipped. Stops if any check fails.</a:t>
             </a:r>
           </a:p>
         </p:txBody>
@@ -9658,7 +11250,7 @@
                 </a:solidFill>
                 <a:latin typeface="Segoe UI"/>
               </a:rPr>
-              <a:t>watermark: only new or changed files are copied</a:t>
+              <a:t>change watermark: file ETags, table checksums</a:t>
             </a:r>
           </a:p>
         </p:txBody>
@@ -9835,7 +11427,7 @@
                 </a:solidFill>
                 <a:latin typeface="Segoe UI"/>
               </a:rPr>
-              <a:t>3 / 10</a:t>
+              <a:t>3 / 11</a:t>
             </a:r>
           </a:p>
         </p:txBody>
@@ -11389,7 +12981,7 @@
                 </a:solidFill>
                 <a:latin typeface="Segoe UI"/>
               </a:rPr>
-              <a:t>4 / 10</a:t>
+              <a:t>4 / 11</a:t>
             </a:r>
           </a:p>
         </p:txBody>
@@ -14174,7 +15766,7 @@
                 </a:solidFill>
                 <a:latin typeface="Segoe UI"/>
               </a:rPr>
-              <a:t>5 / 10</a:t>
+              <a:t>5 / 11</a:t>
             </a:r>
           </a:p>
         </p:txBody>
@@ -14188,6 +15780,1446 @@
 </file>
 
 <file path=ppt/slides/slide6.xml><?xml version="1.0" encoding="utf-8"?>
+<p:sld xmlns:a="http://schemas.openxmlformats.org/drawingml/2006/main" xmlns:p="http://schemas.openxmlformats.org/presentationml/2006/main" xmlns:r="http://schemas.openxmlformats.org/officeDocument/2006/relationships">
+  <p:cSld>
+    <p:bg>
+      <p:bgPr>
+        <a:solidFill>
+          <a:srgbClr val="FFFFFF"/>
+        </a:solidFill>
+        <a:effectLst/>
+      </p:bgPr>
+    </p:bg>
+    <p:spTree>
+      <p:nvGrpSpPr>
+        <p:cNvPr id="1" name=""/>
+        <p:cNvGrpSpPr/>
+        <p:nvPr/>
+      </p:nvGrpSpPr>
+      <p:grpSpPr/>
+      <p:sp>
+        <p:nvSpPr>
+          <p:cNvPr id="2" name="TextBox 1"/>
+          <p:cNvSpPr txBox="1"/>
+          <p:nvPr/>
+        </p:nvSpPr>
+        <p:spPr>
+          <a:xfrm>
+            <a:off x="548640" y="292608"/>
+            <a:ext cx="8229600" cy="274320"/>
+          </a:xfrm>
+          <a:prstGeom prst="rect">
+            <a:avLst/>
+          </a:prstGeom>
+          <a:noFill/>
+        </p:spPr>
+        <p:txBody>
+          <a:bodyPr wrap="square" anchor="t" lIns="18288" rIns="18288" tIns="18288" bIns="18288">
+            <a:spAutoFit/>
+          </a:bodyPr>
+          <a:lstStyle/>
+          <a:p>
+            <a:pPr algn="l">
+              <a:spcAft>
+                <a:spcPts val="400"/>
+              </a:spcAft>
+            </a:pPr>
+            <a:r>
+              <a:rPr sz="1100" b="0">
+                <a:solidFill>
+                  <a:srgbClr val="1D4E89"/>
+                </a:solidFill>
+                <a:latin typeface="Segoe UI Semibold"/>
+              </a:rPr>
+              <a:t>RE-RUNS &amp; CHANGE DETECTION</a:t>
+            </a:r>
+          </a:p>
+        </p:txBody>
+      </p:sp>
+      <p:sp>
+        <p:nvSpPr>
+          <p:cNvPr id="3" name="TextBox 2"/>
+          <p:cNvSpPr txBox="1"/>
+          <p:nvPr/>
+        </p:nvSpPr>
+        <p:spPr>
+          <a:xfrm>
+            <a:off x="548640" y="566928"/>
+            <a:ext cx="11064240" cy="731520"/>
+          </a:xfrm>
+          <a:prstGeom prst="rect">
+            <a:avLst/>
+          </a:prstGeom>
+          <a:noFill/>
+        </p:spPr>
+        <p:txBody>
+          <a:bodyPr wrap="square" anchor="t" lIns="18288" rIns="18288" tIns="18288" bIns="18288">
+            <a:spAutoFit/>
+          </a:bodyPr>
+          <a:lstStyle/>
+          <a:p>
+            <a:pPr algn="l">
+              <a:spcAft>
+                <a:spcPts val="400"/>
+              </a:spcAft>
+            </a:pPr>
+            <a:r>
+              <a:rPr sz="2600" b="0">
+                <a:solidFill>
+                  <a:srgbClr val="17202A"/>
+                </a:solidFill>
+                <a:latin typeface="Segoe UI Semibold"/>
+              </a:rPr>
+              <a:t>Re-running with unchanged data repeats no work</a:t>
+            </a:r>
+          </a:p>
+        </p:txBody>
+      </p:sp>
+      <p:sp>
+        <p:nvSpPr>
+          <p:cNvPr id="4" name="Rounded Rectangle 3"/>
+          <p:cNvSpPr/>
+          <p:nvPr/>
+        </p:nvSpPr>
+        <p:spPr>
+          <a:xfrm>
+            <a:off x="548640" y="1463040"/>
+            <a:ext cx="5394960" cy="548640"/>
+          </a:xfrm>
+          <a:prstGeom prst="roundRect">
+            <a:avLst>
+              <a:gd name="adj" fmla="val 6000"/>
+            </a:avLst>
+          </a:prstGeom>
+          <a:solidFill>
+            <a:srgbClr val="F4F6F8"/>
+          </a:solidFill>
+          <a:ln>
+            <a:noFill/>
+          </a:ln>
+        </p:spPr>
+        <p:txBody>
+          <a:bodyPr rtlCol="0" anchor="ctr"/>
+          <a:lstStyle/>
+          <a:p/>
+        </p:txBody>
+      </p:sp>
+      <p:sp>
+        <p:nvSpPr>
+          <p:cNvPr id="5" name="TextBox 4"/>
+          <p:cNvSpPr txBox="1"/>
+          <p:nvPr/>
+        </p:nvSpPr>
+        <p:spPr>
+          <a:xfrm>
+            <a:off x="731520" y="1554480"/>
+            <a:ext cx="5029200" cy="320040"/>
+          </a:xfrm>
+          <a:prstGeom prst="rect">
+            <a:avLst/>
+          </a:prstGeom>
+          <a:noFill/>
+        </p:spPr>
+        <p:txBody>
+          <a:bodyPr wrap="square" anchor="t" lIns="18288" rIns="18288" tIns="18288" bIns="18288">
+            <a:spAutoFit/>
+          </a:bodyPr>
+          <a:lstStyle/>
+          <a:p>
+            <a:pPr algn="l">
+              <a:spcAft>
+                <a:spcPts val="400"/>
+              </a:spcAft>
+            </a:pPr>
+            <a:r>
+              <a:rPr sz="1300" b="0">
+                <a:solidFill>
+                  <a:srgbClr val="17202A"/>
+                </a:solidFill>
+                <a:latin typeface="Segoe UI Semibold"/>
+              </a:rPr>
+              <a:t>Run starts</a:t>
+            </a:r>
+          </a:p>
+        </p:txBody>
+      </p:sp>
+      <p:cxnSp>
+        <p:nvCxnSpPr>
+          <p:cNvPr id="6" name="Connector 5"/>
+          <p:cNvCxnSpPr/>
+          <p:nvPr/>
+        </p:nvCxnSpPr>
+        <p:spPr>
+          <a:xfrm>
+            <a:off x="3246120" y="2011680"/>
+            <a:ext cx="0" cy="182880"/>
+          </a:xfrm>
+          <a:prstGeom prst="line">
+            <a:avLst/>
+          </a:prstGeom>
+          <a:ln w="19050">
+            <a:solidFill>
+              <a:srgbClr val="4B5765"/>
+            </a:solidFill>
+            <a:tailEnd type="triangle" w="med" len="med"/>
+          </a:ln>
+        </p:spPr>
+      </p:cxnSp>
+      <p:sp>
+        <p:nvSpPr>
+          <p:cNvPr id="7" name="Rounded Rectangle 6"/>
+          <p:cNvSpPr/>
+          <p:nvPr/>
+        </p:nvSpPr>
+        <p:spPr>
+          <a:xfrm>
+            <a:off x="548640" y="2194560"/>
+            <a:ext cx="5394960" cy="1234440"/>
+          </a:xfrm>
+          <a:prstGeom prst="roundRect">
+            <a:avLst>
+              <a:gd name="adj" fmla="val 6000"/>
+            </a:avLst>
+          </a:prstGeom>
+          <a:solidFill>
+            <a:srgbClr val="FFFFFF"/>
+          </a:solidFill>
+          <a:ln w="12700">
+            <a:solidFill>
+              <a:srgbClr val="D4DAE1"/>
+            </a:solidFill>
+          </a:ln>
+        </p:spPr>
+        <p:txBody>
+          <a:bodyPr rtlCol="0" anchor="ctr"/>
+          <a:lstStyle/>
+          <a:p/>
+        </p:txBody>
+      </p:sp>
+      <p:sp>
+        <p:nvSpPr>
+          <p:cNvPr id="8" name="TextBox 7"/>
+          <p:cNvSpPr txBox="1"/>
+          <p:nvPr/>
+        </p:nvSpPr>
+        <p:spPr>
+          <a:xfrm>
+            <a:off x="731520" y="2286000"/>
+            <a:ext cx="5029200" cy="320040"/>
+          </a:xfrm>
+          <a:prstGeom prst="rect">
+            <a:avLst/>
+          </a:prstGeom>
+          <a:noFill/>
+        </p:spPr>
+        <p:txBody>
+          <a:bodyPr wrap="square" anchor="t" lIns="18288" rIns="18288" tIns="18288" bIns="18288">
+            <a:spAutoFit/>
+          </a:bodyPr>
+          <a:lstStyle/>
+          <a:p>
+            <a:pPr algn="l">
+              <a:spcAft>
+                <a:spcPts val="400"/>
+              </a:spcAft>
+            </a:pPr>
+            <a:r>
+              <a:rPr sz="1300" b="0">
+                <a:solidFill>
+                  <a:srgbClr val="17202A"/>
+                </a:solidFill>
+                <a:latin typeface="Segoe UI Semibold"/>
+              </a:rPr>
+              <a:t>Change check, per source</a:t>
+            </a:r>
+          </a:p>
+        </p:txBody>
+      </p:sp>
+      <p:sp>
+        <p:nvSpPr>
+          <p:cNvPr id="9" name="TextBox 8"/>
+          <p:cNvSpPr txBox="1"/>
+          <p:nvPr/>
+        </p:nvSpPr>
+        <p:spPr>
+          <a:xfrm>
+            <a:off x="731520" y="2633472"/>
+            <a:ext cx="5029200" cy="777240"/>
+          </a:xfrm>
+          <a:prstGeom prst="rect">
+            <a:avLst/>
+          </a:prstGeom>
+          <a:noFill/>
+        </p:spPr>
+        <p:txBody>
+          <a:bodyPr wrap="square" anchor="t" lIns="18288" rIns="18288" tIns="18288" bIns="18288">
+            <a:spAutoFit/>
+          </a:bodyPr>
+          <a:lstStyle/>
+          <a:p>
+            <a:pPr algn="l">
+              <a:spcAft>
+                <a:spcPts val="400"/>
+              </a:spcAft>
+            </a:pPr>
+            <a:r>
+              <a:rPr sz="1150" b="0">
+                <a:solidFill>
+                  <a:srgbClr val="17202A"/>
+                </a:solidFill>
+                <a:latin typeface="Segoe UI Semibold"/>
+              </a:rPr>
+              <a:t>S3 files  </a:t>
+            </a:r>
+            <a:r>
+              <a:rPr sz="1150" b="0">
+                <a:solidFill>
+                  <a:srgbClr val="4B5765"/>
+                </a:solidFill>
+                <a:latin typeface="Segoe UI"/>
+              </a:rPr>
+              <a:t>ETag vs the _state watermark</a:t>
+            </a:r>
+          </a:p>
+          <a:p>
+            <a:pPr algn="l">
+              <a:spcAft>
+                <a:spcPts val="400"/>
+              </a:spcAft>
+            </a:pPr>
+            <a:r>
+              <a:rPr sz="1150" b="0">
+                <a:solidFill>
+                  <a:srgbClr val="17202A"/>
+                </a:solidFill>
+                <a:latin typeface="Segoe UI Semibold"/>
+              </a:rPr>
+              <a:t>PostgreSQL tables  </a:t>
+            </a:r>
+            <a:r>
+              <a:rPr sz="1150" b="0">
+                <a:solidFill>
+                  <a:srgbClr val="4B5765"/>
+                </a:solidFill>
+                <a:latin typeface="Segoe UI"/>
+              </a:rPr>
+              <a:t>export checksum vs last Bronze manifest</a:t>
+            </a:r>
+          </a:p>
+        </p:txBody>
+      </p:sp>
+      <p:cxnSp>
+        <p:nvCxnSpPr>
+          <p:cNvPr id="10" name="Connector 9"/>
+          <p:cNvCxnSpPr/>
+          <p:nvPr/>
+        </p:nvCxnSpPr>
+        <p:spPr>
+          <a:xfrm>
+            <a:off x="1874519" y="3429000"/>
+            <a:ext cx="0" cy="457200"/>
+          </a:xfrm>
+          <a:prstGeom prst="line">
+            <a:avLst/>
+          </a:prstGeom>
+          <a:ln w="19050">
+            <a:solidFill>
+              <a:srgbClr val="4B5765"/>
+            </a:solidFill>
+            <a:tailEnd type="triangle" w="med" len="med"/>
+          </a:ln>
+        </p:spPr>
+      </p:cxnSp>
+      <p:sp>
+        <p:nvSpPr>
+          <p:cNvPr id="11" name="TextBox 10"/>
+          <p:cNvSpPr txBox="1"/>
+          <p:nvPr/>
+        </p:nvSpPr>
+        <p:spPr>
+          <a:xfrm>
+            <a:off x="1965960" y="3493008"/>
+            <a:ext cx="1463040" cy="274320"/>
+          </a:xfrm>
+          <a:prstGeom prst="rect">
+            <a:avLst/>
+          </a:prstGeom>
+          <a:noFill/>
+        </p:spPr>
+        <p:txBody>
+          <a:bodyPr wrap="square" anchor="t" lIns="18288" rIns="18288" tIns="18288" bIns="18288">
+            <a:spAutoFit/>
+          </a:bodyPr>
+          <a:lstStyle/>
+          <a:p>
+            <a:pPr algn="l">
+              <a:spcAft>
+                <a:spcPts val="400"/>
+              </a:spcAft>
+            </a:pPr>
+            <a:r>
+              <a:rPr sz="950" b="0">
+                <a:solidFill>
+                  <a:srgbClr val="4B5765"/>
+                </a:solidFill>
+                <a:latin typeface="Consolas"/>
+              </a:rPr>
+              <a:t>nothing changed</a:t>
+            </a:r>
+          </a:p>
+        </p:txBody>
+      </p:sp>
+      <p:cxnSp>
+        <p:nvCxnSpPr>
+          <p:cNvPr id="12" name="Connector 11"/>
+          <p:cNvCxnSpPr/>
+          <p:nvPr/>
+        </p:nvCxnSpPr>
+        <p:spPr>
+          <a:xfrm>
+            <a:off x="4617720" y="3429000"/>
+            <a:ext cx="0" cy="457200"/>
+          </a:xfrm>
+          <a:prstGeom prst="line">
+            <a:avLst/>
+          </a:prstGeom>
+          <a:ln w="19050">
+            <a:solidFill>
+              <a:srgbClr val="4B5765"/>
+            </a:solidFill>
+            <a:tailEnd type="triangle" w="med" len="med"/>
+          </a:ln>
+        </p:spPr>
+      </p:cxnSp>
+      <p:sp>
+        <p:nvSpPr>
+          <p:cNvPr id="13" name="TextBox 12"/>
+          <p:cNvSpPr txBox="1"/>
+          <p:nvPr/>
+        </p:nvSpPr>
+        <p:spPr>
+          <a:xfrm>
+            <a:off x="4709159" y="3493008"/>
+            <a:ext cx="1280160" cy="274320"/>
+          </a:xfrm>
+          <a:prstGeom prst="rect">
+            <a:avLst/>
+          </a:prstGeom>
+          <a:noFill/>
+        </p:spPr>
+        <p:txBody>
+          <a:bodyPr wrap="square" anchor="t" lIns="18288" rIns="18288" tIns="18288" bIns="18288">
+            <a:spAutoFit/>
+          </a:bodyPr>
+          <a:lstStyle/>
+          <a:p>
+            <a:pPr algn="l">
+              <a:spcAft>
+                <a:spcPts val="400"/>
+              </a:spcAft>
+            </a:pPr>
+            <a:r>
+              <a:rPr sz="950" b="0">
+                <a:solidFill>
+                  <a:srgbClr val="4B5765"/>
+                </a:solidFill>
+                <a:latin typeface="Consolas"/>
+              </a:rPr>
+              <a:t>changed</a:t>
+            </a:r>
+          </a:p>
+        </p:txBody>
+      </p:sp>
+      <p:sp>
+        <p:nvSpPr>
+          <p:cNvPr id="14" name="Rounded Rectangle 13"/>
+          <p:cNvSpPr/>
+          <p:nvPr/>
+        </p:nvSpPr>
+        <p:spPr>
+          <a:xfrm>
+            <a:off x="548640" y="3886200"/>
+            <a:ext cx="2606040" cy="1417320"/>
+          </a:xfrm>
+          <a:prstGeom prst="roundRect">
+            <a:avLst>
+              <a:gd name="adj" fmla="val 6000"/>
+            </a:avLst>
+          </a:prstGeom>
+          <a:solidFill>
+            <a:srgbClr val="DFF0E5"/>
+          </a:solidFill>
+          <a:ln>
+            <a:noFill/>
+          </a:ln>
+        </p:spPr>
+        <p:txBody>
+          <a:bodyPr rtlCol="0" anchor="ctr"/>
+          <a:lstStyle/>
+          <a:p/>
+        </p:txBody>
+      </p:sp>
+      <p:sp>
+        <p:nvSpPr>
+          <p:cNvPr id="15" name="TextBox 14"/>
+          <p:cNvSpPr txBox="1"/>
+          <p:nvPr/>
+        </p:nvSpPr>
+        <p:spPr>
+          <a:xfrm>
+            <a:off x="713232" y="3977639"/>
+            <a:ext cx="2331720" cy="320040"/>
+          </a:xfrm>
+          <a:prstGeom prst="rect">
+            <a:avLst/>
+          </a:prstGeom>
+          <a:noFill/>
+        </p:spPr>
+        <p:txBody>
+          <a:bodyPr wrap="square" anchor="t" lIns="18288" rIns="18288" tIns="18288" bIns="18288">
+            <a:spAutoFit/>
+          </a:bodyPr>
+          <a:lstStyle/>
+          <a:p>
+            <a:pPr algn="l">
+              <a:spcAft>
+                <a:spcPts val="400"/>
+              </a:spcAft>
+            </a:pPr>
+            <a:r>
+              <a:rPr sz="1300" b="0">
+                <a:solidFill>
+                  <a:srgbClr val="2D7449"/>
+                </a:solidFill>
+                <a:latin typeface="Segoe UI Semibold"/>
+              </a:rPr>
+              <a:t>No-op run</a:t>
+            </a:r>
+          </a:p>
+        </p:txBody>
+      </p:sp>
+      <p:sp>
+        <p:nvSpPr>
+          <p:cNvPr id="16" name="TextBox 15"/>
+          <p:cNvSpPr txBox="1"/>
+          <p:nvPr/>
+        </p:nvSpPr>
+        <p:spPr>
+          <a:xfrm>
+            <a:off x="713232" y="4315968"/>
+            <a:ext cx="2331720" cy="960120"/>
+          </a:xfrm>
+          <a:prstGeom prst="rect">
+            <a:avLst/>
+          </a:prstGeom>
+          <a:noFill/>
+        </p:spPr>
+        <p:txBody>
+          <a:bodyPr wrap="square" anchor="t" lIns="18288" rIns="18288" tIns="18288" bIns="18288">
+            <a:spAutoFit/>
+          </a:bodyPr>
+          <a:lstStyle/>
+          <a:p>
+            <a:pPr algn="l">
+              <a:spcAft>
+                <a:spcPts val="400"/>
+              </a:spcAft>
+            </a:pPr>
+            <a:r>
+              <a:rPr sz="1100" b="0">
+                <a:solidFill>
+                  <a:srgbClr val="4B5765"/>
+                </a:solidFill>
+                <a:latin typeface="Segoe UI"/>
+              </a:rPr>
+              <a:t>Skip Bronze, Silver and Gold; record 'no changes' in the run manifest</a:t>
+            </a:r>
+          </a:p>
+        </p:txBody>
+      </p:sp>
+      <p:sp>
+        <p:nvSpPr>
+          <p:cNvPr id="17" name="Rounded Rectangle 16"/>
+          <p:cNvSpPr/>
+          <p:nvPr/>
+        </p:nvSpPr>
+        <p:spPr>
+          <a:xfrm>
+            <a:off x="3337560" y="3886200"/>
+            <a:ext cx="2606040" cy="1417320"/>
+          </a:xfrm>
+          <a:prstGeom prst="roundRect">
+            <a:avLst>
+              <a:gd name="adj" fmla="val 6000"/>
+            </a:avLst>
+          </a:prstGeom>
+          <a:solidFill>
+            <a:srgbClr val="F6ECCC"/>
+          </a:solidFill>
+          <a:ln>
+            <a:noFill/>
+          </a:ln>
+        </p:spPr>
+        <p:txBody>
+          <a:bodyPr rtlCol="0" anchor="ctr"/>
+          <a:lstStyle/>
+          <a:p/>
+        </p:txBody>
+      </p:sp>
+      <p:sp>
+        <p:nvSpPr>
+          <p:cNvPr id="18" name="TextBox 17"/>
+          <p:cNvSpPr txBox="1"/>
+          <p:nvPr/>
+        </p:nvSpPr>
+        <p:spPr>
+          <a:xfrm>
+            <a:off x="3502152" y="3977639"/>
+            <a:ext cx="2331720" cy="320040"/>
+          </a:xfrm>
+          <a:prstGeom prst="rect">
+            <a:avLst/>
+          </a:prstGeom>
+          <a:noFill/>
+        </p:spPr>
+        <p:txBody>
+          <a:bodyPr wrap="square" anchor="t" lIns="18288" rIns="18288" tIns="18288" bIns="18288">
+            <a:spAutoFit/>
+          </a:bodyPr>
+          <a:lstStyle/>
+          <a:p>
+            <a:pPr algn="l">
+              <a:spcAft>
+                <a:spcPts val="400"/>
+              </a:spcAft>
+            </a:pPr>
+            <a:r>
+              <a:rPr sz="1300" b="0">
+                <a:solidFill>
+                  <a:srgbClr val="8F6C0E"/>
+                </a:solidFill>
+                <a:latin typeface="Segoe UI Semibold"/>
+              </a:rPr>
+              <a:t>Process the change</a:t>
+            </a:r>
+          </a:p>
+        </p:txBody>
+      </p:sp>
+      <p:sp>
+        <p:nvSpPr>
+          <p:cNvPr id="19" name="TextBox 18"/>
+          <p:cNvSpPr txBox="1"/>
+          <p:nvPr/>
+        </p:nvSpPr>
+        <p:spPr>
+          <a:xfrm>
+            <a:off x="3502152" y="4315968"/>
+            <a:ext cx="2331720" cy="960120"/>
+          </a:xfrm>
+          <a:prstGeom prst="rect">
+            <a:avLst/>
+          </a:prstGeom>
+          <a:noFill/>
+        </p:spPr>
+        <p:txBody>
+          <a:bodyPr wrap="square" anchor="t" lIns="18288" rIns="18288" tIns="18288" bIns="18288">
+            <a:spAutoFit/>
+          </a:bodyPr>
+          <a:lstStyle/>
+          <a:p>
+            <a:pPr algn="l">
+              <a:spcAft>
+                <a:spcPts val="400"/>
+              </a:spcAft>
+            </a:pPr>
+            <a:r>
+              <a:rPr sz="1100" b="0">
+                <a:solidFill>
+                  <a:srgbClr val="4B5765"/>
+                </a:solidFill>
+                <a:latin typeface="Segoe UI"/>
+              </a:rPr>
+              <a:t>Load only the changed sources into Bronze, then rebuild Silver and Gold</a:t>
+            </a:r>
+          </a:p>
+        </p:txBody>
+      </p:sp>
+      <p:sp>
+        <p:nvSpPr>
+          <p:cNvPr id="20" name="TextBox 19"/>
+          <p:cNvSpPr txBox="1"/>
+          <p:nvPr/>
+        </p:nvSpPr>
+        <p:spPr>
+          <a:xfrm>
+            <a:off x="548640" y="5440680"/>
+            <a:ext cx="5394960" cy="731520"/>
+          </a:xfrm>
+          <a:prstGeom prst="rect">
+            <a:avLst/>
+          </a:prstGeom>
+          <a:noFill/>
+        </p:spPr>
+        <p:txBody>
+          <a:bodyPr wrap="square" anchor="t" lIns="18288" rIns="18288" tIns="18288" bIns="18288">
+            <a:spAutoFit/>
+          </a:bodyPr>
+          <a:lstStyle/>
+          <a:p>
+            <a:pPr algn="l">
+              <a:spcAft>
+                <a:spcPts val="400"/>
+              </a:spcAft>
+            </a:pPr>
+            <a:r>
+              <a:rPr sz="1100" b="0">
+                <a:solidFill>
+                  <a:srgbClr val="4B5765"/>
+                </a:solidFill>
+                <a:latin typeface="Segoe UI"/>
+              </a:rPr>
+              <a:t>Results are identical either way: every layer is idempotent. Change detection only saves work and avoids duplicate snapshots.</a:t>
+            </a:r>
+          </a:p>
+        </p:txBody>
+      </p:sp>
+      <p:sp>
+        <p:nvSpPr>
+          <p:cNvPr id="21" name="TextBox 20"/>
+          <p:cNvSpPr txBox="1"/>
+          <p:nvPr/>
+        </p:nvSpPr>
+        <p:spPr>
+          <a:xfrm>
+            <a:off x="6355080" y="1444752"/>
+            <a:ext cx="5303520" cy="365760"/>
+          </a:xfrm>
+          <a:prstGeom prst="rect">
+            <a:avLst/>
+          </a:prstGeom>
+          <a:noFill/>
+        </p:spPr>
+        <p:txBody>
+          <a:bodyPr wrap="square" anchor="t" lIns="18288" rIns="18288" tIns="18288" bIns="18288">
+            <a:spAutoFit/>
+          </a:bodyPr>
+          <a:lstStyle/>
+          <a:p>
+            <a:pPr algn="l">
+              <a:spcAft>
+                <a:spcPts val="400"/>
+              </a:spcAft>
+            </a:pPr>
+            <a:r>
+              <a:rPr sz="1400" b="0">
+                <a:solidFill>
+                  <a:srgbClr val="17202A"/>
+                </a:solidFill>
+                <a:latin typeface="Segoe UI Semibold"/>
+              </a:rPr>
+              <a:t>Today vs design</a:t>
+            </a:r>
+          </a:p>
+        </p:txBody>
+      </p:sp>
+      <p:graphicFrame>
+        <p:nvGraphicFramePr>
+          <p:cNvPr id="22" name="Table 21"/>
+          <p:cNvGraphicFramePr>
+            <a:graphicFrameLocks noGrp="1"/>
+          </p:cNvGraphicFramePr>
+          <p:nvPr/>
+        </p:nvGraphicFramePr>
+        <p:xfrm>
+          <a:off x="6355080" y="1847088"/>
+          <a:ext cx="5285232" cy="3474720"/>
+        </p:xfrm>
+        <a:graphic>
+          <a:graphicData uri="http://schemas.openxmlformats.org/drawingml/2006/table">
+            <a:tbl>
+              <a:tblPr firstRow="1">
+                <a:tableStyleId>{5C22544A-7EE6-4342-B048-85BDC9FD1C3A}</a:tableStyleId>
+              </a:tblPr>
+              <a:tblGrid>
+                <a:gridCol w="1325880"/>
+                <a:gridCol w="2011680"/>
+                <a:gridCol w="1947672"/>
+              </a:tblGrid>
+              <a:tr h="868680">
+                <a:tc>
+                  <a:txBody>
+                    <a:bodyPr wrap="square"/>
+                    <a:lstStyle/>
+                    <a:p>
+                      <a:pPr algn="l"/>
+                      <a:r>
+                        <a:rPr sz="1000" b="1">
+                          <a:solidFill>
+                            <a:srgbClr val="4B5765"/>
+                          </a:solidFill>
+                          <a:latin typeface="Segoe UI Semibold"/>
+                        </a:rPr>
+                        <a:t>Source / layer</a:t>
+                      </a:r>
+                    </a:p>
+                  </a:txBody>
+                  <a:tcPr marL="82296" marR="82296" marT="36576" marB="36576" anchor="ctr">
+                    <a:solidFill>
+                      <a:srgbClr val="F4F6F8"/>
+                    </a:solidFill>
+                    <a:lnL w="6350">
+                      <a:solidFill>
+                        <a:srgbClr val="D4DAE1"/>
+                      </a:solidFill>
+                    </a:lnL>
+                    <a:lnR w="6350">
+                      <a:solidFill>
+                        <a:srgbClr val="D4DAE1"/>
+                      </a:solidFill>
+                    </a:lnR>
+                    <a:lnT w="6350">
+                      <a:solidFill>
+                        <a:srgbClr val="D4DAE1"/>
+                      </a:solidFill>
+                    </a:lnT>
+                    <a:lnB w="6350">
+                      <a:solidFill>
+                        <a:srgbClr val="D4DAE1"/>
+                      </a:solidFill>
+                    </a:lnB>
+                  </a:tcPr>
+                </a:tc>
+                <a:tc>
+                  <a:txBody>
+                    <a:bodyPr wrap="square"/>
+                    <a:lstStyle/>
+                    <a:p>
+                      <a:pPr algn="l"/>
+                      <a:r>
+                        <a:rPr sz="1000" b="1">
+                          <a:solidFill>
+                            <a:srgbClr val="4B5765"/>
+                          </a:solidFill>
+                          <a:latin typeface="Segoe UI Semibold"/>
+                        </a:rPr>
+                        <a:t>Built today</a:t>
+                      </a:r>
+                    </a:p>
+                  </a:txBody>
+                  <a:tcPr marL="82296" marR="82296" marT="36576" marB="36576" anchor="ctr">
+                    <a:solidFill>
+                      <a:srgbClr val="F4F6F8"/>
+                    </a:solidFill>
+                    <a:lnL w="6350">
+                      <a:solidFill>
+                        <a:srgbClr val="D4DAE1"/>
+                      </a:solidFill>
+                    </a:lnL>
+                    <a:lnR w="6350">
+                      <a:solidFill>
+                        <a:srgbClr val="D4DAE1"/>
+                      </a:solidFill>
+                    </a:lnR>
+                    <a:lnT w="6350">
+                      <a:solidFill>
+                        <a:srgbClr val="D4DAE1"/>
+                      </a:solidFill>
+                    </a:lnT>
+                    <a:lnB w="6350">
+                      <a:solidFill>
+                        <a:srgbClr val="D4DAE1"/>
+                      </a:solidFill>
+                    </a:lnB>
+                  </a:tcPr>
+                </a:tc>
+                <a:tc>
+                  <a:txBody>
+                    <a:bodyPr wrap="square"/>
+                    <a:lstStyle/>
+                    <a:p>
+                      <a:pPr algn="l"/>
+                      <a:r>
+                        <a:rPr sz="1000" b="1">
+                          <a:solidFill>
+                            <a:srgbClr val="4B5765"/>
+                          </a:solidFill>
+                          <a:latin typeface="Segoe UI Semibold"/>
+                        </a:rPr>
+                        <a:t>Design (planned)</a:t>
+                      </a:r>
+                    </a:p>
+                  </a:txBody>
+                  <a:tcPr marL="82296" marR="82296" marT="36576" marB="36576" anchor="ctr">
+                    <a:solidFill>
+                      <a:srgbClr val="F4F6F8"/>
+                    </a:solidFill>
+                    <a:lnL w="6350">
+                      <a:solidFill>
+                        <a:srgbClr val="D4DAE1"/>
+                      </a:solidFill>
+                    </a:lnL>
+                    <a:lnR w="6350">
+                      <a:solidFill>
+                        <a:srgbClr val="D4DAE1"/>
+                      </a:solidFill>
+                    </a:lnR>
+                    <a:lnT w="6350">
+                      <a:solidFill>
+                        <a:srgbClr val="D4DAE1"/>
+                      </a:solidFill>
+                    </a:lnT>
+                    <a:lnB w="6350">
+                      <a:solidFill>
+                        <a:srgbClr val="D4DAE1"/>
+                      </a:solidFill>
+                    </a:lnB>
+                  </a:tcPr>
+                </a:tc>
+              </a:tr>
+              <a:tr h="868680">
+                <a:tc>
+                  <a:txBody>
+                    <a:bodyPr wrap="square"/>
+                    <a:lstStyle/>
+                    <a:p>
+                      <a:pPr algn="l"/>
+                      <a:r>
+                        <a:rPr sz="1100" b="0">
+                          <a:solidFill>
+                            <a:srgbClr val="17202A"/>
+                          </a:solidFill>
+                          <a:latin typeface="Segoe UI"/>
+                        </a:rPr>
+                        <a:t>S3 learning files</a:t>
+                      </a:r>
+                    </a:p>
+                  </a:txBody>
+                  <a:tcPr marL="82296" marR="82296" marT="36576" marB="36576" anchor="ctr">
+                    <a:solidFill>
+                      <a:srgbClr val="FFFFFF"/>
+                    </a:solidFill>
+                    <a:lnL w="6350">
+                      <a:solidFill>
+                        <a:srgbClr val="D4DAE1"/>
+                      </a:solidFill>
+                    </a:lnL>
+                    <a:lnR w="6350">
+                      <a:solidFill>
+                        <a:srgbClr val="D4DAE1"/>
+                      </a:solidFill>
+                    </a:lnR>
+                    <a:lnT w="6350">
+                      <a:solidFill>
+                        <a:srgbClr val="D4DAE1"/>
+                      </a:solidFill>
+                    </a:lnT>
+                    <a:lnB w="6350">
+                      <a:solidFill>
+                        <a:srgbClr val="D4DAE1"/>
+                      </a:solidFill>
+                    </a:lnB>
+                  </a:tcPr>
+                </a:tc>
+                <a:tc>
+                  <a:txBody>
+                    <a:bodyPr wrap="square"/>
+                    <a:lstStyle/>
+                    <a:p>
+                      <a:pPr algn="l"/>
+                      <a:r>
+                        <a:rPr sz="1100" b="0">
+                          <a:solidFill>
+                            <a:srgbClr val="17202A"/>
+                          </a:solidFill>
+                          <a:latin typeface="Segoe UI"/>
+                        </a:rPr>
+                        <a:t>Unchanged files skipped by ETag (rerun copied 0 of 783)</a:t>
+                      </a:r>
+                    </a:p>
+                  </a:txBody>
+                  <a:tcPr marL="82296" marR="82296" marT="36576" marB="36576" anchor="ctr">
+                    <a:solidFill>
+                      <a:srgbClr val="FFFFFF"/>
+                    </a:solidFill>
+                    <a:lnL w="6350">
+                      <a:solidFill>
+                        <a:srgbClr val="D4DAE1"/>
+                      </a:solidFill>
+                    </a:lnL>
+                    <a:lnR w="6350">
+                      <a:solidFill>
+                        <a:srgbClr val="D4DAE1"/>
+                      </a:solidFill>
+                    </a:lnR>
+                    <a:lnT w="6350">
+                      <a:solidFill>
+                        <a:srgbClr val="D4DAE1"/>
+                      </a:solidFill>
+                    </a:lnT>
+                    <a:lnB w="6350">
+                      <a:solidFill>
+                        <a:srgbClr val="D4DAE1"/>
+                      </a:solidFill>
+                    </a:lnB>
+                  </a:tcPr>
+                </a:tc>
+                <a:tc>
+                  <a:txBody>
+                    <a:bodyPr wrap="square"/>
+                    <a:lstStyle/>
+                    <a:p>
+                      <a:pPr algn="l"/>
+                      <a:r>
+                        <a:rPr sz="1100" b="0">
+                          <a:solidFill>
+                            <a:srgbClr val="2D7449"/>
+                          </a:solidFill>
+                          <a:latin typeface="Segoe UI Semibold"/>
+                        </a:rPr>
+                        <a:t>Built</a:t>
+                      </a:r>
+                    </a:p>
+                  </a:txBody>
+                  <a:tcPr marL="82296" marR="82296" marT="36576" marB="36576" anchor="ctr">
+                    <a:solidFill>
+                      <a:srgbClr val="FFFFFF"/>
+                    </a:solidFill>
+                    <a:lnL w="6350">
+                      <a:solidFill>
+                        <a:srgbClr val="D4DAE1"/>
+                      </a:solidFill>
+                    </a:lnL>
+                    <a:lnR w="6350">
+                      <a:solidFill>
+                        <a:srgbClr val="D4DAE1"/>
+                      </a:solidFill>
+                    </a:lnR>
+                    <a:lnT w="6350">
+                      <a:solidFill>
+                        <a:srgbClr val="D4DAE1"/>
+                      </a:solidFill>
+                    </a:lnT>
+                    <a:lnB w="6350">
+                      <a:solidFill>
+                        <a:srgbClr val="D4DAE1"/>
+                      </a:solidFill>
+                    </a:lnB>
+                  </a:tcPr>
+                </a:tc>
+              </a:tr>
+              <a:tr h="868680">
+                <a:tc>
+                  <a:txBody>
+                    <a:bodyPr wrap="square"/>
+                    <a:lstStyle/>
+                    <a:p>
+                      <a:pPr algn="l"/>
+                      <a:r>
+                        <a:rPr sz="1100" b="0">
+                          <a:solidFill>
+                            <a:srgbClr val="17202A"/>
+                          </a:solidFill>
+                          <a:latin typeface="Segoe UI"/>
+                        </a:rPr>
+                        <a:t>PostgreSQL tables</a:t>
+                      </a:r>
+                    </a:p>
+                  </a:txBody>
+                  <a:tcPr marL="82296" marR="82296" marT="36576" marB="36576" anchor="ctr">
+                    <a:solidFill>
+                      <a:srgbClr val="FFFFFF"/>
+                    </a:solidFill>
+                    <a:lnL w="6350">
+                      <a:solidFill>
+                        <a:srgbClr val="D4DAE1"/>
+                      </a:solidFill>
+                    </a:lnL>
+                    <a:lnR w="6350">
+                      <a:solidFill>
+                        <a:srgbClr val="D4DAE1"/>
+                      </a:solidFill>
+                    </a:lnR>
+                    <a:lnT w="6350">
+                      <a:solidFill>
+                        <a:srgbClr val="D4DAE1"/>
+                      </a:solidFill>
+                    </a:lnT>
+                    <a:lnB w="6350">
+                      <a:solidFill>
+                        <a:srgbClr val="D4DAE1"/>
+                      </a:solidFill>
+                    </a:lnB>
+                  </a:tcPr>
+                </a:tc>
+                <a:tc>
+                  <a:txBody>
+                    <a:bodyPr wrap="square"/>
+                    <a:lstStyle/>
+                    <a:p>
+                      <a:pPr algn="l"/>
+                      <a:r>
+                        <a:rPr sz="1100" b="0">
+                          <a:solidFill>
+                            <a:srgbClr val="17202A"/>
+                          </a:solidFill>
+                          <a:latin typeface="Segoe UI"/>
+                        </a:rPr>
+                        <a:t>Same-day rerun skipped; a new day takes a new snapshot</a:t>
+                      </a:r>
+                    </a:p>
+                  </a:txBody>
+                  <a:tcPr marL="82296" marR="82296" marT="36576" marB="36576" anchor="ctr">
+                    <a:solidFill>
+                      <a:srgbClr val="FFFFFF"/>
+                    </a:solidFill>
+                    <a:lnL w="6350">
+                      <a:solidFill>
+                        <a:srgbClr val="D4DAE1"/>
+                      </a:solidFill>
+                    </a:lnL>
+                    <a:lnR w="6350">
+                      <a:solidFill>
+                        <a:srgbClr val="D4DAE1"/>
+                      </a:solidFill>
+                    </a:lnR>
+                    <a:lnT w="6350">
+                      <a:solidFill>
+                        <a:srgbClr val="D4DAE1"/>
+                      </a:solidFill>
+                    </a:lnT>
+                    <a:lnB w="6350">
+                      <a:solidFill>
+                        <a:srgbClr val="D4DAE1"/>
+                      </a:solidFill>
+                    </a:lnB>
+                  </a:tcPr>
+                </a:tc>
+                <a:tc>
+                  <a:txBody>
+                    <a:bodyPr wrap="square"/>
+                    <a:lstStyle/>
+                    <a:p>
+                      <a:pPr algn="l"/>
+                      <a:r>
+                        <a:rPr sz="1100" b="0">
+                          <a:solidFill>
+                            <a:srgbClr val="17202A"/>
+                          </a:solidFill>
+                          <a:latin typeface="Segoe UI"/>
+                        </a:rPr>
+                        <a:t>Skip the snapshot when the checksum matches the last manifest</a:t>
+                      </a:r>
+                    </a:p>
+                  </a:txBody>
+                  <a:tcPr marL="82296" marR="82296" marT="36576" marB="36576" anchor="ctr">
+                    <a:solidFill>
+                      <a:srgbClr val="FFFFFF"/>
+                    </a:solidFill>
+                    <a:lnL w="6350">
+                      <a:solidFill>
+                        <a:srgbClr val="D4DAE1"/>
+                      </a:solidFill>
+                    </a:lnL>
+                    <a:lnR w="6350">
+                      <a:solidFill>
+                        <a:srgbClr val="D4DAE1"/>
+                      </a:solidFill>
+                    </a:lnR>
+                    <a:lnT w="6350">
+                      <a:solidFill>
+                        <a:srgbClr val="D4DAE1"/>
+                      </a:solidFill>
+                    </a:lnT>
+                    <a:lnB w="6350">
+                      <a:solidFill>
+                        <a:srgbClr val="D4DAE1"/>
+                      </a:solidFill>
+                    </a:lnB>
+                  </a:tcPr>
+                </a:tc>
+              </a:tr>
+              <a:tr h="868680">
+                <a:tc>
+                  <a:txBody>
+                    <a:bodyPr wrap="square"/>
+                    <a:lstStyle/>
+                    <a:p>
+                      <a:pPr algn="l"/>
+                      <a:r>
+                        <a:rPr sz="1100" b="0">
+                          <a:solidFill>
+                            <a:srgbClr val="17202A"/>
+                          </a:solidFill>
+                          <a:latin typeface="Segoe UI"/>
+                        </a:rPr>
+                        <a:t>Silver &amp; Gold</a:t>
+                      </a:r>
+                    </a:p>
+                  </a:txBody>
+                  <a:tcPr marL="82296" marR="82296" marT="36576" marB="36576" anchor="ctr">
+                    <a:solidFill>
+                      <a:srgbClr val="FFFFFF"/>
+                    </a:solidFill>
+                    <a:lnL w="6350">
+                      <a:solidFill>
+                        <a:srgbClr val="D4DAE1"/>
+                      </a:solidFill>
+                    </a:lnL>
+                    <a:lnR w="6350">
+                      <a:solidFill>
+                        <a:srgbClr val="D4DAE1"/>
+                      </a:solidFill>
+                    </a:lnR>
+                    <a:lnT w="6350">
+                      <a:solidFill>
+                        <a:srgbClr val="D4DAE1"/>
+                      </a:solidFill>
+                    </a:lnT>
+                    <a:lnB w="6350">
+                      <a:solidFill>
+                        <a:srgbClr val="D4DAE1"/>
+                      </a:solidFill>
+                    </a:lnB>
+                  </a:tcPr>
+                </a:tc>
+                <a:tc>
+                  <a:txBody>
+                    <a:bodyPr wrap="square"/>
+                    <a:lstStyle/>
+                    <a:p>
+                      <a:pPr algn="l"/>
+                      <a:r>
+                        <a:rPr sz="1100" b="0">
+                          <a:solidFill>
+                            <a:srgbClr val="17202A"/>
+                          </a:solidFill>
+                          <a:latin typeface="Segoe UI"/>
+                        </a:rPr>
+                        <a:t>Rebuilt every run (seconds)</a:t>
+                      </a:r>
+                    </a:p>
+                  </a:txBody>
+                  <a:tcPr marL="82296" marR="82296" marT="36576" marB="36576" anchor="ctr">
+                    <a:solidFill>
+                      <a:srgbClr val="FFFFFF"/>
+                    </a:solidFill>
+                    <a:lnL w="6350">
+                      <a:solidFill>
+                        <a:srgbClr val="D4DAE1"/>
+                      </a:solidFill>
+                    </a:lnL>
+                    <a:lnR w="6350">
+                      <a:solidFill>
+                        <a:srgbClr val="D4DAE1"/>
+                      </a:solidFill>
+                    </a:lnR>
+                    <a:lnT w="6350">
+                      <a:solidFill>
+                        <a:srgbClr val="D4DAE1"/>
+                      </a:solidFill>
+                    </a:lnT>
+                    <a:lnB w="6350">
+                      <a:solidFill>
+                        <a:srgbClr val="D4DAE1"/>
+                      </a:solidFill>
+                    </a:lnB>
+                  </a:tcPr>
+                </a:tc>
+                <a:tc>
+                  <a:txBody>
+                    <a:bodyPr wrap="square"/>
+                    <a:lstStyle/>
+                    <a:p>
+                      <a:pPr algn="l"/>
+                      <a:r>
+                        <a:rPr sz="1100" b="0">
+                          <a:solidFill>
+                            <a:srgbClr val="17202A"/>
+                          </a:solidFill>
+                          <a:latin typeface="Segoe UI"/>
+                        </a:rPr>
+                        <a:t>Skip when no source changed: no-op run</a:t>
+                      </a:r>
+                    </a:p>
+                  </a:txBody>
+                  <a:tcPr marL="82296" marR="82296" marT="36576" marB="36576" anchor="ctr">
+                    <a:solidFill>
+                      <a:srgbClr val="FFFFFF"/>
+                    </a:solidFill>
+                    <a:lnL w="6350">
+                      <a:solidFill>
+                        <a:srgbClr val="D4DAE1"/>
+                      </a:solidFill>
+                    </a:lnL>
+                    <a:lnR w="6350">
+                      <a:solidFill>
+                        <a:srgbClr val="D4DAE1"/>
+                      </a:solidFill>
+                    </a:lnR>
+                    <a:lnT w="6350">
+                      <a:solidFill>
+                        <a:srgbClr val="D4DAE1"/>
+                      </a:solidFill>
+                    </a:lnT>
+                    <a:lnB w="6350">
+                      <a:solidFill>
+                        <a:srgbClr val="D4DAE1"/>
+                      </a:solidFill>
+                    </a:lnB>
+                  </a:tcPr>
+                </a:tc>
+              </a:tr>
+            </a:tbl>
+          </a:graphicData>
+        </a:graphic>
+      </p:graphicFrame>
+      <p:sp>
+        <p:nvSpPr>
+          <p:cNvPr id="23" name="TextBox 22"/>
+          <p:cNvSpPr txBox="1"/>
+          <p:nvPr/>
+        </p:nvSpPr>
+        <p:spPr>
+          <a:xfrm>
+            <a:off x="6355080" y="5486400"/>
+            <a:ext cx="5303520" cy="685800"/>
+          </a:xfrm>
+          <a:prstGeom prst="rect">
+            <a:avLst/>
+          </a:prstGeom>
+          <a:noFill/>
+        </p:spPr>
+        <p:txBody>
+          <a:bodyPr wrap="square" anchor="t" lIns="18288" rIns="18288" tIns="18288" bIns="18288">
+            <a:spAutoFit/>
+          </a:bodyPr>
+          <a:lstStyle/>
+          <a:p>
+            <a:pPr algn="l">
+              <a:spcAft>
+                <a:spcPts val="400"/>
+              </a:spcAft>
+            </a:pPr>
+            <a:r>
+              <a:rPr sz="1100" b="0">
+                <a:solidFill>
+                  <a:srgbClr val="4B5765"/>
+                </a:solidFill>
+                <a:latin typeface="Segoe UI"/>
+              </a:rPr>
+              <a:t>The checksum is already stored: every Bronze manifest records the MD5 of the table export, so the planned check needs no new storage.</a:t>
+            </a:r>
+          </a:p>
+        </p:txBody>
+      </p:sp>
+      <p:cxnSp>
+        <p:nvCxnSpPr>
+          <p:cNvPr id="24" name="Connector 23"/>
+          <p:cNvCxnSpPr/>
+          <p:nvPr/>
+        </p:nvCxnSpPr>
+        <p:spPr>
+          <a:xfrm>
+            <a:off x="548640" y="6400800"/>
+            <a:ext cx="11094415" cy="0"/>
+          </a:xfrm>
+          <a:prstGeom prst="line">
+            <a:avLst/>
+          </a:prstGeom>
+          <a:ln w="9525">
+            <a:solidFill>
+              <a:srgbClr val="D4DAE1"/>
+            </a:solidFill>
+          </a:ln>
+        </p:spPr>
+      </p:cxnSp>
+      <p:sp>
+        <p:nvSpPr>
+          <p:cNvPr id="25" name="TextBox 24"/>
+          <p:cNvSpPr txBox="1"/>
+          <p:nvPr/>
+        </p:nvSpPr>
+        <p:spPr>
+          <a:xfrm>
+            <a:off x="548640" y="6455664"/>
+            <a:ext cx="7315200" cy="274320"/>
+          </a:xfrm>
+          <a:prstGeom prst="rect">
+            <a:avLst/>
+          </a:prstGeom>
+          <a:noFill/>
+        </p:spPr>
+        <p:txBody>
+          <a:bodyPr wrap="square" anchor="t" lIns="18288" rIns="18288" tIns="18288" bIns="18288">
+            <a:spAutoFit/>
+          </a:bodyPr>
+          <a:lstStyle/>
+          <a:p>
+            <a:pPr algn="l">
+              <a:spcAft>
+                <a:spcPts val="400"/>
+              </a:spcAft>
+            </a:pPr>
+            <a:r>
+              <a:rPr sz="900" b="0">
+                <a:solidFill>
+                  <a:srgbClr val="8A94A0"/>
+                </a:solidFill>
+                <a:latin typeface="Segoe UI"/>
+              </a:rPr>
+              <a:t>ACME Talent Lake  ·  Data Engineer track  ·  Coding Workshop 2026</a:t>
+            </a:r>
+          </a:p>
+        </p:txBody>
+      </p:sp>
+      <p:sp>
+        <p:nvSpPr>
+          <p:cNvPr id="26" name="TextBox 25"/>
+          <p:cNvSpPr txBox="1"/>
+          <p:nvPr/>
+        </p:nvSpPr>
+        <p:spPr>
+          <a:xfrm>
+            <a:off x="10698480" y="6455664"/>
+            <a:ext cx="941832" cy="274320"/>
+          </a:xfrm>
+          <a:prstGeom prst="rect">
+            <a:avLst/>
+          </a:prstGeom>
+          <a:noFill/>
+        </p:spPr>
+        <p:txBody>
+          <a:bodyPr wrap="square" anchor="t" lIns="18288" rIns="18288" tIns="18288" bIns="18288">
+            <a:spAutoFit/>
+          </a:bodyPr>
+          <a:lstStyle/>
+          <a:p>
+            <a:pPr algn="r">
+              <a:spcAft>
+                <a:spcPts val="400"/>
+              </a:spcAft>
+            </a:pPr>
+            <a:r>
+              <a:rPr sz="900" b="0">
+                <a:solidFill>
+                  <a:srgbClr val="8A94A0"/>
+                </a:solidFill>
+                <a:latin typeface="Segoe UI"/>
+              </a:rPr>
+              <a:t>6 / 11</a:t>
+            </a:r>
+          </a:p>
+        </p:txBody>
+      </p:sp>
+    </p:spTree>
+  </p:cSld>
+  <p:clrMapOvr>
+    <a:masterClrMapping/>
+  </p:clrMapOvr>
+</p:sld>
+</file>
+
+<file path=ppt/slides/slide7.xml><?xml version="1.0" encoding="utf-8"?>
 <p:sld xmlns:a="http://schemas.openxmlformats.org/drawingml/2006/main" xmlns:p="http://schemas.openxmlformats.org/presentationml/2006/main" xmlns:r="http://schemas.openxmlformats.org/officeDocument/2006/relationships">
   <p:cSld>
     <p:bg>
@@ -16513,1238 +19545,7 @@
                 </a:solidFill>
                 <a:latin typeface="Segoe UI"/>
               </a:rPr>
-              <a:t>6 / 10</a:t>
-            </a:r>
-          </a:p>
-        </p:txBody>
-      </p:sp>
-    </p:spTree>
-  </p:cSld>
-  <p:clrMapOvr>
-    <a:masterClrMapping/>
-  </p:clrMapOvr>
-</p:sld>
-</file>
-
-<file path=ppt/slides/slide7.xml><?xml version="1.0" encoding="utf-8"?>
-<p:sld xmlns:a="http://schemas.openxmlformats.org/drawingml/2006/main" xmlns:p="http://schemas.openxmlformats.org/presentationml/2006/main" xmlns:r="http://schemas.openxmlformats.org/officeDocument/2006/relationships">
-  <p:cSld>
-    <p:bg>
-      <p:bgPr>
-        <a:solidFill>
-          <a:srgbClr val="FFFFFF"/>
-        </a:solidFill>
-        <a:effectLst/>
-      </p:bgPr>
-    </p:bg>
-    <p:spTree>
-      <p:nvGrpSpPr>
-        <p:cNvPr id="1" name=""/>
-        <p:cNvGrpSpPr/>
-        <p:nvPr/>
-      </p:nvGrpSpPr>
-      <p:grpSpPr/>
-      <p:sp>
-        <p:nvSpPr>
-          <p:cNvPr id="2" name="TextBox 1"/>
-          <p:cNvSpPr txBox="1"/>
-          <p:nvPr/>
-        </p:nvSpPr>
-        <p:spPr>
-          <a:xfrm>
-            <a:off x="548640" y="292608"/>
-            <a:ext cx="8229600" cy="274320"/>
-          </a:xfrm>
-          <a:prstGeom prst="rect">
-            <a:avLst/>
-          </a:prstGeom>
-          <a:noFill/>
-        </p:spPr>
-        <p:txBody>
-          <a:bodyPr wrap="square" anchor="t" lIns="18288" rIns="18288" tIns="18288" bIns="18288">
-            <a:spAutoFit/>
-          </a:bodyPr>
-          <a:lstStyle/>
-          <a:p>
-            <a:pPr algn="l">
-              <a:spcAft>
-                <a:spcPts val="400"/>
-              </a:spcAft>
-            </a:pPr>
-            <a:r>
-              <a:rPr sz="1100" b="0">
-                <a:solidFill>
-                  <a:srgbClr val="1D4E89"/>
-                </a:solidFill>
-                <a:latin typeface="Segoe UI Semibold"/>
-              </a:rPr>
-              <a:t>FINDINGS · Q1–Q4</a:t>
-            </a:r>
-          </a:p>
-        </p:txBody>
-      </p:sp>
-      <p:sp>
-        <p:nvSpPr>
-          <p:cNvPr id="3" name="TextBox 2"/>
-          <p:cNvSpPr txBox="1"/>
-          <p:nvPr/>
-        </p:nvSpPr>
-        <p:spPr>
-          <a:xfrm>
-            <a:off x="548640" y="566928"/>
-            <a:ext cx="11064240" cy="731520"/>
-          </a:xfrm>
-          <a:prstGeom prst="rect">
-            <a:avLst/>
-          </a:prstGeom>
-          <a:noFill/>
-        </p:spPr>
-        <p:txBody>
-          <a:bodyPr wrap="square" anchor="t" lIns="18288" rIns="18288" tIns="18288" bIns="18288">
-            <a:spAutoFit/>
-          </a:bodyPr>
-          <a:lstStyle/>
-          <a:p>
-            <a:pPr algn="l">
-              <a:spcAft>
-                <a:spcPts val="400"/>
-              </a:spcAft>
-            </a:pPr>
-            <a:r>
-              <a:rPr sz="2600" b="0">
-                <a:solidFill>
-                  <a:srgbClr val="17202A"/>
-                </a:solidFill>
-                <a:latin typeface="Segoe UI Semibold"/>
-              </a:rPr>
-              <a:t>230 declining · 441 with gaps · 124 ready · 232 not learning</a:t>
-            </a:r>
-          </a:p>
-        </p:txBody>
-      </p:sp>
-      <p:sp>
-        <p:nvSpPr>
-          <p:cNvPr id="4" name="TextBox 3"/>
-          <p:cNvSpPr txBox="1"/>
-          <p:nvPr/>
-        </p:nvSpPr>
-        <p:spPr>
-          <a:xfrm>
-            <a:off x="548640" y="1417320"/>
-            <a:ext cx="5422392" cy="320040"/>
-          </a:xfrm>
-          <a:prstGeom prst="rect">
-            <a:avLst/>
-          </a:prstGeom>
-          <a:noFill/>
-        </p:spPr>
-        <p:txBody>
-          <a:bodyPr wrap="square" anchor="t" lIns="18288" rIns="18288" tIns="18288" bIns="18288">
-            <a:spAutoFit/>
-          </a:bodyPr>
-          <a:lstStyle/>
-          <a:p>
-            <a:pPr algn="l">
-              <a:spcAft>
-                <a:spcPts val="400"/>
-              </a:spcAft>
-            </a:pPr>
-            <a:r>
-              <a:rPr sz="1300" b="0">
-                <a:solidFill>
-                  <a:srgbClr val="17202A"/>
-                </a:solidFill>
-                <a:latin typeface="Segoe UI Semibold"/>
-              </a:rPr>
-              <a:t>Q1 · Change since previous review</a:t>
-            </a:r>
-          </a:p>
-        </p:txBody>
-      </p:sp>
-      <p:graphicFrame>
-        <p:nvGraphicFramePr>
-          <p:cNvPr id="5" name="Chart 4"/>
-          <p:cNvGraphicFramePr>
-            <a:graphicFrameLocks noGrp="1"/>
-          </p:cNvGraphicFramePr>
-          <p:nvPr/>
-        </p:nvGraphicFramePr>
-        <p:xfrm>
-          <a:off x="457200" y="1737360"/>
-          <a:ext cx="3566160" cy="1874519"/>
-        </p:xfrm>
-        <a:graphic>
-          <a:graphicData uri="http://schemas.openxmlformats.org/drawingml/2006/chart">
-            <c:chart xmlns:c="http://schemas.openxmlformats.org/drawingml/2006/chart" r:id="rId3"/>
-          </a:graphicData>
-        </a:graphic>
-      </p:graphicFrame>
-      <p:sp>
-        <p:nvSpPr>
-          <p:cNvPr id="6" name="TextBox 5"/>
-          <p:cNvSpPr txBox="1"/>
-          <p:nvPr/>
-        </p:nvSpPr>
-        <p:spPr>
-          <a:xfrm>
-            <a:off x="4206240" y="1920240"/>
-            <a:ext cx="1737360" cy="548640"/>
-          </a:xfrm>
-          <a:prstGeom prst="rect">
-            <a:avLst/>
-          </a:prstGeom>
-          <a:noFill/>
-        </p:spPr>
-        <p:txBody>
-          <a:bodyPr wrap="square" anchor="t" lIns="18288" rIns="18288" tIns="18288" bIns="18288">
-            <a:spAutoFit/>
-          </a:bodyPr>
-          <a:lstStyle/>
-          <a:p>
-            <a:pPr algn="l">
-              <a:spcAft>
-                <a:spcPts val="400"/>
-              </a:spcAft>
-            </a:pPr>
-            <a:r>
-              <a:rPr sz="2600" b="0">
-                <a:solidFill>
-                  <a:srgbClr val="17202A"/>
-                </a:solidFill>
-                <a:latin typeface="Segoe UI Semibold"/>
-              </a:rPr>
-              <a:t>3.41</a:t>
-            </a:r>
-          </a:p>
-        </p:txBody>
-      </p:sp>
-      <p:sp>
-        <p:nvSpPr>
-          <p:cNvPr id="7" name="TextBox 6"/>
-          <p:cNvSpPr txBox="1"/>
-          <p:nvPr/>
-        </p:nvSpPr>
-        <p:spPr>
-          <a:xfrm>
-            <a:off x="4206240" y="2487168"/>
-            <a:ext cx="1737360" cy="457200"/>
-          </a:xfrm>
-          <a:prstGeom prst="rect">
-            <a:avLst/>
-          </a:prstGeom>
-          <a:noFill/>
-        </p:spPr>
-        <p:txBody>
-          <a:bodyPr wrap="square" anchor="t" lIns="18288" rIns="18288" tIns="18288" bIns="18288">
-            <a:spAutoFit/>
-          </a:bodyPr>
-          <a:lstStyle/>
-          <a:p>
-            <a:pPr algn="l">
-              <a:spcAft>
-                <a:spcPts val="400"/>
-              </a:spcAft>
-            </a:pPr>
-            <a:r>
-              <a:rPr sz="1100" b="0">
-                <a:solidFill>
-                  <a:srgbClr val="4B5765"/>
-                </a:solidFill>
-                <a:latin typeface="Segoe UI"/>
-              </a:rPr>
-              <a:t>average latest rating</a:t>
-            </a:r>
-          </a:p>
-        </p:txBody>
-      </p:sp>
-      <p:sp>
-        <p:nvSpPr>
-          <p:cNvPr id="8" name="TextBox 7"/>
-          <p:cNvSpPr txBox="1"/>
-          <p:nvPr/>
-        </p:nvSpPr>
-        <p:spPr>
-          <a:xfrm>
-            <a:off x="4206240" y="2834640"/>
-            <a:ext cx="1737360" cy="548640"/>
-          </a:xfrm>
-          <a:prstGeom prst="rect">
-            <a:avLst/>
-          </a:prstGeom>
-          <a:noFill/>
-        </p:spPr>
-        <p:txBody>
-          <a:bodyPr wrap="square" anchor="t" lIns="18288" rIns="18288" tIns="18288" bIns="18288">
-            <a:spAutoFit/>
-          </a:bodyPr>
-          <a:lstStyle/>
-          <a:p>
-            <a:pPr algn="l">
-              <a:spcAft>
-                <a:spcPts val="400"/>
-              </a:spcAft>
-            </a:pPr>
-            <a:r>
-              <a:rPr sz="2600" b="0">
-                <a:solidFill>
-                  <a:srgbClr val="B0412D"/>
-                </a:solidFill>
-                <a:latin typeface="Segoe UI Semibold"/>
-              </a:rPr>
-              <a:t>84</a:t>
-            </a:r>
-          </a:p>
-        </p:txBody>
-      </p:sp>
-      <p:sp>
-        <p:nvSpPr>
-          <p:cNvPr id="9" name="TextBox 8"/>
-          <p:cNvSpPr txBox="1"/>
-          <p:nvPr/>
-        </p:nvSpPr>
-        <p:spPr>
-          <a:xfrm>
-            <a:off x="4206240" y="3401568"/>
-            <a:ext cx="1737360" cy="457200"/>
-          </a:xfrm>
-          <a:prstGeom prst="rect">
-            <a:avLst/>
-          </a:prstGeom>
-          <a:noFill/>
-        </p:spPr>
-        <p:txBody>
-          <a:bodyPr wrap="square" anchor="t" lIns="18288" rIns="18288" tIns="18288" bIns="18288">
-            <a:spAutoFit/>
-          </a:bodyPr>
-          <a:lstStyle/>
-          <a:p>
-            <a:pPr algn="l">
-              <a:spcAft>
-                <a:spcPts val="400"/>
-              </a:spcAft>
-            </a:pPr>
-            <a:r>
-              <a:rPr sz="1100" b="0">
-                <a:solidFill>
-                  <a:srgbClr val="4B5765"/>
-                </a:solidFill>
-                <a:latin typeface="Segoe UI"/>
-              </a:rPr>
-              <a:t>dropped 2+ points</a:t>
-            </a:r>
-          </a:p>
-        </p:txBody>
-      </p:sp>
-      <p:sp>
-        <p:nvSpPr>
-          <p:cNvPr id="10" name="TextBox 9"/>
-          <p:cNvSpPr txBox="1"/>
-          <p:nvPr/>
-        </p:nvSpPr>
-        <p:spPr>
-          <a:xfrm>
-            <a:off x="6217920" y="1417320"/>
-            <a:ext cx="5422392" cy="320040"/>
-          </a:xfrm>
-          <a:prstGeom prst="rect">
-            <a:avLst/>
-          </a:prstGeom>
-          <a:noFill/>
-        </p:spPr>
-        <p:txBody>
-          <a:bodyPr wrap="square" anchor="t" lIns="18288" rIns="18288" tIns="18288" bIns="18288">
-            <a:spAutoFit/>
-          </a:bodyPr>
-          <a:lstStyle/>
-          <a:p>
-            <a:pPr algn="l">
-              <a:spcAft>
-                <a:spcPts val="400"/>
-              </a:spcAft>
-            </a:pPr>
-            <a:r>
-              <a:rPr sz="1300" b="0">
-                <a:solidFill>
-                  <a:srgbClr val="17202A"/>
-                </a:solidFill>
-                <a:latin typeface="Segoe UI Semibold"/>
-              </a:rPr>
-              <a:t>Q2 · Most critical skill gaps</a:t>
-            </a:r>
-          </a:p>
-        </p:txBody>
-      </p:sp>
-      <p:graphicFrame>
-        <p:nvGraphicFramePr>
-          <p:cNvPr id="11" name="Chart 10"/>
-          <p:cNvGraphicFramePr>
-            <a:graphicFrameLocks noGrp="1"/>
-          </p:cNvGraphicFramePr>
-          <p:nvPr/>
-        </p:nvGraphicFramePr>
-        <p:xfrm>
-          <a:off x="6126480" y="1737360"/>
-          <a:ext cx="3566160" cy="1874519"/>
-        </p:xfrm>
-        <a:graphic>
-          <a:graphicData uri="http://schemas.openxmlformats.org/drawingml/2006/chart">
-            <c:chart xmlns:c="http://schemas.openxmlformats.org/drawingml/2006/chart" r:id="rId4"/>
-          </a:graphicData>
-        </a:graphic>
-      </p:graphicFrame>
-      <p:sp>
-        <p:nvSpPr>
-          <p:cNvPr id="12" name="TextBox 11"/>
-          <p:cNvSpPr txBox="1"/>
-          <p:nvPr/>
-        </p:nvSpPr>
-        <p:spPr>
-          <a:xfrm>
-            <a:off x="9875520" y="1920240"/>
-            <a:ext cx="1737360" cy="548640"/>
-          </a:xfrm>
-          <a:prstGeom prst="rect">
-            <a:avLst/>
-          </a:prstGeom>
-          <a:noFill/>
-        </p:spPr>
-        <p:txBody>
-          <a:bodyPr wrap="square" anchor="t" lIns="18288" rIns="18288" tIns="18288" bIns="18288">
-            <a:spAutoFit/>
-          </a:bodyPr>
-          <a:lstStyle/>
-          <a:p>
-            <a:pPr algn="l">
-              <a:spcAft>
-                <a:spcPts val="400"/>
-              </a:spcAft>
-            </a:pPr>
-            <a:r>
-              <a:rPr sz="2600" b="0">
-                <a:solidFill>
-                  <a:srgbClr val="17202A"/>
-                </a:solidFill>
-                <a:latin typeface="Segoe UI Semibold"/>
-              </a:rPr>
-              <a:t>465</a:t>
-            </a:r>
-          </a:p>
-        </p:txBody>
-      </p:sp>
-      <p:sp>
-        <p:nvSpPr>
-          <p:cNvPr id="13" name="TextBox 12"/>
-          <p:cNvSpPr txBox="1"/>
-          <p:nvPr/>
-        </p:nvSpPr>
-        <p:spPr>
-          <a:xfrm>
-            <a:off x="9875520" y="2487168"/>
-            <a:ext cx="1737360" cy="457200"/>
-          </a:xfrm>
-          <a:prstGeom prst="rect">
-            <a:avLst/>
-          </a:prstGeom>
-          <a:noFill/>
-        </p:spPr>
-        <p:txBody>
-          <a:bodyPr wrap="square" anchor="t" lIns="18288" rIns="18288" tIns="18288" bIns="18288">
-            <a:spAutoFit/>
-          </a:bodyPr>
-          <a:lstStyle/>
-          <a:p>
-            <a:pPr algn="l">
-              <a:spcAft>
-                <a:spcPts val="400"/>
-              </a:spcAft>
-            </a:pPr>
-            <a:r>
-              <a:rPr sz="1100" b="0">
-                <a:solidFill>
-                  <a:srgbClr val="4B5765"/>
-                </a:solidFill>
-                <a:latin typeface="Segoe UI"/>
-              </a:rPr>
-              <a:t>gaps across 441 people</a:t>
-            </a:r>
-          </a:p>
-        </p:txBody>
-      </p:sp>
-      <p:sp>
-        <p:nvSpPr>
-          <p:cNvPr id="14" name="TextBox 13"/>
-          <p:cNvSpPr txBox="1"/>
-          <p:nvPr/>
-        </p:nvSpPr>
-        <p:spPr>
-          <a:xfrm>
-            <a:off x="9875520" y="2834640"/>
-            <a:ext cx="1737360" cy="548640"/>
-          </a:xfrm>
-          <a:prstGeom prst="rect">
-            <a:avLst/>
-          </a:prstGeom>
-          <a:noFill/>
-        </p:spPr>
-        <p:txBody>
-          <a:bodyPr wrap="square" anchor="t" lIns="18288" rIns="18288" tIns="18288" bIns="18288">
-            <a:spAutoFit/>
-          </a:bodyPr>
-          <a:lstStyle/>
-          <a:p>
-            <a:pPr algn="l">
-              <a:spcAft>
-                <a:spcPts val="400"/>
-              </a:spcAft>
-            </a:pPr>
-            <a:r>
-              <a:rPr sz="2600" b="0">
-                <a:solidFill>
-                  <a:srgbClr val="B0412D"/>
-                </a:solidFill>
-                <a:latin typeface="Segoe UI Semibold"/>
-              </a:rPr>
-              <a:t>28%</a:t>
-            </a:r>
-          </a:p>
-        </p:txBody>
-      </p:sp>
-      <p:sp>
-        <p:nvSpPr>
-          <p:cNvPr id="15" name="TextBox 14"/>
-          <p:cNvSpPr txBox="1"/>
-          <p:nvPr/>
-        </p:nvSpPr>
-        <p:spPr>
-          <a:xfrm>
-            <a:off x="9875520" y="3401568"/>
-            <a:ext cx="1737360" cy="457200"/>
-          </a:xfrm>
-          <a:prstGeom prst="rect">
-            <a:avLst/>
-          </a:prstGeom>
-          <a:noFill/>
-        </p:spPr>
-        <p:txBody>
-          <a:bodyPr wrap="square" anchor="t" lIns="18288" rIns="18288" tIns="18288" bIns="18288">
-            <a:spAutoFit/>
-          </a:bodyPr>
-          <a:lstStyle/>
-          <a:p>
-            <a:pPr algn="l">
-              <a:spcAft>
-                <a:spcPts val="400"/>
-              </a:spcAft>
-            </a:pPr>
-            <a:r>
-              <a:rPr sz="1100" b="0">
-                <a:solidFill>
-                  <a:srgbClr val="4B5765"/>
-                </a:solidFill>
-                <a:latin typeface="Segoe UI"/>
-              </a:rPr>
-              <a:t>of Human Resources affected</a:t>
-            </a:r>
-          </a:p>
-        </p:txBody>
-      </p:sp>
-      <p:sp>
-        <p:nvSpPr>
-          <p:cNvPr id="16" name="TextBox 15"/>
-          <p:cNvSpPr txBox="1"/>
-          <p:nvPr/>
-        </p:nvSpPr>
-        <p:spPr>
-          <a:xfrm>
-            <a:off x="548640" y="3931920"/>
-            <a:ext cx="5422392" cy="320040"/>
-          </a:xfrm>
-          <a:prstGeom prst="rect">
-            <a:avLst/>
-          </a:prstGeom>
-          <a:noFill/>
-        </p:spPr>
-        <p:txBody>
-          <a:bodyPr wrap="square" anchor="t" lIns="18288" rIns="18288" tIns="18288" bIns="18288">
-            <a:spAutoFit/>
-          </a:bodyPr>
-          <a:lstStyle/>
-          <a:p>
-            <a:pPr algn="l">
-              <a:spcAft>
-                <a:spcPts val="400"/>
-              </a:spcAft>
-            </a:pPr>
-            <a:r>
-              <a:rPr sz="1300" b="0">
-                <a:solidFill>
-                  <a:srgbClr val="17202A"/>
-                </a:solidFill>
-                <a:latin typeface="Segoe UI Semibold"/>
-              </a:rPr>
-              <a:t>Q3 · Promotion pipeline</a:t>
-            </a:r>
-          </a:p>
-        </p:txBody>
-      </p:sp>
-      <p:graphicFrame>
-        <p:nvGraphicFramePr>
-          <p:cNvPr id="17" name="Chart 16"/>
-          <p:cNvGraphicFramePr>
-            <a:graphicFrameLocks noGrp="1"/>
-          </p:cNvGraphicFramePr>
-          <p:nvPr/>
-        </p:nvGraphicFramePr>
-        <p:xfrm>
-          <a:off x="457200" y="4251959"/>
-          <a:ext cx="3566160" cy="1874519"/>
-        </p:xfrm>
-        <a:graphic>
-          <a:graphicData uri="http://schemas.openxmlformats.org/drawingml/2006/chart">
-            <c:chart xmlns:c="http://schemas.openxmlformats.org/drawingml/2006/chart" r:id="rId5"/>
-          </a:graphicData>
-        </a:graphic>
-      </p:graphicFrame>
-      <p:sp>
-        <p:nvSpPr>
-          <p:cNvPr id="18" name="TextBox 17"/>
-          <p:cNvSpPr txBox="1"/>
-          <p:nvPr/>
-        </p:nvSpPr>
-        <p:spPr>
-          <a:xfrm>
-            <a:off x="4206240" y="4434840"/>
-            <a:ext cx="1737360" cy="548640"/>
-          </a:xfrm>
-          <a:prstGeom prst="rect">
-            <a:avLst/>
-          </a:prstGeom>
-          <a:noFill/>
-        </p:spPr>
-        <p:txBody>
-          <a:bodyPr wrap="square" anchor="t" lIns="18288" rIns="18288" tIns="18288" bIns="18288">
-            <a:spAutoFit/>
-          </a:bodyPr>
-          <a:lstStyle/>
-          <a:p>
-            <a:pPr algn="l">
-              <a:spcAft>
-                <a:spcPts val="400"/>
-              </a:spcAft>
-            </a:pPr>
-            <a:r>
-              <a:rPr sz="2600" b="0">
-                <a:solidFill>
-                  <a:srgbClr val="B0412D"/>
-                </a:solidFill>
-                <a:latin typeface="Segoe UI Semibold"/>
-              </a:rPr>
-              <a:t>28</a:t>
-            </a:r>
-          </a:p>
-        </p:txBody>
-      </p:sp>
-      <p:sp>
-        <p:nvSpPr>
-          <p:cNvPr id="19" name="TextBox 18"/>
-          <p:cNvSpPr txBox="1"/>
-          <p:nvPr/>
-        </p:nvSpPr>
-        <p:spPr>
-          <a:xfrm>
-            <a:off x="4206240" y="5001768"/>
-            <a:ext cx="1737360" cy="457200"/>
-          </a:xfrm>
-          <a:prstGeom prst="rect">
-            <a:avLst/>
-          </a:prstGeom>
-          <a:noFill/>
-        </p:spPr>
-        <p:txBody>
-          <a:bodyPr wrap="square" anchor="t" lIns="18288" rIns="18288" tIns="18288" bIns="18288">
-            <a:spAutoFit/>
-          </a:bodyPr>
-          <a:lstStyle/>
-          <a:p>
-            <a:pPr algn="l">
-              <a:spcAft>
-                <a:spcPts val="400"/>
-              </a:spcAft>
-            </a:pPr>
-            <a:r>
-              <a:rPr sz="1100" b="0">
-                <a:solidFill>
-                  <a:srgbClr val="4B5765"/>
-                </a:solidFill>
-                <a:latin typeface="Segoe UI"/>
-              </a:rPr>
-              <a:t>high-potential people at high attrition risk</a:t>
-            </a:r>
-          </a:p>
-        </p:txBody>
-      </p:sp>
-      <p:sp>
-        <p:nvSpPr>
-          <p:cNvPr id="20" name="TextBox 19"/>
-          <p:cNvSpPr txBox="1"/>
-          <p:nvPr/>
-        </p:nvSpPr>
-        <p:spPr>
-          <a:xfrm>
-            <a:off x="6217920" y="3931920"/>
-            <a:ext cx="5422392" cy="320040"/>
-          </a:xfrm>
-          <a:prstGeom prst="rect">
-            <a:avLst/>
-          </a:prstGeom>
-          <a:noFill/>
-        </p:spPr>
-        <p:txBody>
-          <a:bodyPr wrap="square" anchor="t" lIns="18288" rIns="18288" tIns="18288" bIns="18288">
-            <a:spAutoFit/>
-          </a:bodyPr>
-          <a:lstStyle/>
-          <a:p>
-            <a:pPr algn="l">
-              <a:spcAft>
-                <a:spcPts val="400"/>
-              </a:spcAft>
-            </a:pPr>
-            <a:r>
-              <a:rPr sz="1300" b="0">
-                <a:solidFill>
-                  <a:srgbClr val="17202A"/>
-                </a:solidFill>
-                <a:latin typeface="Segoe UI Semibold"/>
-              </a:rPr>
-              <a:t>Q4 · Training and development</a:t>
-            </a:r>
-          </a:p>
-        </p:txBody>
-      </p:sp>
-      <p:sp>
-        <p:nvSpPr>
-          <p:cNvPr id="21" name="Rounded Rectangle 20"/>
-          <p:cNvSpPr/>
-          <p:nvPr/>
-        </p:nvSpPr>
-        <p:spPr>
-          <a:xfrm>
-            <a:off x="6217920" y="4343400"/>
-            <a:ext cx="2633472" cy="886968"/>
-          </a:xfrm>
-          <a:prstGeom prst="roundRect">
-            <a:avLst>
-              <a:gd name="adj" fmla="val 6000"/>
-            </a:avLst>
-          </a:prstGeom>
-          <a:solidFill>
-            <a:srgbClr val="F4F6F8"/>
-          </a:solidFill>
-          <a:ln>
-            <a:noFill/>
-          </a:ln>
-        </p:spPr>
-        <p:txBody>
-          <a:bodyPr rtlCol="0" anchor="ctr"/>
-          <a:lstStyle/>
-          <a:p/>
-        </p:txBody>
-      </p:sp>
-      <p:sp>
-        <p:nvSpPr>
-          <p:cNvPr id="22" name="TextBox 21"/>
-          <p:cNvSpPr txBox="1"/>
-          <p:nvPr/>
-        </p:nvSpPr>
-        <p:spPr>
-          <a:xfrm>
-            <a:off x="6382512" y="4398264"/>
-            <a:ext cx="2377440" cy="457200"/>
-          </a:xfrm>
-          <a:prstGeom prst="rect">
-            <a:avLst/>
-          </a:prstGeom>
-          <a:noFill/>
-        </p:spPr>
-        <p:txBody>
-          <a:bodyPr wrap="square" anchor="t" lIns="18288" rIns="18288" tIns="18288" bIns="18288">
-            <a:spAutoFit/>
-          </a:bodyPr>
-          <a:lstStyle/>
-          <a:p>
-            <a:pPr algn="l">
-              <a:spcAft>
-                <a:spcPts val="400"/>
-              </a:spcAft>
-            </a:pPr>
-            <a:r>
-              <a:rPr sz="2200" b="0">
-                <a:solidFill>
-                  <a:srgbClr val="17202A"/>
-                </a:solidFill>
-                <a:latin typeface="Segoe UI Semibold"/>
-              </a:rPr>
-              <a:t>1.75</a:t>
-            </a:r>
-          </a:p>
-        </p:txBody>
-      </p:sp>
-      <p:sp>
-        <p:nvSpPr>
-          <p:cNvPr id="23" name="TextBox 22"/>
-          <p:cNvSpPr txBox="1"/>
-          <p:nvPr/>
-        </p:nvSpPr>
-        <p:spPr>
-          <a:xfrm>
-            <a:off x="6382512" y="4855464"/>
-            <a:ext cx="2377440" cy="320040"/>
-          </a:xfrm>
-          <a:prstGeom prst="rect">
-            <a:avLst/>
-          </a:prstGeom>
-          <a:noFill/>
-        </p:spPr>
-        <p:txBody>
-          <a:bodyPr wrap="square" anchor="t" lIns="18288" rIns="18288" tIns="18288" bIns="18288">
-            <a:spAutoFit/>
-          </a:bodyPr>
-          <a:lstStyle/>
-          <a:p>
-            <a:pPr algn="l">
-              <a:spcAft>
-                <a:spcPts val="400"/>
-              </a:spcAft>
-            </a:pPr>
-            <a:r>
-              <a:rPr sz="1050" b="0">
-                <a:solidFill>
-                  <a:srgbClr val="4B5765"/>
-                </a:solidFill>
-                <a:latin typeface="Segoe UI"/>
-              </a:rPr>
-              <a:t>courses per employee</a:t>
-            </a:r>
-          </a:p>
-        </p:txBody>
-      </p:sp>
-      <p:sp>
-        <p:nvSpPr>
-          <p:cNvPr id="24" name="Rounded Rectangle 23"/>
-          <p:cNvSpPr/>
-          <p:nvPr/>
-        </p:nvSpPr>
-        <p:spPr>
-          <a:xfrm>
-            <a:off x="8942832" y="4343400"/>
-            <a:ext cx="2633472" cy="886968"/>
-          </a:xfrm>
-          <a:prstGeom prst="roundRect">
-            <a:avLst>
-              <a:gd name="adj" fmla="val 6000"/>
-            </a:avLst>
-          </a:prstGeom>
-          <a:solidFill>
-            <a:srgbClr val="F4F6F8"/>
-          </a:solidFill>
-          <a:ln>
-            <a:noFill/>
-          </a:ln>
-        </p:spPr>
-        <p:txBody>
-          <a:bodyPr rtlCol="0" anchor="ctr"/>
-          <a:lstStyle/>
-          <a:p/>
-        </p:txBody>
-      </p:sp>
-      <p:sp>
-        <p:nvSpPr>
-          <p:cNvPr id="25" name="TextBox 24"/>
-          <p:cNvSpPr txBox="1"/>
-          <p:nvPr/>
-        </p:nvSpPr>
-        <p:spPr>
-          <a:xfrm>
-            <a:off x="9107424" y="4398264"/>
-            <a:ext cx="2377440" cy="457200"/>
-          </a:xfrm>
-          <a:prstGeom prst="rect">
-            <a:avLst/>
-          </a:prstGeom>
-          <a:noFill/>
-        </p:spPr>
-        <p:txBody>
-          <a:bodyPr wrap="square" anchor="t" lIns="18288" rIns="18288" tIns="18288" bIns="18288">
-            <a:spAutoFit/>
-          </a:bodyPr>
-          <a:lstStyle/>
-          <a:p>
-            <a:pPr algn="l">
-              <a:spcAft>
-                <a:spcPts val="400"/>
-              </a:spcAft>
-            </a:pPr>
-            <a:r>
-              <a:rPr sz="2200" b="0">
-                <a:solidFill>
-                  <a:srgbClr val="17202A"/>
-                </a:solidFill>
-                <a:latin typeface="Segoe UI Semibold"/>
-              </a:rPr>
-              <a:t>1,764</a:t>
-            </a:r>
-          </a:p>
-        </p:txBody>
-      </p:sp>
-      <p:sp>
-        <p:nvSpPr>
-          <p:cNvPr id="26" name="TextBox 25"/>
-          <p:cNvSpPr txBox="1"/>
-          <p:nvPr/>
-        </p:nvSpPr>
-        <p:spPr>
-          <a:xfrm>
-            <a:off x="9107424" y="4855464"/>
-            <a:ext cx="2377440" cy="320040"/>
-          </a:xfrm>
-          <a:prstGeom prst="rect">
-            <a:avLst/>
-          </a:prstGeom>
-          <a:noFill/>
-        </p:spPr>
-        <p:txBody>
-          <a:bodyPr wrap="square" anchor="t" lIns="18288" rIns="18288" tIns="18288" bIns="18288">
-            <a:spAutoFit/>
-          </a:bodyPr>
-          <a:lstStyle/>
-          <a:p>
-            <a:pPr algn="l">
-              <a:spcAft>
-                <a:spcPts val="400"/>
-              </a:spcAft>
-            </a:pPr>
-            <a:r>
-              <a:rPr sz="1050" b="0">
-                <a:solidFill>
-                  <a:srgbClr val="4B5765"/>
-                </a:solidFill>
-                <a:latin typeface="Segoe UI"/>
-              </a:rPr>
-              <a:t>certifications</a:t>
-            </a:r>
-          </a:p>
-        </p:txBody>
-      </p:sp>
-      <p:sp>
-        <p:nvSpPr>
-          <p:cNvPr id="27" name="Rounded Rectangle 26"/>
-          <p:cNvSpPr/>
-          <p:nvPr/>
-        </p:nvSpPr>
-        <p:spPr>
-          <a:xfrm>
-            <a:off x="6217920" y="5321808"/>
-            <a:ext cx="2633472" cy="886968"/>
-          </a:xfrm>
-          <a:prstGeom prst="roundRect">
-            <a:avLst>
-              <a:gd name="adj" fmla="val 6000"/>
-            </a:avLst>
-          </a:prstGeom>
-          <a:solidFill>
-            <a:srgbClr val="F4F6F8"/>
-          </a:solidFill>
-          <a:ln>
-            <a:noFill/>
-          </a:ln>
-        </p:spPr>
-        <p:txBody>
-          <a:bodyPr rtlCol="0" anchor="ctr"/>
-          <a:lstStyle/>
-          <a:p/>
-        </p:txBody>
-      </p:sp>
-      <p:sp>
-        <p:nvSpPr>
-          <p:cNvPr id="28" name="TextBox 27"/>
-          <p:cNvSpPr txBox="1"/>
-          <p:nvPr/>
-        </p:nvSpPr>
-        <p:spPr>
-          <a:xfrm>
-            <a:off x="6382512" y="5376672"/>
-            <a:ext cx="2377440" cy="457200"/>
-          </a:xfrm>
-          <a:prstGeom prst="rect">
-            <a:avLst/>
-          </a:prstGeom>
-          <a:noFill/>
-        </p:spPr>
-        <p:txBody>
-          <a:bodyPr wrap="square" anchor="t" lIns="18288" rIns="18288" tIns="18288" bIns="18288">
-            <a:spAutoFit/>
-          </a:bodyPr>
-          <a:lstStyle/>
-          <a:p>
-            <a:pPr algn="l">
-              <a:spcAft>
-                <a:spcPts val="400"/>
-              </a:spcAft>
-            </a:pPr>
-            <a:r>
-              <a:rPr sz="2200" b="0">
-                <a:solidFill>
-                  <a:srgbClr val="17202A"/>
-                </a:solidFill>
-                <a:latin typeface="Segoe UI Semibold"/>
-              </a:rPr>
-              <a:t>41%</a:t>
-            </a:r>
-          </a:p>
-        </p:txBody>
-      </p:sp>
-      <p:sp>
-        <p:nvSpPr>
-          <p:cNvPr id="29" name="TextBox 28"/>
-          <p:cNvSpPr txBox="1"/>
-          <p:nvPr/>
-        </p:nvSpPr>
-        <p:spPr>
-          <a:xfrm>
-            <a:off x="6382512" y="5833872"/>
-            <a:ext cx="2377440" cy="320040"/>
-          </a:xfrm>
-          <a:prstGeom prst="rect">
-            <a:avLst/>
-          </a:prstGeom>
-          <a:noFill/>
-        </p:spPr>
-        <p:txBody>
-          <a:bodyPr wrap="square" anchor="t" lIns="18288" rIns="18288" tIns="18288" bIns="18288">
-            <a:spAutoFit/>
-          </a:bodyPr>
-          <a:lstStyle/>
-          <a:p>
-            <a:pPr algn="l">
-              <a:spcAft>
-                <a:spcPts val="400"/>
-              </a:spcAft>
-            </a:pPr>
-            <a:r>
-              <a:rPr sz="1050" b="0">
-                <a:solidFill>
-                  <a:srgbClr val="4B5765"/>
-                </a:solidFill>
-                <a:latin typeface="Segoe UI"/>
-              </a:rPr>
-              <a:t>quiz pass rate</a:t>
-            </a:r>
-          </a:p>
-        </p:txBody>
-      </p:sp>
-      <p:sp>
-        <p:nvSpPr>
-          <p:cNvPr id="30" name="Rounded Rectangle 29"/>
-          <p:cNvSpPr/>
-          <p:nvPr/>
-        </p:nvSpPr>
-        <p:spPr>
-          <a:xfrm>
-            <a:off x="8942832" y="5321808"/>
-            <a:ext cx="2633472" cy="886968"/>
-          </a:xfrm>
-          <a:prstGeom prst="roundRect">
-            <a:avLst>
-              <a:gd name="adj" fmla="val 6000"/>
-            </a:avLst>
-          </a:prstGeom>
-          <a:solidFill>
-            <a:srgbClr val="F4F6F8"/>
-          </a:solidFill>
-          <a:ln>
-            <a:noFill/>
-          </a:ln>
-        </p:spPr>
-        <p:txBody>
-          <a:bodyPr rtlCol="0" anchor="ctr"/>
-          <a:lstStyle/>
-          <a:p/>
-        </p:txBody>
-      </p:sp>
-      <p:sp>
-        <p:nvSpPr>
-          <p:cNvPr id="31" name="TextBox 30"/>
-          <p:cNvSpPr txBox="1"/>
-          <p:nvPr/>
-        </p:nvSpPr>
-        <p:spPr>
-          <a:xfrm>
-            <a:off x="9107424" y="5376672"/>
-            <a:ext cx="2377440" cy="457200"/>
-          </a:xfrm>
-          <a:prstGeom prst="rect">
-            <a:avLst/>
-          </a:prstGeom>
-          <a:noFill/>
-        </p:spPr>
-        <p:txBody>
-          <a:bodyPr wrap="square" anchor="t" lIns="18288" rIns="18288" tIns="18288" bIns="18288">
-            <a:spAutoFit/>
-          </a:bodyPr>
-          <a:lstStyle/>
-          <a:p>
-            <a:pPr algn="l">
-              <a:spcAft>
-                <a:spcPts val="400"/>
-              </a:spcAft>
-            </a:pPr>
-            <a:r>
-              <a:rPr sz="2200" b="0">
-                <a:solidFill>
-                  <a:srgbClr val="B0412D"/>
-                </a:solidFill>
-                <a:latin typeface="Segoe UI Semibold"/>
-              </a:rPr>
-              <a:t>232</a:t>
-            </a:r>
-          </a:p>
-        </p:txBody>
-      </p:sp>
-      <p:sp>
-        <p:nvSpPr>
-          <p:cNvPr id="32" name="TextBox 31"/>
-          <p:cNvSpPr txBox="1"/>
-          <p:nvPr/>
-        </p:nvSpPr>
-        <p:spPr>
-          <a:xfrm>
-            <a:off x="9107424" y="5833872"/>
-            <a:ext cx="2377440" cy="320040"/>
-          </a:xfrm>
-          <a:prstGeom prst="rect">
-            <a:avLst/>
-          </a:prstGeom>
-          <a:noFill/>
-        </p:spPr>
-        <p:txBody>
-          <a:bodyPr wrap="square" anchor="t" lIns="18288" rIns="18288" tIns="18288" bIns="18288">
-            <a:spAutoFit/>
-          </a:bodyPr>
-          <a:lstStyle/>
-          <a:p>
-            <a:pPr algn="l">
-              <a:spcAft>
-                <a:spcPts val="400"/>
-              </a:spcAft>
-            </a:pPr>
-            <a:r>
-              <a:rPr sz="1050" b="0">
-                <a:solidFill>
-                  <a:srgbClr val="4B5765"/>
-                </a:solidFill>
-                <a:latin typeface="Segoe UI"/>
-              </a:rPr>
-              <a:t>with no learning activity</a:t>
-            </a:r>
-          </a:p>
-        </p:txBody>
-      </p:sp>
-      <p:cxnSp>
-        <p:nvCxnSpPr>
-          <p:cNvPr id="33" name="Connector 32"/>
-          <p:cNvCxnSpPr/>
-          <p:nvPr/>
-        </p:nvCxnSpPr>
-        <p:spPr>
-          <a:xfrm>
-            <a:off x="548640" y="6400800"/>
-            <a:ext cx="11094415" cy="0"/>
-          </a:xfrm>
-          <a:prstGeom prst="line">
-            <a:avLst/>
-          </a:prstGeom>
-          <a:ln w="9525">
-            <a:solidFill>
-              <a:srgbClr val="D4DAE1"/>
-            </a:solidFill>
-          </a:ln>
-        </p:spPr>
-      </p:cxnSp>
-      <p:sp>
-        <p:nvSpPr>
-          <p:cNvPr id="34" name="TextBox 33"/>
-          <p:cNvSpPr txBox="1"/>
-          <p:nvPr/>
-        </p:nvSpPr>
-        <p:spPr>
-          <a:xfrm>
-            <a:off x="548640" y="6455664"/>
-            <a:ext cx="7315200" cy="274320"/>
-          </a:xfrm>
-          <a:prstGeom prst="rect">
-            <a:avLst/>
-          </a:prstGeom>
-          <a:noFill/>
-        </p:spPr>
-        <p:txBody>
-          <a:bodyPr wrap="square" anchor="t" lIns="18288" rIns="18288" tIns="18288" bIns="18288">
-            <a:spAutoFit/>
-          </a:bodyPr>
-          <a:lstStyle/>
-          <a:p>
-            <a:pPr algn="l">
-              <a:spcAft>
-                <a:spcPts val="400"/>
-              </a:spcAft>
-            </a:pPr>
-            <a:r>
-              <a:rPr sz="900" b="0">
-                <a:solidFill>
-                  <a:srgbClr val="8A94A0"/>
-                </a:solidFill>
-                <a:latin typeface="Segoe UI"/>
-              </a:rPr>
-              <a:t>ACME Talent Lake  ·  Data Engineer track  ·  Coding Workshop 2026</a:t>
-            </a:r>
-          </a:p>
-        </p:txBody>
-      </p:sp>
-      <p:sp>
-        <p:nvSpPr>
-          <p:cNvPr id="35" name="TextBox 34"/>
-          <p:cNvSpPr txBox="1"/>
-          <p:nvPr/>
-        </p:nvSpPr>
-        <p:spPr>
-          <a:xfrm>
-            <a:off x="10698480" y="6455664"/>
-            <a:ext cx="941832" cy="274320"/>
-          </a:xfrm>
-          <a:prstGeom prst="rect">
-            <a:avLst/>
-          </a:prstGeom>
-          <a:noFill/>
-        </p:spPr>
-        <p:txBody>
-          <a:bodyPr wrap="square" anchor="t" lIns="18288" rIns="18288" tIns="18288" bIns="18288">
-            <a:spAutoFit/>
-          </a:bodyPr>
-          <a:lstStyle/>
-          <a:p>
-            <a:pPr algn="r">
-              <a:spcAft>
-                <a:spcPts val="400"/>
-              </a:spcAft>
-            </a:pPr>
-            <a:r>
-              <a:rPr sz="900" b="0">
-                <a:solidFill>
-                  <a:srgbClr val="8A94A0"/>
-                </a:solidFill>
-                <a:latin typeface="Segoe UI"/>
-              </a:rPr>
-              <a:t>7 / 10</a:t>
+              <a:t>7 / 11</a:t>
             </a:r>
           </a:p>
         </p:txBody>
@@ -17809,7 +19610,7 @@
                 </a:solidFill>
                 <a:latin typeface="Segoe UI Semibold"/>
               </a:rPr>
-              <a:t>FINDINGS · Q5–Q7</a:t>
+              <a:t>FINDINGS · Q1–Q4</a:t>
             </a:r>
           </a:p>
         </p:txBody>
@@ -17848,7 +19649,7 @@
                 </a:solidFill>
                 <a:latin typeface="Segoe UI Semibold"/>
               </a:rPr>
-              <a:t>212 at high attrition risk; stronger teams deliver on time</a:t>
+              <a:t>230 declining · 441 with gaps · 124 ready · 232 not learning</a:t>
             </a:r>
           </a:p>
         </p:txBody>
@@ -17862,7 +19663,7 @@
         <p:spPr>
           <a:xfrm>
             <a:off x="548640" y="1417320"/>
-            <a:ext cx="3557016" cy="320040"/>
+            <a:ext cx="5422392" cy="320040"/>
           </a:xfrm>
           <a:prstGeom prst="rect">
             <a:avLst/>
@@ -17887,7 +19688,7 @@
                 </a:solidFill>
                 <a:latin typeface="Segoe UI Semibold"/>
               </a:rPr>
-              <a:t>Q5 · Computed attrition risk</a:t>
+              <a:t>Q1 · Change since previous review</a:t>
             </a:r>
           </a:p>
         </p:txBody>
@@ -17902,7 +19703,7 @@
         </p:nvGraphicFramePr>
         <p:xfrm>
           <a:off x="457200" y="1737360"/>
-          <a:ext cx="3648456" cy="1737360"/>
+          <a:ext cx="3566160" cy="1874519"/>
         </p:xfrm>
         <a:graphic>
           <a:graphicData uri="http://schemas.openxmlformats.org/drawingml/2006/chart">
@@ -17918,8 +19719,8 @@
         </p:nvSpPr>
         <p:spPr>
           <a:xfrm>
-            <a:off x="548640" y="3657600"/>
-            <a:ext cx="3557016" cy="2468880"/>
+            <a:off x="4206240" y="1920240"/>
+            <a:ext cx="1737360" cy="548640"/>
           </a:xfrm>
           <a:prstGeom prst="rect">
             <a:avLst/>
@@ -17934,49 +19735,17 @@
           <a:p>
             <a:pPr algn="l">
               <a:spcAft>
-                <a:spcPts val="800"/>
-              </a:spcAft>
-            </a:pPr>
-            <a:r>
-              <a:rPr sz="1200" b="0">
-                <a:solidFill>
-                  <a:srgbClr val="4B5765"/>
-                </a:solidFill>
-                <a:latin typeface="Segoe UI"/>
-              </a:rPr>
-              <a:t>Managers flagged 311 as high risk; only 145 also show performance warning signs.</a:t>
-            </a:r>
-          </a:p>
-          <a:p>
-            <a:pPr algn="l">
-              <a:spcAft>
-                <a:spcPts val="800"/>
-              </a:spcAft>
-            </a:pPr>
-            <a:r>
-              <a:rPr sz="1200" b="0">
+                <a:spcPts val="400"/>
+              </a:spcAft>
+            </a:pPr>
+            <a:r>
+              <a:rPr sz="2600" b="0">
                 <a:solidFill>
                   <a:srgbClr val="17202A"/>
                 </a:solidFill>
                 <a:latin typeface="Segoe UI Semibold"/>
               </a:rPr>
-              <a:t>67 more score high without a manager flag.</a:t>
-            </a:r>
-          </a:p>
-          <a:p>
-            <a:pPr algn="l">
-              <a:spcAft>
-                <a:spcPts val="800"/>
-              </a:spcAft>
-            </a:pPr>
-            <a:r>
-              <a:rPr sz="1050" b="0">
-                <a:solidFill>
-                  <a:srgbClr val="8A94A0"/>
-                </a:solidFill>
-                <a:latin typeface="Segoe UI"/>
-              </a:rPr>
-              <a:t>Score: rating fell +2 · rating ≤ 2 +2 · negative comment +1 · no learning in 180 days +1 · manager flag +2 / +1. High = 5 or more.</a:t>
+              <a:t>3.41</a:t>
             </a:r>
           </a:p>
         </p:txBody>
@@ -17989,8 +19758,8 @@
         </p:nvSpPr>
         <p:spPr>
           <a:xfrm>
-            <a:off x="4315968" y="1417320"/>
-            <a:ext cx="3557016" cy="320040"/>
+            <a:off x="4206240" y="2487168"/>
+            <a:ext cx="1737360" cy="457200"/>
           </a:xfrm>
           <a:prstGeom prst="rect">
             <a:avLst/>
@@ -18009,28 +19778,145 @@
               </a:spcAft>
             </a:pPr>
             <a:r>
+              <a:rPr sz="1100" b="0">
+                <a:solidFill>
+                  <a:srgbClr val="4B5765"/>
+                </a:solidFill>
+                <a:latin typeface="Segoe UI"/>
+              </a:rPr>
+              <a:t>average latest rating</a:t>
+            </a:r>
+          </a:p>
+        </p:txBody>
+      </p:sp>
+      <p:sp>
+        <p:nvSpPr>
+          <p:cNvPr id="8" name="TextBox 7"/>
+          <p:cNvSpPr txBox="1"/>
+          <p:nvPr/>
+        </p:nvSpPr>
+        <p:spPr>
+          <a:xfrm>
+            <a:off x="4206240" y="2834640"/>
+            <a:ext cx="1737360" cy="548640"/>
+          </a:xfrm>
+          <a:prstGeom prst="rect">
+            <a:avLst/>
+          </a:prstGeom>
+          <a:noFill/>
+        </p:spPr>
+        <p:txBody>
+          <a:bodyPr wrap="square" anchor="t" lIns="18288" rIns="18288" tIns="18288" bIns="18288">
+            <a:spAutoFit/>
+          </a:bodyPr>
+          <a:lstStyle/>
+          <a:p>
+            <a:pPr algn="l">
+              <a:spcAft>
+                <a:spcPts val="400"/>
+              </a:spcAft>
+            </a:pPr>
+            <a:r>
+              <a:rPr sz="2600" b="0">
+                <a:solidFill>
+                  <a:srgbClr val="B0412D"/>
+                </a:solidFill>
+                <a:latin typeface="Segoe UI Semibold"/>
+              </a:rPr>
+              <a:t>84</a:t>
+            </a:r>
+          </a:p>
+        </p:txBody>
+      </p:sp>
+      <p:sp>
+        <p:nvSpPr>
+          <p:cNvPr id="9" name="TextBox 8"/>
+          <p:cNvSpPr txBox="1"/>
+          <p:nvPr/>
+        </p:nvSpPr>
+        <p:spPr>
+          <a:xfrm>
+            <a:off x="4206240" y="3401568"/>
+            <a:ext cx="1737360" cy="457200"/>
+          </a:xfrm>
+          <a:prstGeom prst="rect">
+            <a:avLst/>
+          </a:prstGeom>
+          <a:noFill/>
+        </p:spPr>
+        <p:txBody>
+          <a:bodyPr wrap="square" anchor="t" lIns="18288" rIns="18288" tIns="18288" bIns="18288">
+            <a:spAutoFit/>
+          </a:bodyPr>
+          <a:lstStyle/>
+          <a:p>
+            <a:pPr algn="l">
+              <a:spcAft>
+                <a:spcPts val="400"/>
+              </a:spcAft>
+            </a:pPr>
+            <a:r>
+              <a:rPr sz="1100" b="0">
+                <a:solidFill>
+                  <a:srgbClr val="4B5765"/>
+                </a:solidFill>
+                <a:latin typeface="Segoe UI"/>
+              </a:rPr>
+              <a:t>dropped 2+ points</a:t>
+            </a:r>
+          </a:p>
+        </p:txBody>
+      </p:sp>
+      <p:sp>
+        <p:nvSpPr>
+          <p:cNvPr id="10" name="TextBox 9"/>
+          <p:cNvSpPr txBox="1"/>
+          <p:nvPr/>
+        </p:nvSpPr>
+        <p:spPr>
+          <a:xfrm>
+            <a:off x="6217920" y="1417320"/>
+            <a:ext cx="5422392" cy="320040"/>
+          </a:xfrm>
+          <a:prstGeom prst="rect">
+            <a:avLst/>
+          </a:prstGeom>
+          <a:noFill/>
+        </p:spPr>
+        <p:txBody>
+          <a:bodyPr wrap="square" anchor="t" lIns="18288" rIns="18288" tIns="18288" bIns="18288">
+            <a:spAutoFit/>
+          </a:bodyPr>
+          <a:lstStyle/>
+          <a:p>
+            <a:pPr algn="l">
+              <a:spcAft>
+                <a:spcPts val="400"/>
+              </a:spcAft>
+            </a:pPr>
+            <a:r>
               <a:rPr sz="1300" b="0">
                 <a:solidFill>
                   <a:srgbClr val="17202A"/>
                 </a:solidFill>
                 <a:latin typeface="Segoe UI Semibold"/>
               </a:rPr>
-              <a:t>Q6 · % high performers by delivery</a:t>
+              <a:t>Q2 · Most critical skill gaps</a:t>
             </a:r>
           </a:p>
         </p:txBody>
       </p:sp>
       <p:graphicFrame>
         <p:nvGraphicFramePr>
-          <p:cNvPr id="8" name="Chart 7"/>
+          <p:cNvPr id="11" name="Chart 10"/>
           <p:cNvGraphicFramePr>
             <a:graphicFrameLocks noGrp="1"/>
           </p:cNvGraphicFramePr>
           <p:nvPr/>
         </p:nvGraphicFramePr>
         <p:xfrm>
-          <a:off x="4224528" y="1737360"/>
-          <a:ext cx="3648456" cy="1737360"/>
+          <a:off x="6126480" y="1737360"/>
+          <a:ext cx="3566160" cy="1874519"/>
         </p:xfrm>
         <a:graphic>
           <a:graphicData uri="http://schemas.openxmlformats.org/drawingml/2006/chart">
@@ -18040,14 +19926,14 @@
       </p:graphicFrame>
       <p:sp>
         <p:nvSpPr>
-          <p:cNvPr id="9" name="TextBox 8"/>
+          <p:cNvPr id="12" name="TextBox 11"/>
           <p:cNvSpPr txBox="1"/>
           <p:nvPr/>
         </p:nvSpPr>
         <p:spPr>
           <a:xfrm>
-            <a:off x="4315968" y="3703320"/>
-            <a:ext cx="1143000" cy="411480"/>
+            <a:off x="9875520" y="1920240"/>
+            <a:ext cx="1737360" cy="548640"/>
           </a:xfrm>
           <a:prstGeom prst="rect">
             <a:avLst/>
@@ -18066,27 +19952,27 @@
               </a:spcAft>
             </a:pPr>
             <a:r>
-              <a:rPr sz="2000" b="0">
+              <a:rPr sz="2600" b="0">
                 <a:solidFill>
                   <a:srgbClr val="17202A"/>
                 </a:solidFill>
                 <a:latin typeface="Segoe UI Semibold"/>
               </a:rPr>
-              <a:t>+0.24</a:t>
-            </a:r>
-          </a:p>
-        </p:txBody>
-      </p:sp>
-      <p:sp>
-        <p:nvSpPr>
-          <p:cNvPr id="10" name="TextBox 9"/>
+              <a:t>465</a:t>
+            </a:r>
+          </a:p>
+        </p:txBody>
+      </p:sp>
+      <p:sp>
+        <p:nvSpPr>
+          <p:cNvPr id="13" name="TextBox 12"/>
           <p:cNvSpPr txBox="1"/>
           <p:nvPr/>
         </p:nvSpPr>
         <p:spPr>
           <a:xfrm>
-            <a:off x="4315968" y="4160520"/>
-            <a:ext cx="1143000" cy="548640"/>
+            <a:off x="9875520" y="2487168"/>
+            <a:ext cx="1737360" cy="457200"/>
           </a:xfrm>
           <a:prstGeom prst="rect">
             <a:avLst/>
@@ -18101,47 +19987,31 @@
           <a:p>
             <a:pPr algn="l">
               <a:spcAft>
-                <a:spcPts val="0"/>
-              </a:spcAft>
-            </a:pPr>
-            <a:r>
-              <a:rPr sz="950" b="0">
+                <a:spcPts val="400"/>
+              </a:spcAft>
+            </a:pPr>
+            <a:r>
+              <a:rPr sz="1100" b="0">
                 <a:solidFill>
                   <a:srgbClr val="4B5765"/>
                 </a:solidFill>
                 <a:latin typeface="Segoe UI"/>
               </a:rPr>
-              <a:t>rating vs</a:t>
-            </a:r>
-          </a:p>
-          <a:p>
-            <a:pPr algn="l">
-              <a:spcAft>
-                <a:spcPts val="0"/>
-              </a:spcAft>
-            </a:pPr>
-            <a:r>
-              <a:rPr sz="950" b="0">
-                <a:solidFill>
-                  <a:srgbClr val="4B5765"/>
-                </a:solidFill>
-                <a:latin typeface="Segoe UI"/>
-              </a:rPr>
-              <a:t>project score</a:t>
-            </a:r>
-          </a:p>
-        </p:txBody>
-      </p:sp>
-      <p:sp>
-        <p:nvSpPr>
-          <p:cNvPr id="11" name="TextBox 10"/>
+              <a:t>gaps across 441 people</a:t>
+            </a:r>
+          </a:p>
+        </p:txBody>
+      </p:sp>
+      <p:sp>
+        <p:nvSpPr>
+          <p:cNvPr id="14" name="TextBox 13"/>
           <p:cNvSpPr txBox="1"/>
           <p:nvPr/>
         </p:nvSpPr>
         <p:spPr>
           <a:xfrm>
-            <a:off x="5504688" y="3703320"/>
-            <a:ext cx="1143000" cy="411480"/>
+            <a:off x="9875520" y="2834640"/>
+            <a:ext cx="1737360" cy="548640"/>
           </a:xfrm>
           <a:prstGeom prst="rect">
             <a:avLst/>
@@ -18160,27 +20030,27 @@
               </a:spcAft>
             </a:pPr>
             <a:r>
-              <a:rPr sz="2000" b="0">
-                <a:solidFill>
-                  <a:srgbClr val="17202A"/>
+              <a:rPr sz="2600" b="0">
+                <a:solidFill>
+                  <a:srgbClr val="B0412D"/>
                 </a:solidFill>
                 <a:latin typeface="Segoe UI Semibold"/>
               </a:rPr>
-              <a:t>+0.38</a:t>
-            </a:r>
-          </a:p>
-        </p:txBody>
-      </p:sp>
-      <p:sp>
-        <p:nvSpPr>
-          <p:cNvPr id="12" name="TextBox 11"/>
+              <a:t>28%</a:t>
+            </a:r>
+          </a:p>
+        </p:txBody>
+      </p:sp>
+      <p:sp>
+        <p:nvSpPr>
+          <p:cNvPr id="15" name="TextBox 14"/>
           <p:cNvSpPr txBox="1"/>
           <p:nvPr/>
         </p:nvSpPr>
         <p:spPr>
           <a:xfrm>
-            <a:off x="5504688" y="4160520"/>
-            <a:ext cx="1143000" cy="548640"/>
+            <a:off x="9875520" y="3401568"/>
+            <a:ext cx="1737360" cy="457200"/>
           </a:xfrm>
           <a:prstGeom prst="rect">
             <a:avLst/>
@@ -18195,47 +20065,31 @@
           <a:p>
             <a:pPr algn="l">
               <a:spcAft>
-                <a:spcPts val="0"/>
-              </a:spcAft>
-            </a:pPr>
-            <a:r>
-              <a:rPr sz="950" b="0">
+                <a:spcPts val="400"/>
+              </a:spcAft>
+            </a:pPr>
+            <a:r>
+              <a:rPr sz="1100" b="0">
                 <a:solidFill>
                   <a:srgbClr val="4B5765"/>
                 </a:solidFill>
                 <a:latin typeface="Segoe UI"/>
               </a:rPr>
-              <a:t>high performers</a:t>
-            </a:r>
-          </a:p>
-          <a:p>
-            <a:pPr algn="l">
-              <a:spcAft>
-                <a:spcPts val="0"/>
-              </a:spcAft>
-            </a:pPr>
-            <a:r>
-              <a:rPr sz="950" b="0">
-                <a:solidFill>
-                  <a:srgbClr val="4B5765"/>
-                </a:solidFill>
-                <a:latin typeface="Segoe UI"/>
-              </a:rPr>
-              <a:t>vs on time</a:t>
-            </a:r>
-          </a:p>
-        </p:txBody>
-      </p:sp>
-      <p:sp>
-        <p:nvSpPr>
-          <p:cNvPr id="13" name="TextBox 12"/>
+              <a:t>of Human Resources affected</a:t>
+            </a:r>
+          </a:p>
+        </p:txBody>
+      </p:sp>
+      <p:sp>
+        <p:nvSpPr>
+          <p:cNvPr id="16" name="TextBox 15"/>
           <p:cNvSpPr txBox="1"/>
           <p:nvPr/>
         </p:nvSpPr>
         <p:spPr>
           <a:xfrm>
-            <a:off x="6693408" y="3703320"/>
-            <a:ext cx="1143000" cy="411480"/>
+            <a:off x="548640" y="3931920"/>
+            <a:ext cx="5422392" cy="320040"/>
           </a:xfrm>
           <a:prstGeom prst="rect">
             <a:avLst/>
@@ -18254,146 +20108,13 @@
               </a:spcAft>
             </a:pPr>
             <a:r>
-              <a:rPr sz="2000" b="0">
+              <a:rPr sz="1300" b="0">
                 <a:solidFill>
                   <a:srgbClr val="17202A"/>
                 </a:solidFill>
                 <a:latin typeface="Segoe UI Semibold"/>
               </a:rPr>
-              <a:t>-0.23</a:t>
-            </a:r>
-          </a:p>
-        </p:txBody>
-      </p:sp>
-      <p:sp>
-        <p:nvSpPr>
-          <p:cNvPr id="14" name="TextBox 13"/>
-          <p:cNvSpPr txBox="1"/>
-          <p:nvPr/>
-        </p:nvSpPr>
-        <p:spPr>
-          <a:xfrm>
-            <a:off x="6693408" y="4160520"/>
-            <a:ext cx="1143000" cy="548640"/>
-          </a:xfrm>
-          <a:prstGeom prst="rect">
-            <a:avLst/>
-          </a:prstGeom>
-          <a:noFill/>
-        </p:spPr>
-        <p:txBody>
-          <a:bodyPr wrap="square" anchor="t" lIns="18288" rIns="18288" tIns="18288" bIns="18288">
-            <a:spAutoFit/>
-          </a:bodyPr>
-          <a:lstStyle/>
-          <a:p>
-            <a:pPr algn="l">
-              <a:spcAft>
-                <a:spcPts val="0"/>
-              </a:spcAft>
-            </a:pPr>
-            <a:r>
-              <a:rPr sz="950" b="0">
-                <a:solidFill>
-                  <a:srgbClr val="4B5765"/>
-                </a:solidFill>
-                <a:latin typeface="Segoe UI"/>
-              </a:rPr>
-              <a:t>skill gaps vs</a:t>
-            </a:r>
-          </a:p>
-          <a:p>
-            <a:pPr algn="l">
-              <a:spcAft>
-                <a:spcPts val="0"/>
-              </a:spcAft>
-            </a:pPr>
-            <a:r>
-              <a:rPr sz="950" b="0">
-                <a:solidFill>
-                  <a:srgbClr val="4B5765"/>
-                </a:solidFill>
-                <a:latin typeface="Segoe UI"/>
-              </a:rPr>
-              <a:t>project score</a:t>
-            </a:r>
-          </a:p>
-        </p:txBody>
-      </p:sp>
-      <p:sp>
-        <p:nvSpPr>
-          <p:cNvPr id="15" name="TextBox 14"/>
-          <p:cNvSpPr txBox="1"/>
-          <p:nvPr/>
-        </p:nvSpPr>
-        <p:spPr>
-          <a:xfrm>
-            <a:off x="4315968" y="4983480"/>
-            <a:ext cx="3557016" cy="1097280"/>
-          </a:xfrm>
-          <a:prstGeom prst="rect">
-            <a:avLst/>
-          </a:prstGeom>
-          <a:noFill/>
-        </p:spPr>
-        <p:txBody>
-          <a:bodyPr wrap="square" anchor="t" lIns="18288" rIns="18288" tIns="18288" bIns="18288">
-            <a:spAutoFit/>
-          </a:bodyPr>
-          <a:lstStyle/>
-          <a:p>
-            <a:pPr algn="l">
-              <a:spcAft>
-                <a:spcPts val="400"/>
-              </a:spcAft>
-            </a:pPr>
-            <a:r>
-              <a:rPr sz="1100" b="0">
-                <a:solidFill>
-                  <a:srgbClr val="4B5765"/>
-                </a:solidFill>
-                <a:latin typeface="Segoe UI"/>
-              </a:rPr>
-              <a:t>Team level, because projects belong to teams. Based on 27 teams: indicative, not proof.</a:t>
-            </a:r>
-          </a:p>
-        </p:txBody>
-      </p:sp>
-      <p:sp>
-        <p:nvSpPr>
-          <p:cNvPr id="16" name="TextBox 15"/>
-          <p:cNvSpPr txBox="1"/>
-          <p:nvPr/>
-        </p:nvSpPr>
-        <p:spPr>
-          <a:xfrm>
-            <a:off x="8083296" y="1417320"/>
-            <a:ext cx="3557016" cy="320040"/>
-          </a:xfrm>
-          <a:prstGeom prst="rect">
-            <a:avLst/>
-          </a:prstGeom>
-          <a:noFill/>
-        </p:spPr>
-        <p:txBody>
-          <a:bodyPr wrap="square" anchor="t" lIns="18288" rIns="18288" tIns="18288" bIns="18288">
-            <a:spAutoFit/>
-          </a:bodyPr>
-          <a:lstStyle/>
-          <a:p>
-            <a:pPr algn="l">
-              <a:spcAft>
-                <a:spcPts val="400"/>
-              </a:spcAft>
-            </a:pPr>
-            <a:r>
-              <a:rPr sz="1300" b="0">
-                <a:solidFill>
-                  <a:srgbClr val="17202A"/>
-                </a:solidFill>
-                <a:latin typeface="Segoe UI Semibold"/>
-              </a:rPr>
-              <a:t>Q7 · Weakest skill coverage</a:t>
+              <a:t>Q3 · Promotion pipeline</a:t>
             </a:r>
           </a:p>
         </p:txBody>
@@ -18407,8 +20128,8 @@
           <p:nvPr/>
         </p:nvGraphicFramePr>
         <p:xfrm>
-          <a:off x="7991856" y="1737360"/>
-          <a:ext cx="3648456" cy="1737360"/>
+          <a:off x="457200" y="4251959"/>
+          <a:ext cx="3566160" cy="1874519"/>
         </p:xfrm>
         <a:graphic>
           <a:graphicData uri="http://schemas.openxmlformats.org/drawingml/2006/chart">
@@ -18424,8 +20145,8 @@
         </p:nvSpPr>
         <p:spPr>
           <a:xfrm>
-            <a:off x="8083296" y="3657600"/>
-            <a:ext cx="1691640" cy="548640"/>
+            <a:off x="4206240" y="4434840"/>
+            <a:ext cx="1737360" cy="548640"/>
           </a:xfrm>
           <a:prstGeom prst="rect">
             <a:avLst/>
@@ -18444,13 +20165,13 @@
               </a:spcAft>
             </a:pPr>
             <a:r>
-              <a:rPr sz="2400" b="0">
+              <a:rPr sz="2600" b="0">
                 <a:solidFill>
                   <a:srgbClr val="B0412D"/>
                 </a:solidFill>
                 <a:latin typeface="Segoe UI Semibold"/>
               </a:rPr>
-              <a:t>33%</a:t>
+              <a:t>28</a:t>
             </a:r>
           </a:p>
         </p:txBody>
@@ -18463,8 +20184,8 @@
         </p:nvSpPr>
         <p:spPr>
           <a:xfrm>
-            <a:off x="8083296" y="4224528"/>
-            <a:ext cx="1691640" cy="457200"/>
+            <a:off x="4206240" y="5001768"/>
+            <a:ext cx="1737360" cy="457200"/>
           </a:xfrm>
           <a:prstGeom prst="rect">
             <a:avLst/>
@@ -18489,7 +20210,7 @@
                 </a:solidFill>
                 <a:latin typeface="Segoe UI"/>
               </a:rPr>
-              <a:t>of assessments at level 1–2</a:t>
+              <a:t>high-potential people at high attrition risk</a:t>
             </a:r>
           </a:p>
         </p:txBody>
@@ -18502,8 +20223,8 @@
         </p:nvSpPr>
         <p:spPr>
           <a:xfrm>
-            <a:off x="9866376" y="3657600"/>
-            <a:ext cx="1691640" cy="548640"/>
+            <a:off x="6217920" y="3931920"/>
+            <a:ext cx="5422392" cy="320040"/>
           </a:xfrm>
           <a:prstGeom prst="rect">
             <a:avLst/>
@@ -18522,27 +20243,56 @@
               </a:spcAft>
             </a:pPr>
             <a:r>
-              <a:rPr sz="2400" b="0">
+              <a:rPr sz="1300" b="0">
                 <a:solidFill>
                   <a:srgbClr val="17202A"/>
                 </a:solidFill>
                 <a:latin typeface="Segoe UI Semibold"/>
               </a:rPr>
-              <a:t>39%</a:t>
-            </a:r>
-          </a:p>
-        </p:txBody>
-      </p:sp>
-      <p:sp>
-        <p:nvSpPr>
-          <p:cNvPr id="21" name="TextBox 20"/>
+              <a:t>Q4 · Training and development</a:t>
+            </a:r>
+          </a:p>
+        </p:txBody>
+      </p:sp>
+      <p:sp>
+        <p:nvSpPr>
+          <p:cNvPr id="21" name="Rounded Rectangle 20"/>
+          <p:cNvSpPr/>
+          <p:nvPr/>
+        </p:nvSpPr>
+        <p:spPr>
+          <a:xfrm>
+            <a:off x="6217920" y="4343400"/>
+            <a:ext cx="2633472" cy="886968"/>
+          </a:xfrm>
+          <a:prstGeom prst="roundRect">
+            <a:avLst>
+              <a:gd name="adj" fmla="val 6000"/>
+            </a:avLst>
+          </a:prstGeom>
+          <a:solidFill>
+            <a:srgbClr val="F4F6F8"/>
+          </a:solidFill>
+          <a:ln>
+            <a:noFill/>
+          </a:ln>
+        </p:spPr>
+        <p:txBody>
+          <a:bodyPr rtlCol="0" anchor="ctr"/>
+          <a:lstStyle/>
+          <a:p/>
+        </p:txBody>
+      </p:sp>
+      <p:sp>
+        <p:nvSpPr>
+          <p:cNvPr id="22" name="TextBox 21"/>
           <p:cNvSpPr txBox="1"/>
           <p:nvPr/>
         </p:nvSpPr>
         <p:spPr>
           <a:xfrm>
-            <a:off x="9866376" y="4224528"/>
-            <a:ext cx="1691640" cy="457200"/>
+            <a:off x="6382512" y="4398264"/>
+            <a:ext cx="2377440" cy="457200"/>
           </a:xfrm>
           <a:prstGeom prst="rect">
             <a:avLst/>
@@ -18561,27 +20311,27 @@
               </a:spcAft>
             </a:pPr>
             <a:r>
-              <a:rPr sz="1100" b="0">
-                <a:solidFill>
-                  <a:srgbClr val="4B5765"/>
-                </a:solidFill>
-                <a:latin typeface="Segoe UI"/>
-              </a:rPr>
-              <a:t>at level 4–5</a:t>
-            </a:r>
-          </a:p>
-        </p:txBody>
-      </p:sp>
-      <p:sp>
-        <p:nvSpPr>
-          <p:cNvPr id="22" name="TextBox 21"/>
+              <a:rPr sz="2200" b="0">
+                <a:solidFill>
+                  <a:srgbClr val="17202A"/>
+                </a:solidFill>
+                <a:latin typeface="Segoe UI Semibold"/>
+              </a:rPr>
+              <a:t>1.75</a:t>
+            </a:r>
+          </a:p>
+        </p:txBody>
+      </p:sp>
+      <p:sp>
+        <p:nvSpPr>
+          <p:cNvPr id="23" name="TextBox 22"/>
           <p:cNvSpPr txBox="1"/>
           <p:nvPr/>
         </p:nvSpPr>
         <p:spPr>
           <a:xfrm>
-            <a:off x="8083296" y="4983480"/>
-            <a:ext cx="3557016" cy="1097280"/>
+            <a:off x="6382512" y="4855464"/>
+            <a:ext cx="2377440" cy="320040"/>
           </a:xfrm>
           <a:prstGeom prst="rect">
             <a:avLst/>
@@ -18600,20 +20350,341 @@
               </a:spcAft>
             </a:pPr>
             <a:r>
-              <a:rPr sz="1100" b="0">
+              <a:rPr sz="1050" b="0">
                 <a:solidFill>
                   <a:srgbClr val="4B5765"/>
                 </a:solidFill>
                 <a:latin typeface="Segoe UI"/>
               </a:rPr>
-              <a:t>% of assessed employees meeting their role's required level. Gaps are specific skills, not whole categories.</a:t>
+              <a:t>courses per employee</a:t>
+            </a:r>
+          </a:p>
+        </p:txBody>
+      </p:sp>
+      <p:sp>
+        <p:nvSpPr>
+          <p:cNvPr id="24" name="Rounded Rectangle 23"/>
+          <p:cNvSpPr/>
+          <p:nvPr/>
+        </p:nvSpPr>
+        <p:spPr>
+          <a:xfrm>
+            <a:off x="8942832" y="4343400"/>
+            <a:ext cx="2633472" cy="886968"/>
+          </a:xfrm>
+          <a:prstGeom prst="roundRect">
+            <a:avLst>
+              <a:gd name="adj" fmla="val 6000"/>
+            </a:avLst>
+          </a:prstGeom>
+          <a:solidFill>
+            <a:srgbClr val="F4F6F8"/>
+          </a:solidFill>
+          <a:ln>
+            <a:noFill/>
+          </a:ln>
+        </p:spPr>
+        <p:txBody>
+          <a:bodyPr rtlCol="0" anchor="ctr"/>
+          <a:lstStyle/>
+          <a:p/>
+        </p:txBody>
+      </p:sp>
+      <p:sp>
+        <p:nvSpPr>
+          <p:cNvPr id="25" name="TextBox 24"/>
+          <p:cNvSpPr txBox="1"/>
+          <p:nvPr/>
+        </p:nvSpPr>
+        <p:spPr>
+          <a:xfrm>
+            <a:off x="9107424" y="4398264"/>
+            <a:ext cx="2377440" cy="457200"/>
+          </a:xfrm>
+          <a:prstGeom prst="rect">
+            <a:avLst/>
+          </a:prstGeom>
+          <a:noFill/>
+        </p:spPr>
+        <p:txBody>
+          <a:bodyPr wrap="square" anchor="t" lIns="18288" rIns="18288" tIns="18288" bIns="18288">
+            <a:spAutoFit/>
+          </a:bodyPr>
+          <a:lstStyle/>
+          <a:p>
+            <a:pPr algn="l">
+              <a:spcAft>
+                <a:spcPts val="400"/>
+              </a:spcAft>
+            </a:pPr>
+            <a:r>
+              <a:rPr sz="2200" b="0">
+                <a:solidFill>
+                  <a:srgbClr val="17202A"/>
+                </a:solidFill>
+                <a:latin typeface="Segoe UI Semibold"/>
+              </a:rPr>
+              <a:t>1,764</a:t>
+            </a:r>
+          </a:p>
+        </p:txBody>
+      </p:sp>
+      <p:sp>
+        <p:nvSpPr>
+          <p:cNvPr id="26" name="TextBox 25"/>
+          <p:cNvSpPr txBox="1"/>
+          <p:nvPr/>
+        </p:nvSpPr>
+        <p:spPr>
+          <a:xfrm>
+            <a:off x="9107424" y="4855464"/>
+            <a:ext cx="2377440" cy="320040"/>
+          </a:xfrm>
+          <a:prstGeom prst="rect">
+            <a:avLst/>
+          </a:prstGeom>
+          <a:noFill/>
+        </p:spPr>
+        <p:txBody>
+          <a:bodyPr wrap="square" anchor="t" lIns="18288" rIns="18288" tIns="18288" bIns="18288">
+            <a:spAutoFit/>
+          </a:bodyPr>
+          <a:lstStyle/>
+          <a:p>
+            <a:pPr algn="l">
+              <a:spcAft>
+                <a:spcPts val="400"/>
+              </a:spcAft>
+            </a:pPr>
+            <a:r>
+              <a:rPr sz="1050" b="0">
+                <a:solidFill>
+                  <a:srgbClr val="4B5765"/>
+                </a:solidFill>
+                <a:latin typeface="Segoe UI"/>
+              </a:rPr>
+              <a:t>certifications</a:t>
+            </a:r>
+          </a:p>
+        </p:txBody>
+      </p:sp>
+      <p:sp>
+        <p:nvSpPr>
+          <p:cNvPr id="27" name="Rounded Rectangle 26"/>
+          <p:cNvSpPr/>
+          <p:nvPr/>
+        </p:nvSpPr>
+        <p:spPr>
+          <a:xfrm>
+            <a:off x="6217920" y="5321808"/>
+            <a:ext cx="2633472" cy="886968"/>
+          </a:xfrm>
+          <a:prstGeom prst="roundRect">
+            <a:avLst>
+              <a:gd name="adj" fmla="val 6000"/>
+            </a:avLst>
+          </a:prstGeom>
+          <a:solidFill>
+            <a:srgbClr val="F4F6F8"/>
+          </a:solidFill>
+          <a:ln>
+            <a:noFill/>
+          </a:ln>
+        </p:spPr>
+        <p:txBody>
+          <a:bodyPr rtlCol="0" anchor="ctr"/>
+          <a:lstStyle/>
+          <a:p/>
+        </p:txBody>
+      </p:sp>
+      <p:sp>
+        <p:nvSpPr>
+          <p:cNvPr id="28" name="TextBox 27"/>
+          <p:cNvSpPr txBox="1"/>
+          <p:nvPr/>
+        </p:nvSpPr>
+        <p:spPr>
+          <a:xfrm>
+            <a:off x="6382512" y="5376672"/>
+            <a:ext cx="2377440" cy="457200"/>
+          </a:xfrm>
+          <a:prstGeom prst="rect">
+            <a:avLst/>
+          </a:prstGeom>
+          <a:noFill/>
+        </p:spPr>
+        <p:txBody>
+          <a:bodyPr wrap="square" anchor="t" lIns="18288" rIns="18288" tIns="18288" bIns="18288">
+            <a:spAutoFit/>
+          </a:bodyPr>
+          <a:lstStyle/>
+          <a:p>
+            <a:pPr algn="l">
+              <a:spcAft>
+                <a:spcPts val="400"/>
+              </a:spcAft>
+            </a:pPr>
+            <a:r>
+              <a:rPr sz="2200" b="0">
+                <a:solidFill>
+                  <a:srgbClr val="17202A"/>
+                </a:solidFill>
+                <a:latin typeface="Segoe UI Semibold"/>
+              </a:rPr>
+              <a:t>41%</a:t>
+            </a:r>
+          </a:p>
+        </p:txBody>
+      </p:sp>
+      <p:sp>
+        <p:nvSpPr>
+          <p:cNvPr id="29" name="TextBox 28"/>
+          <p:cNvSpPr txBox="1"/>
+          <p:nvPr/>
+        </p:nvSpPr>
+        <p:spPr>
+          <a:xfrm>
+            <a:off x="6382512" y="5833872"/>
+            <a:ext cx="2377440" cy="320040"/>
+          </a:xfrm>
+          <a:prstGeom prst="rect">
+            <a:avLst/>
+          </a:prstGeom>
+          <a:noFill/>
+        </p:spPr>
+        <p:txBody>
+          <a:bodyPr wrap="square" anchor="t" lIns="18288" rIns="18288" tIns="18288" bIns="18288">
+            <a:spAutoFit/>
+          </a:bodyPr>
+          <a:lstStyle/>
+          <a:p>
+            <a:pPr algn="l">
+              <a:spcAft>
+                <a:spcPts val="400"/>
+              </a:spcAft>
+            </a:pPr>
+            <a:r>
+              <a:rPr sz="1050" b="0">
+                <a:solidFill>
+                  <a:srgbClr val="4B5765"/>
+                </a:solidFill>
+                <a:latin typeface="Segoe UI"/>
+              </a:rPr>
+              <a:t>quiz pass rate</a:t>
+            </a:r>
+          </a:p>
+        </p:txBody>
+      </p:sp>
+      <p:sp>
+        <p:nvSpPr>
+          <p:cNvPr id="30" name="Rounded Rectangle 29"/>
+          <p:cNvSpPr/>
+          <p:nvPr/>
+        </p:nvSpPr>
+        <p:spPr>
+          <a:xfrm>
+            <a:off x="8942832" y="5321808"/>
+            <a:ext cx="2633472" cy="886968"/>
+          </a:xfrm>
+          <a:prstGeom prst="roundRect">
+            <a:avLst>
+              <a:gd name="adj" fmla="val 6000"/>
+            </a:avLst>
+          </a:prstGeom>
+          <a:solidFill>
+            <a:srgbClr val="F4F6F8"/>
+          </a:solidFill>
+          <a:ln>
+            <a:noFill/>
+          </a:ln>
+        </p:spPr>
+        <p:txBody>
+          <a:bodyPr rtlCol="0" anchor="ctr"/>
+          <a:lstStyle/>
+          <a:p/>
+        </p:txBody>
+      </p:sp>
+      <p:sp>
+        <p:nvSpPr>
+          <p:cNvPr id="31" name="TextBox 30"/>
+          <p:cNvSpPr txBox="1"/>
+          <p:nvPr/>
+        </p:nvSpPr>
+        <p:spPr>
+          <a:xfrm>
+            <a:off x="9107424" y="5376672"/>
+            <a:ext cx="2377440" cy="457200"/>
+          </a:xfrm>
+          <a:prstGeom prst="rect">
+            <a:avLst/>
+          </a:prstGeom>
+          <a:noFill/>
+        </p:spPr>
+        <p:txBody>
+          <a:bodyPr wrap="square" anchor="t" lIns="18288" rIns="18288" tIns="18288" bIns="18288">
+            <a:spAutoFit/>
+          </a:bodyPr>
+          <a:lstStyle/>
+          <a:p>
+            <a:pPr algn="l">
+              <a:spcAft>
+                <a:spcPts val="400"/>
+              </a:spcAft>
+            </a:pPr>
+            <a:r>
+              <a:rPr sz="2200" b="0">
+                <a:solidFill>
+                  <a:srgbClr val="B0412D"/>
+                </a:solidFill>
+                <a:latin typeface="Segoe UI Semibold"/>
+              </a:rPr>
+              <a:t>232</a:t>
+            </a:r>
+          </a:p>
+        </p:txBody>
+      </p:sp>
+      <p:sp>
+        <p:nvSpPr>
+          <p:cNvPr id="32" name="TextBox 31"/>
+          <p:cNvSpPr txBox="1"/>
+          <p:nvPr/>
+        </p:nvSpPr>
+        <p:spPr>
+          <a:xfrm>
+            <a:off x="9107424" y="5833872"/>
+            <a:ext cx="2377440" cy="320040"/>
+          </a:xfrm>
+          <a:prstGeom prst="rect">
+            <a:avLst/>
+          </a:prstGeom>
+          <a:noFill/>
+        </p:spPr>
+        <p:txBody>
+          <a:bodyPr wrap="square" anchor="t" lIns="18288" rIns="18288" tIns="18288" bIns="18288">
+            <a:spAutoFit/>
+          </a:bodyPr>
+          <a:lstStyle/>
+          <a:p>
+            <a:pPr algn="l">
+              <a:spcAft>
+                <a:spcPts val="400"/>
+              </a:spcAft>
+            </a:pPr>
+            <a:r>
+              <a:rPr sz="1050" b="0">
+                <a:solidFill>
+                  <a:srgbClr val="4B5765"/>
+                </a:solidFill>
+                <a:latin typeface="Segoe UI"/>
+              </a:rPr>
+              <a:t>with no learning activity</a:t>
             </a:r>
           </a:p>
         </p:txBody>
       </p:sp>
       <p:cxnSp>
         <p:nvCxnSpPr>
-          <p:cNvPr id="23" name="Connector 22"/>
+          <p:cNvPr id="33" name="Connector 32"/>
           <p:cNvCxnSpPr/>
           <p:nvPr/>
         </p:nvCxnSpPr>
@@ -18634,7 +20705,7 @@
       </p:cxnSp>
       <p:sp>
         <p:nvSpPr>
-          <p:cNvPr id="24" name="TextBox 23"/>
+          <p:cNvPr id="34" name="TextBox 33"/>
           <p:cNvSpPr txBox="1"/>
           <p:nvPr/>
         </p:nvSpPr>
@@ -18673,7 +20744,7 @@
       </p:sp>
       <p:sp>
         <p:nvSpPr>
-          <p:cNvPr id="25" name="TextBox 24"/>
+          <p:cNvPr id="35" name="TextBox 34"/>
           <p:cNvSpPr txBox="1"/>
           <p:nvPr/>
         </p:nvSpPr>
@@ -18705,7 +20776,7 @@
                 </a:solidFill>
                 <a:latin typeface="Segoe UI"/>
               </a:rPr>
-              <a:t>8 / 10</a:t>
+              <a:t>8 / 11</a:t>
             </a:r>
           </a:p>
         </p:txBody>
@@ -18770,7 +20841,7 @@
                 </a:solidFill>
                 <a:latin typeface="Segoe UI Semibold"/>
               </a:rPr>
-              <a:t>DEPLOYMENT &amp; TESTING</a:t>
+              <a:t>FINDINGS · Q5–Q7</a:t>
             </a:r>
           </a:p>
         </p:txBody>
@@ -18809,732 +20880,78 @@
                 </a:solidFill>
                 <a:latin typeface="Segoe UI Semibold"/>
               </a:rPr>
-              <a:t>Same code locally and on AWS, tested at every layer</a:t>
+              <a:t>212 at high attrition risk; stronger teams deliver on time</a:t>
+            </a:r>
+          </a:p>
+        </p:txBody>
+      </p:sp>
+      <p:sp>
+        <p:nvSpPr>
+          <p:cNvPr id="4" name="TextBox 3"/>
+          <p:cNvSpPr txBox="1"/>
+          <p:nvPr/>
+        </p:nvSpPr>
+        <p:spPr>
+          <a:xfrm>
+            <a:off x="548640" y="1417320"/>
+            <a:ext cx="3557016" cy="320040"/>
+          </a:xfrm>
+          <a:prstGeom prst="rect">
+            <a:avLst/>
+          </a:prstGeom>
+          <a:noFill/>
+        </p:spPr>
+        <p:txBody>
+          <a:bodyPr wrap="square" anchor="t" lIns="18288" rIns="18288" tIns="18288" bIns="18288">
+            <a:spAutoFit/>
+          </a:bodyPr>
+          <a:lstStyle/>
+          <a:p>
+            <a:pPr algn="l">
+              <a:spcAft>
+                <a:spcPts val="400"/>
+              </a:spcAft>
+            </a:pPr>
+            <a:r>
+              <a:rPr sz="1300" b="0">
+                <a:solidFill>
+                  <a:srgbClr val="17202A"/>
+                </a:solidFill>
+                <a:latin typeface="Segoe UI Semibold"/>
+              </a:rPr>
+              <a:t>Q5 · Computed attrition risk</a:t>
             </a:r>
           </a:p>
         </p:txBody>
       </p:sp>
       <p:graphicFrame>
         <p:nvGraphicFramePr>
-          <p:cNvPr id="4" name="Table 3"/>
+          <p:cNvPr id="5" name="Chart 4"/>
           <p:cNvGraphicFramePr>
             <a:graphicFrameLocks noGrp="1"/>
           </p:cNvGraphicFramePr>
           <p:nvPr/>
         </p:nvGraphicFramePr>
         <p:xfrm>
-          <a:off x="548640" y="1463040"/>
-          <a:ext cx="5422392" cy="2286000"/>
+          <a:off x="457200" y="1737360"/>
+          <a:ext cx="3648456" cy="1737360"/>
         </p:xfrm>
         <a:graphic>
-          <a:graphicData uri="http://schemas.openxmlformats.org/drawingml/2006/table">
-            <a:tbl>
-              <a:tblPr firstRow="1">
-                <a:tableStyleId>{5C22544A-7EE6-4342-B048-85BDC9FD1C3A}</a:tableStyleId>
-              </a:tblPr>
-              <a:tblGrid>
-                <a:gridCol w="1234440"/>
-                <a:gridCol w="1901952"/>
-                <a:gridCol w="2286000"/>
-              </a:tblGrid>
-              <a:tr h="457200">
-                <a:tc>
-                  <a:txBody>
-                    <a:bodyPr wrap="square"/>
-                    <a:lstStyle/>
-                    <a:p>
-                      <a:pPr algn="l"/>
-                      <a:r>
-                        <a:rPr sz="1100" b="1">
-                          <a:solidFill>
-                            <a:srgbClr val="4B5765"/>
-                          </a:solidFill>
-                          <a:latin typeface="Segoe UI Semibold"/>
-                        </a:rPr>
-                        <a:t/>
-                      </a:r>
-                    </a:p>
-                  </a:txBody>
-                  <a:tcPr marL="82296" marR="82296" marT="36576" marB="36576" anchor="ctr">
-                    <a:solidFill>
-                      <a:srgbClr val="F4F6F8"/>
-                    </a:solidFill>
-                    <a:lnL w="6350">
-                      <a:solidFill>
-                        <a:srgbClr val="D4DAE1"/>
-                      </a:solidFill>
-                    </a:lnL>
-                    <a:lnR w="6350">
-                      <a:solidFill>
-                        <a:srgbClr val="D4DAE1"/>
-                      </a:solidFill>
-                    </a:lnR>
-                    <a:lnT w="6350">
-                      <a:solidFill>
-                        <a:srgbClr val="D4DAE1"/>
-                      </a:solidFill>
-                    </a:lnT>
-                    <a:lnB w="6350">
-                      <a:solidFill>
-                        <a:srgbClr val="D4DAE1"/>
-                      </a:solidFill>
-                    </a:lnB>
-                  </a:tcPr>
-                </a:tc>
-                <a:tc>
-                  <a:txBody>
-                    <a:bodyPr wrap="square"/>
-                    <a:lstStyle/>
-                    <a:p>
-                      <a:pPr algn="l"/>
-                      <a:r>
-                        <a:rPr sz="1100" b="1">
-                          <a:solidFill>
-                            <a:srgbClr val="4B5765"/>
-                          </a:solidFill>
-                          <a:latin typeface="Segoe UI Semibold"/>
-                        </a:rPr>
-                        <a:t>Local (VDI)</a:t>
-                      </a:r>
-                    </a:p>
-                  </a:txBody>
-                  <a:tcPr marL="82296" marR="82296" marT="36576" marB="36576" anchor="ctr">
-                    <a:solidFill>
-                      <a:srgbClr val="F4F6F8"/>
-                    </a:solidFill>
-                    <a:lnL w="6350">
-                      <a:solidFill>
-                        <a:srgbClr val="D4DAE1"/>
-                      </a:solidFill>
-                    </a:lnL>
-                    <a:lnR w="6350">
-                      <a:solidFill>
-                        <a:srgbClr val="D4DAE1"/>
-                      </a:solidFill>
-                    </a:lnR>
-                    <a:lnT w="6350">
-                      <a:solidFill>
-                        <a:srgbClr val="D4DAE1"/>
-                      </a:solidFill>
-                    </a:lnT>
-                    <a:lnB w="6350">
-                      <a:solidFill>
-                        <a:srgbClr val="D4DAE1"/>
-                      </a:solidFill>
-                    </a:lnB>
-                  </a:tcPr>
-                </a:tc>
-                <a:tc>
-                  <a:txBody>
-                    <a:bodyPr wrap="square"/>
-                    <a:lstStyle/>
-                    <a:p>
-                      <a:pPr algn="l"/>
-                      <a:r>
-                        <a:rPr sz="1100" b="1">
-                          <a:solidFill>
-                            <a:srgbClr val="4B5765"/>
-                          </a:solidFill>
-                          <a:latin typeface="Segoe UI Semibold"/>
-                        </a:rPr>
-                        <a:t>AWS (ap-south-1)</a:t>
-                      </a:r>
-                    </a:p>
-                  </a:txBody>
-                  <a:tcPr marL="82296" marR="82296" marT="36576" marB="36576" anchor="ctr">
-                    <a:solidFill>
-                      <a:srgbClr val="F4F6F8"/>
-                    </a:solidFill>
-                    <a:lnL w="6350">
-                      <a:solidFill>
-                        <a:srgbClr val="D4DAE1"/>
-                      </a:solidFill>
-                    </a:lnL>
-                    <a:lnR w="6350">
-                      <a:solidFill>
-                        <a:srgbClr val="D4DAE1"/>
-                      </a:solidFill>
-                    </a:lnR>
-                    <a:lnT w="6350">
-                      <a:solidFill>
-                        <a:srgbClr val="D4DAE1"/>
-                      </a:solidFill>
-                    </a:lnT>
-                    <a:lnB w="6350">
-                      <a:solidFill>
-                        <a:srgbClr val="D4DAE1"/>
-                      </a:solidFill>
-                    </a:lnB>
-                  </a:tcPr>
-                </a:tc>
-              </a:tr>
-              <a:tr h="457200">
-                <a:tc>
-                  <a:txBody>
-                    <a:bodyPr wrap="square"/>
-                    <a:lstStyle/>
-                    <a:p>
-                      <a:pPr algn="l"/>
-                      <a:r>
-                        <a:rPr sz="1200" b="0">
-                          <a:solidFill>
-                            <a:srgbClr val="17202A"/>
-                          </a:solidFill>
-                          <a:latin typeface="Segoe UI"/>
-                        </a:rPr>
-                        <a:t>Runner</a:t>
-                      </a:r>
-                    </a:p>
-                  </a:txBody>
-                  <a:tcPr marL="82296" marR="82296" marT="36576" marB="36576" anchor="ctr">
-                    <a:solidFill>
-                      <a:srgbClr val="FFFFFF"/>
-                    </a:solidFill>
-                    <a:lnL w="6350">
-                      <a:solidFill>
-                        <a:srgbClr val="D4DAE1"/>
-                      </a:solidFill>
-                    </a:lnL>
-                    <a:lnR w="6350">
-                      <a:solidFill>
-                        <a:srgbClr val="D4DAE1"/>
-                      </a:solidFill>
-                    </a:lnR>
-                    <a:lnT w="6350">
-                      <a:solidFill>
-                        <a:srgbClr val="D4DAE1"/>
-                      </a:solidFill>
-                    </a:lnT>
-                    <a:lnB w="6350">
-                      <a:solidFill>
-                        <a:srgbClr val="D4DAE1"/>
-                      </a:solidFill>
-                    </a:lnB>
-                  </a:tcPr>
-                </a:tc>
-                <a:tc>
-                  <a:txBody>
-                    <a:bodyPr wrap="square"/>
-                    <a:lstStyle/>
-                    <a:p>
-                      <a:pPr algn="l"/>
-                      <a:r>
-                        <a:rPr sz="1200" b="0">
-                          <a:solidFill>
-                            <a:srgbClr val="17202A"/>
-                          </a:solidFill>
-                          <a:latin typeface="Segoe UI"/>
-                        </a:rPr>
-                        <a:t>python job.py</a:t>
-                      </a:r>
-                    </a:p>
-                  </a:txBody>
-                  <a:tcPr marL="82296" marR="82296" marT="36576" marB="36576" anchor="ctr">
-                    <a:solidFill>
-                      <a:srgbClr val="FFFFFF"/>
-                    </a:solidFill>
-                    <a:lnL w="6350">
-                      <a:solidFill>
-                        <a:srgbClr val="D4DAE1"/>
-                      </a:solidFill>
-                    </a:lnL>
-                    <a:lnR w="6350">
-                      <a:solidFill>
-                        <a:srgbClr val="D4DAE1"/>
-                      </a:solidFill>
-                    </a:lnR>
-                    <a:lnT w="6350">
-                      <a:solidFill>
-                        <a:srgbClr val="D4DAE1"/>
-                      </a:solidFill>
-                    </a:lnT>
-                    <a:lnB w="6350">
-                      <a:solidFill>
-                        <a:srgbClr val="D4DAE1"/>
-                      </a:solidFill>
-                    </a:lnB>
-                  </a:tcPr>
-                </a:tc>
-                <a:tc>
-                  <a:txBody>
-                    <a:bodyPr wrap="square"/>
-                    <a:lstStyle/>
-                    <a:p>
-                      <a:pPr algn="l"/>
-                      <a:r>
-                        <a:rPr sz="1200" b="0">
-                          <a:solidFill>
-                            <a:srgbClr val="17202A"/>
-                          </a:solidFill>
-                          <a:latin typeface="Segoe UI"/>
-                        </a:rPr>
-                        <a:t>Kubernetes Job on EKS</a:t>
-                      </a:r>
-                    </a:p>
-                  </a:txBody>
-                  <a:tcPr marL="82296" marR="82296" marT="36576" marB="36576" anchor="ctr">
-                    <a:solidFill>
-                      <a:srgbClr val="FFFFFF"/>
-                    </a:solidFill>
-                    <a:lnL w="6350">
-                      <a:solidFill>
-                        <a:srgbClr val="D4DAE1"/>
-                      </a:solidFill>
-                    </a:lnL>
-                    <a:lnR w="6350">
-                      <a:solidFill>
-                        <a:srgbClr val="D4DAE1"/>
-                      </a:solidFill>
-                    </a:lnR>
-                    <a:lnT w="6350">
-                      <a:solidFill>
-                        <a:srgbClr val="D4DAE1"/>
-                      </a:solidFill>
-                    </a:lnT>
-                    <a:lnB w="6350">
-                      <a:solidFill>
-                        <a:srgbClr val="D4DAE1"/>
-                      </a:solidFill>
-                    </a:lnB>
-                  </a:tcPr>
-                </a:tc>
-              </a:tr>
-              <a:tr h="457200">
-                <a:tc>
-                  <a:txBody>
-                    <a:bodyPr wrap="square"/>
-                    <a:lstStyle/>
-                    <a:p>
-                      <a:pPr algn="l"/>
-                      <a:r>
-                        <a:rPr sz="1200" b="0">
-                          <a:solidFill>
-                            <a:srgbClr val="17202A"/>
-                          </a:solidFill>
-                          <a:latin typeface="Segoe UI"/>
-                        </a:rPr>
-                        <a:t>HR source</a:t>
-                      </a:r>
-                    </a:p>
-                  </a:txBody>
-                  <a:tcPr marL="82296" marR="82296" marT="36576" marB="36576" anchor="ctr">
-                    <a:solidFill>
-                      <a:srgbClr val="FFFFFF"/>
-                    </a:solidFill>
-                    <a:lnL w="6350">
-                      <a:solidFill>
-                        <a:srgbClr val="D4DAE1"/>
-                      </a:solidFill>
-                    </a:lnL>
-                    <a:lnR w="6350">
-                      <a:solidFill>
-                        <a:srgbClr val="D4DAE1"/>
-                      </a:solidFill>
-                    </a:lnR>
-                    <a:lnT w="6350">
-                      <a:solidFill>
-                        <a:srgbClr val="D4DAE1"/>
-                      </a:solidFill>
-                    </a:lnT>
-                    <a:lnB w="6350">
-                      <a:solidFill>
-                        <a:srgbClr val="D4DAE1"/>
-                      </a:solidFill>
-                    </a:lnB>
-                  </a:tcPr>
-                </a:tc>
-                <a:tc>
-                  <a:txBody>
-                    <a:bodyPr wrap="square"/>
-                    <a:lstStyle/>
-                    <a:p>
-                      <a:pPr algn="l"/>
-                      <a:r>
-                        <a:rPr sz="1200" b="0">
-                          <a:solidFill>
-                            <a:srgbClr val="17202A"/>
-                          </a:solidFill>
-                          <a:latin typeface="Segoe UI"/>
-                        </a:rPr>
-                        <a:t>PostgreSQL 18</a:t>
-                      </a:r>
-                    </a:p>
-                  </a:txBody>
-                  <a:tcPr marL="82296" marR="82296" marT="36576" marB="36576" anchor="ctr">
-                    <a:solidFill>
-                      <a:srgbClr val="FFFFFF"/>
-                    </a:solidFill>
-                    <a:lnL w="6350">
-                      <a:solidFill>
-                        <a:srgbClr val="D4DAE1"/>
-                      </a:solidFill>
-                    </a:lnL>
-                    <a:lnR w="6350">
-                      <a:solidFill>
-                        <a:srgbClr val="D4DAE1"/>
-                      </a:solidFill>
-                    </a:lnR>
-                    <a:lnT w="6350">
-                      <a:solidFill>
-                        <a:srgbClr val="D4DAE1"/>
-                      </a:solidFill>
-                    </a:lnT>
-                    <a:lnB w="6350">
-                      <a:solidFill>
-                        <a:srgbClr val="D4DAE1"/>
-                      </a:solidFill>
-                    </a:lnB>
-                  </a:tcPr>
-                </a:tc>
-                <a:tc>
-                  <a:txBody>
-                    <a:bodyPr wrap="square"/>
-                    <a:lstStyle/>
-                    <a:p>
-                      <a:pPr algn="l"/>
-                      <a:r>
-                        <a:rPr sz="1200" b="0">
-                          <a:solidFill>
-                            <a:srgbClr val="17202A"/>
-                          </a:solidFill>
-                          <a:latin typeface="Segoe UI"/>
-                        </a:rPr>
-                        <a:t>Aurora PostgreSQL</a:t>
-                      </a:r>
-                    </a:p>
-                  </a:txBody>
-                  <a:tcPr marL="82296" marR="82296" marT="36576" marB="36576" anchor="ctr">
-                    <a:solidFill>
-                      <a:srgbClr val="FFFFFF"/>
-                    </a:solidFill>
-                    <a:lnL w="6350">
-                      <a:solidFill>
-                        <a:srgbClr val="D4DAE1"/>
-                      </a:solidFill>
-                    </a:lnL>
-                    <a:lnR w="6350">
-                      <a:solidFill>
-                        <a:srgbClr val="D4DAE1"/>
-                      </a:solidFill>
-                    </a:lnR>
-                    <a:lnT w="6350">
-                      <a:solidFill>
-                        <a:srgbClr val="D4DAE1"/>
-                      </a:solidFill>
-                    </a:lnT>
-                    <a:lnB w="6350">
-                      <a:solidFill>
-                        <a:srgbClr val="D4DAE1"/>
-                      </a:solidFill>
-                    </a:lnB>
-                  </a:tcPr>
-                </a:tc>
-              </a:tr>
-              <a:tr h="457200">
-                <a:tc>
-                  <a:txBody>
-                    <a:bodyPr wrap="square"/>
-                    <a:lstStyle/>
-                    <a:p>
-                      <a:pPr algn="l"/>
-                      <a:r>
-                        <a:rPr sz="1200" b="0">
-                          <a:solidFill>
-                            <a:srgbClr val="17202A"/>
-                          </a:solidFill>
-                          <a:latin typeface="Segoe UI"/>
-                        </a:rPr>
-                        <a:t>Data lake</a:t>
-                      </a:r>
-                    </a:p>
-                  </a:txBody>
-                  <a:tcPr marL="82296" marR="82296" marT="36576" marB="36576" anchor="ctr">
-                    <a:solidFill>
-                      <a:srgbClr val="FFFFFF"/>
-                    </a:solidFill>
-                    <a:lnL w="6350">
-                      <a:solidFill>
-                        <a:srgbClr val="D4DAE1"/>
-                      </a:solidFill>
-                    </a:lnL>
-                    <a:lnR w="6350">
-                      <a:solidFill>
-                        <a:srgbClr val="D4DAE1"/>
-                      </a:solidFill>
-                    </a:lnR>
-                    <a:lnT w="6350">
-                      <a:solidFill>
-                        <a:srgbClr val="D4DAE1"/>
-                      </a:solidFill>
-                    </a:lnT>
-                    <a:lnB w="6350">
-                      <a:solidFill>
-                        <a:srgbClr val="D4DAE1"/>
-                      </a:solidFill>
-                    </a:lnB>
-                  </a:tcPr>
-                </a:tc>
-                <a:tc>
-                  <a:txBody>
-                    <a:bodyPr wrap="square"/>
-                    <a:lstStyle/>
-                    <a:p>
-                      <a:pPr algn="l"/>
-                      <a:r>
-                        <a:rPr sz="1200" b="0">
-                          <a:solidFill>
-                            <a:srgbClr val="17202A"/>
-                          </a:solidFill>
-                          <a:latin typeface="Segoe UI"/>
-                        </a:rPr>
-                        <a:t>LocalStack S3</a:t>
-                      </a:r>
-                    </a:p>
-                  </a:txBody>
-                  <a:tcPr marL="82296" marR="82296" marT="36576" marB="36576" anchor="ctr">
-                    <a:solidFill>
-                      <a:srgbClr val="FFFFFF"/>
-                    </a:solidFill>
-                    <a:lnL w="6350">
-                      <a:solidFill>
-                        <a:srgbClr val="D4DAE1"/>
-                      </a:solidFill>
-                    </a:lnL>
-                    <a:lnR w="6350">
-                      <a:solidFill>
-                        <a:srgbClr val="D4DAE1"/>
-                      </a:solidFill>
-                    </a:lnR>
-                    <a:lnT w="6350">
-                      <a:solidFill>
-                        <a:srgbClr val="D4DAE1"/>
-                      </a:solidFill>
-                    </a:lnT>
-                    <a:lnB w="6350">
-                      <a:solidFill>
-                        <a:srgbClr val="D4DAE1"/>
-                      </a:solidFill>
-                    </a:lnB>
-                  </a:tcPr>
-                </a:tc>
-                <a:tc>
-                  <a:txBody>
-                    <a:bodyPr wrap="square"/>
-                    <a:lstStyle/>
-                    <a:p>
-                      <a:pPr algn="l"/>
-                      <a:r>
-                        <a:rPr sz="1200" b="0">
-                          <a:solidFill>
-                            <a:srgbClr val="17202A"/>
-                          </a:solidFill>
-                          <a:latin typeface="Segoe UI"/>
-                        </a:rPr>
-                        <a:t>Amazon S3</a:t>
-                      </a:r>
-                    </a:p>
-                  </a:txBody>
-                  <a:tcPr marL="82296" marR="82296" marT="36576" marB="36576" anchor="ctr">
-                    <a:solidFill>
-                      <a:srgbClr val="FFFFFF"/>
-                    </a:solidFill>
-                    <a:lnL w="6350">
-                      <a:solidFill>
-                        <a:srgbClr val="D4DAE1"/>
-                      </a:solidFill>
-                    </a:lnL>
-                    <a:lnR w="6350">
-                      <a:solidFill>
-                        <a:srgbClr val="D4DAE1"/>
-                      </a:solidFill>
-                    </a:lnR>
-                    <a:lnT w="6350">
-                      <a:solidFill>
-                        <a:srgbClr val="D4DAE1"/>
-                      </a:solidFill>
-                    </a:lnT>
-                    <a:lnB w="6350">
-                      <a:solidFill>
-                        <a:srgbClr val="D4DAE1"/>
-                      </a:solidFill>
-                    </a:lnB>
-                  </a:tcPr>
-                </a:tc>
-              </a:tr>
-              <a:tr h="457200">
-                <a:tc>
-                  <a:txBody>
-                    <a:bodyPr wrap="square"/>
-                    <a:lstStyle/>
-                    <a:p>
-                      <a:pPr algn="l"/>
-                      <a:r>
-                        <a:rPr sz="1200" b="0">
-                          <a:solidFill>
-                            <a:srgbClr val="17202A"/>
-                          </a:solidFill>
-                          <a:latin typeface="Segoe UI"/>
-                        </a:rPr>
-                        <a:t>Dashboard</a:t>
-                      </a:r>
-                    </a:p>
-                  </a:txBody>
-                  <a:tcPr marL="82296" marR="82296" marT="36576" marB="36576" anchor="ctr">
-                    <a:solidFill>
-                      <a:srgbClr val="FFFFFF"/>
-                    </a:solidFill>
-                    <a:lnL w="6350">
-                      <a:solidFill>
-                        <a:srgbClr val="D4DAE1"/>
-                      </a:solidFill>
-                    </a:lnL>
-                    <a:lnR w="6350">
-                      <a:solidFill>
-                        <a:srgbClr val="D4DAE1"/>
-                      </a:solidFill>
-                    </a:lnR>
-                    <a:lnT w="6350">
-                      <a:solidFill>
-                        <a:srgbClr val="D4DAE1"/>
-                      </a:solidFill>
-                    </a:lnT>
-                    <a:lnB w="6350">
-                      <a:solidFill>
-                        <a:srgbClr val="D4DAE1"/>
-                      </a:solidFill>
-                    </a:lnB>
-                  </a:tcPr>
-                </a:tc>
-                <a:tc>
-                  <a:txBody>
-                    <a:bodyPr wrap="square"/>
-                    <a:lstStyle/>
-                    <a:p>
-                      <a:pPr algn="l"/>
-                      <a:r>
-                        <a:rPr sz="1200" b="0">
-                          <a:solidFill>
-                            <a:srgbClr val="17202A"/>
-                          </a:solidFill>
-                          <a:latin typeface="Segoe UI"/>
-                        </a:rPr>
-                        <a:t>localhost:8501</a:t>
-                      </a:r>
-                    </a:p>
-                  </a:txBody>
-                  <a:tcPr marL="82296" marR="82296" marT="36576" marB="36576" anchor="ctr">
-                    <a:solidFill>
-                      <a:srgbClr val="FFFFFF"/>
-                    </a:solidFill>
-                    <a:lnL w="6350">
-                      <a:solidFill>
-                        <a:srgbClr val="D4DAE1"/>
-                      </a:solidFill>
-                    </a:lnL>
-                    <a:lnR w="6350">
-                      <a:solidFill>
-                        <a:srgbClr val="D4DAE1"/>
-                      </a:solidFill>
-                    </a:lnR>
-                    <a:lnT w="6350">
-                      <a:solidFill>
-                        <a:srgbClr val="D4DAE1"/>
-                      </a:solidFill>
-                    </a:lnT>
-                    <a:lnB w="6350">
-                      <a:solidFill>
-                        <a:srgbClr val="D4DAE1"/>
-                      </a:solidFill>
-                    </a:lnB>
-                  </a:tcPr>
-                </a:tc>
-                <a:tc>
-                  <a:txBody>
-                    <a:bodyPr wrap="square"/>
-                    <a:lstStyle/>
-                    <a:p>
-                      <a:pPr algn="l"/>
-                      <a:r>
-                        <a:rPr sz="1200" b="0">
-                          <a:solidFill>
-                            <a:srgbClr val="17202A"/>
-                          </a:solidFill>
-                          <a:latin typeface="Segoe UI"/>
-                        </a:rPr>
-                        <a:t>EKS + load balancer</a:t>
-                      </a:r>
-                    </a:p>
-                  </a:txBody>
-                  <a:tcPr marL="82296" marR="82296" marT="36576" marB="36576" anchor="ctr">
-                    <a:solidFill>
-                      <a:srgbClr val="FFFFFF"/>
-                    </a:solidFill>
-                    <a:lnL w="6350">
-                      <a:solidFill>
-                        <a:srgbClr val="D4DAE1"/>
-                      </a:solidFill>
-                    </a:lnL>
-                    <a:lnR w="6350">
-                      <a:solidFill>
-                        <a:srgbClr val="D4DAE1"/>
-                      </a:solidFill>
-                    </a:lnR>
-                    <a:lnT w="6350">
-                      <a:solidFill>
-                        <a:srgbClr val="D4DAE1"/>
-                      </a:solidFill>
-                    </a:lnT>
-                    <a:lnB w="6350">
-                      <a:solidFill>
-                        <a:srgbClr val="D4DAE1"/>
-                      </a:solidFill>
-                    </a:lnB>
-                  </a:tcPr>
-                </a:tc>
-              </a:tr>
-            </a:tbl>
+          <a:graphicData uri="http://schemas.openxmlformats.org/drawingml/2006/chart">
+            <c:chart xmlns:c="http://schemas.openxmlformats.org/drawingml/2006/chart" r:id="rId3"/>
           </a:graphicData>
         </a:graphic>
       </p:graphicFrame>
       <p:sp>
         <p:nvSpPr>
-          <p:cNvPr id="5" name="Rounded Rectangle 4"/>
-          <p:cNvSpPr/>
-          <p:nvPr/>
-        </p:nvSpPr>
-        <p:spPr>
-          <a:xfrm>
-            <a:off x="548640" y="3931920"/>
-            <a:ext cx="5422392" cy="914400"/>
-          </a:xfrm>
-          <a:prstGeom prst="roundRect">
-            <a:avLst>
-              <a:gd name="adj" fmla="val 6000"/>
-            </a:avLst>
-          </a:prstGeom>
-          <a:solidFill>
-            <a:srgbClr val="DFF0E5"/>
-          </a:solidFill>
-          <a:ln>
-            <a:noFill/>
-          </a:ln>
-        </p:spPr>
-        <p:txBody>
-          <a:bodyPr rtlCol="0" anchor="ctr"/>
-          <a:lstStyle/>
-          <a:p/>
-        </p:txBody>
-      </p:sp>
-      <p:sp>
-        <p:nvSpPr>
           <p:cNvPr id="6" name="TextBox 5"/>
           <p:cNvSpPr txBox="1"/>
           <p:nvPr/>
         </p:nvSpPr>
         <p:spPr>
           <a:xfrm>
-            <a:off x="731520" y="4023360"/>
-            <a:ext cx="5120640" cy="777240"/>
+            <a:off x="548640" y="3657600"/>
+            <a:ext cx="3557016" cy="2468880"/>
           </a:xfrm>
           <a:prstGeom prst="rect">
             <a:avLst/>
@@ -19549,33 +20966,49 @@
           <a:p>
             <a:pPr algn="l">
               <a:spcAft>
-                <a:spcPts val="300"/>
-              </a:spcAft>
-            </a:pPr>
-            <a:r>
-              <a:rPr sz="1400" b="0">
-                <a:solidFill>
-                  <a:srgbClr val="2D7449"/>
+                <a:spcPts val="800"/>
+              </a:spcAft>
+            </a:pPr>
+            <a:r>
+              <a:rPr sz="1200" b="0">
+                <a:solidFill>
+                  <a:srgbClr val="4B5765"/>
+                </a:solidFill>
+                <a:latin typeface="Segoe UI"/>
+              </a:rPr>
+              <a:t>Managers flagged 311 as high risk; only 145 also show performance warning signs.</a:t>
+            </a:r>
+          </a:p>
+          <a:p>
+            <a:pPr algn="l">
+              <a:spcAft>
+                <a:spcPts val="800"/>
+              </a:spcAft>
+            </a:pPr>
+            <a:r>
+              <a:rPr sz="1200" b="0">
+                <a:solidFill>
+                  <a:srgbClr val="17202A"/>
                 </a:solidFill>
                 <a:latin typeface="Segoe UI Semibold"/>
               </a:rPr>
-              <a:t>Cloud run: 60 s, succeeded</a:t>
-            </a:r>
-          </a:p>
-          <a:p>
-            <a:pPr algn="l">
-              <a:spcAft>
-                <a:spcPts val="300"/>
-              </a:spcAft>
-            </a:pPr>
-            <a:r>
-              <a:rPr sz="1150" b="0">
-                <a:solidFill>
-                  <a:srgbClr val="4B5765"/>
+              <a:t>67 more score high without a manager flag.</a:t>
+            </a:r>
+          </a:p>
+          <a:p>
+            <a:pPr algn="l">
+              <a:spcAft>
+                <a:spcPts val="800"/>
+              </a:spcAft>
+            </a:pPr>
+            <a:r>
+              <a:rPr sz="1050" b="0">
+                <a:solidFill>
+                  <a:srgbClr val="8A94A0"/>
                 </a:solidFill>
                 <a:latin typeface="Segoe UI"/>
               </a:rPr>
-              <a:t>Identical answers: 3.41 avg · 465 gaps · 124 ready · 212 high risk</a:t>
+              <a:t>Score: rating fell +2 · rating ≤ 2 +2 · negative comment +1 · no learning in 180 days +1 · manager flag +2 / +1. High = 5 or more.</a:t>
             </a:r>
           </a:p>
         </p:txBody>
@@ -19588,8 +21021,8 @@
         </p:nvSpPr>
         <p:spPr>
           <a:xfrm>
-            <a:off x="548640" y="5029200"/>
-            <a:ext cx="5422392" cy="1097280"/>
+            <a:off x="4315968" y="1417320"/>
+            <a:ext cx="3557016" cy="320040"/>
           </a:xfrm>
           <a:prstGeom prst="rect">
             <a:avLst/>
@@ -19608,27 +21041,45 @@
               </a:spcAft>
             </a:pPr>
             <a:r>
-              <a:rPr sz="1150" b="0">
-                <a:solidFill>
-                  <a:srgbClr val="4B5765"/>
-                </a:solidFill>
-                <a:latin typeface="Segoe UI"/>
-              </a:rPr>
-              <a:t>The first cloud run caught a real bug: numpy 2.5 needs Python 3.12, the cluster image runs 3.11. Pinned numpy 2.4.6 and checked every module on 3.11.</a:t>
-            </a:r>
-          </a:p>
-        </p:txBody>
-      </p:sp>
-      <p:sp>
-        <p:nvSpPr>
-          <p:cNvPr id="8" name="TextBox 7"/>
+              <a:rPr sz="1300" b="0">
+                <a:solidFill>
+                  <a:srgbClr val="17202A"/>
+                </a:solidFill>
+                <a:latin typeface="Segoe UI Semibold"/>
+              </a:rPr>
+              <a:t>Q6 · % high performers by delivery</a:t>
+            </a:r>
+          </a:p>
+        </p:txBody>
+      </p:sp>
+      <p:graphicFrame>
+        <p:nvGraphicFramePr>
+          <p:cNvPr id="8" name="Chart 7"/>
+          <p:cNvGraphicFramePr>
+            <a:graphicFrameLocks noGrp="1"/>
+          </p:cNvGraphicFramePr>
+          <p:nvPr/>
+        </p:nvGraphicFramePr>
+        <p:xfrm>
+          <a:off x="4224528" y="1737360"/>
+          <a:ext cx="3648456" cy="1737360"/>
+        </p:xfrm>
+        <a:graphic>
+          <a:graphicData uri="http://schemas.openxmlformats.org/drawingml/2006/chart">
+            <c:chart xmlns:c="http://schemas.openxmlformats.org/drawingml/2006/chart" r:id="rId4"/>
+          </a:graphicData>
+        </a:graphic>
+      </p:graphicFrame>
+      <p:sp>
+        <p:nvSpPr>
+          <p:cNvPr id="9" name="TextBox 8"/>
           <p:cNvSpPr txBox="1"/>
           <p:nvPr/>
         </p:nvSpPr>
         <p:spPr>
           <a:xfrm>
-            <a:off x="6217920" y="1444752"/>
-            <a:ext cx="5422392" cy="365760"/>
+            <a:off x="4315968" y="3703320"/>
+            <a:ext cx="1143000" cy="411480"/>
           </a:xfrm>
           <a:prstGeom prst="rect">
             <a:avLst/>
@@ -19647,27 +21098,27 @@
               </a:spcAft>
             </a:pPr>
             <a:r>
-              <a:rPr sz="1400" b="0">
+              <a:rPr sz="2000" b="0">
                 <a:solidFill>
                   <a:srgbClr val="17202A"/>
                 </a:solidFill>
                 <a:latin typeface="Segoe UI Semibold"/>
               </a:rPr>
-              <a:t>Stock EKS gaps, closed without editing infra/</a:t>
-            </a:r>
-          </a:p>
-        </p:txBody>
-      </p:sp>
-      <p:sp>
-        <p:nvSpPr>
-          <p:cNvPr id="9" name="TextBox 8"/>
+              <a:t>+0.24</a:t>
+            </a:r>
+          </a:p>
+        </p:txBody>
+      </p:sp>
+      <p:sp>
+        <p:nvSpPr>
+          <p:cNvPr id="10" name="TextBox 9"/>
           <p:cNvSpPr txBox="1"/>
           <p:nvPr/>
         </p:nvSpPr>
         <p:spPr>
           <a:xfrm>
-            <a:off x="6217920" y="1874519"/>
-            <a:ext cx="2468880" cy="411480"/>
+            <a:off x="4315968" y="4160520"/>
+            <a:ext cx="1143000" cy="548640"/>
           </a:xfrm>
           <a:prstGeom prst="rect">
             <a:avLst/>
@@ -19682,31 +21133,47 @@
           <a:p>
             <a:pPr algn="l">
               <a:spcAft>
-                <a:spcPts val="400"/>
-              </a:spcAft>
-            </a:pPr>
-            <a:r>
-              <a:rPr sz="1200" b="0">
+                <a:spcPts val="0"/>
+              </a:spcAft>
+            </a:pPr>
+            <a:r>
+              <a:rPr sz="950" b="0">
                 <a:solidFill>
                   <a:srgbClr val="4B5765"/>
                 </a:solidFill>
                 <a:latin typeface="Segoe UI"/>
               </a:rPr>
-              <a:t>Only job.py shipped</a:t>
-            </a:r>
-          </a:p>
-        </p:txBody>
-      </p:sp>
-      <p:sp>
-        <p:nvSpPr>
-          <p:cNvPr id="10" name="TextBox 9"/>
+              <a:t>rating vs</a:t>
+            </a:r>
+          </a:p>
+          <a:p>
+            <a:pPr algn="l">
+              <a:spcAft>
+                <a:spcPts val="0"/>
+              </a:spcAft>
+            </a:pPr>
+            <a:r>
+              <a:rPr sz="950" b="0">
+                <a:solidFill>
+                  <a:srgbClr val="4B5765"/>
+                </a:solidFill>
+                <a:latin typeface="Segoe UI"/>
+              </a:rPr>
+              <a:t>project score</a:t>
+            </a:r>
+          </a:p>
+        </p:txBody>
+      </p:sp>
+      <p:sp>
+        <p:nvSpPr>
+          <p:cNvPr id="11" name="TextBox 10"/>
           <p:cNvSpPr txBox="1"/>
           <p:nvPr/>
         </p:nvSpPr>
         <p:spPr>
           <a:xfrm>
-            <a:off x="8641080" y="1874519"/>
-            <a:ext cx="3017520" cy="411480"/>
+            <a:off x="5504688" y="3703320"/>
+            <a:ext cx="1143000" cy="411480"/>
           </a:xfrm>
           <a:prstGeom prst="rect">
             <a:avLst/>
@@ -19725,27 +21192,27 @@
               </a:spcAft>
             </a:pPr>
             <a:r>
-              <a:rPr sz="1200" b="0">
+              <a:rPr sz="2000" b="0">
                 <a:solidFill>
                   <a:srgbClr val="17202A"/>
                 </a:solidFill>
-                <a:latin typeface="Segoe UI"/>
-              </a:rPr>
-              <a:t>→  all modules sent as a ConfigMap</a:t>
-            </a:r>
-          </a:p>
-        </p:txBody>
-      </p:sp>
-      <p:sp>
-        <p:nvSpPr>
-          <p:cNvPr id="11" name="TextBox 10"/>
+                <a:latin typeface="Segoe UI Semibold"/>
+              </a:rPr>
+              <a:t>+0.38</a:t>
+            </a:r>
+          </a:p>
+        </p:txBody>
+      </p:sp>
+      <p:sp>
+        <p:nvSpPr>
+          <p:cNvPr id="12" name="TextBox 11"/>
           <p:cNvSpPr txBox="1"/>
           <p:nvPr/>
         </p:nvSpPr>
         <p:spPr>
           <a:xfrm>
-            <a:off x="6217920" y="2350008"/>
-            <a:ext cx="2468880" cy="411480"/>
+            <a:off x="5504688" y="4160520"/>
+            <a:ext cx="1143000" cy="548640"/>
           </a:xfrm>
           <a:prstGeom prst="rect">
             <a:avLst/>
@@ -19760,31 +21227,47 @@
           <a:p>
             <a:pPr algn="l">
               <a:spcAft>
-                <a:spcPts val="400"/>
-              </a:spcAft>
-            </a:pPr>
-            <a:r>
-              <a:rPr sz="1200" b="0">
+                <a:spcPts val="0"/>
+              </a:spcAft>
+            </a:pPr>
+            <a:r>
+              <a:rPr sz="950" b="0">
                 <a:solidFill>
                   <a:srgbClr val="4B5765"/>
                 </a:solidFill>
                 <a:latin typeface="Segoe UI"/>
               </a:rPr>
-              <a:t>No settings or password</a:t>
-            </a:r>
-          </a:p>
-        </p:txBody>
-      </p:sp>
-      <p:sp>
-        <p:nvSpPr>
-          <p:cNvPr id="12" name="TextBox 11"/>
+              <a:t>high performers</a:t>
+            </a:r>
+          </a:p>
+          <a:p>
+            <a:pPr algn="l">
+              <a:spcAft>
+                <a:spcPts val="0"/>
+              </a:spcAft>
+            </a:pPr>
+            <a:r>
+              <a:rPr sz="950" b="0">
+                <a:solidFill>
+                  <a:srgbClr val="4B5765"/>
+                </a:solidFill>
+                <a:latin typeface="Segoe UI"/>
+              </a:rPr>
+              <a:t>vs on time</a:t>
+            </a:r>
+          </a:p>
+        </p:txBody>
+      </p:sp>
+      <p:sp>
+        <p:nvSpPr>
+          <p:cNvPr id="13" name="TextBox 12"/>
           <p:cNvSpPr txBox="1"/>
           <p:nvPr/>
         </p:nvSpPr>
         <p:spPr>
           <a:xfrm>
-            <a:off x="8641080" y="2350008"/>
-            <a:ext cx="3017520" cy="411480"/>
+            <a:off x="6693408" y="3703320"/>
+            <a:ext cx="1143000" cy="411480"/>
           </a:xfrm>
           <a:prstGeom prst="rect">
             <a:avLst/>
@@ -19803,27 +21286,27 @@
               </a:spcAft>
             </a:pPr>
             <a:r>
-              <a:rPr sz="1200" b="0">
+              <a:rPr sz="2000" b="0">
                 <a:solidFill>
                   <a:srgbClr val="17202A"/>
                 </a:solidFill>
-                <a:latin typeface="Segoe UI"/>
-              </a:rPr>
-              <a:t>→  env vars + Kubernetes Secret</a:t>
-            </a:r>
-          </a:p>
-        </p:txBody>
-      </p:sp>
-      <p:sp>
-        <p:nvSpPr>
-          <p:cNvPr id="13" name="TextBox 12"/>
+                <a:latin typeface="Segoe UI Semibold"/>
+              </a:rPr>
+              <a:t>-0.23</a:t>
+            </a:r>
+          </a:p>
+        </p:txBody>
+      </p:sp>
+      <p:sp>
+        <p:nvSpPr>
+          <p:cNvPr id="14" name="TextBox 13"/>
           <p:cNvSpPr txBox="1"/>
           <p:nvPr/>
         </p:nvSpPr>
         <p:spPr>
           <a:xfrm>
-            <a:off x="6217920" y="2825496"/>
-            <a:ext cx="2468880" cy="411480"/>
+            <a:off x="6693408" y="4160520"/>
+            <a:ext cx="1143000" cy="548640"/>
           </a:xfrm>
           <a:prstGeom prst="rect">
             <a:avLst/>
@@ -19838,31 +21321,47 @@
           <a:p>
             <a:pPr algn="l">
               <a:spcAft>
-                <a:spcPts val="400"/>
-              </a:spcAft>
-            </a:pPr>
-            <a:r>
-              <a:rPr sz="1200" b="0">
+                <a:spcPts val="0"/>
+              </a:spcAft>
+            </a:pPr>
+            <a:r>
+              <a:rPr sz="950" b="0">
                 <a:solidFill>
                   <a:srgbClr val="4B5765"/>
                 </a:solidFill>
                 <a:latin typeface="Segoe UI"/>
               </a:rPr>
-              <a:t>No S3 permission</a:t>
-            </a:r>
-          </a:p>
-        </p:txBody>
-      </p:sp>
-      <p:sp>
-        <p:nvSpPr>
-          <p:cNvPr id="14" name="TextBox 13"/>
+              <a:t>skill gaps vs</a:t>
+            </a:r>
+          </a:p>
+          <a:p>
+            <a:pPr algn="l">
+              <a:spcAft>
+                <a:spcPts val="0"/>
+              </a:spcAft>
+            </a:pPr>
+            <a:r>
+              <a:rPr sz="950" b="0">
+                <a:solidFill>
+                  <a:srgbClr val="4B5765"/>
+                </a:solidFill>
+                <a:latin typeface="Segoe UI"/>
+              </a:rPr>
+              <a:t>project score</a:t>
+            </a:r>
+          </a:p>
+        </p:txBody>
+      </p:sp>
+      <p:sp>
+        <p:nvSpPr>
+          <p:cNvPr id="15" name="TextBox 14"/>
           <p:cNvSpPr txBox="1"/>
           <p:nvPr/>
         </p:nvSpPr>
         <p:spPr>
           <a:xfrm>
-            <a:off x="8641080" y="2825496"/>
-            <a:ext cx="3017520" cy="411480"/>
+            <a:off x="4315968" y="4983480"/>
+            <a:ext cx="3557016" cy="1097280"/>
           </a:xfrm>
           <a:prstGeom prst="rect">
             <a:avLst/>
@@ -19881,27 +21380,27 @@
               </a:spcAft>
             </a:pPr>
             <a:r>
-              <a:rPr sz="1200" b="0">
-                <a:solidFill>
-                  <a:srgbClr val="17202A"/>
+              <a:rPr sz="1100" b="0">
+                <a:solidFill>
+                  <a:srgbClr val="4B5765"/>
                 </a:solidFill>
                 <a:latin typeface="Segoe UI"/>
               </a:rPr>
-              <a:t>→  node-role policy, lake bucket only</a:t>
-            </a:r>
-          </a:p>
-        </p:txBody>
-      </p:sp>
-      <p:sp>
-        <p:nvSpPr>
-          <p:cNvPr id="15" name="TextBox 14"/>
+              <a:t>Team level, because projects belong to teams. Based on 27 teams: indicative, not proof.</a:t>
+            </a:r>
+          </a:p>
+        </p:txBody>
+      </p:sp>
+      <p:sp>
+        <p:nvSpPr>
+          <p:cNvPr id="16" name="TextBox 15"/>
           <p:cNvSpPr txBox="1"/>
           <p:nvPr/>
         </p:nvSpPr>
         <p:spPr>
           <a:xfrm>
-            <a:off x="6217920" y="3300984"/>
-            <a:ext cx="2468880" cy="411480"/>
+            <a:off x="8083296" y="1417320"/>
+            <a:ext cx="3557016" cy="320040"/>
           </a:xfrm>
           <a:prstGeom prst="rect">
             <a:avLst/>
@@ -19920,27 +21419,45 @@
               </a:spcAft>
             </a:pPr>
             <a:r>
-              <a:rPr sz="1200" b="0">
-                <a:solidFill>
-                  <a:srgbClr val="4B5765"/>
-                </a:solidFill>
-                <a:latin typeface="Segoe UI"/>
-              </a:rPr>
-              <a:t>No route to Aurora</a:t>
-            </a:r>
-          </a:p>
-        </p:txBody>
-      </p:sp>
-      <p:sp>
-        <p:nvSpPr>
-          <p:cNvPr id="16" name="TextBox 15"/>
+              <a:rPr sz="1300" b="0">
+                <a:solidFill>
+                  <a:srgbClr val="17202A"/>
+                </a:solidFill>
+                <a:latin typeface="Segoe UI Semibold"/>
+              </a:rPr>
+              <a:t>Q7 · Weakest skill coverage</a:t>
+            </a:r>
+          </a:p>
+        </p:txBody>
+      </p:sp>
+      <p:graphicFrame>
+        <p:nvGraphicFramePr>
+          <p:cNvPr id="17" name="Chart 16"/>
+          <p:cNvGraphicFramePr>
+            <a:graphicFrameLocks noGrp="1"/>
+          </p:cNvGraphicFramePr>
+          <p:nvPr/>
+        </p:nvGraphicFramePr>
+        <p:xfrm>
+          <a:off x="7991856" y="1737360"/>
+          <a:ext cx="3648456" cy="1737360"/>
+        </p:xfrm>
+        <a:graphic>
+          <a:graphicData uri="http://schemas.openxmlformats.org/drawingml/2006/chart">
+            <c:chart xmlns:c="http://schemas.openxmlformats.org/drawingml/2006/chart" r:id="rId5"/>
+          </a:graphicData>
+        </a:graphic>
+      </p:graphicFrame>
+      <p:sp>
+        <p:nvSpPr>
+          <p:cNvPr id="18" name="TextBox 17"/>
           <p:cNvSpPr txBox="1"/>
           <p:nvPr/>
         </p:nvSpPr>
         <p:spPr>
           <a:xfrm>
-            <a:off x="8641080" y="3300984"/>
-            <a:ext cx="3017520" cy="411480"/>
+            <a:off x="8083296" y="3657600"/>
+            <a:ext cx="1691640" cy="548640"/>
           </a:xfrm>
           <a:prstGeom prst="rect">
             <a:avLst/>
@@ -19959,56 +21476,27 @@
               </a:spcAft>
             </a:pPr>
             <a:r>
-              <a:rPr sz="1200" b="0">
-                <a:solidFill>
-                  <a:srgbClr val="17202A"/>
-                </a:solidFill>
-                <a:latin typeface="Segoe UI"/>
-              </a:rPr>
-              <a:t>→  EKS security group attached to Aurora</a:t>
-            </a:r>
-          </a:p>
-        </p:txBody>
-      </p:sp>
-      <p:sp>
-        <p:nvSpPr>
-          <p:cNvPr id="17" name="Rounded Rectangle 16"/>
-          <p:cNvSpPr/>
-          <p:nvPr/>
-        </p:nvSpPr>
-        <p:spPr>
-          <a:xfrm>
-            <a:off x="6217920" y="3931920"/>
-            <a:ext cx="5422392" cy="2240280"/>
-          </a:xfrm>
-          <a:prstGeom prst="roundRect">
-            <a:avLst>
-              <a:gd name="adj" fmla="val 6000"/>
-            </a:avLst>
-          </a:prstGeom>
-          <a:solidFill>
-            <a:srgbClr val="F4F6F8"/>
-          </a:solidFill>
-          <a:ln>
-            <a:noFill/>
-          </a:ln>
-        </p:spPr>
-        <p:txBody>
-          <a:bodyPr rtlCol="0" anchor="ctr"/>
-          <a:lstStyle/>
-          <a:p/>
-        </p:txBody>
-      </p:sp>
-      <p:sp>
-        <p:nvSpPr>
-          <p:cNvPr id="18" name="TextBox 17"/>
+              <a:rPr sz="2400" b="0">
+                <a:solidFill>
+                  <a:srgbClr val="B0412D"/>
+                </a:solidFill>
+                <a:latin typeface="Segoe UI Semibold"/>
+              </a:rPr>
+              <a:t>33%</a:t>
+            </a:r>
+          </a:p>
+        </p:txBody>
+      </p:sp>
+      <p:sp>
+        <p:nvSpPr>
+          <p:cNvPr id="19" name="TextBox 18"/>
           <p:cNvSpPr txBox="1"/>
           <p:nvPr/>
         </p:nvSpPr>
         <p:spPr>
           <a:xfrm>
-            <a:off x="6400800" y="4023360"/>
-            <a:ext cx="1737360" cy="640080"/>
+            <a:off x="8083296" y="4224528"/>
+            <a:ext cx="1691640" cy="457200"/>
           </a:xfrm>
           <a:prstGeom prst="rect">
             <a:avLst/>
@@ -20027,27 +21515,27 @@
               </a:spcAft>
             </a:pPr>
             <a:r>
-              <a:rPr sz="3600" b="0">
-                <a:solidFill>
-                  <a:srgbClr val="17202A"/>
-                </a:solidFill>
-                <a:latin typeface="Segoe UI Semibold"/>
-              </a:rPr>
-              <a:t>68</a:t>
-            </a:r>
-          </a:p>
-        </p:txBody>
-      </p:sp>
-      <p:sp>
-        <p:nvSpPr>
-          <p:cNvPr id="19" name="TextBox 18"/>
+              <a:rPr sz="1100" b="0">
+                <a:solidFill>
+                  <a:srgbClr val="4B5765"/>
+                </a:solidFill>
+                <a:latin typeface="Segoe UI"/>
+              </a:rPr>
+              <a:t>of assessments at level 1–2</a:t>
+            </a:r>
+          </a:p>
+        </p:txBody>
+      </p:sp>
+      <p:sp>
+        <p:nvSpPr>
+          <p:cNvPr id="20" name="TextBox 19"/>
           <p:cNvSpPr txBox="1"/>
           <p:nvPr/>
         </p:nvSpPr>
         <p:spPr>
           <a:xfrm>
-            <a:off x="7818120" y="4160520"/>
-            <a:ext cx="3749039" cy="548640"/>
+            <a:off x="9866376" y="3657600"/>
+            <a:ext cx="1691640" cy="548640"/>
           </a:xfrm>
           <a:prstGeom prst="rect">
             <a:avLst/>
@@ -20066,27 +21554,27 @@
               </a:spcAft>
             </a:pPr>
             <a:r>
-              <a:rPr sz="1400" b="0">
-                <a:solidFill>
-                  <a:srgbClr val="4B5765"/>
-                </a:solidFill>
-                <a:latin typeface="Segoe UI"/>
-              </a:rPr>
-              <a:t>automated tests</a:t>
-            </a:r>
-          </a:p>
-        </p:txBody>
-      </p:sp>
-      <p:sp>
-        <p:nvSpPr>
-          <p:cNvPr id="20" name="TextBox 19"/>
+              <a:rPr sz="2400" b="0">
+                <a:solidFill>
+                  <a:srgbClr val="17202A"/>
+                </a:solidFill>
+                <a:latin typeface="Segoe UI Semibold"/>
+              </a:rPr>
+              <a:t>39%</a:t>
+            </a:r>
+          </a:p>
+        </p:txBody>
+      </p:sp>
+      <p:sp>
+        <p:nvSpPr>
+          <p:cNvPr id="21" name="TextBox 20"/>
           <p:cNvSpPr txBox="1"/>
           <p:nvPr/>
         </p:nvSpPr>
         <p:spPr>
           <a:xfrm>
-            <a:off x="6400800" y="4800600"/>
-            <a:ext cx="5120640" cy="1325880"/>
+            <a:off x="9866376" y="4224528"/>
+            <a:ext cx="1691640" cy="457200"/>
           </a:xfrm>
           <a:prstGeom prst="rect">
             <a:avLst/>
@@ -20101,23 +21589,46 @@
           <a:p>
             <a:pPr algn="l">
               <a:spcAft>
-                <a:spcPts val="600"/>
-              </a:spcAft>
-            </a:pPr>
-            <a:r>
-              <a:rPr sz="1200" b="0">
+                <a:spcPts val="400"/>
+              </a:spcAft>
+            </a:pPr>
+            <a:r>
+              <a:rPr sz="1100" b="0">
                 <a:solidFill>
                   <a:srgbClr val="4B5765"/>
                 </a:solidFill>
                 <a:latin typeface="Segoe UI"/>
               </a:rPr>
-              <a:t>Contracts 15 · Silver 20 · Gold 17 · Bronze 6 · Dashboard 5 · Integration 5</a:t>
-            </a:r>
-          </a:p>
-          <a:p>
-            <a:pPr algn="l">
-              <a:spcAft>
-                <a:spcPts val="600"/>
+              <a:t>at level 4–5</a:t>
+            </a:r>
+          </a:p>
+        </p:txBody>
+      </p:sp>
+      <p:sp>
+        <p:nvSpPr>
+          <p:cNvPr id="22" name="TextBox 21"/>
+          <p:cNvSpPr txBox="1"/>
+          <p:nvPr/>
+        </p:nvSpPr>
+        <p:spPr>
+          <a:xfrm>
+            <a:off x="8083296" y="4983480"/>
+            <a:ext cx="3557016" cy="1097280"/>
+          </a:xfrm>
+          <a:prstGeom prst="rect">
+            <a:avLst/>
+          </a:prstGeom>
+          <a:noFill/>
+        </p:spPr>
+        <p:txBody>
+          <a:bodyPr wrap="square" anchor="t" lIns="18288" rIns="18288" tIns="18288" bIns="18288">
+            <a:spAutoFit/>
+          </a:bodyPr>
+          <a:lstStyle/>
+          <a:p>
+            <a:pPr algn="l">
+              <a:spcAft>
+                <a:spcPts val="400"/>
               </a:spcAft>
             </a:pPr>
             <a:r>
@@ -20127,14 +21638,14 @@
                 </a:solidFill>
                 <a:latin typeface="Segoe UI"/>
               </a:rPr>
-              <a:t>Integration runs end to end on LocalStack + PostgreSQL: reconciliation, idempotency, write-once, changed-file versioning, forced reload.</a:t>
+              <a:t>% of assessed employees meeting their role's required level. Gaps are specific skills, not whole categories.</a:t>
             </a:r>
           </a:p>
         </p:txBody>
       </p:sp>
       <p:cxnSp>
         <p:nvCxnSpPr>
-          <p:cNvPr id="21" name="Connector 20"/>
+          <p:cNvPr id="23" name="Connector 22"/>
           <p:cNvCxnSpPr/>
           <p:nvPr/>
         </p:nvCxnSpPr>
@@ -20155,7 +21666,7 @@
       </p:cxnSp>
       <p:sp>
         <p:nvSpPr>
-          <p:cNvPr id="22" name="TextBox 21"/>
+          <p:cNvPr id="24" name="TextBox 23"/>
           <p:cNvSpPr txBox="1"/>
           <p:nvPr/>
         </p:nvSpPr>
@@ -20194,7 +21705,7 @@
       </p:sp>
       <p:sp>
         <p:nvSpPr>
-          <p:cNvPr id="23" name="TextBox 22"/>
+          <p:cNvPr id="25" name="TextBox 24"/>
           <p:cNvSpPr txBox="1"/>
           <p:nvPr/>
         </p:nvSpPr>
@@ -20226,7 +21737,7 @@
                 </a:solidFill>
                 <a:latin typeface="Segoe UI"/>
               </a:rPr>
-              <a:t>9 / 10</a:t>
+              <a:t>9 / 11</a:t>
             </a:r>
           </a:p>
         </p:txBody>

--- a/data/talent-etl/presentation/ACME_Talent_Lake.pptx
+++ b/data/talent-etl/presentation/ACME_Talent_Lake.pptx
@@ -16,6 +16,7 @@
     <p:sldId id="264" r:id="rId16"/>
     <p:sldId id="265" r:id="rId17"/>
     <p:sldId id="266" r:id="rId18"/>
+    <p:sldId id="267" r:id="rId19"/>
   </p:sldIdLst>
   <p:sldSz cx="12191695" cy="6858000" type="screen4x3"/>
   <p:notesSz cx="6858000" cy="9144000"/>
@@ -1718,7 +1719,7 @@
           <a:lstStyle/>
           <a:p>
             <a:r>
-              <a:t>job.py is identical locally and in AWS; environment variables decide the rest. In AWS it runs as a Kubernetes Job on the workshop EKS cluster, reads Aurora and writes Amazon S3: 60 seconds, identical answers. The stock EKS template only supports a single-file job with no settings or AWS access; I kept infra/ and bin/ untouched and closed each gap with small scripts in the project. 60 automated tests, including end-to-end runs.</a:t>
+              <a:t>Q5 is a transparent points score: rating fell +2, latest rating 2 or below +2, negative manager comment +1, no learning in 180 days +1, manager flag High +2 or Medium +1; 5 or more is High. Managers flagged 311 as high risk; only 145 also show performance warning signs, and 67 score high without a flag. Q6 is team level because projects belong to teams: on-time teams have 56% high performers versus 43% for all-delayed teams, from 27 teams. Q7: Stakeholder Management has the weakest coverage of required levels at 65%; a third of assessments are at level 1–2.</a:t>
             </a:r>
           </a:p>
         </p:txBody>
@@ -1788,6 +1789,76 @@
           <a:lstStyle/>
           <a:p>
             <a:r>
+              <a:t>job.py is identical locally and in AWS; environment variables decide the rest. In AWS it runs as a Kubernetes Job on the workshop EKS cluster, reads Aurora and writes Amazon S3: 60 seconds, identical answers. The stock EKS template only supports a single-file job with no settings or AWS access; I kept infra/ and bin/ untouched and closed each gap with small scripts in the project. 60 automated tests, including end-to-end runs.</a:t>
+            </a:r>
+          </a:p>
+        </p:txBody>
+      </p:sp>
+      <p:sp>
+        <p:nvSpPr>
+          <p:cNvPr id="4" name="Slide Number Placeholder 3"/>
+          <p:cNvSpPr>
+            <a:spLocks noGrp="1"/>
+          </p:cNvSpPr>
+          <p:nvPr>
+            <p:ph type="sldNum" idx="5" sz="quarter"/>
+          </p:nvPr>
+        </p:nvSpPr>
+        <p:spPr/>
+      </p:sp>
+    </p:spTree>
+  </p:cSld>
+  <p:clrMapOvr>
+    <a:masterClrMapping/>
+  </p:clrMapOvr>
+</p:notes>
+</file>
+
+<file path=ppt/notesSlides/notesSlide12.xml><?xml version="1.0" encoding="utf-8"?>
+<p:notes xmlns:a="http://schemas.openxmlformats.org/drawingml/2006/main" xmlns:p="http://schemas.openxmlformats.org/presentationml/2006/main" xmlns:r="http://schemas.openxmlformats.org/officeDocument/2006/relationships">
+  <p:cSld>
+    <p:spTree>
+      <p:nvGrpSpPr>
+        <p:cNvPr id="1" name=""/>
+        <p:cNvGrpSpPr/>
+        <p:nvPr/>
+      </p:nvGrpSpPr>
+      <p:grpSpPr>
+        <a:xfrm>
+          <a:off x="0" y="0"/>
+          <a:ext cx="0" cy="0"/>
+          <a:chOff x="0" y="0"/>
+          <a:chExt cx="0" cy="0"/>
+        </a:xfrm>
+      </p:grpSpPr>
+      <p:sp>
+        <p:nvSpPr>
+          <p:cNvPr id="2" name="Slide Image Placeholder 1"/>
+          <p:cNvSpPr>
+            <a:spLocks noGrp="1"/>
+          </p:cNvSpPr>
+          <p:nvPr>
+            <p:ph type="sldImg" idx="2"/>
+          </p:nvPr>
+        </p:nvSpPr>
+        <p:spPr/>
+      </p:sp>
+      <p:sp>
+        <p:nvSpPr>
+          <p:cNvPr id="3" name="Notes Placeholder 2"/>
+          <p:cNvSpPr>
+            <a:spLocks noGrp="1"/>
+          </p:cNvSpPr>
+          <p:nvPr>
+            <p:ph type="body" idx="3" sz="quarter"/>
+          </p:nvPr>
+        </p:nvSpPr>
+        <p:spPr/>
+        <p:txBody>
+          <a:bodyPr/>
+          <a:lstStyle/>
+          <a:p>
+            <a:r>
               <a:t>Key decisions: pandas because the data is small and pure functions are testable; one code path via LocalStack S3; quarantine instead of dropping; a transparent attrition score. Limits: two review periods, 27 teams for Q6, a weak potential rating, 143 unusable events, plain-HTTP dashboard. Next: change history (SCD Type 2), the four small infra changes, scheduling, SQL over Gold and HTTPS. Then demo: cloud_run.sh, the dashboard, the notebook.</a:t>
             </a:r>
           </a:p>
@@ -1998,7 +2069,7 @@
           <a:lstStyle/>
           <a:p>
             <a:r>
-              <a:t>Profiling found the HR tables clean and the learning export deliberately dirty. Bronze keeps exactly what arrived: write-once, byte-identical copies, reconciled to the source, so any number can be reproduced later. Silver applies a contract per dataset; failing rows go to quarantine with every rule they broke and the original line. Duplicates are extra copies whose original is kept; renamed fields are recovered. Counts reconcile exactly.</a:t>
+              <a:t>Same flow as before, now with what makes it production-grade. Sources: one consistent read-only snapshot of PostgreSQL with retries for Aurora waking up, and change detection on S3 files. Bronze: write-once and versioned, byte-identical copies, a manifest written last as a commit marker, reconciled to the source. Silver: a contract per dataset, schema drift recovered, quarantine with reason and raw line, and alerts at 5% and 50%. Gold: every table reconciled with Silver and its rules written down. Across every run: idempotent re-runs, lineage, a data-quality report and 68 tests. And the same job.py runs locally and on AWS with least-privilege access.</a:t>
             </a:r>
           </a:p>
         </p:txBody>
@@ -2068,7 +2139,7 @@
           <a:lstStyle/>
           <a:p>
             <a:r>
-              <a:t>Every Silver dataset gets a quarantine rate. Below 5% it publishes normally. From 5% it still publishes but raises a warning in the log, the data-quality report, the run manifest and a dashboard banner. From 50%, for example 500 of 1,000 rows, the source is probably broken: the rejects are still saved as evidence, but the previous good Silver data is kept, the run stops and Gold is not rebuilt. Both thresholds are environment variables. Today every dataset is OK; the highest is learning activity at about 1%. An end-to-end test lowers the threshold to 0.5% to prove a critical batch keeps the previous data.</a:t>
+              <a:t>Profiling found the HR tables clean and the learning export deliberately dirty. Bronze keeps exactly what arrived: write-once, byte-identical copies, reconciled to the source, so any number can be reproduced later. Silver applies a contract per dataset; failing rows go to quarantine with every rule they broke and the original line. Duplicates are extra copies whose original is kept; renamed fields are recovered. Counts reconcile exactly.</a:t>
             </a:r>
           </a:p>
         </p:txBody>
@@ -2138,7 +2209,7 @@
           <a:lstStyle/>
           <a:p>
             <a:r>
-              <a:t>Before loading anything, the pipeline asks each source whether it changed since the last run. For S3 files this is built today: each file's ETag is compared with the watermark in _state, and an unchanged file is skipped (a rerun copied 0 of 783 files). For PostgreSQL the design compares a checksum of each table export with the MD5 already stored in the last Bronze manifest; if nothing changed anywhere, the run records a no-op and skips Silver and Gold. Results are identical either way, because every layer is idempotent; change detection only saves work and avoids duplicate snapshots.</a:t>
+              <a:t>Every Silver dataset gets a quarantine rate. Below 5% it publishes normally. From 5% it still publishes but raises a warning in the log, the data-quality report, the run manifest and a dashboard banner. From 50%, for example 500 of 1,000 rows, the source is probably broken: the rejects are still saved as evidence, but the previous good Silver data is kept, the run stops and Gold is not rebuilt. Both thresholds are environment variables. Today every dataset is OK; the highest is learning activity at about 1%. An end-to-end test lowers the threshold to 0.5% to prove a critical batch keeps the previous data.</a:t>
             </a:r>
           </a:p>
         </p:txBody>
@@ -2208,7 +2279,7 @@
           <a:lstStyle/>
           <a:p>
             <a:r>
-              <a:t>Gold is organised by question. Each table is a pure function of Silver with business rules as named constants, so a threshold is a one-line change. Before publishing, row counts must match the Silver population, totals must add back up, and every row must obey its rule. Lineage exists at run, row and column level, so any Gold number traces back to a source file and line.</a:t>
+              <a:t>Before loading anything, the pipeline asks each source whether it changed since the last run. For S3 files this is built today: each file's ETag is compared with the watermark in _state, and an unchanged file is skipped (a rerun copied 0 of 783 files). For PostgreSQL the design compares a checksum of each table export with the MD5 already stored in the last Bronze manifest; if nothing changed anywhere, the run records a no-op and skips Silver and Gold. Results are identical either way, because every layer is idempotent; change detection only saves work and avoids duplicate snapshots.</a:t>
             </a:r>
           </a:p>
         </p:txBody>
@@ -2278,7 +2349,7 @@
           <a:lstStyle/>
           <a:p>
             <a:r>
-              <a:t>Q1: average latest rating 3.41; 898 improved, 872 stable, 230 declined. Q2: a critical gap is two or more levels short, or any shortfall where the role needs level 4+; 465 gaps across 441 people, Stakeholder Management most common, HR department highest share (28%). Q3: ready now = high potential, readiness 'Ready Now', no critical gaps; 124 people; 28 high-potential employees are at high attrition risk. Q4: 1.75 courses per person, 41% quiz pass rate, 232 with no learning activity at all.</a:t>
+              <a:t>Gold is organised by question. Each table is a pure function of Silver with business rules as named constants, so a threshold is a one-line change. Before publishing, row counts must match the Silver population, totals must add back up, and every row must obey its rule. Lineage exists at run, row and column level, so any Gold number traces back to a source file and line.</a:t>
             </a:r>
           </a:p>
         </p:txBody>
@@ -2348,7 +2419,7 @@
           <a:lstStyle/>
           <a:p>
             <a:r>
-              <a:t>Q5 is a transparent points score: rating fell +2, latest rating 2 or below +2, negative manager comment +1, no learning in 180 days +1, manager flag High +2 or Medium +1; 5 or more is High. Managers flagged 311 as high risk; only 145 also show performance warning signs, and 67 score high without a flag. Q6 is team level because projects belong to teams: on-time teams have 56% high performers versus 43% for all-delayed teams, from 27 teams. Q7: Stakeholder Management has the weakest coverage of required levels at 65%; a third of assessments are at level 1–2.</a:t>
+              <a:t>Q1: average latest rating 3.41; 898 improved, 872 stable, 230 declined. Q2: a critical gap is two or more levels short, or any shortfall where the role needs level 4+; 465 gaps across 441 people, Stakeholder Management most common, HR department highest share (28%). Q3: ready now = high potential, readiness 'Ready Now', no critical gaps; 124 people; 28 high-potential employees are at high attrition risk. Q4: 1.75 courses per person, 41% quiz pass rate, 232 with no learning activity at all.</a:t>
             </a:r>
           </a:p>
         </p:txBody>
@@ -5914,6 +5985,967 @@
                 </a:solidFill>
                 <a:latin typeface="Segoe UI Semibold"/>
               </a:rPr>
+              <a:t>FINDINGS · Q5–Q7</a:t>
+            </a:r>
+          </a:p>
+        </p:txBody>
+      </p:sp>
+      <p:sp>
+        <p:nvSpPr>
+          <p:cNvPr id="3" name="TextBox 2"/>
+          <p:cNvSpPr txBox="1"/>
+          <p:nvPr/>
+        </p:nvSpPr>
+        <p:spPr>
+          <a:xfrm>
+            <a:off x="548640" y="566928"/>
+            <a:ext cx="11064240" cy="731520"/>
+          </a:xfrm>
+          <a:prstGeom prst="rect">
+            <a:avLst/>
+          </a:prstGeom>
+          <a:noFill/>
+        </p:spPr>
+        <p:txBody>
+          <a:bodyPr wrap="square" anchor="t" lIns="18288" rIns="18288" tIns="18288" bIns="18288">
+            <a:spAutoFit/>
+          </a:bodyPr>
+          <a:lstStyle/>
+          <a:p>
+            <a:pPr algn="l">
+              <a:spcAft>
+                <a:spcPts val="400"/>
+              </a:spcAft>
+            </a:pPr>
+            <a:r>
+              <a:rPr sz="2600" b="0">
+                <a:solidFill>
+                  <a:srgbClr val="17202A"/>
+                </a:solidFill>
+                <a:latin typeface="Segoe UI Semibold"/>
+              </a:rPr>
+              <a:t>212 at high attrition risk; stronger teams deliver on time</a:t>
+            </a:r>
+          </a:p>
+        </p:txBody>
+      </p:sp>
+      <p:sp>
+        <p:nvSpPr>
+          <p:cNvPr id="4" name="TextBox 3"/>
+          <p:cNvSpPr txBox="1"/>
+          <p:nvPr/>
+        </p:nvSpPr>
+        <p:spPr>
+          <a:xfrm>
+            <a:off x="548640" y="1417320"/>
+            <a:ext cx="3557016" cy="320040"/>
+          </a:xfrm>
+          <a:prstGeom prst="rect">
+            <a:avLst/>
+          </a:prstGeom>
+          <a:noFill/>
+        </p:spPr>
+        <p:txBody>
+          <a:bodyPr wrap="square" anchor="t" lIns="18288" rIns="18288" tIns="18288" bIns="18288">
+            <a:spAutoFit/>
+          </a:bodyPr>
+          <a:lstStyle/>
+          <a:p>
+            <a:pPr algn="l">
+              <a:spcAft>
+                <a:spcPts val="400"/>
+              </a:spcAft>
+            </a:pPr>
+            <a:r>
+              <a:rPr sz="1300" b="0">
+                <a:solidFill>
+                  <a:srgbClr val="17202A"/>
+                </a:solidFill>
+                <a:latin typeface="Segoe UI Semibold"/>
+              </a:rPr>
+              <a:t>Q5 · Computed attrition risk</a:t>
+            </a:r>
+          </a:p>
+        </p:txBody>
+      </p:sp>
+      <p:graphicFrame>
+        <p:nvGraphicFramePr>
+          <p:cNvPr id="5" name="Chart 4"/>
+          <p:cNvGraphicFramePr>
+            <a:graphicFrameLocks noGrp="1"/>
+          </p:cNvGraphicFramePr>
+          <p:nvPr/>
+        </p:nvGraphicFramePr>
+        <p:xfrm>
+          <a:off x="457200" y="1737360"/>
+          <a:ext cx="3648456" cy="1737360"/>
+        </p:xfrm>
+        <a:graphic>
+          <a:graphicData uri="http://schemas.openxmlformats.org/drawingml/2006/chart">
+            <c:chart xmlns:c="http://schemas.openxmlformats.org/drawingml/2006/chart" r:id="rId3"/>
+          </a:graphicData>
+        </a:graphic>
+      </p:graphicFrame>
+      <p:sp>
+        <p:nvSpPr>
+          <p:cNvPr id="6" name="TextBox 5"/>
+          <p:cNvSpPr txBox="1"/>
+          <p:nvPr/>
+        </p:nvSpPr>
+        <p:spPr>
+          <a:xfrm>
+            <a:off x="548640" y="3657600"/>
+            <a:ext cx="3557016" cy="2468880"/>
+          </a:xfrm>
+          <a:prstGeom prst="rect">
+            <a:avLst/>
+          </a:prstGeom>
+          <a:noFill/>
+        </p:spPr>
+        <p:txBody>
+          <a:bodyPr wrap="square" anchor="t" lIns="18288" rIns="18288" tIns="18288" bIns="18288">
+            <a:spAutoFit/>
+          </a:bodyPr>
+          <a:lstStyle/>
+          <a:p>
+            <a:pPr algn="l">
+              <a:spcAft>
+                <a:spcPts val="800"/>
+              </a:spcAft>
+            </a:pPr>
+            <a:r>
+              <a:rPr sz="1200" b="0">
+                <a:solidFill>
+                  <a:srgbClr val="4B5765"/>
+                </a:solidFill>
+                <a:latin typeface="Segoe UI"/>
+              </a:rPr>
+              <a:t>Managers flagged 311 as high risk; only 145 also show performance warning signs.</a:t>
+            </a:r>
+          </a:p>
+          <a:p>
+            <a:pPr algn="l">
+              <a:spcAft>
+                <a:spcPts val="800"/>
+              </a:spcAft>
+            </a:pPr>
+            <a:r>
+              <a:rPr sz="1200" b="0">
+                <a:solidFill>
+                  <a:srgbClr val="17202A"/>
+                </a:solidFill>
+                <a:latin typeface="Segoe UI Semibold"/>
+              </a:rPr>
+              <a:t>67 more score high without a manager flag.</a:t>
+            </a:r>
+          </a:p>
+          <a:p>
+            <a:pPr algn="l">
+              <a:spcAft>
+                <a:spcPts val="800"/>
+              </a:spcAft>
+            </a:pPr>
+            <a:r>
+              <a:rPr sz="1050" b="0">
+                <a:solidFill>
+                  <a:srgbClr val="8A94A0"/>
+                </a:solidFill>
+                <a:latin typeface="Segoe UI"/>
+              </a:rPr>
+              <a:t>Score: rating fell +2 · rating ≤ 2 +2 · negative comment +1 · no learning in 180 days +1 · manager flag +2 / +1. High = 5 or more.</a:t>
+            </a:r>
+          </a:p>
+        </p:txBody>
+      </p:sp>
+      <p:sp>
+        <p:nvSpPr>
+          <p:cNvPr id="7" name="TextBox 6"/>
+          <p:cNvSpPr txBox="1"/>
+          <p:nvPr/>
+        </p:nvSpPr>
+        <p:spPr>
+          <a:xfrm>
+            <a:off x="4315968" y="1417320"/>
+            <a:ext cx="3557016" cy="320040"/>
+          </a:xfrm>
+          <a:prstGeom prst="rect">
+            <a:avLst/>
+          </a:prstGeom>
+          <a:noFill/>
+        </p:spPr>
+        <p:txBody>
+          <a:bodyPr wrap="square" anchor="t" lIns="18288" rIns="18288" tIns="18288" bIns="18288">
+            <a:spAutoFit/>
+          </a:bodyPr>
+          <a:lstStyle/>
+          <a:p>
+            <a:pPr algn="l">
+              <a:spcAft>
+                <a:spcPts val="400"/>
+              </a:spcAft>
+            </a:pPr>
+            <a:r>
+              <a:rPr sz="1300" b="0">
+                <a:solidFill>
+                  <a:srgbClr val="17202A"/>
+                </a:solidFill>
+                <a:latin typeface="Segoe UI Semibold"/>
+              </a:rPr>
+              <a:t>Q6 · % high performers by delivery</a:t>
+            </a:r>
+          </a:p>
+        </p:txBody>
+      </p:sp>
+      <p:graphicFrame>
+        <p:nvGraphicFramePr>
+          <p:cNvPr id="8" name="Chart 7"/>
+          <p:cNvGraphicFramePr>
+            <a:graphicFrameLocks noGrp="1"/>
+          </p:cNvGraphicFramePr>
+          <p:nvPr/>
+        </p:nvGraphicFramePr>
+        <p:xfrm>
+          <a:off x="4224528" y="1737360"/>
+          <a:ext cx="3648456" cy="1737360"/>
+        </p:xfrm>
+        <a:graphic>
+          <a:graphicData uri="http://schemas.openxmlformats.org/drawingml/2006/chart">
+            <c:chart xmlns:c="http://schemas.openxmlformats.org/drawingml/2006/chart" r:id="rId4"/>
+          </a:graphicData>
+        </a:graphic>
+      </p:graphicFrame>
+      <p:sp>
+        <p:nvSpPr>
+          <p:cNvPr id="9" name="TextBox 8"/>
+          <p:cNvSpPr txBox="1"/>
+          <p:nvPr/>
+        </p:nvSpPr>
+        <p:spPr>
+          <a:xfrm>
+            <a:off x="4315968" y="3703320"/>
+            <a:ext cx="1143000" cy="411480"/>
+          </a:xfrm>
+          <a:prstGeom prst="rect">
+            <a:avLst/>
+          </a:prstGeom>
+          <a:noFill/>
+        </p:spPr>
+        <p:txBody>
+          <a:bodyPr wrap="square" anchor="t" lIns="18288" rIns="18288" tIns="18288" bIns="18288">
+            <a:spAutoFit/>
+          </a:bodyPr>
+          <a:lstStyle/>
+          <a:p>
+            <a:pPr algn="l">
+              <a:spcAft>
+                <a:spcPts val="400"/>
+              </a:spcAft>
+            </a:pPr>
+            <a:r>
+              <a:rPr sz="2000" b="0">
+                <a:solidFill>
+                  <a:srgbClr val="17202A"/>
+                </a:solidFill>
+                <a:latin typeface="Segoe UI Semibold"/>
+              </a:rPr>
+              <a:t>+0.24</a:t>
+            </a:r>
+          </a:p>
+        </p:txBody>
+      </p:sp>
+      <p:sp>
+        <p:nvSpPr>
+          <p:cNvPr id="10" name="TextBox 9"/>
+          <p:cNvSpPr txBox="1"/>
+          <p:nvPr/>
+        </p:nvSpPr>
+        <p:spPr>
+          <a:xfrm>
+            <a:off x="4315968" y="4160520"/>
+            <a:ext cx="1143000" cy="548640"/>
+          </a:xfrm>
+          <a:prstGeom prst="rect">
+            <a:avLst/>
+          </a:prstGeom>
+          <a:noFill/>
+        </p:spPr>
+        <p:txBody>
+          <a:bodyPr wrap="square" anchor="t" lIns="18288" rIns="18288" tIns="18288" bIns="18288">
+            <a:spAutoFit/>
+          </a:bodyPr>
+          <a:lstStyle/>
+          <a:p>
+            <a:pPr algn="l">
+              <a:spcAft>
+                <a:spcPts val="0"/>
+              </a:spcAft>
+            </a:pPr>
+            <a:r>
+              <a:rPr sz="950" b="0">
+                <a:solidFill>
+                  <a:srgbClr val="4B5765"/>
+                </a:solidFill>
+                <a:latin typeface="Segoe UI"/>
+              </a:rPr>
+              <a:t>rating vs</a:t>
+            </a:r>
+          </a:p>
+          <a:p>
+            <a:pPr algn="l">
+              <a:spcAft>
+                <a:spcPts val="0"/>
+              </a:spcAft>
+            </a:pPr>
+            <a:r>
+              <a:rPr sz="950" b="0">
+                <a:solidFill>
+                  <a:srgbClr val="4B5765"/>
+                </a:solidFill>
+                <a:latin typeface="Segoe UI"/>
+              </a:rPr>
+              <a:t>project score</a:t>
+            </a:r>
+          </a:p>
+        </p:txBody>
+      </p:sp>
+      <p:sp>
+        <p:nvSpPr>
+          <p:cNvPr id="11" name="TextBox 10"/>
+          <p:cNvSpPr txBox="1"/>
+          <p:nvPr/>
+        </p:nvSpPr>
+        <p:spPr>
+          <a:xfrm>
+            <a:off x="5504688" y="3703320"/>
+            <a:ext cx="1143000" cy="411480"/>
+          </a:xfrm>
+          <a:prstGeom prst="rect">
+            <a:avLst/>
+          </a:prstGeom>
+          <a:noFill/>
+        </p:spPr>
+        <p:txBody>
+          <a:bodyPr wrap="square" anchor="t" lIns="18288" rIns="18288" tIns="18288" bIns="18288">
+            <a:spAutoFit/>
+          </a:bodyPr>
+          <a:lstStyle/>
+          <a:p>
+            <a:pPr algn="l">
+              <a:spcAft>
+                <a:spcPts val="400"/>
+              </a:spcAft>
+            </a:pPr>
+            <a:r>
+              <a:rPr sz="2000" b="0">
+                <a:solidFill>
+                  <a:srgbClr val="17202A"/>
+                </a:solidFill>
+                <a:latin typeface="Segoe UI Semibold"/>
+              </a:rPr>
+              <a:t>+0.38</a:t>
+            </a:r>
+          </a:p>
+        </p:txBody>
+      </p:sp>
+      <p:sp>
+        <p:nvSpPr>
+          <p:cNvPr id="12" name="TextBox 11"/>
+          <p:cNvSpPr txBox="1"/>
+          <p:nvPr/>
+        </p:nvSpPr>
+        <p:spPr>
+          <a:xfrm>
+            <a:off x="5504688" y="4160520"/>
+            <a:ext cx="1143000" cy="548640"/>
+          </a:xfrm>
+          <a:prstGeom prst="rect">
+            <a:avLst/>
+          </a:prstGeom>
+          <a:noFill/>
+        </p:spPr>
+        <p:txBody>
+          <a:bodyPr wrap="square" anchor="t" lIns="18288" rIns="18288" tIns="18288" bIns="18288">
+            <a:spAutoFit/>
+          </a:bodyPr>
+          <a:lstStyle/>
+          <a:p>
+            <a:pPr algn="l">
+              <a:spcAft>
+                <a:spcPts val="0"/>
+              </a:spcAft>
+            </a:pPr>
+            <a:r>
+              <a:rPr sz="950" b="0">
+                <a:solidFill>
+                  <a:srgbClr val="4B5765"/>
+                </a:solidFill>
+                <a:latin typeface="Segoe UI"/>
+              </a:rPr>
+              <a:t>high performers</a:t>
+            </a:r>
+          </a:p>
+          <a:p>
+            <a:pPr algn="l">
+              <a:spcAft>
+                <a:spcPts val="0"/>
+              </a:spcAft>
+            </a:pPr>
+            <a:r>
+              <a:rPr sz="950" b="0">
+                <a:solidFill>
+                  <a:srgbClr val="4B5765"/>
+                </a:solidFill>
+                <a:latin typeface="Segoe UI"/>
+              </a:rPr>
+              <a:t>vs on time</a:t>
+            </a:r>
+          </a:p>
+        </p:txBody>
+      </p:sp>
+      <p:sp>
+        <p:nvSpPr>
+          <p:cNvPr id="13" name="TextBox 12"/>
+          <p:cNvSpPr txBox="1"/>
+          <p:nvPr/>
+        </p:nvSpPr>
+        <p:spPr>
+          <a:xfrm>
+            <a:off x="6693408" y="3703320"/>
+            <a:ext cx="1143000" cy="411480"/>
+          </a:xfrm>
+          <a:prstGeom prst="rect">
+            <a:avLst/>
+          </a:prstGeom>
+          <a:noFill/>
+        </p:spPr>
+        <p:txBody>
+          <a:bodyPr wrap="square" anchor="t" lIns="18288" rIns="18288" tIns="18288" bIns="18288">
+            <a:spAutoFit/>
+          </a:bodyPr>
+          <a:lstStyle/>
+          <a:p>
+            <a:pPr algn="l">
+              <a:spcAft>
+                <a:spcPts val="400"/>
+              </a:spcAft>
+            </a:pPr>
+            <a:r>
+              <a:rPr sz="2000" b="0">
+                <a:solidFill>
+                  <a:srgbClr val="17202A"/>
+                </a:solidFill>
+                <a:latin typeface="Segoe UI Semibold"/>
+              </a:rPr>
+              <a:t>-0.23</a:t>
+            </a:r>
+          </a:p>
+        </p:txBody>
+      </p:sp>
+      <p:sp>
+        <p:nvSpPr>
+          <p:cNvPr id="14" name="TextBox 13"/>
+          <p:cNvSpPr txBox="1"/>
+          <p:nvPr/>
+        </p:nvSpPr>
+        <p:spPr>
+          <a:xfrm>
+            <a:off x="6693408" y="4160520"/>
+            <a:ext cx="1143000" cy="548640"/>
+          </a:xfrm>
+          <a:prstGeom prst="rect">
+            <a:avLst/>
+          </a:prstGeom>
+          <a:noFill/>
+        </p:spPr>
+        <p:txBody>
+          <a:bodyPr wrap="square" anchor="t" lIns="18288" rIns="18288" tIns="18288" bIns="18288">
+            <a:spAutoFit/>
+          </a:bodyPr>
+          <a:lstStyle/>
+          <a:p>
+            <a:pPr algn="l">
+              <a:spcAft>
+                <a:spcPts val="0"/>
+              </a:spcAft>
+            </a:pPr>
+            <a:r>
+              <a:rPr sz="950" b="0">
+                <a:solidFill>
+                  <a:srgbClr val="4B5765"/>
+                </a:solidFill>
+                <a:latin typeface="Segoe UI"/>
+              </a:rPr>
+              <a:t>skill gaps vs</a:t>
+            </a:r>
+          </a:p>
+          <a:p>
+            <a:pPr algn="l">
+              <a:spcAft>
+                <a:spcPts val="0"/>
+              </a:spcAft>
+            </a:pPr>
+            <a:r>
+              <a:rPr sz="950" b="0">
+                <a:solidFill>
+                  <a:srgbClr val="4B5765"/>
+                </a:solidFill>
+                <a:latin typeface="Segoe UI"/>
+              </a:rPr>
+              <a:t>project score</a:t>
+            </a:r>
+          </a:p>
+        </p:txBody>
+      </p:sp>
+      <p:sp>
+        <p:nvSpPr>
+          <p:cNvPr id="15" name="TextBox 14"/>
+          <p:cNvSpPr txBox="1"/>
+          <p:nvPr/>
+        </p:nvSpPr>
+        <p:spPr>
+          <a:xfrm>
+            <a:off x="4315968" y="4983480"/>
+            <a:ext cx="3557016" cy="1097280"/>
+          </a:xfrm>
+          <a:prstGeom prst="rect">
+            <a:avLst/>
+          </a:prstGeom>
+          <a:noFill/>
+        </p:spPr>
+        <p:txBody>
+          <a:bodyPr wrap="square" anchor="t" lIns="18288" rIns="18288" tIns="18288" bIns="18288">
+            <a:spAutoFit/>
+          </a:bodyPr>
+          <a:lstStyle/>
+          <a:p>
+            <a:pPr algn="l">
+              <a:spcAft>
+                <a:spcPts val="400"/>
+              </a:spcAft>
+            </a:pPr>
+            <a:r>
+              <a:rPr sz="1100" b="0">
+                <a:solidFill>
+                  <a:srgbClr val="4B5765"/>
+                </a:solidFill>
+                <a:latin typeface="Segoe UI"/>
+              </a:rPr>
+              <a:t>Team level, because projects belong to teams. Based on 27 teams: indicative, not proof.</a:t>
+            </a:r>
+          </a:p>
+        </p:txBody>
+      </p:sp>
+      <p:sp>
+        <p:nvSpPr>
+          <p:cNvPr id="16" name="TextBox 15"/>
+          <p:cNvSpPr txBox="1"/>
+          <p:nvPr/>
+        </p:nvSpPr>
+        <p:spPr>
+          <a:xfrm>
+            <a:off x="8083296" y="1417320"/>
+            <a:ext cx="3557016" cy="320040"/>
+          </a:xfrm>
+          <a:prstGeom prst="rect">
+            <a:avLst/>
+          </a:prstGeom>
+          <a:noFill/>
+        </p:spPr>
+        <p:txBody>
+          <a:bodyPr wrap="square" anchor="t" lIns="18288" rIns="18288" tIns="18288" bIns="18288">
+            <a:spAutoFit/>
+          </a:bodyPr>
+          <a:lstStyle/>
+          <a:p>
+            <a:pPr algn="l">
+              <a:spcAft>
+                <a:spcPts val="400"/>
+              </a:spcAft>
+            </a:pPr>
+            <a:r>
+              <a:rPr sz="1300" b="0">
+                <a:solidFill>
+                  <a:srgbClr val="17202A"/>
+                </a:solidFill>
+                <a:latin typeface="Segoe UI Semibold"/>
+              </a:rPr>
+              <a:t>Q7 · Weakest skill coverage</a:t>
+            </a:r>
+          </a:p>
+        </p:txBody>
+      </p:sp>
+      <p:graphicFrame>
+        <p:nvGraphicFramePr>
+          <p:cNvPr id="17" name="Chart 16"/>
+          <p:cNvGraphicFramePr>
+            <a:graphicFrameLocks noGrp="1"/>
+          </p:cNvGraphicFramePr>
+          <p:nvPr/>
+        </p:nvGraphicFramePr>
+        <p:xfrm>
+          <a:off x="7991856" y="1737360"/>
+          <a:ext cx="3648456" cy="1737360"/>
+        </p:xfrm>
+        <a:graphic>
+          <a:graphicData uri="http://schemas.openxmlformats.org/drawingml/2006/chart">
+            <c:chart xmlns:c="http://schemas.openxmlformats.org/drawingml/2006/chart" r:id="rId5"/>
+          </a:graphicData>
+        </a:graphic>
+      </p:graphicFrame>
+      <p:sp>
+        <p:nvSpPr>
+          <p:cNvPr id="18" name="TextBox 17"/>
+          <p:cNvSpPr txBox="1"/>
+          <p:nvPr/>
+        </p:nvSpPr>
+        <p:spPr>
+          <a:xfrm>
+            <a:off x="8083296" y="3657600"/>
+            <a:ext cx="1691640" cy="548640"/>
+          </a:xfrm>
+          <a:prstGeom prst="rect">
+            <a:avLst/>
+          </a:prstGeom>
+          <a:noFill/>
+        </p:spPr>
+        <p:txBody>
+          <a:bodyPr wrap="square" anchor="t" lIns="18288" rIns="18288" tIns="18288" bIns="18288">
+            <a:spAutoFit/>
+          </a:bodyPr>
+          <a:lstStyle/>
+          <a:p>
+            <a:pPr algn="l">
+              <a:spcAft>
+                <a:spcPts val="400"/>
+              </a:spcAft>
+            </a:pPr>
+            <a:r>
+              <a:rPr sz="2400" b="0">
+                <a:solidFill>
+                  <a:srgbClr val="B0412D"/>
+                </a:solidFill>
+                <a:latin typeface="Segoe UI Semibold"/>
+              </a:rPr>
+              <a:t>33%</a:t>
+            </a:r>
+          </a:p>
+        </p:txBody>
+      </p:sp>
+      <p:sp>
+        <p:nvSpPr>
+          <p:cNvPr id="19" name="TextBox 18"/>
+          <p:cNvSpPr txBox="1"/>
+          <p:nvPr/>
+        </p:nvSpPr>
+        <p:spPr>
+          <a:xfrm>
+            <a:off x="8083296" y="4224528"/>
+            <a:ext cx="1691640" cy="457200"/>
+          </a:xfrm>
+          <a:prstGeom prst="rect">
+            <a:avLst/>
+          </a:prstGeom>
+          <a:noFill/>
+        </p:spPr>
+        <p:txBody>
+          <a:bodyPr wrap="square" anchor="t" lIns="18288" rIns="18288" tIns="18288" bIns="18288">
+            <a:spAutoFit/>
+          </a:bodyPr>
+          <a:lstStyle/>
+          <a:p>
+            <a:pPr algn="l">
+              <a:spcAft>
+                <a:spcPts val="400"/>
+              </a:spcAft>
+            </a:pPr>
+            <a:r>
+              <a:rPr sz="1100" b="0">
+                <a:solidFill>
+                  <a:srgbClr val="4B5765"/>
+                </a:solidFill>
+                <a:latin typeface="Segoe UI"/>
+              </a:rPr>
+              <a:t>of assessments at level 1–2</a:t>
+            </a:r>
+          </a:p>
+        </p:txBody>
+      </p:sp>
+      <p:sp>
+        <p:nvSpPr>
+          <p:cNvPr id="20" name="TextBox 19"/>
+          <p:cNvSpPr txBox="1"/>
+          <p:nvPr/>
+        </p:nvSpPr>
+        <p:spPr>
+          <a:xfrm>
+            <a:off x="9866376" y="3657600"/>
+            <a:ext cx="1691640" cy="548640"/>
+          </a:xfrm>
+          <a:prstGeom prst="rect">
+            <a:avLst/>
+          </a:prstGeom>
+          <a:noFill/>
+        </p:spPr>
+        <p:txBody>
+          <a:bodyPr wrap="square" anchor="t" lIns="18288" rIns="18288" tIns="18288" bIns="18288">
+            <a:spAutoFit/>
+          </a:bodyPr>
+          <a:lstStyle/>
+          <a:p>
+            <a:pPr algn="l">
+              <a:spcAft>
+                <a:spcPts val="400"/>
+              </a:spcAft>
+            </a:pPr>
+            <a:r>
+              <a:rPr sz="2400" b="0">
+                <a:solidFill>
+                  <a:srgbClr val="17202A"/>
+                </a:solidFill>
+                <a:latin typeface="Segoe UI Semibold"/>
+              </a:rPr>
+              <a:t>39%</a:t>
+            </a:r>
+          </a:p>
+        </p:txBody>
+      </p:sp>
+      <p:sp>
+        <p:nvSpPr>
+          <p:cNvPr id="21" name="TextBox 20"/>
+          <p:cNvSpPr txBox="1"/>
+          <p:nvPr/>
+        </p:nvSpPr>
+        <p:spPr>
+          <a:xfrm>
+            <a:off x="9866376" y="4224528"/>
+            <a:ext cx="1691640" cy="457200"/>
+          </a:xfrm>
+          <a:prstGeom prst="rect">
+            <a:avLst/>
+          </a:prstGeom>
+          <a:noFill/>
+        </p:spPr>
+        <p:txBody>
+          <a:bodyPr wrap="square" anchor="t" lIns="18288" rIns="18288" tIns="18288" bIns="18288">
+            <a:spAutoFit/>
+          </a:bodyPr>
+          <a:lstStyle/>
+          <a:p>
+            <a:pPr algn="l">
+              <a:spcAft>
+                <a:spcPts val="400"/>
+              </a:spcAft>
+            </a:pPr>
+            <a:r>
+              <a:rPr sz="1100" b="0">
+                <a:solidFill>
+                  <a:srgbClr val="4B5765"/>
+                </a:solidFill>
+                <a:latin typeface="Segoe UI"/>
+              </a:rPr>
+              <a:t>at level 4–5</a:t>
+            </a:r>
+          </a:p>
+        </p:txBody>
+      </p:sp>
+      <p:sp>
+        <p:nvSpPr>
+          <p:cNvPr id="22" name="TextBox 21"/>
+          <p:cNvSpPr txBox="1"/>
+          <p:nvPr/>
+        </p:nvSpPr>
+        <p:spPr>
+          <a:xfrm>
+            <a:off x="8083296" y="4983480"/>
+            <a:ext cx="3557016" cy="1097280"/>
+          </a:xfrm>
+          <a:prstGeom prst="rect">
+            <a:avLst/>
+          </a:prstGeom>
+          <a:noFill/>
+        </p:spPr>
+        <p:txBody>
+          <a:bodyPr wrap="square" anchor="t" lIns="18288" rIns="18288" tIns="18288" bIns="18288">
+            <a:spAutoFit/>
+          </a:bodyPr>
+          <a:lstStyle/>
+          <a:p>
+            <a:pPr algn="l">
+              <a:spcAft>
+                <a:spcPts val="400"/>
+              </a:spcAft>
+            </a:pPr>
+            <a:r>
+              <a:rPr sz="1100" b="0">
+                <a:solidFill>
+                  <a:srgbClr val="4B5765"/>
+                </a:solidFill>
+                <a:latin typeface="Segoe UI"/>
+              </a:rPr>
+              <a:t>% of assessed employees meeting their role's required level. Gaps are specific skills, not whole categories.</a:t>
+            </a:r>
+          </a:p>
+        </p:txBody>
+      </p:sp>
+      <p:cxnSp>
+        <p:nvCxnSpPr>
+          <p:cNvPr id="23" name="Connector 22"/>
+          <p:cNvCxnSpPr/>
+          <p:nvPr/>
+        </p:nvCxnSpPr>
+        <p:spPr>
+          <a:xfrm>
+            <a:off x="548640" y="6400800"/>
+            <a:ext cx="11094415" cy="0"/>
+          </a:xfrm>
+          <a:prstGeom prst="line">
+            <a:avLst/>
+          </a:prstGeom>
+          <a:ln w="9525">
+            <a:solidFill>
+              <a:srgbClr val="D4DAE1"/>
+            </a:solidFill>
+          </a:ln>
+        </p:spPr>
+      </p:cxnSp>
+      <p:sp>
+        <p:nvSpPr>
+          <p:cNvPr id="24" name="TextBox 23"/>
+          <p:cNvSpPr txBox="1"/>
+          <p:nvPr/>
+        </p:nvSpPr>
+        <p:spPr>
+          <a:xfrm>
+            <a:off x="548640" y="6455664"/>
+            <a:ext cx="7315200" cy="274320"/>
+          </a:xfrm>
+          <a:prstGeom prst="rect">
+            <a:avLst/>
+          </a:prstGeom>
+          <a:noFill/>
+        </p:spPr>
+        <p:txBody>
+          <a:bodyPr wrap="square" anchor="t" lIns="18288" rIns="18288" tIns="18288" bIns="18288">
+            <a:spAutoFit/>
+          </a:bodyPr>
+          <a:lstStyle/>
+          <a:p>
+            <a:pPr algn="l">
+              <a:spcAft>
+                <a:spcPts val="400"/>
+              </a:spcAft>
+            </a:pPr>
+            <a:r>
+              <a:rPr sz="900" b="0">
+                <a:solidFill>
+                  <a:srgbClr val="8A94A0"/>
+                </a:solidFill>
+                <a:latin typeface="Segoe UI"/>
+              </a:rPr>
+              <a:t>ACME Talent Lake  ·  Data Engineer track  ·  Coding Workshop 2026</a:t>
+            </a:r>
+          </a:p>
+        </p:txBody>
+      </p:sp>
+      <p:sp>
+        <p:nvSpPr>
+          <p:cNvPr id="25" name="TextBox 24"/>
+          <p:cNvSpPr txBox="1"/>
+          <p:nvPr/>
+        </p:nvSpPr>
+        <p:spPr>
+          <a:xfrm>
+            <a:off x="10698480" y="6455664"/>
+            <a:ext cx="941832" cy="274320"/>
+          </a:xfrm>
+          <a:prstGeom prst="rect">
+            <a:avLst/>
+          </a:prstGeom>
+          <a:noFill/>
+        </p:spPr>
+        <p:txBody>
+          <a:bodyPr wrap="square" anchor="t" lIns="18288" rIns="18288" tIns="18288" bIns="18288">
+            <a:spAutoFit/>
+          </a:bodyPr>
+          <a:lstStyle/>
+          <a:p>
+            <a:pPr algn="r">
+              <a:spcAft>
+                <a:spcPts val="400"/>
+              </a:spcAft>
+            </a:pPr>
+            <a:r>
+              <a:rPr sz="900" b="0">
+                <a:solidFill>
+                  <a:srgbClr val="8A94A0"/>
+                </a:solidFill>
+                <a:latin typeface="Segoe UI"/>
+              </a:rPr>
+              <a:t>10 / 12</a:t>
+            </a:r>
+          </a:p>
+        </p:txBody>
+      </p:sp>
+    </p:spTree>
+  </p:cSld>
+  <p:clrMapOvr>
+    <a:masterClrMapping/>
+  </p:clrMapOvr>
+</p:sld>
+</file>
+
+<file path=ppt/slides/slide11.xml><?xml version="1.0" encoding="utf-8"?>
+<p:sld xmlns:a="http://schemas.openxmlformats.org/drawingml/2006/main" xmlns:p="http://schemas.openxmlformats.org/presentationml/2006/main" xmlns:r="http://schemas.openxmlformats.org/officeDocument/2006/relationships">
+  <p:cSld>
+    <p:bg>
+      <p:bgPr>
+        <a:solidFill>
+          <a:srgbClr val="FFFFFF"/>
+        </a:solidFill>
+        <a:effectLst/>
+      </p:bgPr>
+    </p:bg>
+    <p:spTree>
+      <p:nvGrpSpPr>
+        <p:cNvPr id="1" name=""/>
+        <p:cNvGrpSpPr/>
+        <p:nvPr/>
+      </p:nvGrpSpPr>
+      <p:grpSpPr/>
+      <p:sp>
+        <p:nvSpPr>
+          <p:cNvPr id="2" name="TextBox 1"/>
+          <p:cNvSpPr txBox="1"/>
+          <p:nvPr/>
+        </p:nvSpPr>
+        <p:spPr>
+          <a:xfrm>
+            <a:off x="548640" y="292608"/>
+            <a:ext cx="8229600" cy="274320"/>
+          </a:xfrm>
+          <a:prstGeom prst="rect">
+            <a:avLst/>
+          </a:prstGeom>
+          <a:noFill/>
+        </p:spPr>
+        <p:txBody>
+          <a:bodyPr wrap="square" anchor="t" lIns="18288" rIns="18288" tIns="18288" bIns="18288">
+            <a:spAutoFit/>
+          </a:bodyPr>
+          <a:lstStyle/>
+          <a:p>
+            <a:pPr algn="l">
+              <a:spcAft>
+                <a:spcPts val="400"/>
+              </a:spcAft>
+            </a:pPr>
+            <a:r>
+              <a:rPr sz="1100" b="0">
+                <a:solidFill>
+                  <a:srgbClr val="1D4E89"/>
+                </a:solidFill>
+                <a:latin typeface="Segoe UI Semibold"/>
+              </a:rPr>
               <a:t>DEPLOYMENT &amp; TESTING</a:t>
             </a:r>
           </a:p>
@@ -7370,7 +8402,7 @@
                 </a:solidFill>
                 <a:latin typeface="Segoe UI"/>
               </a:rPr>
-              <a:t>10 / 11</a:t>
+              <a:t>11 / 12</a:t>
             </a:r>
           </a:p>
         </p:txBody>
@@ -7383,7 +8415,7 @@
 </p:sld>
 </file>
 
-<file path=ppt/slides/slide11.xml><?xml version="1.0" encoding="utf-8"?>
+<file path=ppt/slides/slide12.xml><?xml version="1.0" encoding="utf-8"?>
 <p:sld xmlns:a="http://schemas.openxmlformats.org/drawingml/2006/main" xmlns:p="http://schemas.openxmlformats.org/presentationml/2006/main" xmlns:r="http://schemas.openxmlformats.org/officeDocument/2006/relationships">
   <p:cSld>
     <p:bg>
@@ -8307,7 +9339,7 @@
                 </a:solidFill>
                 <a:latin typeface="Segoe UI"/>
               </a:rPr>
-              <a:t>11 / 11</a:t>
+              <a:t>12 / 12</a:t>
             </a:r>
           </a:p>
         </p:txBody>
@@ -9346,7 +10378,7 @@
                 </a:solidFill>
                 <a:latin typeface="Segoe UI"/>
               </a:rPr>
-              <a:t>2 / 11</a:t>
+              <a:t>2 / 12</a:t>
             </a:r>
           </a:p>
         </p:txBody>
@@ -11427,7 +12459,7 @@
                 </a:solidFill>
                 <a:latin typeface="Segoe UI"/>
               </a:rPr>
-              <a:t>3 / 11</a:t>
+              <a:t>3 / 12</a:t>
             </a:r>
           </a:p>
         </p:txBody>
@@ -11441,6 +12473,2483 @@
 </file>
 
 <file path=ppt/slides/slide4.xml><?xml version="1.0" encoding="utf-8"?>
+<p:sld xmlns:a="http://schemas.openxmlformats.org/drawingml/2006/main" xmlns:p="http://schemas.openxmlformats.org/presentationml/2006/main" xmlns:r="http://schemas.openxmlformats.org/officeDocument/2006/relationships">
+  <p:cSld>
+    <p:bg>
+      <p:bgPr>
+        <a:solidFill>
+          <a:srgbClr val="FFFFFF"/>
+        </a:solidFill>
+        <a:effectLst/>
+      </p:bgPr>
+    </p:bg>
+    <p:spTree>
+      <p:nvGrpSpPr>
+        <p:cNvPr id="1" name=""/>
+        <p:cNvGrpSpPr/>
+        <p:nvPr/>
+      </p:nvGrpSpPr>
+      <p:grpSpPr/>
+      <p:sp>
+        <p:nvSpPr>
+          <p:cNvPr id="2" name="TextBox 1"/>
+          <p:cNvSpPr txBox="1"/>
+          <p:nvPr/>
+        </p:nvSpPr>
+        <p:spPr>
+          <a:xfrm>
+            <a:off x="548640" y="292608"/>
+            <a:ext cx="8229600" cy="274320"/>
+          </a:xfrm>
+          <a:prstGeom prst="rect">
+            <a:avLst/>
+          </a:prstGeom>
+          <a:noFill/>
+        </p:spPr>
+        <p:txBody>
+          <a:bodyPr wrap="square" anchor="t" lIns="18288" rIns="18288" tIns="18288" bIns="18288">
+            <a:spAutoFit/>
+          </a:bodyPr>
+          <a:lstStyle/>
+          <a:p>
+            <a:pPr algn="l">
+              <a:spcAft>
+                <a:spcPts val="400"/>
+              </a:spcAft>
+            </a:pPr>
+            <a:r>
+              <a:rPr sz="1100" b="0">
+                <a:solidFill>
+                  <a:srgbClr val="1D4E89"/>
+                </a:solidFill>
+                <a:latin typeface="Segoe UI Semibold"/>
+              </a:rPr>
+              <a:t>ARCHITECTURE · WHAT MAKES IT ROBUST</a:t>
+            </a:r>
+          </a:p>
+        </p:txBody>
+      </p:sp>
+      <p:sp>
+        <p:nvSpPr>
+          <p:cNvPr id="3" name="TextBox 2"/>
+          <p:cNvSpPr txBox="1"/>
+          <p:nvPr/>
+        </p:nvSpPr>
+        <p:spPr>
+          <a:xfrm>
+            <a:off x="548640" y="566928"/>
+            <a:ext cx="11064240" cy="731520"/>
+          </a:xfrm>
+          <a:prstGeom prst="rect">
+            <a:avLst/>
+          </a:prstGeom>
+          <a:noFill/>
+        </p:spPr>
+        <p:txBody>
+          <a:bodyPr wrap="square" anchor="t" lIns="18288" rIns="18288" tIns="18288" bIns="18288">
+            <a:spAutoFit/>
+          </a:bodyPr>
+          <a:lstStyle/>
+          <a:p>
+            <a:pPr algn="l">
+              <a:spcAft>
+                <a:spcPts val="400"/>
+              </a:spcAft>
+            </a:pPr>
+            <a:r>
+              <a:rPr sz="2600" b="0">
+                <a:solidFill>
+                  <a:srgbClr val="17202A"/>
+                </a:solidFill>
+                <a:latin typeface="Segoe UI Semibold"/>
+              </a:rPr>
+              <a:t>Built to be trusted: the extras at every layer</a:t>
+            </a:r>
+          </a:p>
+        </p:txBody>
+      </p:sp>
+      <p:sp>
+        <p:nvSpPr>
+          <p:cNvPr id="4" name="Rounded Rectangle 3"/>
+          <p:cNvSpPr/>
+          <p:nvPr/>
+        </p:nvSpPr>
+        <p:spPr>
+          <a:xfrm>
+            <a:off x="457200" y="1298448"/>
+            <a:ext cx="1965960" cy="1417320"/>
+          </a:xfrm>
+          <a:prstGeom prst="roundRect">
+            <a:avLst>
+              <a:gd name="adj" fmla="val 6000"/>
+            </a:avLst>
+          </a:prstGeom>
+          <a:solidFill>
+            <a:srgbClr val="FFFFFF"/>
+          </a:solidFill>
+          <a:ln w="15875">
+            <a:solidFill>
+              <a:srgbClr val="D4DAE1"/>
+            </a:solidFill>
+          </a:ln>
+        </p:spPr>
+        <p:txBody>
+          <a:bodyPr rtlCol="0" anchor="ctr"/>
+          <a:lstStyle/>
+          <a:p/>
+        </p:txBody>
+      </p:sp>
+      <p:sp>
+        <p:nvSpPr>
+          <p:cNvPr id="5" name="TextBox 4"/>
+          <p:cNvSpPr txBox="1"/>
+          <p:nvPr/>
+        </p:nvSpPr>
+        <p:spPr>
+          <a:xfrm>
+            <a:off x="594360" y="1389888"/>
+            <a:ext cx="1691639" cy="292608"/>
+          </a:xfrm>
+          <a:prstGeom prst="rect">
+            <a:avLst/>
+          </a:prstGeom>
+          <a:noFill/>
+        </p:spPr>
+        <p:txBody>
+          <a:bodyPr wrap="square" anchor="t" lIns="18288" rIns="18288" tIns="18288" bIns="18288">
+            <a:spAutoFit/>
+          </a:bodyPr>
+          <a:lstStyle/>
+          <a:p>
+            <a:pPr algn="l">
+              <a:spcAft>
+                <a:spcPts val="400"/>
+              </a:spcAft>
+            </a:pPr>
+            <a:r>
+              <a:rPr sz="1300" b="0">
+                <a:solidFill>
+                  <a:srgbClr val="17202A"/>
+                </a:solidFill>
+                <a:latin typeface="Segoe UI Semibold"/>
+              </a:rPr>
+              <a:t>PostgreSQL · Aurora</a:t>
+            </a:r>
+          </a:p>
+        </p:txBody>
+      </p:sp>
+      <p:sp>
+        <p:nvSpPr>
+          <p:cNvPr id="6" name="TextBox 5"/>
+          <p:cNvSpPr txBox="1"/>
+          <p:nvPr/>
+        </p:nvSpPr>
+        <p:spPr>
+          <a:xfrm>
+            <a:off x="594360" y="1728216"/>
+            <a:ext cx="1691639" cy="914400"/>
+          </a:xfrm>
+          <a:prstGeom prst="rect">
+            <a:avLst/>
+          </a:prstGeom>
+          <a:noFill/>
+        </p:spPr>
+        <p:txBody>
+          <a:bodyPr wrap="square" anchor="t" lIns="18288" rIns="18288" tIns="18288" bIns="18288">
+            <a:spAutoFit/>
+          </a:bodyPr>
+          <a:lstStyle/>
+          <a:p>
+            <a:pPr algn="l">
+              <a:spcAft>
+                <a:spcPts val="300"/>
+              </a:spcAft>
+            </a:pPr>
+            <a:r>
+              <a:rPr sz="1050" b="0">
+                <a:solidFill>
+                  <a:srgbClr val="4B5765"/>
+                </a:solidFill>
+                <a:latin typeface="Segoe UI"/>
+              </a:rPr>
+              <a:t>• one read-only snapshot of all 7 tables</a:t>
+            </a:r>
+          </a:p>
+          <a:p>
+            <a:pPr algn="l">
+              <a:spcAft>
+                <a:spcPts val="300"/>
+              </a:spcAft>
+            </a:pPr>
+            <a:r>
+              <a:rPr sz="1050" b="0">
+                <a:solidFill>
+                  <a:srgbClr val="4B5765"/>
+                </a:solidFill>
+                <a:latin typeface="Segoe UI"/>
+              </a:rPr>
+              <a:t>• retries with backoff (Aurora wake-up)</a:t>
+            </a:r>
+          </a:p>
+          <a:p>
+            <a:pPr algn="l">
+              <a:spcAft>
+                <a:spcPts val="300"/>
+              </a:spcAft>
+            </a:pPr>
+            <a:r>
+              <a:rPr sz="1050" b="0">
+                <a:solidFill>
+                  <a:srgbClr val="4B5765"/>
+                </a:solidFill>
+                <a:latin typeface="Segoe UI"/>
+              </a:rPr>
+              <a:t>• TLS in the cloud</a:t>
+            </a:r>
+          </a:p>
+        </p:txBody>
+      </p:sp>
+      <p:sp>
+        <p:nvSpPr>
+          <p:cNvPr id="7" name="Rounded Rectangle 6"/>
+          <p:cNvSpPr/>
+          <p:nvPr/>
+        </p:nvSpPr>
+        <p:spPr>
+          <a:xfrm>
+            <a:off x="457200" y="2852928"/>
+            <a:ext cx="1965960" cy="1234440"/>
+          </a:xfrm>
+          <a:prstGeom prst="roundRect">
+            <a:avLst>
+              <a:gd name="adj" fmla="val 6000"/>
+            </a:avLst>
+          </a:prstGeom>
+          <a:solidFill>
+            <a:srgbClr val="FFFFFF"/>
+          </a:solidFill>
+          <a:ln w="15875">
+            <a:solidFill>
+              <a:srgbClr val="D4DAE1"/>
+            </a:solidFill>
+          </a:ln>
+        </p:spPr>
+        <p:txBody>
+          <a:bodyPr rtlCol="0" anchor="ctr"/>
+          <a:lstStyle/>
+          <a:p/>
+        </p:txBody>
+      </p:sp>
+      <p:sp>
+        <p:nvSpPr>
+          <p:cNvPr id="8" name="TextBox 7"/>
+          <p:cNvSpPr txBox="1"/>
+          <p:nvPr/>
+        </p:nvSpPr>
+        <p:spPr>
+          <a:xfrm>
+            <a:off x="594360" y="2944368"/>
+            <a:ext cx="1691639" cy="292608"/>
+          </a:xfrm>
+          <a:prstGeom prst="rect">
+            <a:avLst/>
+          </a:prstGeom>
+          <a:noFill/>
+        </p:spPr>
+        <p:txBody>
+          <a:bodyPr wrap="square" anchor="t" lIns="18288" rIns="18288" tIns="18288" bIns="18288">
+            <a:spAutoFit/>
+          </a:bodyPr>
+          <a:lstStyle/>
+          <a:p>
+            <a:pPr algn="l">
+              <a:spcAft>
+                <a:spcPts val="400"/>
+              </a:spcAft>
+            </a:pPr>
+            <a:r>
+              <a:rPr sz="1300" b="0">
+                <a:solidFill>
+                  <a:srgbClr val="17202A"/>
+                </a:solidFill>
+                <a:latin typeface="Segoe UI Semibold"/>
+              </a:rPr>
+              <a:t>S3 landing</a:t>
+            </a:r>
+          </a:p>
+        </p:txBody>
+      </p:sp>
+      <p:sp>
+        <p:nvSpPr>
+          <p:cNvPr id="9" name="TextBox 8"/>
+          <p:cNvSpPr txBox="1"/>
+          <p:nvPr/>
+        </p:nvSpPr>
+        <p:spPr>
+          <a:xfrm>
+            <a:off x="594360" y="3282696"/>
+            <a:ext cx="1691639" cy="731520"/>
+          </a:xfrm>
+          <a:prstGeom prst="rect">
+            <a:avLst/>
+          </a:prstGeom>
+          <a:noFill/>
+        </p:spPr>
+        <p:txBody>
+          <a:bodyPr wrap="square" anchor="t" lIns="18288" rIns="18288" tIns="18288" bIns="18288">
+            <a:spAutoFit/>
+          </a:bodyPr>
+          <a:lstStyle/>
+          <a:p>
+            <a:pPr algn="l">
+              <a:spcAft>
+                <a:spcPts val="300"/>
+              </a:spcAft>
+            </a:pPr>
+            <a:r>
+              <a:rPr sz="1050" b="0">
+                <a:solidFill>
+                  <a:srgbClr val="4B5765"/>
+                </a:solidFill>
+                <a:latin typeface="Segoe UI"/>
+              </a:rPr>
+              <a:t>• 783 JSONL files</a:t>
+            </a:r>
+          </a:p>
+          <a:p>
+            <a:pPr algn="l">
+              <a:spcAft>
+                <a:spcPts val="300"/>
+              </a:spcAft>
+            </a:pPr>
+            <a:r>
+              <a:rPr sz="1050" b="0">
+                <a:solidFill>
+                  <a:srgbClr val="4B5765"/>
+                </a:solidFill>
+                <a:latin typeface="Segoe UI"/>
+              </a:rPr>
+              <a:t>• change detection by ETag</a:t>
+            </a:r>
+          </a:p>
+        </p:txBody>
+      </p:sp>
+      <p:sp>
+        <p:nvSpPr>
+          <p:cNvPr id="10" name="Rounded Rectangle 9"/>
+          <p:cNvSpPr/>
+          <p:nvPr/>
+        </p:nvSpPr>
+        <p:spPr>
+          <a:xfrm>
+            <a:off x="2697480" y="1298448"/>
+            <a:ext cx="2194560" cy="2788920"/>
+          </a:xfrm>
+          <a:prstGeom prst="roundRect">
+            <a:avLst>
+              <a:gd name="adj" fmla="val 6000"/>
+            </a:avLst>
+          </a:prstGeom>
+          <a:solidFill>
+            <a:srgbClr val="F6E9DE"/>
+          </a:solidFill>
+          <a:ln w="15875">
+            <a:solidFill>
+              <a:srgbClr val="9B5A2A"/>
+            </a:solidFill>
+          </a:ln>
+        </p:spPr>
+        <p:txBody>
+          <a:bodyPr rtlCol="0" anchor="ctr"/>
+          <a:lstStyle/>
+          <a:p/>
+        </p:txBody>
+      </p:sp>
+      <p:sp>
+        <p:nvSpPr>
+          <p:cNvPr id="11" name="TextBox 10"/>
+          <p:cNvSpPr txBox="1"/>
+          <p:nvPr/>
+        </p:nvSpPr>
+        <p:spPr>
+          <a:xfrm>
+            <a:off x="2834640" y="1389888"/>
+            <a:ext cx="1920240" cy="292608"/>
+          </a:xfrm>
+          <a:prstGeom prst="rect">
+            <a:avLst/>
+          </a:prstGeom>
+          <a:noFill/>
+        </p:spPr>
+        <p:txBody>
+          <a:bodyPr wrap="square" anchor="t" lIns="18288" rIns="18288" tIns="18288" bIns="18288">
+            <a:spAutoFit/>
+          </a:bodyPr>
+          <a:lstStyle/>
+          <a:p>
+            <a:pPr algn="l">
+              <a:spcAft>
+                <a:spcPts val="400"/>
+              </a:spcAft>
+            </a:pPr>
+            <a:r>
+              <a:rPr sz="1300" b="0">
+                <a:solidFill>
+                  <a:srgbClr val="9B5A2A"/>
+                </a:solidFill>
+                <a:latin typeface="Segoe UI Semibold"/>
+              </a:rPr>
+              <a:t>Bronze</a:t>
+            </a:r>
+          </a:p>
+        </p:txBody>
+      </p:sp>
+      <p:sp>
+        <p:nvSpPr>
+          <p:cNvPr id="12" name="TextBox 11"/>
+          <p:cNvSpPr txBox="1"/>
+          <p:nvPr/>
+        </p:nvSpPr>
+        <p:spPr>
+          <a:xfrm>
+            <a:off x="2834640" y="1728216"/>
+            <a:ext cx="1920240" cy="2286000"/>
+          </a:xfrm>
+          <a:prstGeom prst="rect">
+            <a:avLst/>
+          </a:prstGeom>
+          <a:noFill/>
+        </p:spPr>
+        <p:txBody>
+          <a:bodyPr wrap="square" anchor="t" lIns="18288" rIns="18288" tIns="18288" bIns="18288">
+            <a:spAutoFit/>
+          </a:bodyPr>
+          <a:lstStyle/>
+          <a:p>
+            <a:pPr algn="l">
+              <a:spcAft>
+                <a:spcPts val="300"/>
+              </a:spcAft>
+            </a:pPr>
+            <a:r>
+              <a:rPr sz="1050" b="0">
+                <a:solidFill>
+                  <a:srgbClr val="4B5765"/>
+                </a:solidFill>
+                <a:latin typeface="Segoe UI"/>
+              </a:rPr>
+              <a:t>• write-once: re-runs skip loaded days</a:t>
+            </a:r>
+          </a:p>
+          <a:p>
+            <a:pPr algn="l">
+              <a:spcAft>
+                <a:spcPts val="300"/>
+              </a:spcAft>
+            </a:pPr>
+            <a:r>
+              <a:rPr sz="1050" b="0">
+                <a:solidFill>
+                  <a:srgbClr val="4B5765"/>
+                </a:solidFill>
+                <a:latin typeface="Segoe UI"/>
+              </a:rPr>
+              <a:t>• versioned: dated snapshots, file versions named by ETag</a:t>
+            </a:r>
+          </a:p>
+          <a:p>
+            <a:pPr algn="l">
+              <a:spcAft>
+                <a:spcPts val="300"/>
+              </a:spcAft>
+            </a:pPr>
+            <a:r>
+              <a:rPr sz="1050" b="0">
+                <a:solidFill>
+                  <a:srgbClr val="4B5765"/>
+                </a:solidFill>
+                <a:latin typeface="Segoe UI"/>
+              </a:rPr>
+              <a:t>• byte-identical raw copies</a:t>
+            </a:r>
+          </a:p>
+          <a:p>
+            <a:pPr algn="l">
+              <a:spcAft>
+                <a:spcPts val="300"/>
+              </a:spcAft>
+            </a:pPr>
+            <a:r>
+              <a:rPr sz="1050" b="0">
+                <a:solidFill>
+                  <a:srgbClr val="4B5765"/>
+                </a:solidFill>
+                <a:latin typeface="Segoe UI"/>
+              </a:rPr>
+              <a:t>• manifest written last (commit marker)</a:t>
+            </a:r>
+          </a:p>
+          <a:p>
+            <a:pPr algn="l">
+              <a:spcAft>
+                <a:spcPts val="300"/>
+              </a:spcAft>
+            </a:pPr>
+            <a:r>
+              <a:rPr sz="1050" b="0">
+                <a:solidFill>
+                  <a:srgbClr val="4B5765"/>
+                </a:solidFill>
+                <a:latin typeface="Segoe UI"/>
+              </a:rPr>
+              <a:t>• count, bytes, MD5 checked vs source</a:t>
+            </a:r>
+          </a:p>
+        </p:txBody>
+      </p:sp>
+      <p:sp>
+        <p:nvSpPr>
+          <p:cNvPr id="13" name="Rounded Rectangle 12"/>
+          <p:cNvSpPr/>
+          <p:nvPr/>
+        </p:nvSpPr>
+        <p:spPr>
+          <a:xfrm>
+            <a:off x="5166360" y="1298448"/>
+            <a:ext cx="2148840" cy="1645920"/>
+          </a:xfrm>
+          <a:prstGeom prst="roundRect">
+            <a:avLst>
+              <a:gd name="adj" fmla="val 6000"/>
+            </a:avLst>
+          </a:prstGeom>
+          <a:solidFill>
+            <a:srgbClr val="E8ECF0"/>
+          </a:solidFill>
+          <a:ln w="15875">
+            <a:solidFill>
+              <a:srgbClr val="5F6B77"/>
+            </a:solidFill>
+          </a:ln>
+        </p:spPr>
+        <p:txBody>
+          <a:bodyPr rtlCol="0" anchor="ctr"/>
+          <a:lstStyle/>
+          <a:p/>
+        </p:txBody>
+      </p:sp>
+      <p:sp>
+        <p:nvSpPr>
+          <p:cNvPr id="14" name="TextBox 13"/>
+          <p:cNvSpPr txBox="1"/>
+          <p:nvPr/>
+        </p:nvSpPr>
+        <p:spPr>
+          <a:xfrm>
+            <a:off x="5303520" y="1389888"/>
+            <a:ext cx="1874520" cy="292608"/>
+          </a:xfrm>
+          <a:prstGeom prst="rect">
+            <a:avLst/>
+          </a:prstGeom>
+          <a:noFill/>
+        </p:spPr>
+        <p:txBody>
+          <a:bodyPr wrap="square" anchor="t" lIns="18288" rIns="18288" tIns="18288" bIns="18288">
+            <a:spAutoFit/>
+          </a:bodyPr>
+          <a:lstStyle/>
+          <a:p>
+            <a:pPr algn="l">
+              <a:spcAft>
+                <a:spcPts val="400"/>
+              </a:spcAft>
+            </a:pPr>
+            <a:r>
+              <a:rPr sz="1300" b="0">
+                <a:solidFill>
+                  <a:srgbClr val="5F6B77"/>
+                </a:solidFill>
+                <a:latin typeface="Segoe UI Semibold"/>
+              </a:rPr>
+              <a:t>Silver</a:t>
+            </a:r>
+          </a:p>
+        </p:txBody>
+      </p:sp>
+      <p:sp>
+        <p:nvSpPr>
+          <p:cNvPr id="15" name="TextBox 14"/>
+          <p:cNvSpPr txBox="1"/>
+          <p:nvPr/>
+        </p:nvSpPr>
+        <p:spPr>
+          <a:xfrm>
+            <a:off x="5303520" y="1728216"/>
+            <a:ext cx="1874520" cy="1143000"/>
+          </a:xfrm>
+          <a:prstGeom prst="rect">
+            <a:avLst/>
+          </a:prstGeom>
+          <a:noFill/>
+        </p:spPr>
+        <p:txBody>
+          <a:bodyPr wrap="square" anchor="t" lIns="18288" rIns="18288" tIns="18288" bIns="18288">
+            <a:spAutoFit/>
+          </a:bodyPr>
+          <a:lstStyle/>
+          <a:p>
+            <a:pPr algn="l">
+              <a:spcAft>
+                <a:spcPts val="300"/>
+              </a:spcAft>
+            </a:pPr>
+            <a:r>
+              <a:rPr sz="1000" b="0">
+                <a:solidFill>
+                  <a:srgbClr val="4B5765"/>
+                </a:solidFill>
+                <a:latin typeface="Segoe UI"/>
+              </a:rPr>
+              <a:t>• contract per dataset</a:t>
+            </a:r>
+          </a:p>
+          <a:p>
+            <a:pPr algn="l">
+              <a:spcAft>
+                <a:spcPts val="300"/>
+              </a:spcAft>
+            </a:pPr>
+            <a:r>
+              <a:rPr sz="1000" b="0">
+                <a:solidFill>
+                  <a:srgbClr val="4B5765"/>
+                </a:solidFill>
+                <a:latin typeface="Segoe UI"/>
+              </a:rPr>
+              <a:t>• schema drift recovered (notes → text)</a:t>
+            </a:r>
+          </a:p>
+          <a:p>
+            <a:pPr algn="l">
+              <a:spcAft>
+                <a:spcPts val="300"/>
+              </a:spcAft>
+            </a:pPr>
+            <a:r>
+              <a:rPr sz="1000" b="0">
+                <a:solidFill>
+                  <a:srgbClr val="4B5765"/>
+                </a:solidFill>
+                <a:latin typeface="Segoe UI"/>
+              </a:rPr>
+              <a:t>• dedupe, types, keys checked</a:t>
+            </a:r>
+          </a:p>
+          <a:p>
+            <a:pPr algn="l">
+              <a:spcAft>
+                <a:spcPts val="300"/>
+              </a:spcAft>
+            </a:pPr>
+            <a:r>
+              <a:rPr sz="1000" b="0">
+                <a:solidFill>
+                  <a:srgbClr val="4B5765"/>
+                </a:solidFill>
+                <a:latin typeface="Segoe UI"/>
+              </a:rPr>
+              <a:t>• structural checks before publish</a:t>
+            </a:r>
+          </a:p>
+        </p:txBody>
+      </p:sp>
+      <p:sp>
+        <p:nvSpPr>
+          <p:cNvPr id="16" name="Rounded Rectangle 15"/>
+          <p:cNvSpPr/>
+          <p:nvPr/>
+        </p:nvSpPr>
+        <p:spPr>
+          <a:xfrm>
+            <a:off x="5166360" y="3035808"/>
+            <a:ext cx="2148840" cy="1051560"/>
+          </a:xfrm>
+          <a:prstGeom prst="roundRect">
+            <a:avLst>
+              <a:gd name="adj" fmla="val 6000"/>
+            </a:avLst>
+          </a:prstGeom>
+          <a:solidFill>
+            <a:srgbClr val="F8E2DC"/>
+          </a:solidFill>
+          <a:ln w="15875">
+            <a:solidFill>
+              <a:srgbClr val="B0412D"/>
+            </a:solidFill>
+          </a:ln>
+        </p:spPr>
+        <p:txBody>
+          <a:bodyPr rtlCol="0" anchor="ctr"/>
+          <a:lstStyle/>
+          <a:p/>
+        </p:txBody>
+      </p:sp>
+      <p:sp>
+        <p:nvSpPr>
+          <p:cNvPr id="17" name="TextBox 16"/>
+          <p:cNvSpPr txBox="1"/>
+          <p:nvPr/>
+        </p:nvSpPr>
+        <p:spPr>
+          <a:xfrm>
+            <a:off x="5303520" y="3127248"/>
+            <a:ext cx="1874520" cy="292608"/>
+          </a:xfrm>
+          <a:prstGeom prst="rect">
+            <a:avLst/>
+          </a:prstGeom>
+          <a:noFill/>
+        </p:spPr>
+        <p:txBody>
+          <a:bodyPr wrap="square" anchor="t" lIns="18288" rIns="18288" tIns="18288" bIns="18288">
+            <a:spAutoFit/>
+          </a:bodyPr>
+          <a:lstStyle/>
+          <a:p>
+            <a:pPr algn="l">
+              <a:spcAft>
+                <a:spcPts val="400"/>
+              </a:spcAft>
+            </a:pPr>
+            <a:r>
+              <a:rPr sz="1300" b="0">
+                <a:solidFill>
+                  <a:srgbClr val="B0412D"/>
+                </a:solidFill>
+                <a:latin typeface="Segoe UI Semibold"/>
+              </a:rPr>
+              <a:t>Quarantine + alerts</a:t>
+            </a:r>
+          </a:p>
+        </p:txBody>
+      </p:sp>
+      <p:sp>
+        <p:nvSpPr>
+          <p:cNvPr id="18" name="TextBox 17"/>
+          <p:cNvSpPr txBox="1"/>
+          <p:nvPr/>
+        </p:nvSpPr>
+        <p:spPr>
+          <a:xfrm>
+            <a:off x="5303520" y="3465576"/>
+            <a:ext cx="1874520" cy="548639"/>
+          </a:xfrm>
+          <a:prstGeom prst="rect">
+            <a:avLst/>
+          </a:prstGeom>
+          <a:noFill/>
+        </p:spPr>
+        <p:txBody>
+          <a:bodyPr wrap="square" anchor="t" lIns="18288" rIns="18288" tIns="18288" bIns="18288">
+            <a:spAutoFit/>
+          </a:bodyPr>
+          <a:lstStyle/>
+          <a:p>
+            <a:pPr algn="l">
+              <a:spcAft>
+                <a:spcPts val="300"/>
+              </a:spcAft>
+            </a:pPr>
+            <a:r>
+              <a:rPr sz="1000" b="0">
+                <a:solidFill>
+                  <a:srgbClr val="4B5765"/>
+                </a:solidFill>
+                <a:latin typeface="Segoe UI"/>
+              </a:rPr>
+              <a:t>• row + reason + raw line</a:t>
+            </a:r>
+          </a:p>
+          <a:p>
+            <a:pPr algn="l">
+              <a:spcAft>
+                <a:spcPts val="300"/>
+              </a:spcAft>
+            </a:pPr>
+            <a:r>
+              <a:rPr sz="1000" b="0">
+                <a:solidFill>
+                  <a:srgbClr val="4B5765"/>
+                </a:solidFill>
+                <a:latin typeface="Segoe UI"/>
+              </a:rPr>
+              <a:t>• warn ≥ 5% · stop ≥ 50%</a:t>
+            </a:r>
+          </a:p>
+          <a:p>
+            <a:pPr algn="l">
+              <a:spcAft>
+                <a:spcPts val="300"/>
+              </a:spcAft>
+            </a:pPr>
+            <a:r>
+              <a:rPr sz="1000" b="0">
+                <a:solidFill>
+                  <a:srgbClr val="4B5765"/>
+                </a:solidFill>
+                <a:latin typeface="Segoe UI"/>
+              </a:rPr>
+              <a:t>• last good data kept</a:t>
+            </a:r>
+          </a:p>
+        </p:txBody>
+      </p:sp>
+      <p:sp>
+        <p:nvSpPr>
+          <p:cNvPr id="19" name="Rounded Rectangle 18"/>
+          <p:cNvSpPr/>
+          <p:nvPr/>
+        </p:nvSpPr>
+        <p:spPr>
+          <a:xfrm>
+            <a:off x="7589520" y="1298448"/>
+            <a:ext cx="2057400" cy="2788920"/>
+          </a:xfrm>
+          <a:prstGeom prst="roundRect">
+            <a:avLst>
+              <a:gd name="adj" fmla="val 6000"/>
+            </a:avLst>
+          </a:prstGeom>
+          <a:solidFill>
+            <a:srgbClr val="F6ECCC"/>
+          </a:solidFill>
+          <a:ln w="15875">
+            <a:solidFill>
+              <a:srgbClr val="8F6C0E"/>
+            </a:solidFill>
+          </a:ln>
+        </p:spPr>
+        <p:txBody>
+          <a:bodyPr rtlCol="0" anchor="ctr"/>
+          <a:lstStyle/>
+          <a:p/>
+        </p:txBody>
+      </p:sp>
+      <p:sp>
+        <p:nvSpPr>
+          <p:cNvPr id="20" name="TextBox 19"/>
+          <p:cNvSpPr txBox="1"/>
+          <p:nvPr/>
+        </p:nvSpPr>
+        <p:spPr>
+          <a:xfrm>
+            <a:off x="7726680" y="1389888"/>
+            <a:ext cx="1783080" cy="292608"/>
+          </a:xfrm>
+          <a:prstGeom prst="rect">
+            <a:avLst/>
+          </a:prstGeom>
+          <a:noFill/>
+        </p:spPr>
+        <p:txBody>
+          <a:bodyPr wrap="square" anchor="t" lIns="18288" rIns="18288" tIns="18288" bIns="18288">
+            <a:spAutoFit/>
+          </a:bodyPr>
+          <a:lstStyle/>
+          <a:p>
+            <a:pPr algn="l">
+              <a:spcAft>
+                <a:spcPts val="400"/>
+              </a:spcAft>
+            </a:pPr>
+            <a:r>
+              <a:rPr sz="1300" b="0">
+                <a:solidFill>
+                  <a:srgbClr val="8F6C0E"/>
+                </a:solidFill>
+                <a:latin typeface="Segoe UI Semibold"/>
+              </a:rPr>
+              <a:t>Gold</a:t>
+            </a:r>
+          </a:p>
+        </p:txBody>
+      </p:sp>
+      <p:sp>
+        <p:nvSpPr>
+          <p:cNvPr id="21" name="TextBox 20"/>
+          <p:cNvSpPr txBox="1"/>
+          <p:nvPr/>
+        </p:nvSpPr>
+        <p:spPr>
+          <a:xfrm>
+            <a:off x="7726680" y="1728216"/>
+            <a:ext cx="1783080" cy="2286000"/>
+          </a:xfrm>
+          <a:prstGeom prst="rect">
+            <a:avLst/>
+          </a:prstGeom>
+          <a:noFill/>
+        </p:spPr>
+        <p:txBody>
+          <a:bodyPr wrap="square" anchor="t" lIns="18288" rIns="18288" tIns="18288" bIns="18288">
+            <a:spAutoFit/>
+          </a:bodyPr>
+          <a:lstStyle/>
+          <a:p>
+            <a:pPr algn="l">
+              <a:spcAft>
+                <a:spcPts val="300"/>
+              </a:spcAft>
+            </a:pPr>
+            <a:r>
+              <a:rPr sz="1050" b="0">
+                <a:solidFill>
+                  <a:srgbClr val="4B5765"/>
+                </a:solidFill>
+                <a:latin typeface="Segoe UI"/>
+              </a:rPr>
+              <a:t>• 8 tables, one per question</a:t>
+            </a:r>
+          </a:p>
+          <a:p>
+            <a:pPr algn="l">
+              <a:spcAft>
+                <a:spcPts val="300"/>
+              </a:spcAft>
+            </a:pPr>
+            <a:r>
+              <a:rPr sz="1050" b="0">
+                <a:solidFill>
+                  <a:srgbClr val="4B5765"/>
+                </a:solidFill>
+                <a:latin typeface="Segoe UI"/>
+              </a:rPr>
+              <a:t>• grain enforced</a:t>
+            </a:r>
+          </a:p>
+          <a:p>
+            <a:pPr algn="l">
+              <a:spcAft>
+                <a:spcPts val="300"/>
+              </a:spcAft>
+            </a:pPr>
+            <a:r>
+              <a:rPr sz="1050" b="0">
+                <a:solidFill>
+                  <a:srgbClr val="4B5765"/>
+                </a:solidFill>
+                <a:latin typeface="Segoe UI"/>
+              </a:rPr>
+              <a:t>• totals reconcile with Silver</a:t>
+            </a:r>
+          </a:p>
+          <a:p>
+            <a:pPr algn="l">
+              <a:spcAft>
+                <a:spcPts val="300"/>
+              </a:spcAft>
+            </a:pPr>
+            <a:r>
+              <a:rPr sz="1050" b="0">
+                <a:solidFill>
+                  <a:srgbClr val="4B5765"/>
+                </a:solidFill>
+                <a:latin typeface="Segoe UI"/>
+              </a:rPr>
+              <a:t>• rule invariants (risk = sum of signals)</a:t>
+            </a:r>
+          </a:p>
+          <a:p>
+            <a:pPr algn="l">
+              <a:spcAft>
+                <a:spcPts val="300"/>
+              </a:spcAft>
+            </a:pPr>
+            <a:r>
+              <a:rPr sz="1050" b="0">
+                <a:solidFill>
+                  <a:srgbClr val="4B5765"/>
+                </a:solidFill>
+                <a:latin typeface="Segoe UI"/>
+              </a:rPr>
+              <a:t>• rules in _catalog.json</a:t>
+            </a:r>
+          </a:p>
+          <a:p>
+            <a:pPr algn="l">
+              <a:spcAft>
+                <a:spcPts val="300"/>
+              </a:spcAft>
+            </a:pPr>
+            <a:r>
+              <a:rPr sz="1050" b="0">
+                <a:solidFill>
+                  <a:srgbClr val="4B5765"/>
+                </a:solidFill>
+                <a:latin typeface="Segoe UI"/>
+              </a:rPr>
+              <a:t>• answers in _summary.json</a:t>
+            </a:r>
+          </a:p>
+        </p:txBody>
+      </p:sp>
+      <p:sp>
+        <p:nvSpPr>
+          <p:cNvPr id="22" name="Rounded Rectangle 21"/>
+          <p:cNvSpPr/>
+          <p:nvPr/>
+        </p:nvSpPr>
+        <p:spPr>
+          <a:xfrm>
+            <a:off x="9921240" y="1298448"/>
+            <a:ext cx="1810512" cy="1325880"/>
+          </a:xfrm>
+          <a:prstGeom prst="roundRect">
+            <a:avLst>
+              <a:gd name="adj" fmla="val 6000"/>
+            </a:avLst>
+          </a:prstGeom>
+          <a:solidFill>
+            <a:srgbClr val="FFFFFF"/>
+          </a:solidFill>
+          <a:ln w="15875">
+            <a:solidFill>
+              <a:srgbClr val="D4DAE1"/>
+            </a:solidFill>
+          </a:ln>
+        </p:spPr>
+        <p:txBody>
+          <a:bodyPr rtlCol="0" anchor="ctr"/>
+          <a:lstStyle/>
+          <a:p/>
+        </p:txBody>
+      </p:sp>
+      <p:sp>
+        <p:nvSpPr>
+          <p:cNvPr id="23" name="TextBox 22"/>
+          <p:cNvSpPr txBox="1"/>
+          <p:nvPr/>
+        </p:nvSpPr>
+        <p:spPr>
+          <a:xfrm>
+            <a:off x="10058400" y="1389888"/>
+            <a:ext cx="1536192" cy="292608"/>
+          </a:xfrm>
+          <a:prstGeom prst="rect">
+            <a:avLst/>
+          </a:prstGeom>
+          <a:noFill/>
+        </p:spPr>
+        <p:txBody>
+          <a:bodyPr wrap="square" anchor="t" lIns="18288" rIns="18288" tIns="18288" bIns="18288">
+            <a:spAutoFit/>
+          </a:bodyPr>
+          <a:lstStyle/>
+          <a:p>
+            <a:pPr algn="l">
+              <a:spcAft>
+                <a:spcPts val="400"/>
+              </a:spcAft>
+            </a:pPr>
+            <a:r>
+              <a:rPr sz="1300" b="0">
+                <a:solidFill>
+                  <a:srgbClr val="17202A"/>
+                </a:solidFill>
+                <a:latin typeface="Segoe UI Semibold"/>
+              </a:rPr>
+              <a:t>Notebook</a:t>
+            </a:r>
+          </a:p>
+        </p:txBody>
+      </p:sp>
+      <p:sp>
+        <p:nvSpPr>
+          <p:cNvPr id="24" name="TextBox 23"/>
+          <p:cNvSpPr txBox="1"/>
+          <p:nvPr/>
+        </p:nvSpPr>
+        <p:spPr>
+          <a:xfrm>
+            <a:off x="10058400" y="1728216"/>
+            <a:ext cx="1536192" cy="822959"/>
+          </a:xfrm>
+          <a:prstGeom prst="rect">
+            <a:avLst/>
+          </a:prstGeom>
+          <a:noFill/>
+        </p:spPr>
+        <p:txBody>
+          <a:bodyPr wrap="square" anchor="t" lIns="18288" rIns="18288" tIns="18288" bIns="18288">
+            <a:spAutoFit/>
+          </a:bodyPr>
+          <a:lstStyle/>
+          <a:p>
+            <a:pPr algn="l">
+              <a:spcAft>
+                <a:spcPts val="300"/>
+              </a:spcAft>
+            </a:pPr>
+            <a:r>
+              <a:rPr sz="1050" b="0">
+                <a:solidFill>
+                  <a:srgbClr val="4B5765"/>
+                </a:solidFill>
+                <a:latin typeface="Segoe UI"/>
+              </a:rPr>
+              <a:t>• reads Gold only</a:t>
+            </a:r>
+          </a:p>
+          <a:p>
+            <a:pPr algn="l">
+              <a:spcAft>
+                <a:spcPts val="300"/>
+              </a:spcAft>
+            </a:pPr>
+            <a:r>
+              <a:rPr sz="1050" b="0">
+                <a:solidFill>
+                  <a:srgbClr val="4B5765"/>
+                </a:solidFill>
+                <a:latin typeface="Segoe UI"/>
+              </a:rPr>
+              <a:t>• every finding computed</a:t>
+            </a:r>
+          </a:p>
+          <a:p>
+            <a:pPr algn="l">
+              <a:spcAft>
+                <a:spcPts val="300"/>
+              </a:spcAft>
+            </a:pPr>
+            <a:r>
+              <a:rPr sz="1050" b="0">
+                <a:solidFill>
+                  <a:srgbClr val="4B5765"/>
+                </a:solidFill>
+                <a:latin typeface="Segoe UI"/>
+              </a:rPr>
+              <a:t>• saved with outputs</a:t>
+            </a:r>
+          </a:p>
+        </p:txBody>
+      </p:sp>
+      <p:sp>
+        <p:nvSpPr>
+          <p:cNvPr id="25" name="Rounded Rectangle 24"/>
+          <p:cNvSpPr/>
+          <p:nvPr/>
+        </p:nvSpPr>
+        <p:spPr>
+          <a:xfrm>
+            <a:off x="9921240" y="2761488"/>
+            <a:ext cx="1810512" cy="1325880"/>
+          </a:xfrm>
+          <a:prstGeom prst="roundRect">
+            <a:avLst>
+              <a:gd name="adj" fmla="val 6000"/>
+            </a:avLst>
+          </a:prstGeom>
+          <a:solidFill>
+            <a:srgbClr val="FFFFFF"/>
+          </a:solidFill>
+          <a:ln w="15875">
+            <a:solidFill>
+              <a:srgbClr val="D4DAE1"/>
+            </a:solidFill>
+          </a:ln>
+        </p:spPr>
+        <p:txBody>
+          <a:bodyPr rtlCol="0" anchor="ctr"/>
+          <a:lstStyle/>
+          <a:p/>
+        </p:txBody>
+      </p:sp>
+      <p:sp>
+        <p:nvSpPr>
+          <p:cNvPr id="26" name="TextBox 25"/>
+          <p:cNvSpPr txBox="1"/>
+          <p:nvPr/>
+        </p:nvSpPr>
+        <p:spPr>
+          <a:xfrm>
+            <a:off x="10058400" y="2852928"/>
+            <a:ext cx="1536192" cy="292608"/>
+          </a:xfrm>
+          <a:prstGeom prst="rect">
+            <a:avLst/>
+          </a:prstGeom>
+          <a:noFill/>
+        </p:spPr>
+        <p:txBody>
+          <a:bodyPr wrap="square" anchor="t" lIns="18288" rIns="18288" tIns="18288" bIns="18288">
+            <a:spAutoFit/>
+          </a:bodyPr>
+          <a:lstStyle/>
+          <a:p>
+            <a:pPr algn="l">
+              <a:spcAft>
+                <a:spcPts val="400"/>
+              </a:spcAft>
+            </a:pPr>
+            <a:r>
+              <a:rPr sz="1300" b="0">
+                <a:solidFill>
+                  <a:srgbClr val="17202A"/>
+                </a:solidFill>
+                <a:latin typeface="Segoe UI Semibold"/>
+              </a:rPr>
+              <a:t>Dashboard</a:t>
+            </a:r>
+          </a:p>
+        </p:txBody>
+      </p:sp>
+      <p:sp>
+        <p:nvSpPr>
+          <p:cNvPr id="27" name="TextBox 26"/>
+          <p:cNvSpPr txBox="1"/>
+          <p:nvPr/>
+        </p:nvSpPr>
+        <p:spPr>
+          <a:xfrm>
+            <a:off x="10058400" y="3191256"/>
+            <a:ext cx="1536192" cy="822959"/>
+          </a:xfrm>
+          <a:prstGeom prst="rect">
+            <a:avLst/>
+          </a:prstGeom>
+          <a:noFill/>
+        </p:spPr>
+        <p:txBody>
+          <a:bodyPr wrap="square" anchor="t" lIns="18288" rIns="18288" tIns="18288" bIns="18288">
+            <a:spAutoFit/>
+          </a:bodyPr>
+          <a:lstStyle/>
+          <a:p>
+            <a:pPr algn="l">
+              <a:spcAft>
+                <a:spcPts val="300"/>
+              </a:spcAft>
+            </a:pPr>
+            <a:r>
+              <a:rPr sz="1050" b="0">
+                <a:solidFill>
+                  <a:srgbClr val="4B5765"/>
+                </a:solidFill>
+                <a:latin typeface="Segoe UI"/>
+              </a:rPr>
+              <a:t>• Employee 360, filters</a:t>
+            </a:r>
+          </a:p>
+          <a:p>
+            <a:pPr algn="l">
+              <a:spcAft>
+                <a:spcPts val="300"/>
+              </a:spcAft>
+            </a:pPr>
+            <a:r>
+              <a:rPr sz="1050" b="0">
+                <a:solidFill>
+                  <a:srgbClr val="4B5765"/>
+                </a:solidFill>
+                <a:latin typeface="Segoe UI"/>
+              </a:rPr>
+              <a:t>• alert banner</a:t>
+            </a:r>
+          </a:p>
+          <a:p>
+            <a:pPr algn="l">
+              <a:spcAft>
+                <a:spcPts val="300"/>
+              </a:spcAft>
+            </a:pPr>
+            <a:r>
+              <a:rPr sz="1050" b="0">
+                <a:solidFill>
+                  <a:srgbClr val="4B5765"/>
+                </a:solidFill>
+                <a:latin typeface="Segoe UI"/>
+              </a:rPr>
+              <a:t>• public on EKS</a:t>
+            </a:r>
+          </a:p>
+        </p:txBody>
+      </p:sp>
+      <p:cxnSp>
+        <p:nvCxnSpPr>
+          <p:cNvPr id="28" name="Connector 27"/>
+          <p:cNvCxnSpPr/>
+          <p:nvPr/>
+        </p:nvCxnSpPr>
+        <p:spPr>
+          <a:xfrm>
+            <a:off x="2423160" y="1984248"/>
+            <a:ext cx="274320" cy="0"/>
+          </a:xfrm>
+          <a:prstGeom prst="line">
+            <a:avLst/>
+          </a:prstGeom>
+          <a:ln w="19050">
+            <a:solidFill>
+              <a:srgbClr val="4B5765"/>
+            </a:solidFill>
+            <a:tailEnd type="triangle" w="med" len="med"/>
+          </a:ln>
+        </p:spPr>
+      </p:cxnSp>
+      <p:cxnSp>
+        <p:nvCxnSpPr>
+          <p:cNvPr id="29" name="Connector 28"/>
+          <p:cNvCxnSpPr/>
+          <p:nvPr/>
+        </p:nvCxnSpPr>
+        <p:spPr>
+          <a:xfrm>
+            <a:off x="2423160" y="3447288"/>
+            <a:ext cx="274320" cy="0"/>
+          </a:xfrm>
+          <a:prstGeom prst="line">
+            <a:avLst/>
+          </a:prstGeom>
+          <a:ln w="19050">
+            <a:solidFill>
+              <a:srgbClr val="4B5765"/>
+            </a:solidFill>
+            <a:tailEnd type="triangle" w="med" len="med"/>
+          </a:ln>
+        </p:spPr>
+      </p:cxnSp>
+      <p:cxnSp>
+        <p:nvCxnSpPr>
+          <p:cNvPr id="30" name="Connector 29"/>
+          <p:cNvCxnSpPr/>
+          <p:nvPr/>
+        </p:nvCxnSpPr>
+        <p:spPr>
+          <a:xfrm>
+            <a:off x="4892040" y="2121408"/>
+            <a:ext cx="274320" cy="0"/>
+          </a:xfrm>
+          <a:prstGeom prst="line">
+            <a:avLst/>
+          </a:prstGeom>
+          <a:ln w="19050">
+            <a:solidFill>
+              <a:srgbClr val="4B5765"/>
+            </a:solidFill>
+            <a:tailEnd type="triangle" w="med" len="med"/>
+          </a:ln>
+        </p:spPr>
+      </p:cxnSp>
+      <p:cxnSp>
+        <p:nvCxnSpPr>
+          <p:cNvPr id="31" name="Connector 30"/>
+          <p:cNvCxnSpPr/>
+          <p:nvPr/>
+        </p:nvCxnSpPr>
+        <p:spPr>
+          <a:xfrm>
+            <a:off x="6236208" y="2944368"/>
+            <a:ext cx="0" cy="91440"/>
+          </a:xfrm>
+          <a:prstGeom prst="line">
+            <a:avLst/>
+          </a:prstGeom>
+          <a:ln w="19050">
+            <a:solidFill>
+              <a:srgbClr val="4B5765"/>
+            </a:solidFill>
+            <a:tailEnd type="triangle" w="med" len="med"/>
+          </a:ln>
+        </p:spPr>
+      </p:cxnSp>
+      <p:cxnSp>
+        <p:nvCxnSpPr>
+          <p:cNvPr id="32" name="Connector 31"/>
+          <p:cNvCxnSpPr/>
+          <p:nvPr/>
+        </p:nvCxnSpPr>
+        <p:spPr>
+          <a:xfrm>
+            <a:off x="7315200" y="2121408"/>
+            <a:ext cx="274320" cy="0"/>
+          </a:xfrm>
+          <a:prstGeom prst="line">
+            <a:avLst/>
+          </a:prstGeom>
+          <a:ln w="19050">
+            <a:solidFill>
+              <a:srgbClr val="4B5765"/>
+            </a:solidFill>
+            <a:tailEnd type="triangle" w="med" len="med"/>
+          </a:ln>
+        </p:spPr>
+      </p:cxnSp>
+      <p:cxnSp>
+        <p:nvCxnSpPr>
+          <p:cNvPr id="33" name="Connector 32"/>
+          <p:cNvCxnSpPr/>
+          <p:nvPr/>
+        </p:nvCxnSpPr>
+        <p:spPr>
+          <a:xfrm>
+            <a:off x="9646920" y="1938528"/>
+            <a:ext cx="274320" cy="0"/>
+          </a:xfrm>
+          <a:prstGeom prst="line">
+            <a:avLst/>
+          </a:prstGeom>
+          <a:ln w="19050">
+            <a:solidFill>
+              <a:srgbClr val="4B5765"/>
+            </a:solidFill>
+            <a:tailEnd type="triangle" w="med" len="med"/>
+          </a:ln>
+        </p:spPr>
+      </p:cxnSp>
+      <p:cxnSp>
+        <p:nvCxnSpPr>
+          <p:cNvPr id="34" name="Connector 33"/>
+          <p:cNvCxnSpPr/>
+          <p:nvPr/>
+        </p:nvCxnSpPr>
+        <p:spPr>
+          <a:xfrm>
+            <a:off x="9646920" y="3401568"/>
+            <a:ext cx="274320" cy="0"/>
+          </a:xfrm>
+          <a:prstGeom prst="line">
+            <a:avLst/>
+          </a:prstGeom>
+          <a:ln w="19050">
+            <a:solidFill>
+              <a:srgbClr val="4B5765"/>
+            </a:solidFill>
+            <a:tailEnd type="triangle" w="med" len="med"/>
+          </a:ln>
+        </p:spPr>
+      </p:cxnSp>
+      <p:sp>
+        <p:nvSpPr>
+          <p:cNvPr id="35" name="TextBox 34"/>
+          <p:cNvSpPr txBox="1"/>
+          <p:nvPr/>
+        </p:nvSpPr>
+        <p:spPr>
+          <a:xfrm>
+            <a:off x="457200" y="4279392"/>
+            <a:ext cx="3657600" cy="274320"/>
+          </a:xfrm>
+          <a:prstGeom prst="rect">
+            <a:avLst/>
+          </a:prstGeom>
+          <a:noFill/>
+        </p:spPr>
+        <p:txBody>
+          <a:bodyPr wrap="square" anchor="t" lIns="18288" rIns="18288" tIns="18288" bIns="18288">
+            <a:spAutoFit/>
+          </a:bodyPr>
+          <a:lstStyle/>
+          <a:p>
+            <a:pPr algn="l">
+              <a:spcAft>
+                <a:spcPts val="400"/>
+              </a:spcAft>
+            </a:pPr>
+            <a:r>
+              <a:rPr sz="1000" b="0">
+                <a:solidFill>
+                  <a:srgbClr val="8A94A0"/>
+                </a:solidFill>
+                <a:latin typeface="Segoe UI Semibold"/>
+              </a:rPr>
+              <a:t>ACROSS EVERY RUN</a:t>
+            </a:r>
+          </a:p>
+        </p:txBody>
+      </p:sp>
+      <p:sp>
+        <p:nvSpPr>
+          <p:cNvPr id="36" name="Rounded Rectangle 35"/>
+          <p:cNvSpPr/>
+          <p:nvPr/>
+        </p:nvSpPr>
+        <p:spPr>
+          <a:xfrm>
+            <a:off x="457200" y="4553712"/>
+            <a:ext cx="1787652" cy="713232"/>
+          </a:xfrm>
+          <a:prstGeom prst="roundRect">
+            <a:avLst>
+              <a:gd name="adj" fmla="val 6000"/>
+            </a:avLst>
+          </a:prstGeom>
+          <a:solidFill>
+            <a:srgbClr val="F4F6F8"/>
+          </a:solidFill>
+          <a:ln>
+            <a:noFill/>
+          </a:ln>
+        </p:spPr>
+        <p:txBody>
+          <a:bodyPr rtlCol="0" anchor="ctr"/>
+          <a:lstStyle/>
+          <a:p/>
+        </p:txBody>
+      </p:sp>
+      <p:sp>
+        <p:nvSpPr>
+          <p:cNvPr id="37" name="TextBox 36"/>
+          <p:cNvSpPr txBox="1"/>
+          <p:nvPr/>
+        </p:nvSpPr>
+        <p:spPr>
+          <a:xfrm>
+            <a:off x="566928" y="4608576"/>
+            <a:ext cx="1604772" cy="274320"/>
+          </a:xfrm>
+          <a:prstGeom prst="rect">
+            <a:avLst/>
+          </a:prstGeom>
+          <a:noFill/>
+        </p:spPr>
+        <p:txBody>
+          <a:bodyPr wrap="square" anchor="t" lIns="18288" rIns="18288" tIns="18288" bIns="18288">
+            <a:spAutoFit/>
+          </a:bodyPr>
+          <a:lstStyle/>
+          <a:p>
+            <a:pPr algn="l">
+              <a:spcAft>
+                <a:spcPts val="400"/>
+              </a:spcAft>
+            </a:pPr>
+            <a:r>
+              <a:rPr sz="1100" b="0">
+                <a:solidFill>
+                  <a:srgbClr val="17202A"/>
+                </a:solidFill>
+                <a:latin typeface="Segoe UI Semibold"/>
+              </a:rPr>
+              <a:t>Idempotent re-runs</a:t>
+            </a:r>
+          </a:p>
+        </p:txBody>
+      </p:sp>
+      <p:sp>
+        <p:nvSpPr>
+          <p:cNvPr id="38" name="TextBox 37"/>
+          <p:cNvSpPr txBox="1"/>
+          <p:nvPr/>
+        </p:nvSpPr>
+        <p:spPr>
+          <a:xfrm>
+            <a:off x="566928" y="4901183"/>
+            <a:ext cx="1604772" cy="320040"/>
+          </a:xfrm>
+          <a:prstGeom prst="rect">
+            <a:avLst/>
+          </a:prstGeom>
+          <a:noFill/>
+        </p:spPr>
+        <p:txBody>
+          <a:bodyPr wrap="square" anchor="t" lIns="18288" rIns="18288" tIns="18288" bIns="18288">
+            <a:spAutoFit/>
+          </a:bodyPr>
+          <a:lstStyle/>
+          <a:p>
+            <a:pPr algn="l">
+              <a:spcAft>
+                <a:spcPts val="400"/>
+              </a:spcAft>
+            </a:pPr>
+            <a:r>
+              <a:rPr sz="950" b="0">
+                <a:solidFill>
+                  <a:srgbClr val="4B5765"/>
+                </a:solidFill>
+                <a:latin typeface="Segoe UI"/>
+              </a:rPr>
+              <a:t>same input → same output</a:t>
+            </a:r>
+          </a:p>
+        </p:txBody>
+      </p:sp>
+      <p:sp>
+        <p:nvSpPr>
+          <p:cNvPr id="39" name="Rounded Rectangle 38"/>
+          <p:cNvSpPr/>
+          <p:nvPr/>
+        </p:nvSpPr>
+        <p:spPr>
+          <a:xfrm>
+            <a:off x="2354580" y="4553712"/>
+            <a:ext cx="1787652" cy="713232"/>
+          </a:xfrm>
+          <a:prstGeom prst="roundRect">
+            <a:avLst>
+              <a:gd name="adj" fmla="val 6000"/>
+            </a:avLst>
+          </a:prstGeom>
+          <a:solidFill>
+            <a:srgbClr val="F4F6F8"/>
+          </a:solidFill>
+          <a:ln>
+            <a:noFill/>
+          </a:ln>
+        </p:spPr>
+        <p:txBody>
+          <a:bodyPr rtlCol="0" anchor="ctr"/>
+          <a:lstStyle/>
+          <a:p/>
+        </p:txBody>
+      </p:sp>
+      <p:sp>
+        <p:nvSpPr>
+          <p:cNvPr id="40" name="TextBox 39"/>
+          <p:cNvSpPr txBox="1"/>
+          <p:nvPr/>
+        </p:nvSpPr>
+        <p:spPr>
+          <a:xfrm>
+            <a:off x="2464308" y="4608576"/>
+            <a:ext cx="1604772" cy="274320"/>
+          </a:xfrm>
+          <a:prstGeom prst="rect">
+            <a:avLst/>
+          </a:prstGeom>
+          <a:noFill/>
+        </p:spPr>
+        <p:txBody>
+          <a:bodyPr wrap="square" anchor="t" lIns="18288" rIns="18288" tIns="18288" bIns="18288">
+            <a:spAutoFit/>
+          </a:bodyPr>
+          <a:lstStyle/>
+          <a:p>
+            <a:pPr algn="l">
+              <a:spcAft>
+                <a:spcPts val="400"/>
+              </a:spcAft>
+            </a:pPr>
+            <a:r>
+              <a:rPr sz="1100" b="0">
+                <a:solidFill>
+                  <a:srgbClr val="17202A"/>
+                </a:solidFill>
+                <a:latin typeface="Segoe UI Semibold"/>
+              </a:rPr>
+              <a:t>Fails loudly</a:t>
+            </a:r>
+          </a:p>
+        </p:txBody>
+      </p:sp>
+      <p:sp>
+        <p:nvSpPr>
+          <p:cNvPr id="41" name="TextBox 40"/>
+          <p:cNvSpPr txBox="1"/>
+          <p:nvPr/>
+        </p:nvSpPr>
+        <p:spPr>
+          <a:xfrm>
+            <a:off x="2464308" y="4901183"/>
+            <a:ext cx="1604772" cy="320040"/>
+          </a:xfrm>
+          <a:prstGeom prst="rect">
+            <a:avLst/>
+          </a:prstGeom>
+          <a:noFill/>
+        </p:spPr>
+        <p:txBody>
+          <a:bodyPr wrap="square" anchor="t" lIns="18288" rIns="18288" tIns="18288" bIns="18288">
+            <a:spAutoFit/>
+          </a:bodyPr>
+          <a:lstStyle/>
+          <a:p>
+            <a:pPr algn="l">
+              <a:spcAft>
+                <a:spcPts val="400"/>
+              </a:spcAft>
+            </a:pPr>
+            <a:r>
+              <a:rPr sz="950" b="0">
+                <a:solidFill>
+                  <a:srgbClr val="4B5765"/>
+                </a:solidFill>
+                <a:latin typeface="Segoe UI"/>
+              </a:rPr>
+              <a:t>bad numbers never published</a:t>
+            </a:r>
+          </a:p>
+        </p:txBody>
+      </p:sp>
+      <p:sp>
+        <p:nvSpPr>
+          <p:cNvPr id="42" name="Rounded Rectangle 41"/>
+          <p:cNvSpPr/>
+          <p:nvPr/>
+        </p:nvSpPr>
+        <p:spPr>
+          <a:xfrm>
+            <a:off x="4251960" y="4553712"/>
+            <a:ext cx="1787652" cy="713232"/>
+          </a:xfrm>
+          <a:prstGeom prst="roundRect">
+            <a:avLst>
+              <a:gd name="adj" fmla="val 6000"/>
+            </a:avLst>
+          </a:prstGeom>
+          <a:solidFill>
+            <a:srgbClr val="F4F6F8"/>
+          </a:solidFill>
+          <a:ln>
+            <a:noFill/>
+          </a:ln>
+        </p:spPr>
+        <p:txBody>
+          <a:bodyPr rtlCol="0" anchor="ctr"/>
+          <a:lstStyle/>
+          <a:p/>
+        </p:txBody>
+      </p:sp>
+      <p:sp>
+        <p:nvSpPr>
+          <p:cNvPr id="43" name="TextBox 42"/>
+          <p:cNvSpPr txBox="1"/>
+          <p:nvPr/>
+        </p:nvSpPr>
+        <p:spPr>
+          <a:xfrm>
+            <a:off x="4361688" y="4608576"/>
+            <a:ext cx="1604772" cy="274320"/>
+          </a:xfrm>
+          <a:prstGeom prst="rect">
+            <a:avLst/>
+          </a:prstGeom>
+          <a:noFill/>
+        </p:spPr>
+        <p:txBody>
+          <a:bodyPr wrap="square" anchor="t" lIns="18288" rIns="18288" tIns="18288" bIns="18288">
+            <a:spAutoFit/>
+          </a:bodyPr>
+          <a:lstStyle/>
+          <a:p>
+            <a:pPr algn="l">
+              <a:spcAft>
+                <a:spcPts val="400"/>
+              </a:spcAft>
+            </a:pPr>
+            <a:r>
+              <a:rPr sz="1100" b="0">
+                <a:solidFill>
+                  <a:srgbClr val="17202A"/>
+                </a:solidFill>
+                <a:latin typeface="Segoe UI Semibold"/>
+              </a:rPr>
+              <a:t>Lineage</a:t>
+            </a:r>
+          </a:p>
+        </p:txBody>
+      </p:sp>
+      <p:sp>
+        <p:nvSpPr>
+          <p:cNvPr id="44" name="TextBox 43"/>
+          <p:cNvSpPr txBox="1"/>
+          <p:nvPr/>
+        </p:nvSpPr>
+        <p:spPr>
+          <a:xfrm>
+            <a:off x="4361688" y="4901183"/>
+            <a:ext cx="1604772" cy="320040"/>
+          </a:xfrm>
+          <a:prstGeom prst="rect">
+            <a:avLst/>
+          </a:prstGeom>
+          <a:noFill/>
+        </p:spPr>
+        <p:txBody>
+          <a:bodyPr wrap="square" anchor="t" lIns="18288" rIns="18288" tIns="18288" bIns="18288">
+            <a:spAutoFit/>
+          </a:bodyPr>
+          <a:lstStyle/>
+          <a:p>
+            <a:pPr algn="l">
+              <a:spcAft>
+                <a:spcPts val="400"/>
+              </a:spcAft>
+            </a:pPr>
+            <a:r>
+              <a:rPr sz="950" b="0">
+                <a:solidFill>
+                  <a:srgbClr val="4B5765"/>
+                </a:solidFill>
+                <a:latin typeface="Segoe UI"/>
+              </a:rPr>
+              <a:t>run · row · column</a:t>
+            </a:r>
+          </a:p>
+        </p:txBody>
+      </p:sp>
+      <p:sp>
+        <p:nvSpPr>
+          <p:cNvPr id="45" name="Rounded Rectangle 44"/>
+          <p:cNvSpPr/>
+          <p:nvPr/>
+        </p:nvSpPr>
+        <p:spPr>
+          <a:xfrm>
+            <a:off x="6149340" y="4553712"/>
+            <a:ext cx="1787652" cy="713232"/>
+          </a:xfrm>
+          <a:prstGeom prst="roundRect">
+            <a:avLst>
+              <a:gd name="adj" fmla="val 6000"/>
+            </a:avLst>
+          </a:prstGeom>
+          <a:solidFill>
+            <a:srgbClr val="F4F6F8"/>
+          </a:solidFill>
+          <a:ln>
+            <a:noFill/>
+          </a:ln>
+        </p:spPr>
+        <p:txBody>
+          <a:bodyPr rtlCol="0" anchor="ctr"/>
+          <a:lstStyle/>
+          <a:p/>
+        </p:txBody>
+      </p:sp>
+      <p:sp>
+        <p:nvSpPr>
+          <p:cNvPr id="46" name="TextBox 45"/>
+          <p:cNvSpPr txBox="1"/>
+          <p:nvPr/>
+        </p:nvSpPr>
+        <p:spPr>
+          <a:xfrm>
+            <a:off x="6259068" y="4608576"/>
+            <a:ext cx="1604772" cy="274320"/>
+          </a:xfrm>
+          <a:prstGeom prst="rect">
+            <a:avLst/>
+          </a:prstGeom>
+          <a:noFill/>
+        </p:spPr>
+        <p:txBody>
+          <a:bodyPr wrap="square" anchor="t" lIns="18288" rIns="18288" tIns="18288" bIns="18288">
+            <a:spAutoFit/>
+          </a:bodyPr>
+          <a:lstStyle/>
+          <a:p>
+            <a:pPr algn="l">
+              <a:spcAft>
+                <a:spcPts val="400"/>
+              </a:spcAft>
+            </a:pPr>
+            <a:r>
+              <a:rPr sz="1100" b="0">
+                <a:solidFill>
+                  <a:srgbClr val="17202A"/>
+                </a:solidFill>
+                <a:latin typeface="Segoe UI Semibold"/>
+              </a:rPr>
+              <a:t>Change detection</a:t>
+            </a:r>
+          </a:p>
+        </p:txBody>
+      </p:sp>
+      <p:sp>
+        <p:nvSpPr>
+          <p:cNvPr id="47" name="TextBox 46"/>
+          <p:cNvSpPr txBox="1"/>
+          <p:nvPr/>
+        </p:nvSpPr>
+        <p:spPr>
+          <a:xfrm>
+            <a:off x="6259068" y="4901183"/>
+            <a:ext cx="1604772" cy="320040"/>
+          </a:xfrm>
+          <a:prstGeom prst="rect">
+            <a:avLst/>
+          </a:prstGeom>
+          <a:noFill/>
+        </p:spPr>
+        <p:txBody>
+          <a:bodyPr wrap="square" anchor="t" lIns="18288" rIns="18288" tIns="18288" bIns="18288">
+            <a:spAutoFit/>
+          </a:bodyPr>
+          <a:lstStyle/>
+          <a:p>
+            <a:pPr algn="l">
+              <a:spcAft>
+                <a:spcPts val="400"/>
+              </a:spcAft>
+            </a:pPr>
+            <a:r>
+              <a:rPr sz="950" b="0">
+                <a:solidFill>
+                  <a:srgbClr val="4B5765"/>
+                </a:solidFill>
+                <a:latin typeface="Segoe UI"/>
+              </a:rPr>
+              <a:t>files built · tables planned</a:t>
+            </a:r>
+          </a:p>
+        </p:txBody>
+      </p:sp>
+      <p:sp>
+        <p:nvSpPr>
+          <p:cNvPr id="48" name="Rounded Rectangle 47"/>
+          <p:cNvSpPr/>
+          <p:nvPr/>
+        </p:nvSpPr>
+        <p:spPr>
+          <a:xfrm>
+            <a:off x="8046720" y="4553712"/>
+            <a:ext cx="1787652" cy="713232"/>
+          </a:xfrm>
+          <a:prstGeom prst="roundRect">
+            <a:avLst>
+              <a:gd name="adj" fmla="val 6000"/>
+            </a:avLst>
+          </a:prstGeom>
+          <a:solidFill>
+            <a:srgbClr val="F4F6F8"/>
+          </a:solidFill>
+          <a:ln>
+            <a:noFill/>
+          </a:ln>
+        </p:spPr>
+        <p:txBody>
+          <a:bodyPr rtlCol="0" anchor="ctr"/>
+          <a:lstStyle/>
+          <a:p/>
+        </p:txBody>
+      </p:sp>
+      <p:sp>
+        <p:nvSpPr>
+          <p:cNvPr id="49" name="TextBox 48"/>
+          <p:cNvSpPr txBox="1"/>
+          <p:nvPr/>
+        </p:nvSpPr>
+        <p:spPr>
+          <a:xfrm>
+            <a:off x="8156448" y="4608576"/>
+            <a:ext cx="1604772" cy="274320"/>
+          </a:xfrm>
+          <a:prstGeom prst="rect">
+            <a:avLst/>
+          </a:prstGeom>
+          <a:noFill/>
+        </p:spPr>
+        <p:txBody>
+          <a:bodyPr wrap="square" anchor="t" lIns="18288" rIns="18288" tIns="18288" bIns="18288">
+            <a:spAutoFit/>
+          </a:bodyPr>
+          <a:lstStyle/>
+          <a:p>
+            <a:pPr algn="l">
+              <a:spcAft>
+                <a:spcPts val="400"/>
+              </a:spcAft>
+            </a:pPr>
+            <a:r>
+              <a:rPr sz="1100" b="0">
+                <a:solidFill>
+                  <a:srgbClr val="17202A"/>
+                </a:solidFill>
+                <a:latin typeface="Segoe UI Semibold"/>
+              </a:rPr>
+              <a:t>DQ report</a:t>
+            </a:r>
+          </a:p>
+        </p:txBody>
+      </p:sp>
+      <p:sp>
+        <p:nvSpPr>
+          <p:cNvPr id="50" name="TextBox 49"/>
+          <p:cNvSpPr txBox="1"/>
+          <p:nvPr/>
+        </p:nvSpPr>
+        <p:spPr>
+          <a:xfrm>
+            <a:off x="8156448" y="4901183"/>
+            <a:ext cx="1604772" cy="320040"/>
+          </a:xfrm>
+          <a:prstGeom prst="rect">
+            <a:avLst/>
+          </a:prstGeom>
+          <a:noFill/>
+        </p:spPr>
+        <p:txBody>
+          <a:bodyPr wrap="square" anchor="t" lIns="18288" rIns="18288" tIns="18288" bIns="18288">
+            <a:spAutoFit/>
+          </a:bodyPr>
+          <a:lstStyle/>
+          <a:p>
+            <a:pPr algn="l">
+              <a:spcAft>
+                <a:spcPts val="400"/>
+              </a:spcAft>
+            </a:pPr>
+            <a:r>
+              <a:rPr sz="950" b="0">
+                <a:solidFill>
+                  <a:srgbClr val="4B5765"/>
+                </a:solidFill>
+                <a:latin typeface="Segoe UI"/>
+              </a:rPr>
+              <a:t>sample bad rows</a:t>
+            </a:r>
+          </a:p>
+        </p:txBody>
+      </p:sp>
+      <p:sp>
+        <p:nvSpPr>
+          <p:cNvPr id="51" name="Rounded Rectangle 50"/>
+          <p:cNvSpPr/>
+          <p:nvPr/>
+        </p:nvSpPr>
+        <p:spPr>
+          <a:xfrm>
+            <a:off x="9944100" y="4553712"/>
+            <a:ext cx="1787652" cy="713232"/>
+          </a:xfrm>
+          <a:prstGeom prst="roundRect">
+            <a:avLst>
+              <a:gd name="adj" fmla="val 6000"/>
+            </a:avLst>
+          </a:prstGeom>
+          <a:solidFill>
+            <a:srgbClr val="F4F6F8"/>
+          </a:solidFill>
+          <a:ln>
+            <a:noFill/>
+          </a:ln>
+        </p:spPr>
+        <p:txBody>
+          <a:bodyPr rtlCol="0" anchor="ctr"/>
+          <a:lstStyle/>
+          <a:p/>
+        </p:txBody>
+      </p:sp>
+      <p:sp>
+        <p:nvSpPr>
+          <p:cNvPr id="52" name="TextBox 51"/>
+          <p:cNvSpPr txBox="1"/>
+          <p:nvPr/>
+        </p:nvSpPr>
+        <p:spPr>
+          <a:xfrm>
+            <a:off x="10053828" y="4608576"/>
+            <a:ext cx="1604772" cy="274320"/>
+          </a:xfrm>
+          <a:prstGeom prst="rect">
+            <a:avLst/>
+          </a:prstGeom>
+          <a:noFill/>
+        </p:spPr>
+        <p:txBody>
+          <a:bodyPr wrap="square" anchor="t" lIns="18288" rIns="18288" tIns="18288" bIns="18288">
+            <a:spAutoFit/>
+          </a:bodyPr>
+          <a:lstStyle/>
+          <a:p>
+            <a:pPr algn="l">
+              <a:spcAft>
+                <a:spcPts val="400"/>
+              </a:spcAft>
+            </a:pPr>
+            <a:r>
+              <a:rPr sz="1100" b="0">
+                <a:solidFill>
+                  <a:srgbClr val="17202A"/>
+                </a:solidFill>
+                <a:latin typeface="Segoe UI Semibold"/>
+              </a:rPr>
+              <a:t>68 automated tests</a:t>
+            </a:r>
+          </a:p>
+        </p:txBody>
+      </p:sp>
+      <p:sp>
+        <p:nvSpPr>
+          <p:cNvPr id="53" name="TextBox 52"/>
+          <p:cNvSpPr txBox="1"/>
+          <p:nvPr/>
+        </p:nvSpPr>
+        <p:spPr>
+          <a:xfrm>
+            <a:off x="10053828" y="4901183"/>
+            <a:ext cx="1604772" cy="320040"/>
+          </a:xfrm>
+          <a:prstGeom prst="rect">
+            <a:avLst/>
+          </a:prstGeom>
+          <a:noFill/>
+        </p:spPr>
+        <p:txBody>
+          <a:bodyPr wrap="square" anchor="t" lIns="18288" rIns="18288" tIns="18288" bIns="18288">
+            <a:spAutoFit/>
+          </a:bodyPr>
+          <a:lstStyle/>
+          <a:p>
+            <a:pPr algn="l">
+              <a:spcAft>
+                <a:spcPts val="400"/>
+              </a:spcAft>
+            </a:pPr>
+            <a:r>
+              <a:rPr sz="950" b="0">
+                <a:solidFill>
+                  <a:srgbClr val="4B5765"/>
+                </a:solidFill>
+                <a:latin typeface="Segoe UI"/>
+              </a:rPr>
+              <a:t>incl. end-to-end</a:t>
+            </a:r>
+          </a:p>
+        </p:txBody>
+      </p:sp>
+      <p:sp>
+        <p:nvSpPr>
+          <p:cNvPr id="54" name="TextBox 53"/>
+          <p:cNvSpPr txBox="1"/>
+          <p:nvPr/>
+        </p:nvSpPr>
+        <p:spPr>
+          <a:xfrm>
+            <a:off x="457200" y="5413248"/>
+            <a:ext cx="3657600" cy="274320"/>
+          </a:xfrm>
+          <a:prstGeom prst="rect">
+            <a:avLst/>
+          </a:prstGeom>
+          <a:noFill/>
+        </p:spPr>
+        <p:txBody>
+          <a:bodyPr wrap="square" anchor="t" lIns="18288" rIns="18288" tIns="18288" bIns="18288">
+            <a:spAutoFit/>
+          </a:bodyPr>
+          <a:lstStyle/>
+          <a:p>
+            <a:pPr algn="l">
+              <a:spcAft>
+                <a:spcPts val="400"/>
+              </a:spcAft>
+            </a:pPr>
+            <a:r>
+              <a:rPr sz="1000" b="0">
+                <a:solidFill>
+                  <a:srgbClr val="8A94A0"/>
+                </a:solidFill>
+                <a:latin typeface="Segoe UI Semibold"/>
+              </a:rPr>
+              <a:t>SAME job.py, LOCAL AND AWS</a:t>
+            </a:r>
+          </a:p>
+        </p:txBody>
+      </p:sp>
+      <p:sp>
+        <p:nvSpPr>
+          <p:cNvPr id="55" name="Rounded Rectangle 54"/>
+          <p:cNvSpPr/>
+          <p:nvPr/>
+        </p:nvSpPr>
+        <p:spPr>
+          <a:xfrm>
+            <a:off x="457200" y="5687568"/>
+            <a:ext cx="3566160" cy="658368"/>
+          </a:xfrm>
+          <a:prstGeom prst="roundRect">
+            <a:avLst>
+              <a:gd name="adj" fmla="val 6000"/>
+            </a:avLst>
+          </a:prstGeom>
+          <a:solidFill>
+            <a:srgbClr val="FFFFFF"/>
+          </a:solidFill>
+          <a:ln w="12700">
+            <a:solidFill>
+              <a:srgbClr val="D4DAE1"/>
+            </a:solidFill>
+          </a:ln>
+        </p:spPr>
+        <p:txBody>
+          <a:bodyPr rtlCol="0" anchor="ctr"/>
+          <a:lstStyle/>
+          <a:p/>
+        </p:txBody>
+      </p:sp>
+      <p:sp>
+        <p:nvSpPr>
+          <p:cNvPr id="56" name="TextBox 55"/>
+          <p:cNvSpPr txBox="1"/>
+          <p:nvPr/>
+        </p:nvSpPr>
+        <p:spPr>
+          <a:xfrm>
+            <a:off x="594360" y="5760720"/>
+            <a:ext cx="3291840" cy="548640"/>
+          </a:xfrm>
+          <a:prstGeom prst="rect">
+            <a:avLst/>
+          </a:prstGeom>
+          <a:noFill/>
+        </p:spPr>
+        <p:txBody>
+          <a:bodyPr wrap="square" anchor="t" lIns="18288" rIns="18288" tIns="18288" bIns="18288">
+            <a:spAutoFit/>
+          </a:bodyPr>
+          <a:lstStyle/>
+          <a:p>
+            <a:pPr algn="l">
+              <a:spcAft>
+                <a:spcPts val="100"/>
+              </a:spcAft>
+            </a:pPr>
+            <a:r>
+              <a:rPr sz="1100" b="0">
+                <a:solidFill>
+                  <a:srgbClr val="17202A"/>
+                </a:solidFill>
+                <a:latin typeface="Segoe UI Semibold"/>
+              </a:rPr>
+              <a:t>Local</a:t>
+            </a:r>
+          </a:p>
+          <a:p>
+            <a:pPr algn="l">
+              <a:spcAft>
+                <a:spcPts val="100"/>
+              </a:spcAft>
+            </a:pPr>
+            <a:r>
+              <a:rPr sz="1000" b="0">
+                <a:solidFill>
+                  <a:srgbClr val="4B5765"/>
+                </a:solidFill>
+                <a:latin typeface="Segoe UI"/>
+              </a:rPr>
+              <a:t>python job.py · LocalStack S3 · PostgreSQL 18</a:t>
+            </a:r>
+          </a:p>
+        </p:txBody>
+      </p:sp>
+      <p:cxnSp>
+        <p:nvCxnSpPr>
+          <p:cNvPr id="57" name="Connector 56"/>
+          <p:cNvCxnSpPr/>
+          <p:nvPr/>
+        </p:nvCxnSpPr>
+        <p:spPr>
+          <a:xfrm>
+            <a:off x="4069080" y="6016752"/>
+            <a:ext cx="411480" cy="0"/>
+          </a:xfrm>
+          <a:prstGeom prst="line">
+            <a:avLst/>
+          </a:prstGeom>
+          <a:ln w="19050">
+            <a:solidFill>
+              <a:srgbClr val="4B5765"/>
+            </a:solidFill>
+            <a:tailEnd type="triangle" w="med" len="med"/>
+          </a:ln>
+        </p:spPr>
+      </p:cxnSp>
+      <p:sp>
+        <p:nvSpPr>
+          <p:cNvPr id="58" name="Rounded Rectangle 57"/>
+          <p:cNvSpPr/>
+          <p:nvPr/>
+        </p:nvSpPr>
+        <p:spPr>
+          <a:xfrm>
+            <a:off x="4526280" y="5687568"/>
+            <a:ext cx="7205472" cy="658368"/>
+          </a:xfrm>
+          <a:prstGeom prst="roundRect">
+            <a:avLst>
+              <a:gd name="adj" fmla="val 6000"/>
+            </a:avLst>
+          </a:prstGeom>
+          <a:solidFill>
+            <a:srgbClr val="F6ECCC"/>
+          </a:solidFill>
+          <a:ln>
+            <a:noFill/>
+          </a:ln>
+        </p:spPr>
+        <p:txBody>
+          <a:bodyPr rtlCol="0" anchor="ctr"/>
+          <a:lstStyle/>
+          <a:p/>
+        </p:txBody>
+      </p:sp>
+      <p:sp>
+        <p:nvSpPr>
+          <p:cNvPr id="59" name="TextBox 58"/>
+          <p:cNvSpPr txBox="1"/>
+          <p:nvPr/>
+        </p:nvSpPr>
+        <p:spPr>
+          <a:xfrm>
+            <a:off x="4663440" y="5760720"/>
+            <a:ext cx="6949440" cy="548640"/>
+          </a:xfrm>
+          <a:prstGeom prst="rect">
+            <a:avLst/>
+          </a:prstGeom>
+          <a:noFill/>
+        </p:spPr>
+        <p:txBody>
+          <a:bodyPr wrap="square" anchor="t" lIns="18288" rIns="18288" tIns="18288" bIns="18288">
+            <a:spAutoFit/>
+          </a:bodyPr>
+          <a:lstStyle/>
+          <a:p>
+            <a:pPr algn="l">
+              <a:spcAft>
+                <a:spcPts val="100"/>
+              </a:spcAft>
+            </a:pPr>
+            <a:r>
+              <a:rPr sz="1100" b="0">
+                <a:solidFill>
+                  <a:srgbClr val="17202A"/>
+                </a:solidFill>
+                <a:latin typeface="Segoe UI Semibold"/>
+              </a:rPr>
+              <a:t>AWS ap-south-1</a:t>
+            </a:r>
+          </a:p>
+          <a:p>
+            <a:pPr algn="l">
+              <a:spcAft>
+                <a:spcPts val="100"/>
+              </a:spcAft>
+            </a:pPr>
+            <a:r>
+              <a:rPr sz="1000" b="0">
+                <a:solidFill>
+                  <a:srgbClr val="4B5765"/>
+                </a:solidFill>
+                <a:latin typeface="Segoe UI"/>
+              </a:rPr>
+              <a:t>EKS Job → Aurora (TLS) → Amazon S3 (private, encrypted) · node role: lake bucket only · password in a Kubernetes Secret · no infra/ changes</a:t>
+            </a:r>
+          </a:p>
+        </p:txBody>
+      </p:sp>
+      <p:cxnSp>
+        <p:nvCxnSpPr>
+          <p:cNvPr id="60" name="Connector 59"/>
+          <p:cNvCxnSpPr/>
+          <p:nvPr/>
+        </p:nvCxnSpPr>
+        <p:spPr>
+          <a:xfrm>
+            <a:off x="548640" y="6400800"/>
+            <a:ext cx="11094415" cy="0"/>
+          </a:xfrm>
+          <a:prstGeom prst="line">
+            <a:avLst/>
+          </a:prstGeom>
+          <a:ln w="9525">
+            <a:solidFill>
+              <a:srgbClr val="D4DAE1"/>
+            </a:solidFill>
+          </a:ln>
+        </p:spPr>
+      </p:cxnSp>
+      <p:sp>
+        <p:nvSpPr>
+          <p:cNvPr id="61" name="TextBox 60"/>
+          <p:cNvSpPr txBox="1"/>
+          <p:nvPr/>
+        </p:nvSpPr>
+        <p:spPr>
+          <a:xfrm>
+            <a:off x="548640" y="6455664"/>
+            <a:ext cx="7315200" cy="274320"/>
+          </a:xfrm>
+          <a:prstGeom prst="rect">
+            <a:avLst/>
+          </a:prstGeom>
+          <a:noFill/>
+        </p:spPr>
+        <p:txBody>
+          <a:bodyPr wrap="square" anchor="t" lIns="18288" rIns="18288" tIns="18288" bIns="18288">
+            <a:spAutoFit/>
+          </a:bodyPr>
+          <a:lstStyle/>
+          <a:p>
+            <a:pPr algn="l">
+              <a:spcAft>
+                <a:spcPts val="400"/>
+              </a:spcAft>
+            </a:pPr>
+            <a:r>
+              <a:rPr sz="900" b="0">
+                <a:solidFill>
+                  <a:srgbClr val="8A94A0"/>
+                </a:solidFill>
+                <a:latin typeface="Segoe UI"/>
+              </a:rPr>
+              <a:t>ACME Talent Lake  ·  Data Engineer track  ·  Coding Workshop 2026</a:t>
+            </a:r>
+          </a:p>
+        </p:txBody>
+      </p:sp>
+      <p:sp>
+        <p:nvSpPr>
+          <p:cNvPr id="62" name="TextBox 61"/>
+          <p:cNvSpPr txBox="1"/>
+          <p:nvPr/>
+        </p:nvSpPr>
+        <p:spPr>
+          <a:xfrm>
+            <a:off x="10698480" y="6455664"/>
+            <a:ext cx="941832" cy="274320"/>
+          </a:xfrm>
+          <a:prstGeom prst="rect">
+            <a:avLst/>
+          </a:prstGeom>
+          <a:noFill/>
+        </p:spPr>
+        <p:txBody>
+          <a:bodyPr wrap="square" anchor="t" lIns="18288" rIns="18288" tIns="18288" bIns="18288">
+            <a:spAutoFit/>
+          </a:bodyPr>
+          <a:lstStyle/>
+          <a:p>
+            <a:pPr algn="r">
+              <a:spcAft>
+                <a:spcPts val="400"/>
+              </a:spcAft>
+            </a:pPr>
+            <a:r>
+              <a:rPr sz="900" b="0">
+                <a:solidFill>
+                  <a:srgbClr val="8A94A0"/>
+                </a:solidFill>
+                <a:latin typeface="Segoe UI"/>
+              </a:rPr>
+              <a:t>4 / 12</a:t>
+            </a:r>
+          </a:p>
+        </p:txBody>
+      </p:sp>
+    </p:spTree>
+  </p:cSld>
+  <p:clrMapOvr>
+    <a:masterClrMapping/>
+  </p:clrMapOvr>
+</p:sld>
+</file>
+
+<file path=ppt/slides/slide5.xml><?xml version="1.0" encoding="utf-8"?>
 <p:sld xmlns:a="http://schemas.openxmlformats.org/drawingml/2006/main" xmlns:p="http://schemas.openxmlformats.org/presentationml/2006/main" xmlns:r="http://schemas.openxmlformats.org/officeDocument/2006/relationships">
   <p:cSld>
     <p:bg>
@@ -12981,7 +16490,7 @@
                 </a:solidFill>
                 <a:latin typeface="Segoe UI"/>
               </a:rPr>
-              <a:t>4 / 11</a:t>
+              <a:t>5 / 12</a:t>
             </a:r>
           </a:p>
         </p:txBody>
@@ -12994,7 +16503,7 @@
 </p:sld>
 </file>
 
-<file path=ppt/slides/slide5.xml><?xml version="1.0" encoding="utf-8"?>
+<file path=ppt/slides/slide6.xml><?xml version="1.0" encoding="utf-8"?>
 <p:sld xmlns:a="http://schemas.openxmlformats.org/drawingml/2006/main" xmlns:p="http://schemas.openxmlformats.org/presentationml/2006/main" xmlns:r="http://schemas.openxmlformats.org/officeDocument/2006/relationships">
   <p:cSld>
     <p:bg>
@@ -15766,7 +19275,7 @@
                 </a:solidFill>
                 <a:latin typeface="Segoe UI"/>
               </a:rPr>
-              <a:t>5 / 11</a:t>
+              <a:t>6 / 12</a:t>
             </a:r>
           </a:p>
         </p:txBody>
@@ -15779,7 +19288,7 @@
 </p:sld>
 </file>
 
-<file path=ppt/slides/slide6.xml><?xml version="1.0" encoding="utf-8"?>
+<file path=ppt/slides/slide7.xml><?xml version="1.0" encoding="utf-8"?>
 <p:sld xmlns:a="http://schemas.openxmlformats.org/drawingml/2006/main" xmlns:p="http://schemas.openxmlformats.org/presentationml/2006/main" xmlns:r="http://schemas.openxmlformats.org/officeDocument/2006/relationships">
   <p:cSld>
     <p:bg>
@@ -17206,7 +20715,7 @@
                 </a:solidFill>
                 <a:latin typeface="Segoe UI"/>
               </a:rPr>
-              <a:t>6 / 11</a:t>
+              <a:t>7 / 12</a:t>
             </a:r>
           </a:p>
         </p:txBody>
@@ -17219,7 +20728,7 @@
 </p:sld>
 </file>
 
-<file path=ppt/slides/slide7.xml><?xml version="1.0" encoding="utf-8"?>
+<file path=ppt/slides/slide8.xml><?xml version="1.0" encoding="utf-8"?>
 <p:sld xmlns:a="http://schemas.openxmlformats.org/drawingml/2006/main" xmlns:p="http://schemas.openxmlformats.org/presentationml/2006/main" xmlns:r="http://schemas.openxmlformats.org/officeDocument/2006/relationships">
   <p:cSld>
     <p:bg>
@@ -19545,1238 +23054,7 @@
                 </a:solidFill>
                 <a:latin typeface="Segoe UI"/>
               </a:rPr>
-              <a:t>7 / 11</a:t>
-            </a:r>
-          </a:p>
-        </p:txBody>
-      </p:sp>
-    </p:spTree>
-  </p:cSld>
-  <p:clrMapOvr>
-    <a:masterClrMapping/>
-  </p:clrMapOvr>
-</p:sld>
-</file>
-
-<file path=ppt/slides/slide8.xml><?xml version="1.0" encoding="utf-8"?>
-<p:sld xmlns:a="http://schemas.openxmlformats.org/drawingml/2006/main" xmlns:p="http://schemas.openxmlformats.org/presentationml/2006/main" xmlns:r="http://schemas.openxmlformats.org/officeDocument/2006/relationships">
-  <p:cSld>
-    <p:bg>
-      <p:bgPr>
-        <a:solidFill>
-          <a:srgbClr val="FFFFFF"/>
-        </a:solidFill>
-        <a:effectLst/>
-      </p:bgPr>
-    </p:bg>
-    <p:spTree>
-      <p:nvGrpSpPr>
-        <p:cNvPr id="1" name=""/>
-        <p:cNvGrpSpPr/>
-        <p:nvPr/>
-      </p:nvGrpSpPr>
-      <p:grpSpPr/>
-      <p:sp>
-        <p:nvSpPr>
-          <p:cNvPr id="2" name="TextBox 1"/>
-          <p:cNvSpPr txBox="1"/>
-          <p:nvPr/>
-        </p:nvSpPr>
-        <p:spPr>
-          <a:xfrm>
-            <a:off x="548640" y="292608"/>
-            <a:ext cx="8229600" cy="274320"/>
-          </a:xfrm>
-          <a:prstGeom prst="rect">
-            <a:avLst/>
-          </a:prstGeom>
-          <a:noFill/>
-        </p:spPr>
-        <p:txBody>
-          <a:bodyPr wrap="square" anchor="t" lIns="18288" rIns="18288" tIns="18288" bIns="18288">
-            <a:spAutoFit/>
-          </a:bodyPr>
-          <a:lstStyle/>
-          <a:p>
-            <a:pPr algn="l">
-              <a:spcAft>
-                <a:spcPts val="400"/>
-              </a:spcAft>
-            </a:pPr>
-            <a:r>
-              <a:rPr sz="1100" b="0">
-                <a:solidFill>
-                  <a:srgbClr val="1D4E89"/>
-                </a:solidFill>
-                <a:latin typeface="Segoe UI Semibold"/>
-              </a:rPr>
-              <a:t>FINDINGS · Q1–Q4</a:t>
-            </a:r>
-          </a:p>
-        </p:txBody>
-      </p:sp>
-      <p:sp>
-        <p:nvSpPr>
-          <p:cNvPr id="3" name="TextBox 2"/>
-          <p:cNvSpPr txBox="1"/>
-          <p:nvPr/>
-        </p:nvSpPr>
-        <p:spPr>
-          <a:xfrm>
-            <a:off x="548640" y="566928"/>
-            <a:ext cx="11064240" cy="731520"/>
-          </a:xfrm>
-          <a:prstGeom prst="rect">
-            <a:avLst/>
-          </a:prstGeom>
-          <a:noFill/>
-        </p:spPr>
-        <p:txBody>
-          <a:bodyPr wrap="square" anchor="t" lIns="18288" rIns="18288" tIns="18288" bIns="18288">
-            <a:spAutoFit/>
-          </a:bodyPr>
-          <a:lstStyle/>
-          <a:p>
-            <a:pPr algn="l">
-              <a:spcAft>
-                <a:spcPts val="400"/>
-              </a:spcAft>
-            </a:pPr>
-            <a:r>
-              <a:rPr sz="2600" b="0">
-                <a:solidFill>
-                  <a:srgbClr val="17202A"/>
-                </a:solidFill>
-                <a:latin typeface="Segoe UI Semibold"/>
-              </a:rPr>
-              <a:t>230 declining · 441 with gaps · 124 ready · 232 not learning</a:t>
-            </a:r>
-          </a:p>
-        </p:txBody>
-      </p:sp>
-      <p:sp>
-        <p:nvSpPr>
-          <p:cNvPr id="4" name="TextBox 3"/>
-          <p:cNvSpPr txBox="1"/>
-          <p:nvPr/>
-        </p:nvSpPr>
-        <p:spPr>
-          <a:xfrm>
-            <a:off x="548640" y="1417320"/>
-            <a:ext cx="5422392" cy="320040"/>
-          </a:xfrm>
-          <a:prstGeom prst="rect">
-            <a:avLst/>
-          </a:prstGeom>
-          <a:noFill/>
-        </p:spPr>
-        <p:txBody>
-          <a:bodyPr wrap="square" anchor="t" lIns="18288" rIns="18288" tIns="18288" bIns="18288">
-            <a:spAutoFit/>
-          </a:bodyPr>
-          <a:lstStyle/>
-          <a:p>
-            <a:pPr algn="l">
-              <a:spcAft>
-                <a:spcPts val="400"/>
-              </a:spcAft>
-            </a:pPr>
-            <a:r>
-              <a:rPr sz="1300" b="0">
-                <a:solidFill>
-                  <a:srgbClr val="17202A"/>
-                </a:solidFill>
-                <a:latin typeface="Segoe UI Semibold"/>
-              </a:rPr>
-              <a:t>Q1 · Change since previous review</a:t>
-            </a:r>
-          </a:p>
-        </p:txBody>
-      </p:sp>
-      <p:graphicFrame>
-        <p:nvGraphicFramePr>
-          <p:cNvPr id="5" name="Chart 4"/>
-          <p:cNvGraphicFramePr>
-            <a:graphicFrameLocks noGrp="1"/>
-          </p:cNvGraphicFramePr>
-          <p:nvPr/>
-        </p:nvGraphicFramePr>
-        <p:xfrm>
-          <a:off x="457200" y="1737360"/>
-          <a:ext cx="3566160" cy="1874519"/>
-        </p:xfrm>
-        <a:graphic>
-          <a:graphicData uri="http://schemas.openxmlformats.org/drawingml/2006/chart">
-            <c:chart xmlns:c="http://schemas.openxmlformats.org/drawingml/2006/chart" r:id="rId3"/>
-          </a:graphicData>
-        </a:graphic>
-      </p:graphicFrame>
-      <p:sp>
-        <p:nvSpPr>
-          <p:cNvPr id="6" name="TextBox 5"/>
-          <p:cNvSpPr txBox="1"/>
-          <p:nvPr/>
-        </p:nvSpPr>
-        <p:spPr>
-          <a:xfrm>
-            <a:off x="4206240" y="1920240"/>
-            <a:ext cx="1737360" cy="548640"/>
-          </a:xfrm>
-          <a:prstGeom prst="rect">
-            <a:avLst/>
-          </a:prstGeom>
-          <a:noFill/>
-        </p:spPr>
-        <p:txBody>
-          <a:bodyPr wrap="square" anchor="t" lIns="18288" rIns="18288" tIns="18288" bIns="18288">
-            <a:spAutoFit/>
-          </a:bodyPr>
-          <a:lstStyle/>
-          <a:p>
-            <a:pPr algn="l">
-              <a:spcAft>
-                <a:spcPts val="400"/>
-              </a:spcAft>
-            </a:pPr>
-            <a:r>
-              <a:rPr sz="2600" b="0">
-                <a:solidFill>
-                  <a:srgbClr val="17202A"/>
-                </a:solidFill>
-                <a:latin typeface="Segoe UI Semibold"/>
-              </a:rPr>
-              <a:t>3.41</a:t>
-            </a:r>
-          </a:p>
-        </p:txBody>
-      </p:sp>
-      <p:sp>
-        <p:nvSpPr>
-          <p:cNvPr id="7" name="TextBox 6"/>
-          <p:cNvSpPr txBox="1"/>
-          <p:nvPr/>
-        </p:nvSpPr>
-        <p:spPr>
-          <a:xfrm>
-            <a:off x="4206240" y="2487168"/>
-            <a:ext cx="1737360" cy="457200"/>
-          </a:xfrm>
-          <a:prstGeom prst="rect">
-            <a:avLst/>
-          </a:prstGeom>
-          <a:noFill/>
-        </p:spPr>
-        <p:txBody>
-          <a:bodyPr wrap="square" anchor="t" lIns="18288" rIns="18288" tIns="18288" bIns="18288">
-            <a:spAutoFit/>
-          </a:bodyPr>
-          <a:lstStyle/>
-          <a:p>
-            <a:pPr algn="l">
-              <a:spcAft>
-                <a:spcPts val="400"/>
-              </a:spcAft>
-            </a:pPr>
-            <a:r>
-              <a:rPr sz="1100" b="0">
-                <a:solidFill>
-                  <a:srgbClr val="4B5765"/>
-                </a:solidFill>
-                <a:latin typeface="Segoe UI"/>
-              </a:rPr>
-              <a:t>average latest rating</a:t>
-            </a:r>
-          </a:p>
-        </p:txBody>
-      </p:sp>
-      <p:sp>
-        <p:nvSpPr>
-          <p:cNvPr id="8" name="TextBox 7"/>
-          <p:cNvSpPr txBox="1"/>
-          <p:nvPr/>
-        </p:nvSpPr>
-        <p:spPr>
-          <a:xfrm>
-            <a:off x="4206240" y="2834640"/>
-            <a:ext cx="1737360" cy="548640"/>
-          </a:xfrm>
-          <a:prstGeom prst="rect">
-            <a:avLst/>
-          </a:prstGeom>
-          <a:noFill/>
-        </p:spPr>
-        <p:txBody>
-          <a:bodyPr wrap="square" anchor="t" lIns="18288" rIns="18288" tIns="18288" bIns="18288">
-            <a:spAutoFit/>
-          </a:bodyPr>
-          <a:lstStyle/>
-          <a:p>
-            <a:pPr algn="l">
-              <a:spcAft>
-                <a:spcPts val="400"/>
-              </a:spcAft>
-            </a:pPr>
-            <a:r>
-              <a:rPr sz="2600" b="0">
-                <a:solidFill>
-                  <a:srgbClr val="B0412D"/>
-                </a:solidFill>
-                <a:latin typeface="Segoe UI Semibold"/>
-              </a:rPr>
-              <a:t>84</a:t>
-            </a:r>
-          </a:p>
-        </p:txBody>
-      </p:sp>
-      <p:sp>
-        <p:nvSpPr>
-          <p:cNvPr id="9" name="TextBox 8"/>
-          <p:cNvSpPr txBox="1"/>
-          <p:nvPr/>
-        </p:nvSpPr>
-        <p:spPr>
-          <a:xfrm>
-            <a:off x="4206240" y="3401568"/>
-            <a:ext cx="1737360" cy="457200"/>
-          </a:xfrm>
-          <a:prstGeom prst="rect">
-            <a:avLst/>
-          </a:prstGeom>
-          <a:noFill/>
-        </p:spPr>
-        <p:txBody>
-          <a:bodyPr wrap="square" anchor="t" lIns="18288" rIns="18288" tIns="18288" bIns="18288">
-            <a:spAutoFit/>
-          </a:bodyPr>
-          <a:lstStyle/>
-          <a:p>
-            <a:pPr algn="l">
-              <a:spcAft>
-                <a:spcPts val="400"/>
-              </a:spcAft>
-            </a:pPr>
-            <a:r>
-              <a:rPr sz="1100" b="0">
-                <a:solidFill>
-                  <a:srgbClr val="4B5765"/>
-                </a:solidFill>
-                <a:latin typeface="Segoe UI"/>
-              </a:rPr>
-              <a:t>dropped 2+ points</a:t>
-            </a:r>
-          </a:p>
-        </p:txBody>
-      </p:sp>
-      <p:sp>
-        <p:nvSpPr>
-          <p:cNvPr id="10" name="TextBox 9"/>
-          <p:cNvSpPr txBox="1"/>
-          <p:nvPr/>
-        </p:nvSpPr>
-        <p:spPr>
-          <a:xfrm>
-            <a:off x="6217920" y="1417320"/>
-            <a:ext cx="5422392" cy="320040"/>
-          </a:xfrm>
-          <a:prstGeom prst="rect">
-            <a:avLst/>
-          </a:prstGeom>
-          <a:noFill/>
-        </p:spPr>
-        <p:txBody>
-          <a:bodyPr wrap="square" anchor="t" lIns="18288" rIns="18288" tIns="18288" bIns="18288">
-            <a:spAutoFit/>
-          </a:bodyPr>
-          <a:lstStyle/>
-          <a:p>
-            <a:pPr algn="l">
-              <a:spcAft>
-                <a:spcPts val="400"/>
-              </a:spcAft>
-            </a:pPr>
-            <a:r>
-              <a:rPr sz="1300" b="0">
-                <a:solidFill>
-                  <a:srgbClr val="17202A"/>
-                </a:solidFill>
-                <a:latin typeface="Segoe UI Semibold"/>
-              </a:rPr>
-              <a:t>Q2 · Most critical skill gaps</a:t>
-            </a:r>
-          </a:p>
-        </p:txBody>
-      </p:sp>
-      <p:graphicFrame>
-        <p:nvGraphicFramePr>
-          <p:cNvPr id="11" name="Chart 10"/>
-          <p:cNvGraphicFramePr>
-            <a:graphicFrameLocks noGrp="1"/>
-          </p:cNvGraphicFramePr>
-          <p:nvPr/>
-        </p:nvGraphicFramePr>
-        <p:xfrm>
-          <a:off x="6126480" y="1737360"/>
-          <a:ext cx="3566160" cy="1874519"/>
-        </p:xfrm>
-        <a:graphic>
-          <a:graphicData uri="http://schemas.openxmlformats.org/drawingml/2006/chart">
-            <c:chart xmlns:c="http://schemas.openxmlformats.org/drawingml/2006/chart" r:id="rId4"/>
-          </a:graphicData>
-        </a:graphic>
-      </p:graphicFrame>
-      <p:sp>
-        <p:nvSpPr>
-          <p:cNvPr id="12" name="TextBox 11"/>
-          <p:cNvSpPr txBox="1"/>
-          <p:nvPr/>
-        </p:nvSpPr>
-        <p:spPr>
-          <a:xfrm>
-            <a:off x="9875520" y="1920240"/>
-            <a:ext cx="1737360" cy="548640"/>
-          </a:xfrm>
-          <a:prstGeom prst="rect">
-            <a:avLst/>
-          </a:prstGeom>
-          <a:noFill/>
-        </p:spPr>
-        <p:txBody>
-          <a:bodyPr wrap="square" anchor="t" lIns="18288" rIns="18288" tIns="18288" bIns="18288">
-            <a:spAutoFit/>
-          </a:bodyPr>
-          <a:lstStyle/>
-          <a:p>
-            <a:pPr algn="l">
-              <a:spcAft>
-                <a:spcPts val="400"/>
-              </a:spcAft>
-            </a:pPr>
-            <a:r>
-              <a:rPr sz="2600" b="0">
-                <a:solidFill>
-                  <a:srgbClr val="17202A"/>
-                </a:solidFill>
-                <a:latin typeface="Segoe UI Semibold"/>
-              </a:rPr>
-              <a:t>465</a:t>
-            </a:r>
-          </a:p>
-        </p:txBody>
-      </p:sp>
-      <p:sp>
-        <p:nvSpPr>
-          <p:cNvPr id="13" name="TextBox 12"/>
-          <p:cNvSpPr txBox="1"/>
-          <p:nvPr/>
-        </p:nvSpPr>
-        <p:spPr>
-          <a:xfrm>
-            <a:off x="9875520" y="2487168"/>
-            <a:ext cx="1737360" cy="457200"/>
-          </a:xfrm>
-          <a:prstGeom prst="rect">
-            <a:avLst/>
-          </a:prstGeom>
-          <a:noFill/>
-        </p:spPr>
-        <p:txBody>
-          <a:bodyPr wrap="square" anchor="t" lIns="18288" rIns="18288" tIns="18288" bIns="18288">
-            <a:spAutoFit/>
-          </a:bodyPr>
-          <a:lstStyle/>
-          <a:p>
-            <a:pPr algn="l">
-              <a:spcAft>
-                <a:spcPts val="400"/>
-              </a:spcAft>
-            </a:pPr>
-            <a:r>
-              <a:rPr sz="1100" b="0">
-                <a:solidFill>
-                  <a:srgbClr val="4B5765"/>
-                </a:solidFill>
-                <a:latin typeface="Segoe UI"/>
-              </a:rPr>
-              <a:t>gaps across 441 people</a:t>
-            </a:r>
-          </a:p>
-        </p:txBody>
-      </p:sp>
-      <p:sp>
-        <p:nvSpPr>
-          <p:cNvPr id="14" name="TextBox 13"/>
-          <p:cNvSpPr txBox="1"/>
-          <p:nvPr/>
-        </p:nvSpPr>
-        <p:spPr>
-          <a:xfrm>
-            <a:off x="9875520" y="2834640"/>
-            <a:ext cx="1737360" cy="548640"/>
-          </a:xfrm>
-          <a:prstGeom prst="rect">
-            <a:avLst/>
-          </a:prstGeom>
-          <a:noFill/>
-        </p:spPr>
-        <p:txBody>
-          <a:bodyPr wrap="square" anchor="t" lIns="18288" rIns="18288" tIns="18288" bIns="18288">
-            <a:spAutoFit/>
-          </a:bodyPr>
-          <a:lstStyle/>
-          <a:p>
-            <a:pPr algn="l">
-              <a:spcAft>
-                <a:spcPts val="400"/>
-              </a:spcAft>
-            </a:pPr>
-            <a:r>
-              <a:rPr sz="2600" b="0">
-                <a:solidFill>
-                  <a:srgbClr val="B0412D"/>
-                </a:solidFill>
-                <a:latin typeface="Segoe UI Semibold"/>
-              </a:rPr>
-              <a:t>28%</a:t>
-            </a:r>
-          </a:p>
-        </p:txBody>
-      </p:sp>
-      <p:sp>
-        <p:nvSpPr>
-          <p:cNvPr id="15" name="TextBox 14"/>
-          <p:cNvSpPr txBox="1"/>
-          <p:nvPr/>
-        </p:nvSpPr>
-        <p:spPr>
-          <a:xfrm>
-            <a:off x="9875520" y="3401568"/>
-            <a:ext cx="1737360" cy="457200"/>
-          </a:xfrm>
-          <a:prstGeom prst="rect">
-            <a:avLst/>
-          </a:prstGeom>
-          <a:noFill/>
-        </p:spPr>
-        <p:txBody>
-          <a:bodyPr wrap="square" anchor="t" lIns="18288" rIns="18288" tIns="18288" bIns="18288">
-            <a:spAutoFit/>
-          </a:bodyPr>
-          <a:lstStyle/>
-          <a:p>
-            <a:pPr algn="l">
-              <a:spcAft>
-                <a:spcPts val="400"/>
-              </a:spcAft>
-            </a:pPr>
-            <a:r>
-              <a:rPr sz="1100" b="0">
-                <a:solidFill>
-                  <a:srgbClr val="4B5765"/>
-                </a:solidFill>
-                <a:latin typeface="Segoe UI"/>
-              </a:rPr>
-              <a:t>of Human Resources affected</a:t>
-            </a:r>
-          </a:p>
-        </p:txBody>
-      </p:sp>
-      <p:sp>
-        <p:nvSpPr>
-          <p:cNvPr id="16" name="TextBox 15"/>
-          <p:cNvSpPr txBox="1"/>
-          <p:nvPr/>
-        </p:nvSpPr>
-        <p:spPr>
-          <a:xfrm>
-            <a:off x="548640" y="3931920"/>
-            <a:ext cx="5422392" cy="320040"/>
-          </a:xfrm>
-          <a:prstGeom prst="rect">
-            <a:avLst/>
-          </a:prstGeom>
-          <a:noFill/>
-        </p:spPr>
-        <p:txBody>
-          <a:bodyPr wrap="square" anchor="t" lIns="18288" rIns="18288" tIns="18288" bIns="18288">
-            <a:spAutoFit/>
-          </a:bodyPr>
-          <a:lstStyle/>
-          <a:p>
-            <a:pPr algn="l">
-              <a:spcAft>
-                <a:spcPts val="400"/>
-              </a:spcAft>
-            </a:pPr>
-            <a:r>
-              <a:rPr sz="1300" b="0">
-                <a:solidFill>
-                  <a:srgbClr val="17202A"/>
-                </a:solidFill>
-                <a:latin typeface="Segoe UI Semibold"/>
-              </a:rPr>
-              <a:t>Q3 · Promotion pipeline</a:t>
-            </a:r>
-          </a:p>
-        </p:txBody>
-      </p:sp>
-      <p:graphicFrame>
-        <p:nvGraphicFramePr>
-          <p:cNvPr id="17" name="Chart 16"/>
-          <p:cNvGraphicFramePr>
-            <a:graphicFrameLocks noGrp="1"/>
-          </p:cNvGraphicFramePr>
-          <p:nvPr/>
-        </p:nvGraphicFramePr>
-        <p:xfrm>
-          <a:off x="457200" y="4251959"/>
-          <a:ext cx="3566160" cy="1874519"/>
-        </p:xfrm>
-        <a:graphic>
-          <a:graphicData uri="http://schemas.openxmlformats.org/drawingml/2006/chart">
-            <c:chart xmlns:c="http://schemas.openxmlformats.org/drawingml/2006/chart" r:id="rId5"/>
-          </a:graphicData>
-        </a:graphic>
-      </p:graphicFrame>
-      <p:sp>
-        <p:nvSpPr>
-          <p:cNvPr id="18" name="TextBox 17"/>
-          <p:cNvSpPr txBox="1"/>
-          <p:nvPr/>
-        </p:nvSpPr>
-        <p:spPr>
-          <a:xfrm>
-            <a:off x="4206240" y="4434840"/>
-            <a:ext cx="1737360" cy="548640"/>
-          </a:xfrm>
-          <a:prstGeom prst="rect">
-            <a:avLst/>
-          </a:prstGeom>
-          <a:noFill/>
-        </p:spPr>
-        <p:txBody>
-          <a:bodyPr wrap="square" anchor="t" lIns="18288" rIns="18288" tIns="18288" bIns="18288">
-            <a:spAutoFit/>
-          </a:bodyPr>
-          <a:lstStyle/>
-          <a:p>
-            <a:pPr algn="l">
-              <a:spcAft>
-                <a:spcPts val="400"/>
-              </a:spcAft>
-            </a:pPr>
-            <a:r>
-              <a:rPr sz="2600" b="0">
-                <a:solidFill>
-                  <a:srgbClr val="B0412D"/>
-                </a:solidFill>
-                <a:latin typeface="Segoe UI Semibold"/>
-              </a:rPr>
-              <a:t>28</a:t>
-            </a:r>
-          </a:p>
-        </p:txBody>
-      </p:sp>
-      <p:sp>
-        <p:nvSpPr>
-          <p:cNvPr id="19" name="TextBox 18"/>
-          <p:cNvSpPr txBox="1"/>
-          <p:nvPr/>
-        </p:nvSpPr>
-        <p:spPr>
-          <a:xfrm>
-            <a:off x="4206240" y="5001768"/>
-            <a:ext cx="1737360" cy="457200"/>
-          </a:xfrm>
-          <a:prstGeom prst="rect">
-            <a:avLst/>
-          </a:prstGeom>
-          <a:noFill/>
-        </p:spPr>
-        <p:txBody>
-          <a:bodyPr wrap="square" anchor="t" lIns="18288" rIns="18288" tIns="18288" bIns="18288">
-            <a:spAutoFit/>
-          </a:bodyPr>
-          <a:lstStyle/>
-          <a:p>
-            <a:pPr algn="l">
-              <a:spcAft>
-                <a:spcPts val="400"/>
-              </a:spcAft>
-            </a:pPr>
-            <a:r>
-              <a:rPr sz="1100" b="0">
-                <a:solidFill>
-                  <a:srgbClr val="4B5765"/>
-                </a:solidFill>
-                <a:latin typeface="Segoe UI"/>
-              </a:rPr>
-              <a:t>high-potential people at high attrition risk</a:t>
-            </a:r>
-          </a:p>
-        </p:txBody>
-      </p:sp>
-      <p:sp>
-        <p:nvSpPr>
-          <p:cNvPr id="20" name="TextBox 19"/>
-          <p:cNvSpPr txBox="1"/>
-          <p:nvPr/>
-        </p:nvSpPr>
-        <p:spPr>
-          <a:xfrm>
-            <a:off x="6217920" y="3931920"/>
-            <a:ext cx="5422392" cy="320040"/>
-          </a:xfrm>
-          <a:prstGeom prst="rect">
-            <a:avLst/>
-          </a:prstGeom>
-          <a:noFill/>
-        </p:spPr>
-        <p:txBody>
-          <a:bodyPr wrap="square" anchor="t" lIns="18288" rIns="18288" tIns="18288" bIns="18288">
-            <a:spAutoFit/>
-          </a:bodyPr>
-          <a:lstStyle/>
-          <a:p>
-            <a:pPr algn="l">
-              <a:spcAft>
-                <a:spcPts val="400"/>
-              </a:spcAft>
-            </a:pPr>
-            <a:r>
-              <a:rPr sz="1300" b="0">
-                <a:solidFill>
-                  <a:srgbClr val="17202A"/>
-                </a:solidFill>
-                <a:latin typeface="Segoe UI Semibold"/>
-              </a:rPr>
-              <a:t>Q4 · Training and development</a:t>
-            </a:r>
-          </a:p>
-        </p:txBody>
-      </p:sp>
-      <p:sp>
-        <p:nvSpPr>
-          <p:cNvPr id="21" name="Rounded Rectangle 20"/>
-          <p:cNvSpPr/>
-          <p:nvPr/>
-        </p:nvSpPr>
-        <p:spPr>
-          <a:xfrm>
-            <a:off x="6217920" y="4343400"/>
-            <a:ext cx="2633472" cy="886968"/>
-          </a:xfrm>
-          <a:prstGeom prst="roundRect">
-            <a:avLst>
-              <a:gd name="adj" fmla="val 6000"/>
-            </a:avLst>
-          </a:prstGeom>
-          <a:solidFill>
-            <a:srgbClr val="F4F6F8"/>
-          </a:solidFill>
-          <a:ln>
-            <a:noFill/>
-          </a:ln>
-        </p:spPr>
-        <p:txBody>
-          <a:bodyPr rtlCol="0" anchor="ctr"/>
-          <a:lstStyle/>
-          <a:p/>
-        </p:txBody>
-      </p:sp>
-      <p:sp>
-        <p:nvSpPr>
-          <p:cNvPr id="22" name="TextBox 21"/>
-          <p:cNvSpPr txBox="1"/>
-          <p:nvPr/>
-        </p:nvSpPr>
-        <p:spPr>
-          <a:xfrm>
-            <a:off x="6382512" y="4398264"/>
-            <a:ext cx="2377440" cy="457200"/>
-          </a:xfrm>
-          <a:prstGeom prst="rect">
-            <a:avLst/>
-          </a:prstGeom>
-          <a:noFill/>
-        </p:spPr>
-        <p:txBody>
-          <a:bodyPr wrap="square" anchor="t" lIns="18288" rIns="18288" tIns="18288" bIns="18288">
-            <a:spAutoFit/>
-          </a:bodyPr>
-          <a:lstStyle/>
-          <a:p>
-            <a:pPr algn="l">
-              <a:spcAft>
-                <a:spcPts val="400"/>
-              </a:spcAft>
-            </a:pPr>
-            <a:r>
-              <a:rPr sz="2200" b="0">
-                <a:solidFill>
-                  <a:srgbClr val="17202A"/>
-                </a:solidFill>
-                <a:latin typeface="Segoe UI Semibold"/>
-              </a:rPr>
-              <a:t>1.75</a:t>
-            </a:r>
-          </a:p>
-        </p:txBody>
-      </p:sp>
-      <p:sp>
-        <p:nvSpPr>
-          <p:cNvPr id="23" name="TextBox 22"/>
-          <p:cNvSpPr txBox="1"/>
-          <p:nvPr/>
-        </p:nvSpPr>
-        <p:spPr>
-          <a:xfrm>
-            <a:off x="6382512" y="4855464"/>
-            <a:ext cx="2377440" cy="320040"/>
-          </a:xfrm>
-          <a:prstGeom prst="rect">
-            <a:avLst/>
-          </a:prstGeom>
-          <a:noFill/>
-        </p:spPr>
-        <p:txBody>
-          <a:bodyPr wrap="square" anchor="t" lIns="18288" rIns="18288" tIns="18288" bIns="18288">
-            <a:spAutoFit/>
-          </a:bodyPr>
-          <a:lstStyle/>
-          <a:p>
-            <a:pPr algn="l">
-              <a:spcAft>
-                <a:spcPts val="400"/>
-              </a:spcAft>
-            </a:pPr>
-            <a:r>
-              <a:rPr sz="1050" b="0">
-                <a:solidFill>
-                  <a:srgbClr val="4B5765"/>
-                </a:solidFill>
-                <a:latin typeface="Segoe UI"/>
-              </a:rPr>
-              <a:t>courses per employee</a:t>
-            </a:r>
-          </a:p>
-        </p:txBody>
-      </p:sp>
-      <p:sp>
-        <p:nvSpPr>
-          <p:cNvPr id="24" name="Rounded Rectangle 23"/>
-          <p:cNvSpPr/>
-          <p:nvPr/>
-        </p:nvSpPr>
-        <p:spPr>
-          <a:xfrm>
-            <a:off x="8942832" y="4343400"/>
-            <a:ext cx="2633472" cy="886968"/>
-          </a:xfrm>
-          <a:prstGeom prst="roundRect">
-            <a:avLst>
-              <a:gd name="adj" fmla="val 6000"/>
-            </a:avLst>
-          </a:prstGeom>
-          <a:solidFill>
-            <a:srgbClr val="F4F6F8"/>
-          </a:solidFill>
-          <a:ln>
-            <a:noFill/>
-          </a:ln>
-        </p:spPr>
-        <p:txBody>
-          <a:bodyPr rtlCol="0" anchor="ctr"/>
-          <a:lstStyle/>
-          <a:p/>
-        </p:txBody>
-      </p:sp>
-      <p:sp>
-        <p:nvSpPr>
-          <p:cNvPr id="25" name="TextBox 24"/>
-          <p:cNvSpPr txBox="1"/>
-          <p:nvPr/>
-        </p:nvSpPr>
-        <p:spPr>
-          <a:xfrm>
-            <a:off x="9107424" y="4398264"/>
-            <a:ext cx="2377440" cy="457200"/>
-          </a:xfrm>
-          <a:prstGeom prst="rect">
-            <a:avLst/>
-          </a:prstGeom>
-          <a:noFill/>
-        </p:spPr>
-        <p:txBody>
-          <a:bodyPr wrap="square" anchor="t" lIns="18288" rIns="18288" tIns="18288" bIns="18288">
-            <a:spAutoFit/>
-          </a:bodyPr>
-          <a:lstStyle/>
-          <a:p>
-            <a:pPr algn="l">
-              <a:spcAft>
-                <a:spcPts val="400"/>
-              </a:spcAft>
-            </a:pPr>
-            <a:r>
-              <a:rPr sz="2200" b="0">
-                <a:solidFill>
-                  <a:srgbClr val="17202A"/>
-                </a:solidFill>
-                <a:latin typeface="Segoe UI Semibold"/>
-              </a:rPr>
-              <a:t>1,764</a:t>
-            </a:r>
-          </a:p>
-        </p:txBody>
-      </p:sp>
-      <p:sp>
-        <p:nvSpPr>
-          <p:cNvPr id="26" name="TextBox 25"/>
-          <p:cNvSpPr txBox="1"/>
-          <p:nvPr/>
-        </p:nvSpPr>
-        <p:spPr>
-          <a:xfrm>
-            <a:off x="9107424" y="4855464"/>
-            <a:ext cx="2377440" cy="320040"/>
-          </a:xfrm>
-          <a:prstGeom prst="rect">
-            <a:avLst/>
-          </a:prstGeom>
-          <a:noFill/>
-        </p:spPr>
-        <p:txBody>
-          <a:bodyPr wrap="square" anchor="t" lIns="18288" rIns="18288" tIns="18288" bIns="18288">
-            <a:spAutoFit/>
-          </a:bodyPr>
-          <a:lstStyle/>
-          <a:p>
-            <a:pPr algn="l">
-              <a:spcAft>
-                <a:spcPts val="400"/>
-              </a:spcAft>
-            </a:pPr>
-            <a:r>
-              <a:rPr sz="1050" b="0">
-                <a:solidFill>
-                  <a:srgbClr val="4B5765"/>
-                </a:solidFill>
-                <a:latin typeface="Segoe UI"/>
-              </a:rPr>
-              <a:t>certifications</a:t>
-            </a:r>
-          </a:p>
-        </p:txBody>
-      </p:sp>
-      <p:sp>
-        <p:nvSpPr>
-          <p:cNvPr id="27" name="Rounded Rectangle 26"/>
-          <p:cNvSpPr/>
-          <p:nvPr/>
-        </p:nvSpPr>
-        <p:spPr>
-          <a:xfrm>
-            <a:off x="6217920" y="5321808"/>
-            <a:ext cx="2633472" cy="886968"/>
-          </a:xfrm>
-          <a:prstGeom prst="roundRect">
-            <a:avLst>
-              <a:gd name="adj" fmla="val 6000"/>
-            </a:avLst>
-          </a:prstGeom>
-          <a:solidFill>
-            <a:srgbClr val="F4F6F8"/>
-          </a:solidFill>
-          <a:ln>
-            <a:noFill/>
-          </a:ln>
-        </p:spPr>
-        <p:txBody>
-          <a:bodyPr rtlCol="0" anchor="ctr"/>
-          <a:lstStyle/>
-          <a:p/>
-        </p:txBody>
-      </p:sp>
-      <p:sp>
-        <p:nvSpPr>
-          <p:cNvPr id="28" name="TextBox 27"/>
-          <p:cNvSpPr txBox="1"/>
-          <p:nvPr/>
-        </p:nvSpPr>
-        <p:spPr>
-          <a:xfrm>
-            <a:off x="6382512" y="5376672"/>
-            <a:ext cx="2377440" cy="457200"/>
-          </a:xfrm>
-          <a:prstGeom prst="rect">
-            <a:avLst/>
-          </a:prstGeom>
-          <a:noFill/>
-        </p:spPr>
-        <p:txBody>
-          <a:bodyPr wrap="square" anchor="t" lIns="18288" rIns="18288" tIns="18288" bIns="18288">
-            <a:spAutoFit/>
-          </a:bodyPr>
-          <a:lstStyle/>
-          <a:p>
-            <a:pPr algn="l">
-              <a:spcAft>
-                <a:spcPts val="400"/>
-              </a:spcAft>
-            </a:pPr>
-            <a:r>
-              <a:rPr sz="2200" b="0">
-                <a:solidFill>
-                  <a:srgbClr val="17202A"/>
-                </a:solidFill>
-                <a:latin typeface="Segoe UI Semibold"/>
-              </a:rPr>
-              <a:t>41%</a:t>
-            </a:r>
-          </a:p>
-        </p:txBody>
-      </p:sp>
-      <p:sp>
-        <p:nvSpPr>
-          <p:cNvPr id="29" name="TextBox 28"/>
-          <p:cNvSpPr txBox="1"/>
-          <p:nvPr/>
-        </p:nvSpPr>
-        <p:spPr>
-          <a:xfrm>
-            <a:off x="6382512" y="5833872"/>
-            <a:ext cx="2377440" cy="320040"/>
-          </a:xfrm>
-          <a:prstGeom prst="rect">
-            <a:avLst/>
-          </a:prstGeom>
-          <a:noFill/>
-        </p:spPr>
-        <p:txBody>
-          <a:bodyPr wrap="square" anchor="t" lIns="18288" rIns="18288" tIns="18288" bIns="18288">
-            <a:spAutoFit/>
-          </a:bodyPr>
-          <a:lstStyle/>
-          <a:p>
-            <a:pPr algn="l">
-              <a:spcAft>
-                <a:spcPts val="400"/>
-              </a:spcAft>
-            </a:pPr>
-            <a:r>
-              <a:rPr sz="1050" b="0">
-                <a:solidFill>
-                  <a:srgbClr val="4B5765"/>
-                </a:solidFill>
-                <a:latin typeface="Segoe UI"/>
-              </a:rPr>
-              <a:t>quiz pass rate</a:t>
-            </a:r>
-          </a:p>
-        </p:txBody>
-      </p:sp>
-      <p:sp>
-        <p:nvSpPr>
-          <p:cNvPr id="30" name="Rounded Rectangle 29"/>
-          <p:cNvSpPr/>
-          <p:nvPr/>
-        </p:nvSpPr>
-        <p:spPr>
-          <a:xfrm>
-            <a:off x="8942832" y="5321808"/>
-            <a:ext cx="2633472" cy="886968"/>
-          </a:xfrm>
-          <a:prstGeom prst="roundRect">
-            <a:avLst>
-              <a:gd name="adj" fmla="val 6000"/>
-            </a:avLst>
-          </a:prstGeom>
-          <a:solidFill>
-            <a:srgbClr val="F4F6F8"/>
-          </a:solidFill>
-          <a:ln>
-            <a:noFill/>
-          </a:ln>
-        </p:spPr>
-        <p:txBody>
-          <a:bodyPr rtlCol="0" anchor="ctr"/>
-          <a:lstStyle/>
-          <a:p/>
-        </p:txBody>
-      </p:sp>
-      <p:sp>
-        <p:nvSpPr>
-          <p:cNvPr id="31" name="TextBox 30"/>
-          <p:cNvSpPr txBox="1"/>
-          <p:nvPr/>
-        </p:nvSpPr>
-        <p:spPr>
-          <a:xfrm>
-            <a:off x="9107424" y="5376672"/>
-            <a:ext cx="2377440" cy="457200"/>
-          </a:xfrm>
-          <a:prstGeom prst="rect">
-            <a:avLst/>
-          </a:prstGeom>
-          <a:noFill/>
-        </p:spPr>
-        <p:txBody>
-          <a:bodyPr wrap="square" anchor="t" lIns="18288" rIns="18288" tIns="18288" bIns="18288">
-            <a:spAutoFit/>
-          </a:bodyPr>
-          <a:lstStyle/>
-          <a:p>
-            <a:pPr algn="l">
-              <a:spcAft>
-                <a:spcPts val="400"/>
-              </a:spcAft>
-            </a:pPr>
-            <a:r>
-              <a:rPr sz="2200" b="0">
-                <a:solidFill>
-                  <a:srgbClr val="B0412D"/>
-                </a:solidFill>
-                <a:latin typeface="Segoe UI Semibold"/>
-              </a:rPr>
-              <a:t>232</a:t>
-            </a:r>
-          </a:p>
-        </p:txBody>
-      </p:sp>
-      <p:sp>
-        <p:nvSpPr>
-          <p:cNvPr id="32" name="TextBox 31"/>
-          <p:cNvSpPr txBox="1"/>
-          <p:nvPr/>
-        </p:nvSpPr>
-        <p:spPr>
-          <a:xfrm>
-            <a:off x="9107424" y="5833872"/>
-            <a:ext cx="2377440" cy="320040"/>
-          </a:xfrm>
-          <a:prstGeom prst="rect">
-            <a:avLst/>
-          </a:prstGeom>
-          <a:noFill/>
-        </p:spPr>
-        <p:txBody>
-          <a:bodyPr wrap="square" anchor="t" lIns="18288" rIns="18288" tIns="18288" bIns="18288">
-            <a:spAutoFit/>
-          </a:bodyPr>
-          <a:lstStyle/>
-          <a:p>
-            <a:pPr algn="l">
-              <a:spcAft>
-                <a:spcPts val="400"/>
-              </a:spcAft>
-            </a:pPr>
-            <a:r>
-              <a:rPr sz="1050" b="0">
-                <a:solidFill>
-                  <a:srgbClr val="4B5765"/>
-                </a:solidFill>
-                <a:latin typeface="Segoe UI"/>
-              </a:rPr>
-              <a:t>with no learning activity</a:t>
-            </a:r>
-          </a:p>
-        </p:txBody>
-      </p:sp>
-      <p:cxnSp>
-        <p:nvCxnSpPr>
-          <p:cNvPr id="33" name="Connector 32"/>
-          <p:cNvCxnSpPr/>
-          <p:nvPr/>
-        </p:nvCxnSpPr>
-        <p:spPr>
-          <a:xfrm>
-            <a:off x="548640" y="6400800"/>
-            <a:ext cx="11094415" cy="0"/>
-          </a:xfrm>
-          <a:prstGeom prst="line">
-            <a:avLst/>
-          </a:prstGeom>
-          <a:ln w="9525">
-            <a:solidFill>
-              <a:srgbClr val="D4DAE1"/>
-            </a:solidFill>
-          </a:ln>
-        </p:spPr>
-      </p:cxnSp>
-      <p:sp>
-        <p:nvSpPr>
-          <p:cNvPr id="34" name="TextBox 33"/>
-          <p:cNvSpPr txBox="1"/>
-          <p:nvPr/>
-        </p:nvSpPr>
-        <p:spPr>
-          <a:xfrm>
-            <a:off x="548640" y="6455664"/>
-            <a:ext cx="7315200" cy="274320"/>
-          </a:xfrm>
-          <a:prstGeom prst="rect">
-            <a:avLst/>
-          </a:prstGeom>
-          <a:noFill/>
-        </p:spPr>
-        <p:txBody>
-          <a:bodyPr wrap="square" anchor="t" lIns="18288" rIns="18288" tIns="18288" bIns="18288">
-            <a:spAutoFit/>
-          </a:bodyPr>
-          <a:lstStyle/>
-          <a:p>
-            <a:pPr algn="l">
-              <a:spcAft>
-                <a:spcPts val="400"/>
-              </a:spcAft>
-            </a:pPr>
-            <a:r>
-              <a:rPr sz="900" b="0">
-                <a:solidFill>
-                  <a:srgbClr val="8A94A0"/>
-                </a:solidFill>
-                <a:latin typeface="Segoe UI"/>
-              </a:rPr>
-              <a:t>ACME Talent Lake  ·  Data Engineer track  ·  Coding Workshop 2026</a:t>
-            </a:r>
-          </a:p>
-        </p:txBody>
-      </p:sp>
-      <p:sp>
-        <p:nvSpPr>
-          <p:cNvPr id="35" name="TextBox 34"/>
-          <p:cNvSpPr txBox="1"/>
-          <p:nvPr/>
-        </p:nvSpPr>
-        <p:spPr>
-          <a:xfrm>
-            <a:off x="10698480" y="6455664"/>
-            <a:ext cx="941832" cy="274320"/>
-          </a:xfrm>
-          <a:prstGeom prst="rect">
-            <a:avLst/>
-          </a:prstGeom>
-          <a:noFill/>
-        </p:spPr>
-        <p:txBody>
-          <a:bodyPr wrap="square" anchor="t" lIns="18288" rIns="18288" tIns="18288" bIns="18288">
-            <a:spAutoFit/>
-          </a:bodyPr>
-          <a:lstStyle/>
-          <a:p>
-            <a:pPr algn="r">
-              <a:spcAft>
-                <a:spcPts val="400"/>
-              </a:spcAft>
-            </a:pPr>
-            <a:r>
-              <a:rPr sz="900" b="0">
-                <a:solidFill>
-                  <a:srgbClr val="8A94A0"/>
-                </a:solidFill>
-                <a:latin typeface="Segoe UI"/>
-              </a:rPr>
-              <a:t>8 / 11</a:t>
+              <a:t>8 / 12</a:t>
             </a:r>
           </a:p>
         </p:txBody>
@@ -20841,7 +23119,7 @@
                 </a:solidFill>
                 <a:latin typeface="Segoe UI Semibold"/>
               </a:rPr>
-              <a:t>FINDINGS · Q5–Q7</a:t>
+              <a:t>FINDINGS · Q1–Q4</a:t>
             </a:r>
           </a:p>
         </p:txBody>
@@ -20880,7 +23158,7 @@
                 </a:solidFill>
                 <a:latin typeface="Segoe UI Semibold"/>
               </a:rPr>
-              <a:t>212 at high attrition risk; stronger teams deliver on time</a:t>
+              <a:t>230 declining · 441 with gaps · 124 ready · 232 not learning</a:t>
             </a:r>
           </a:p>
         </p:txBody>
@@ -20894,7 +23172,7 @@
         <p:spPr>
           <a:xfrm>
             <a:off x="548640" y="1417320"/>
-            <a:ext cx="3557016" cy="320040"/>
+            <a:ext cx="5422392" cy="320040"/>
           </a:xfrm>
           <a:prstGeom prst="rect">
             <a:avLst/>
@@ -20919,7 +23197,7 @@
                 </a:solidFill>
                 <a:latin typeface="Segoe UI Semibold"/>
               </a:rPr>
-              <a:t>Q5 · Computed attrition risk</a:t>
+              <a:t>Q1 · Change since previous review</a:t>
             </a:r>
           </a:p>
         </p:txBody>
@@ -20934,7 +23212,7 @@
         </p:nvGraphicFramePr>
         <p:xfrm>
           <a:off x="457200" y="1737360"/>
-          <a:ext cx="3648456" cy="1737360"/>
+          <a:ext cx="3566160" cy="1874519"/>
         </p:xfrm>
         <a:graphic>
           <a:graphicData uri="http://schemas.openxmlformats.org/drawingml/2006/chart">
@@ -20950,8 +23228,8 @@
         </p:nvSpPr>
         <p:spPr>
           <a:xfrm>
-            <a:off x="548640" y="3657600"/>
-            <a:ext cx="3557016" cy="2468880"/>
+            <a:off x="4206240" y="1920240"/>
+            <a:ext cx="1737360" cy="548640"/>
           </a:xfrm>
           <a:prstGeom prst="rect">
             <a:avLst/>
@@ -20966,49 +23244,17 @@
           <a:p>
             <a:pPr algn="l">
               <a:spcAft>
-                <a:spcPts val="800"/>
-              </a:spcAft>
-            </a:pPr>
-            <a:r>
-              <a:rPr sz="1200" b="0">
-                <a:solidFill>
-                  <a:srgbClr val="4B5765"/>
-                </a:solidFill>
-                <a:latin typeface="Segoe UI"/>
-              </a:rPr>
-              <a:t>Managers flagged 311 as high risk; only 145 also show performance warning signs.</a:t>
-            </a:r>
-          </a:p>
-          <a:p>
-            <a:pPr algn="l">
-              <a:spcAft>
-                <a:spcPts val="800"/>
-              </a:spcAft>
-            </a:pPr>
-            <a:r>
-              <a:rPr sz="1200" b="0">
+                <a:spcPts val="400"/>
+              </a:spcAft>
+            </a:pPr>
+            <a:r>
+              <a:rPr sz="2600" b="0">
                 <a:solidFill>
                   <a:srgbClr val="17202A"/>
                 </a:solidFill>
                 <a:latin typeface="Segoe UI Semibold"/>
               </a:rPr>
-              <a:t>67 more score high without a manager flag.</a:t>
-            </a:r>
-          </a:p>
-          <a:p>
-            <a:pPr algn="l">
-              <a:spcAft>
-                <a:spcPts val="800"/>
-              </a:spcAft>
-            </a:pPr>
-            <a:r>
-              <a:rPr sz="1050" b="0">
-                <a:solidFill>
-                  <a:srgbClr val="8A94A0"/>
-                </a:solidFill>
-                <a:latin typeface="Segoe UI"/>
-              </a:rPr>
-              <a:t>Score: rating fell +2 · rating ≤ 2 +2 · negative comment +1 · no learning in 180 days +1 · manager flag +2 / +1. High = 5 or more.</a:t>
+              <a:t>3.41</a:t>
             </a:r>
           </a:p>
         </p:txBody>
@@ -21021,8 +23267,8 @@
         </p:nvSpPr>
         <p:spPr>
           <a:xfrm>
-            <a:off x="4315968" y="1417320"/>
-            <a:ext cx="3557016" cy="320040"/>
+            <a:off x="4206240" y="2487168"/>
+            <a:ext cx="1737360" cy="457200"/>
           </a:xfrm>
           <a:prstGeom prst="rect">
             <a:avLst/>
@@ -21041,28 +23287,145 @@
               </a:spcAft>
             </a:pPr>
             <a:r>
+              <a:rPr sz="1100" b="0">
+                <a:solidFill>
+                  <a:srgbClr val="4B5765"/>
+                </a:solidFill>
+                <a:latin typeface="Segoe UI"/>
+              </a:rPr>
+              <a:t>average latest rating</a:t>
+            </a:r>
+          </a:p>
+        </p:txBody>
+      </p:sp>
+      <p:sp>
+        <p:nvSpPr>
+          <p:cNvPr id="8" name="TextBox 7"/>
+          <p:cNvSpPr txBox="1"/>
+          <p:nvPr/>
+        </p:nvSpPr>
+        <p:spPr>
+          <a:xfrm>
+            <a:off x="4206240" y="2834640"/>
+            <a:ext cx="1737360" cy="548640"/>
+          </a:xfrm>
+          <a:prstGeom prst="rect">
+            <a:avLst/>
+          </a:prstGeom>
+          <a:noFill/>
+        </p:spPr>
+        <p:txBody>
+          <a:bodyPr wrap="square" anchor="t" lIns="18288" rIns="18288" tIns="18288" bIns="18288">
+            <a:spAutoFit/>
+          </a:bodyPr>
+          <a:lstStyle/>
+          <a:p>
+            <a:pPr algn="l">
+              <a:spcAft>
+                <a:spcPts val="400"/>
+              </a:spcAft>
+            </a:pPr>
+            <a:r>
+              <a:rPr sz="2600" b="0">
+                <a:solidFill>
+                  <a:srgbClr val="B0412D"/>
+                </a:solidFill>
+                <a:latin typeface="Segoe UI Semibold"/>
+              </a:rPr>
+              <a:t>84</a:t>
+            </a:r>
+          </a:p>
+        </p:txBody>
+      </p:sp>
+      <p:sp>
+        <p:nvSpPr>
+          <p:cNvPr id="9" name="TextBox 8"/>
+          <p:cNvSpPr txBox="1"/>
+          <p:nvPr/>
+        </p:nvSpPr>
+        <p:spPr>
+          <a:xfrm>
+            <a:off x="4206240" y="3401568"/>
+            <a:ext cx="1737360" cy="457200"/>
+          </a:xfrm>
+          <a:prstGeom prst="rect">
+            <a:avLst/>
+          </a:prstGeom>
+          <a:noFill/>
+        </p:spPr>
+        <p:txBody>
+          <a:bodyPr wrap="square" anchor="t" lIns="18288" rIns="18288" tIns="18288" bIns="18288">
+            <a:spAutoFit/>
+          </a:bodyPr>
+          <a:lstStyle/>
+          <a:p>
+            <a:pPr algn="l">
+              <a:spcAft>
+                <a:spcPts val="400"/>
+              </a:spcAft>
+            </a:pPr>
+            <a:r>
+              <a:rPr sz="1100" b="0">
+                <a:solidFill>
+                  <a:srgbClr val="4B5765"/>
+                </a:solidFill>
+                <a:latin typeface="Segoe UI"/>
+              </a:rPr>
+              <a:t>dropped 2+ points</a:t>
+            </a:r>
+          </a:p>
+        </p:txBody>
+      </p:sp>
+      <p:sp>
+        <p:nvSpPr>
+          <p:cNvPr id="10" name="TextBox 9"/>
+          <p:cNvSpPr txBox="1"/>
+          <p:nvPr/>
+        </p:nvSpPr>
+        <p:spPr>
+          <a:xfrm>
+            <a:off x="6217920" y="1417320"/>
+            <a:ext cx="5422392" cy="320040"/>
+          </a:xfrm>
+          <a:prstGeom prst="rect">
+            <a:avLst/>
+          </a:prstGeom>
+          <a:noFill/>
+        </p:spPr>
+        <p:txBody>
+          <a:bodyPr wrap="square" anchor="t" lIns="18288" rIns="18288" tIns="18288" bIns="18288">
+            <a:spAutoFit/>
+          </a:bodyPr>
+          <a:lstStyle/>
+          <a:p>
+            <a:pPr algn="l">
+              <a:spcAft>
+                <a:spcPts val="400"/>
+              </a:spcAft>
+            </a:pPr>
+            <a:r>
               <a:rPr sz="1300" b="0">
                 <a:solidFill>
                   <a:srgbClr val="17202A"/>
                 </a:solidFill>
                 <a:latin typeface="Segoe UI Semibold"/>
               </a:rPr>
-              <a:t>Q6 · % high performers by delivery</a:t>
+              <a:t>Q2 · Most critical skill gaps</a:t>
             </a:r>
           </a:p>
         </p:txBody>
       </p:sp>
       <p:graphicFrame>
         <p:nvGraphicFramePr>
-          <p:cNvPr id="8" name="Chart 7"/>
+          <p:cNvPr id="11" name="Chart 10"/>
           <p:cNvGraphicFramePr>
             <a:graphicFrameLocks noGrp="1"/>
           </p:cNvGraphicFramePr>
           <p:nvPr/>
         </p:nvGraphicFramePr>
         <p:xfrm>
-          <a:off x="4224528" y="1737360"/>
-          <a:ext cx="3648456" cy="1737360"/>
+          <a:off x="6126480" y="1737360"/>
+          <a:ext cx="3566160" cy="1874519"/>
         </p:xfrm>
         <a:graphic>
           <a:graphicData uri="http://schemas.openxmlformats.org/drawingml/2006/chart">
@@ -21072,14 +23435,14 @@
       </p:graphicFrame>
       <p:sp>
         <p:nvSpPr>
-          <p:cNvPr id="9" name="TextBox 8"/>
+          <p:cNvPr id="12" name="TextBox 11"/>
           <p:cNvSpPr txBox="1"/>
           <p:nvPr/>
         </p:nvSpPr>
         <p:spPr>
           <a:xfrm>
-            <a:off x="4315968" y="3703320"/>
-            <a:ext cx="1143000" cy="411480"/>
+            <a:off x="9875520" y="1920240"/>
+            <a:ext cx="1737360" cy="548640"/>
           </a:xfrm>
           <a:prstGeom prst="rect">
             <a:avLst/>
@@ -21098,27 +23461,27 @@
               </a:spcAft>
             </a:pPr>
             <a:r>
-              <a:rPr sz="2000" b="0">
+              <a:rPr sz="2600" b="0">
                 <a:solidFill>
                   <a:srgbClr val="17202A"/>
                 </a:solidFill>
                 <a:latin typeface="Segoe UI Semibold"/>
               </a:rPr>
-              <a:t>+0.24</a:t>
-            </a:r>
-          </a:p>
-        </p:txBody>
-      </p:sp>
-      <p:sp>
-        <p:nvSpPr>
-          <p:cNvPr id="10" name="TextBox 9"/>
+              <a:t>465</a:t>
+            </a:r>
+          </a:p>
+        </p:txBody>
+      </p:sp>
+      <p:sp>
+        <p:nvSpPr>
+          <p:cNvPr id="13" name="TextBox 12"/>
           <p:cNvSpPr txBox="1"/>
           <p:nvPr/>
         </p:nvSpPr>
         <p:spPr>
           <a:xfrm>
-            <a:off x="4315968" y="4160520"/>
-            <a:ext cx="1143000" cy="548640"/>
+            <a:off x="9875520" y="2487168"/>
+            <a:ext cx="1737360" cy="457200"/>
           </a:xfrm>
           <a:prstGeom prst="rect">
             <a:avLst/>
@@ -21133,47 +23496,31 @@
           <a:p>
             <a:pPr algn="l">
               <a:spcAft>
-                <a:spcPts val="0"/>
-              </a:spcAft>
-            </a:pPr>
-            <a:r>
-              <a:rPr sz="950" b="0">
+                <a:spcPts val="400"/>
+              </a:spcAft>
+            </a:pPr>
+            <a:r>
+              <a:rPr sz="1100" b="0">
                 <a:solidFill>
                   <a:srgbClr val="4B5765"/>
                 </a:solidFill>
                 <a:latin typeface="Segoe UI"/>
               </a:rPr>
-              <a:t>rating vs</a:t>
-            </a:r>
-          </a:p>
-          <a:p>
-            <a:pPr algn="l">
-              <a:spcAft>
-                <a:spcPts val="0"/>
-              </a:spcAft>
-            </a:pPr>
-            <a:r>
-              <a:rPr sz="950" b="0">
-                <a:solidFill>
-                  <a:srgbClr val="4B5765"/>
-                </a:solidFill>
-                <a:latin typeface="Segoe UI"/>
-              </a:rPr>
-              <a:t>project score</a:t>
-            </a:r>
-          </a:p>
-        </p:txBody>
-      </p:sp>
-      <p:sp>
-        <p:nvSpPr>
-          <p:cNvPr id="11" name="TextBox 10"/>
+              <a:t>gaps across 441 people</a:t>
+            </a:r>
+          </a:p>
+        </p:txBody>
+      </p:sp>
+      <p:sp>
+        <p:nvSpPr>
+          <p:cNvPr id="14" name="TextBox 13"/>
           <p:cNvSpPr txBox="1"/>
           <p:nvPr/>
         </p:nvSpPr>
         <p:spPr>
           <a:xfrm>
-            <a:off x="5504688" y="3703320"/>
-            <a:ext cx="1143000" cy="411480"/>
+            <a:off x="9875520" y="2834640"/>
+            <a:ext cx="1737360" cy="548640"/>
           </a:xfrm>
           <a:prstGeom prst="rect">
             <a:avLst/>
@@ -21192,27 +23539,27 @@
               </a:spcAft>
             </a:pPr>
             <a:r>
-              <a:rPr sz="2000" b="0">
-                <a:solidFill>
-                  <a:srgbClr val="17202A"/>
+              <a:rPr sz="2600" b="0">
+                <a:solidFill>
+                  <a:srgbClr val="B0412D"/>
                 </a:solidFill>
                 <a:latin typeface="Segoe UI Semibold"/>
               </a:rPr>
-              <a:t>+0.38</a:t>
-            </a:r>
-          </a:p>
-        </p:txBody>
-      </p:sp>
-      <p:sp>
-        <p:nvSpPr>
-          <p:cNvPr id="12" name="TextBox 11"/>
+              <a:t>28%</a:t>
+            </a:r>
+          </a:p>
+        </p:txBody>
+      </p:sp>
+      <p:sp>
+        <p:nvSpPr>
+          <p:cNvPr id="15" name="TextBox 14"/>
           <p:cNvSpPr txBox="1"/>
           <p:nvPr/>
         </p:nvSpPr>
         <p:spPr>
           <a:xfrm>
-            <a:off x="5504688" y="4160520"/>
-            <a:ext cx="1143000" cy="548640"/>
+            <a:off x="9875520" y="3401568"/>
+            <a:ext cx="1737360" cy="457200"/>
           </a:xfrm>
           <a:prstGeom prst="rect">
             <a:avLst/>
@@ -21227,47 +23574,31 @@
           <a:p>
             <a:pPr algn="l">
               <a:spcAft>
-                <a:spcPts val="0"/>
-              </a:spcAft>
-            </a:pPr>
-            <a:r>
-              <a:rPr sz="950" b="0">
+                <a:spcPts val="400"/>
+              </a:spcAft>
+            </a:pPr>
+            <a:r>
+              <a:rPr sz="1100" b="0">
                 <a:solidFill>
                   <a:srgbClr val="4B5765"/>
                 </a:solidFill>
                 <a:latin typeface="Segoe UI"/>
               </a:rPr>
-              <a:t>high performers</a:t>
-            </a:r>
-          </a:p>
-          <a:p>
-            <a:pPr algn="l">
-              <a:spcAft>
-                <a:spcPts val="0"/>
-              </a:spcAft>
-            </a:pPr>
-            <a:r>
-              <a:rPr sz="950" b="0">
-                <a:solidFill>
-                  <a:srgbClr val="4B5765"/>
-                </a:solidFill>
-                <a:latin typeface="Segoe UI"/>
-              </a:rPr>
-              <a:t>vs on time</a:t>
-            </a:r>
-          </a:p>
-        </p:txBody>
-      </p:sp>
-      <p:sp>
-        <p:nvSpPr>
-          <p:cNvPr id="13" name="TextBox 12"/>
+              <a:t>of Human Resources affected</a:t>
+            </a:r>
+          </a:p>
+        </p:txBody>
+      </p:sp>
+      <p:sp>
+        <p:nvSpPr>
+          <p:cNvPr id="16" name="TextBox 15"/>
           <p:cNvSpPr txBox="1"/>
           <p:nvPr/>
         </p:nvSpPr>
         <p:spPr>
           <a:xfrm>
-            <a:off x="6693408" y="3703320"/>
-            <a:ext cx="1143000" cy="411480"/>
+            <a:off x="548640" y="3931920"/>
+            <a:ext cx="5422392" cy="320040"/>
           </a:xfrm>
           <a:prstGeom prst="rect">
             <a:avLst/>
@@ -21286,146 +23617,13 @@
               </a:spcAft>
             </a:pPr>
             <a:r>
-              <a:rPr sz="2000" b="0">
+              <a:rPr sz="1300" b="0">
                 <a:solidFill>
                   <a:srgbClr val="17202A"/>
                 </a:solidFill>
                 <a:latin typeface="Segoe UI Semibold"/>
               </a:rPr>
-              <a:t>-0.23</a:t>
-            </a:r>
-          </a:p>
-        </p:txBody>
-      </p:sp>
-      <p:sp>
-        <p:nvSpPr>
-          <p:cNvPr id="14" name="TextBox 13"/>
-          <p:cNvSpPr txBox="1"/>
-          <p:nvPr/>
-        </p:nvSpPr>
-        <p:spPr>
-          <a:xfrm>
-            <a:off x="6693408" y="4160520"/>
-            <a:ext cx="1143000" cy="548640"/>
-          </a:xfrm>
-          <a:prstGeom prst="rect">
-            <a:avLst/>
-          </a:prstGeom>
-          <a:noFill/>
-        </p:spPr>
-        <p:txBody>
-          <a:bodyPr wrap="square" anchor="t" lIns="18288" rIns="18288" tIns="18288" bIns="18288">
-            <a:spAutoFit/>
-          </a:bodyPr>
-          <a:lstStyle/>
-          <a:p>
-            <a:pPr algn="l">
-              <a:spcAft>
-                <a:spcPts val="0"/>
-              </a:spcAft>
-            </a:pPr>
-            <a:r>
-              <a:rPr sz="950" b="0">
-                <a:solidFill>
-                  <a:srgbClr val="4B5765"/>
-                </a:solidFill>
-                <a:latin typeface="Segoe UI"/>
-              </a:rPr>
-              <a:t>skill gaps vs</a:t>
-            </a:r>
-          </a:p>
-          <a:p>
-            <a:pPr algn="l">
-              <a:spcAft>
-                <a:spcPts val="0"/>
-              </a:spcAft>
-            </a:pPr>
-            <a:r>
-              <a:rPr sz="950" b="0">
-                <a:solidFill>
-                  <a:srgbClr val="4B5765"/>
-                </a:solidFill>
-                <a:latin typeface="Segoe UI"/>
-              </a:rPr>
-              <a:t>project score</a:t>
-            </a:r>
-          </a:p>
-        </p:txBody>
-      </p:sp>
-      <p:sp>
-        <p:nvSpPr>
-          <p:cNvPr id="15" name="TextBox 14"/>
-          <p:cNvSpPr txBox="1"/>
-          <p:nvPr/>
-        </p:nvSpPr>
-        <p:spPr>
-          <a:xfrm>
-            <a:off x="4315968" y="4983480"/>
-            <a:ext cx="3557016" cy="1097280"/>
-          </a:xfrm>
-          <a:prstGeom prst="rect">
-            <a:avLst/>
-          </a:prstGeom>
-          <a:noFill/>
-        </p:spPr>
-        <p:txBody>
-          <a:bodyPr wrap="square" anchor="t" lIns="18288" rIns="18288" tIns="18288" bIns="18288">
-            <a:spAutoFit/>
-          </a:bodyPr>
-          <a:lstStyle/>
-          <a:p>
-            <a:pPr algn="l">
-              <a:spcAft>
-                <a:spcPts val="400"/>
-              </a:spcAft>
-            </a:pPr>
-            <a:r>
-              <a:rPr sz="1100" b="0">
-                <a:solidFill>
-                  <a:srgbClr val="4B5765"/>
-                </a:solidFill>
-                <a:latin typeface="Segoe UI"/>
-              </a:rPr>
-              <a:t>Team level, because projects belong to teams. Based on 27 teams: indicative, not proof.</a:t>
-            </a:r>
-          </a:p>
-        </p:txBody>
-      </p:sp>
-      <p:sp>
-        <p:nvSpPr>
-          <p:cNvPr id="16" name="TextBox 15"/>
-          <p:cNvSpPr txBox="1"/>
-          <p:nvPr/>
-        </p:nvSpPr>
-        <p:spPr>
-          <a:xfrm>
-            <a:off x="8083296" y="1417320"/>
-            <a:ext cx="3557016" cy="320040"/>
-          </a:xfrm>
-          <a:prstGeom prst="rect">
-            <a:avLst/>
-          </a:prstGeom>
-          <a:noFill/>
-        </p:spPr>
-        <p:txBody>
-          <a:bodyPr wrap="square" anchor="t" lIns="18288" rIns="18288" tIns="18288" bIns="18288">
-            <a:spAutoFit/>
-          </a:bodyPr>
-          <a:lstStyle/>
-          <a:p>
-            <a:pPr algn="l">
-              <a:spcAft>
-                <a:spcPts val="400"/>
-              </a:spcAft>
-            </a:pPr>
-            <a:r>
-              <a:rPr sz="1300" b="0">
-                <a:solidFill>
-                  <a:srgbClr val="17202A"/>
-                </a:solidFill>
-                <a:latin typeface="Segoe UI Semibold"/>
-              </a:rPr>
-              <a:t>Q7 · Weakest skill coverage</a:t>
+              <a:t>Q3 · Promotion pipeline</a:t>
             </a:r>
           </a:p>
         </p:txBody>
@@ -21439,8 +23637,8 @@
           <p:nvPr/>
         </p:nvGraphicFramePr>
         <p:xfrm>
-          <a:off x="7991856" y="1737360"/>
-          <a:ext cx="3648456" cy="1737360"/>
+          <a:off x="457200" y="4251959"/>
+          <a:ext cx="3566160" cy="1874519"/>
         </p:xfrm>
         <a:graphic>
           <a:graphicData uri="http://schemas.openxmlformats.org/drawingml/2006/chart">
@@ -21456,8 +23654,8 @@
         </p:nvSpPr>
         <p:spPr>
           <a:xfrm>
-            <a:off x="8083296" y="3657600"/>
-            <a:ext cx="1691640" cy="548640"/>
+            <a:off x="4206240" y="4434840"/>
+            <a:ext cx="1737360" cy="548640"/>
           </a:xfrm>
           <a:prstGeom prst="rect">
             <a:avLst/>
@@ -21476,13 +23674,13 @@
               </a:spcAft>
             </a:pPr>
             <a:r>
-              <a:rPr sz="2400" b="0">
+              <a:rPr sz="2600" b="0">
                 <a:solidFill>
                   <a:srgbClr val="B0412D"/>
                 </a:solidFill>
                 <a:latin typeface="Segoe UI Semibold"/>
               </a:rPr>
-              <a:t>33%</a:t>
+              <a:t>28</a:t>
             </a:r>
           </a:p>
         </p:txBody>
@@ -21495,8 +23693,8 @@
         </p:nvSpPr>
         <p:spPr>
           <a:xfrm>
-            <a:off x="8083296" y="4224528"/>
-            <a:ext cx="1691640" cy="457200"/>
+            <a:off x="4206240" y="5001768"/>
+            <a:ext cx="1737360" cy="457200"/>
           </a:xfrm>
           <a:prstGeom prst="rect">
             <a:avLst/>
@@ -21521,7 +23719,7 @@
                 </a:solidFill>
                 <a:latin typeface="Segoe UI"/>
               </a:rPr>
-              <a:t>of assessments at level 1–2</a:t>
+              <a:t>high-potential people at high attrition risk</a:t>
             </a:r>
           </a:p>
         </p:txBody>
@@ -21534,8 +23732,8 @@
         </p:nvSpPr>
         <p:spPr>
           <a:xfrm>
-            <a:off x="9866376" y="3657600"/>
-            <a:ext cx="1691640" cy="548640"/>
+            <a:off x="6217920" y="3931920"/>
+            <a:ext cx="5422392" cy="320040"/>
           </a:xfrm>
           <a:prstGeom prst="rect">
             <a:avLst/>
@@ -21554,27 +23752,56 @@
               </a:spcAft>
             </a:pPr>
             <a:r>
-              <a:rPr sz="2400" b="0">
+              <a:rPr sz="1300" b="0">
                 <a:solidFill>
                   <a:srgbClr val="17202A"/>
                 </a:solidFill>
                 <a:latin typeface="Segoe UI Semibold"/>
               </a:rPr>
-              <a:t>39%</a:t>
-            </a:r>
-          </a:p>
-        </p:txBody>
-      </p:sp>
-      <p:sp>
-        <p:nvSpPr>
-          <p:cNvPr id="21" name="TextBox 20"/>
+              <a:t>Q4 · Training and development</a:t>
+            </a:r>
+          </a:p>
+        </p:txBody>
+      </p:sp>
+      <p:sp>
+        <p:nvSpPr>
+          <p:cNvPr id="21" name="Rounded Rectangle 20"/>
+          <p:cNvSpPr/>
+          <p:nvPr/>
+        </p:nvSpPr>
+        <p:spPr>
+          <a:xfrm>
+            <a:off x="6217920" y="4343400"/>
+            <a:ext cx="2633472" cy="886968"/>
+          </a:xfrm>
+          <a:prstGeom prst="roundRect">
+            <a:avLst>
+              <a:gd name="adj" fmla="val 6000"/>
+            </a:avLst>
+          </a:prstGeom>
+          <a:solidFill>
+            <a:srgbClr val="F4F6F8"/>
+          </a:solidFill>
+          <a:ln>
+            <a:noFill/>
+          </a:ln>
+        </p:spPr>
+        <p:txBody>
+          <a:bodyPr rtlCol="0" anchor="ctr"/>
+          <a:lstStyle/>
+          <a:p/>
+        </p:txBody>
+      </p:sp>
+      <p:sp>
+        <p:nvSpPr>
+          <p:cNvPr id="22" name="TextBox 21"/>
           <p:cNvSpPr txBox="1"/>
           <p:nvPr/>
         </p:nvSpPr>
         <p:spPr>
           <a:xfrm>
-            <a:off x="9866376" y="4224528"/>
-            <a:ext cx="1691640" cy="457200"/>
+            <a:off x="6382512" y="4398264"/>
+            <a:ext cx="2377440" cy="457200"/>
           </a:xfrm>
           <a:prstGeom prst="rect">
             <a:avLst/>
@@ -21593,27 +23820,27 @@
               </a:spcAft>
             </a:pPr>
             <a:r>
-              <a:rPr sz="1100" b="0">
-                <a:solidFill>
-                  <a:srgbClr val="4B5765"/>
-                </a:solidFill>
-                <a:latin typeface="Segoe UI"/>
-              </a:rPr>
-              <a:t>at level 4–5</a:t>
-            </a:r>
-          </a:p>
-        </p:txBody>
-      </p:sp>
-      <p:sp>
-        <p:nvSpPr>
-          <p:cNvPr id="22" name="TextBox 21"/>
+              <a:rPr sz="2200" b="0">
+                <a:solidFill>
+                  <a:srgbClr val="17202A"/>
+                </a:solidFill>
+                <a:latin typeface="Segoe UI Semibold"/>
+              </a:rPr>
+              <a:t>1.75</a:t>
+            </a:r>
+          </a:p>
+        </p:txBody>
+      </p:sp>
+      <p:sp>
+        <p:nvSpPr>
+          <p:cNvPr id="23" name="TextBox 22"/>
           <p:cNvSpPr txBox="1"/>
           <p:nvPr/>
         </p:nvSpPr>
         <p:spPr>
           <a:xfrm>
-            <a:off x="8083296" y="4983480"/>
-            <a:ext cx="3557016" cy="1097280"/>
+            <a:off x="6382512" y="4855464"/>
+            <a:ext cx="2377440" cy="320040"/>
           </a:xfrm>
           <a:prstGeom prst="rect">
             <a:avLst/>
@@ -21632,20 +23859,341 @@
               </a:spcAft>
             </a:pPr>
             <a:r>
-              <a:rPr sz="1100" b="0">
+              <a:rPr sz="1050" b="0">
                 <a:solidFill>
                   <a:srgbClr val="4B5765"/>
                 </a:solidFill>
                 <a:latin typeface="Segoe UI"/>
               </a:rPr>
-              <a:t>% of assessed employees meeting their role's required level. Gaps are specific skills, not whole categories.</a:t>
+              <a:t>courses per employee</a:t>
+            </a:r>
+          </a:p>
+        </p:txBody>
+      </p:sp>
+      <p:sp>
+        <p:nvSpPr>
+          <p:cNvPr id="24" name="Rounded Rectangle 23"/>
+          <p:cNvSpPr/>
+          <p:nvPr/>
+        </p:nvSpPr>
+        <p:spPr>
+          <a:xfrm>
+            <a:off x="8942832" y="4343400"/>
+            <a:ext cx="2633472" cy="886968"/>
+          </a:xfrm>
+          <a:prstGeom prst="roundRect">
+            <a:avLst>
+              <a:gd name="adj" fmla="val 6000"/>
+            </a:avLst>
+          </a:prstGeom>
+          <a:solidFill>
+            <a:srgbClr val="F4F6F8"/>
+          </a:solidFill>
+          <a:ln>
+            <a:noFill/>
+          </a:ln>
+        </p:spPr>
+        <p:txBody>
+          <a:bodyPr rtlCol="0" anchor="ctr"/>
+          <a:lstStyle/>
+          <a:p/>
+        </p:txBody>
+      </p:sp>
+      <p:sp>
+        <p:nvSpPr>
+          <p:cNvPr id="25" name="TextBox 24"/>
+          <p:cNvSpPr txBox="1"/>
+          <p:nvPr/>
+        </p:nvSpPr>
+        <p:spPr>
+          <a:xfrm>
+            <a:off x="9107424" y="4398264"/>
+            <a:ext cx="2377440" cy="457200"/>
+          </a:xfrm>
+          <a:prstGeom prst="rect">
+            <a:avLst/>
+          </a:prstGeom>
+          <a:noFill/>
+        </p:spPr>
+        <p:txBody>
+          <a:bodyPr wrap="square" anchor="t" lIns="18288" rIns="18288" tIns="18288" bIns="18288">
+            <a:spAutoFit/>
+          </a:bodyPr>
+          <a:lstStyle/>
+          <a:p>
+            <a:pPr algn="l">
+              <a:spcAft>
+                <a:spcPts val="400"/>
+              </a:spcAft>
+            </a:pPr>
+            <a:r>
+              <a:rPr sz="2200" b="0">
+                <a:solidFill>
+                  <a:srgbClr val="17202A"/>
+                </a:solidFill>
+                <a:latin typeface="Segoe UI Semibold"/>
+              </a:rPr>
+              <a:t>1,764</a:t>
+            </a:r>
+          </a:p>
+        </p:txBody>
+      </p:sp>
+      <p:sp>
+        <p:nvSpPr>
+          <p:cNvPr id="26" name="TextBox 25"/>
+          <p:cNvSpPr txBox="1"/>
+          <p:nvPr/>
+        </p:nvSpPr>
+        <p:spPr>
+          <a:xfrm>
+            <a:off x="9107424" y="4855464"/>
+            <a:ext cx="2377440" cy="320040"/>
+          </a:xfrm>
+          <a:prstGeom prst="rect">
+            <a:avLst/>
+          </a:prstGeom>
+          <a:noFill/>
+        </p:spPr>
+        <p:txBody>
+          <a:bodyPr wrap="square" anchor="t" lIns="18288" rIns="18288" tIns="18288" bIns="18288">
+            <a:spAutoFit/>
+          </a:bodyPr>
+          <a:lstStyle/>
+          <a:p>
+            <a:pPr algn="l">
+              <a:spcAft>
+                <a:spcPts val="400"/>
+              </a:spcAft>
+            </a:pPr>
+            <a:r>
+              <a:rPr sz="1050" b="0">
+                <a:solidFill>
+                  <a:srgbClr val="4B5765"/>
+                </a:solidFill>
+                <a:latin typeface="Segoe UI"/>
+              </a:rPr>
+              <a:t>certifications</a:t>
+            </a:r>
+          </a:p>
+        </p:txBody>
+      </p:sp>
+      <p:sp>
+        <p:nvSpPr>
+          <p:cNvPr id="27" name="Rounded Rectangle 26"/>
+          <p:cNvSpPr/>
+          <p:nvPr/>
+        </p:nvSpPr>
+        <p:spPr>
+          <a:xfrm>
+            <a:off x="6217920" y="5321808"/>
+            <a:ext cx="2633472" cy="886968"/>
+          </a:xfrm>
+          <a:prstGeom prst="roundRect">
+            <a:avLst>
+              <a:gd name="adj" fmla="val 6000"/>
+            </a:avLst>
+          </a:prstGeom>
+          <a:solidFill>
+            <a:srgbClr val="F4F6F8"/>
+          </a:solidFill>
+          <a:ln>
+            <a:noFill/>
+          </a:ln>
+        </p:spPr>
+        <p:txBody>
+          <a:bodyPr rtlCol="0" anchor="ctr"/>
+          <a:lstStyle/>
+          <a:p/>
+        </p:txBody>
+      </p:sp>
+      <p:sp>
+        <p:nvSpPr>
+          <p:cNvPr id="28" name="TextBox 27"/>
+          <p:cNvSpPr txBox="1"/>
+          <p:nvPr/>
+        </p:nvSpPr>
+        <p:spPr>
+          <a:xfrm>
+            <a:off x="6382512" y="5376672"/>
+            <a:ext cx="2377440" cy="457200"/>
+          </a:xfrm>
+          <a:prstGeom prst="rect">
+            <a:avLst/>
+          </a:prstGeom>
+          <a:noFill/>
+        </p:spPr>
+        <p:txBody>
+          <a:bodyPr wrap="square" anchor="t" lIns="18288" rIns="18288" tIns="18288" bIns="18288">
+            <a:spAutoFit/>
+          </a:bodyPr>
+          <a:lstStyle/>
+          <a:p>
+            <a:pPr algn="l">
+              <a:spcAft>
+                <a:spcPts val="400"/>
+              </a:spcAft>
+            </a:pPr>
+            <a:r>
+              <a:rPr sz="2200" b="0">
+                <a:solidFill>
+                  <a:srgbClr val="17202A"/>
+                </a:solidFill>
+                <a:latin typeface="Segoe UI Semibold"/>
+              </a:rPr>
+              <a:t>41%</a:t>
+            </a:r>
+          </a:p>
+        </p:txBody>
+      </p:sp>
+      <p:sp>
+        <p:nvSpPr>
+          <p:cNvPr id="29" name="TextBox 28"/>
+          <p:cNvSpPr txBox="1"/>
+          <p:nvPr/>
+        </p:nvSpPr>
+        <p:spPr>
+          <a:xfrm>
+            <a:off x="6382512" y="5833872"/>
+            <a:ext cx="2377440" cy="320040"/>
+          </a:xfrm>
+          <a:prstGeom prst="rect">
+            <a:avLst/>
+          </a:prstGeom>
+          <a:noFill/>
+        </p:spPr>
+        <p:txBody>
+          <a:bodyPr wrap="square" anchor="t" lIns="18288" rIns="18288" tIns="18288" bIns="18288">
+            <a:spAutoFit/>
+          </a:bodyPr>
+          <a:lstStyle/>
+          <a:p>
+            <a:pPr algn="l">
+              <a:spcAft>
+                <a:spcPts val="400"/>
+              </a:spcAft>
+            </a:pPr>
+            <a:r>
+              <a:rPr sz="1050" b="0">
+                <a:solidFill>
+                  <a:srgbClr val="4B5765"/>
+                </a:solidFill>
+                <a:latin typeface="Segoe UI"/>
+              </a:rPr>
+              <a:t>quiz pass rate</a:t>
+            </a:r>
+          </a:p>
+        </p:txBody>
+      </p:sp>
+      <p:sp>
+        <p:nvSpPr>
+          <p:cNvPr id="30" name="Rounded Rectangle 29"/>
+          <p:cNvSpPr/>
+          <p:nvPr/>
+        </p:nvSpPr>
+        <p:spPr>
+          <a:xfrm>
+            <a:off x="8942832" y="5321808"/>
+            <a:ext cx="2633472" cy="886968"/>
+          </a:xfrm>
+          <a:prstGeom prst="roundRect">
+            <a:avLst>
+              <a:gd name="adj" fmla="val 6000"/>
+            </a:avLst>
+          </a:prstGeom>
+          <a:solidFill>
+            <a:srgbClr val="F4F6F8"/>
+          </a:solidFill>
+          <a:ln>
+            <a:noFill/>
+          </a:ln>
+        </p:spPr>
+        <p:txBody>
+          <a:bodyPr rtlCol="0" anchor="ctr"/>
+          <a:lstStyle/>
+          <a:p/>
+        </p:txBody>
+      </p:sp>
+      <p:sp>
+        <p:nvSpPr>
+          <p:cNvPr id="31" name="TextBox 30"/>
+          <p:cNvSpPr txBox="1"/>
+          <p:nvPr/>
+        </p:nvSpPr>
+        <p:spPr>
+          <a:xfrm>
+            <a:off x="9107424" y="5376672"/>
+            <a:ext cx="2377440" cy="457200"/>
+          </a:xfrm>
+          <a:prstGeom prst="rect">
+            <a:avLst/>
+          </a:prstGeom>
+          <a:noFill/>
+        </p:spPr>
+        <p:txBody>
+          <a:bodyPr wrap="square" anchor="t" lIns="18288" rIns="18288" tIns="18288" bIns="18288">
+            <a:spAutoFit/>
+          </a:bodyPr>
+          <a:lstStyle/>
+          <a:p>
+            <a:pPr algn="l">
+              <a:spcAft>
+                <a:spcPts val="400"/>
+              </a:spcAft>
+            </a:pPr>
+            <a:r>
+              <a:rPr sz="2200" b="0">
+                <a:solidFill>
+                  <a:srgbClr val="B0412D"/>
+                </a:solidFill>
+                <a:latin typeface="Segoe UI Semibold"/>
+              </a:rPr>
+              <a:t>232</a:t>
+            </a:r>
+          </a:p>
+        </p:txBody>
+      </p:sp>
+      <p:sp>
+        <p:nvSpPr>
+          <p:cNvPr id="32" name="TextBox 31"/>
+          <p:cNvSpPr txBox="1"/>
+          <p:nvPr/>
+        </p:nvSpPr>
+        <p:spPr>
+          <a:xfrm>
+            <a:off x="9107424" y="5833872"/>
+            <a:ext cx="2377440" cy="320040"/>
+          </a:xfrm>
+          <a:prstGeom prst="rect">
+            <a:avLst/>
+          </a:prstGeom>
+          <a:noFill/>
+        </p:spPr>
+        <p:txBody>
+          <a:bodyPr wrap="square" anchor="t" lIns="18288" rIns="18288" tIns="18288" bIns="18288">
+            <a:spAutoFit/>
+          </a:bodyPr>
+          <a:lstStyle/>
+          <a:p>
+            <a:pPr algn="l">
+              <a:spcAft>
+                <a:spcPts val="400"/>
+              </a:spcAft>
+            </a:pPr>
+            <a:r>
+              <a:rPr sz="1050" b="0">
+                <a:solidFill>
+                  <a:srgbClr val="4B5765"/>
+                </a:solidFill>
+                <a:latin typeface="Segoe UI"/>
+              </a:rPr>
+              <a:t>with no learning activity</a:t>
             </a:r>
           </a:p>
         </p:txBody>
       </p:sp>
       <p:cxnSp>
         <p:nvCxnSpPr>
-          <p:cNvPr id="23" name="Connector 22"/>
+          <p:cNvPr id="33" name="Connector 32"/>
           <p:cNvCxnSpPr/>
           <p:nvPr/>
         </p:nvCxnSpPr>
@@ -21666,7 +24214,7 @@
       </p:cxnSp>
       <p:sp>
         <p:nvSpPr>
-          <p:cNvPr id="24" name="TextBox 23"/>
+          <p:cNvPr id="34" name="TextBox 33"/>
           <p:cNvSpPr txBox="1"/>
           <p:nvPr/>
         </p:nvSpPr>
@@ -21705,7 +24253,7 @@
       </p:sp>
       <p:sp>
         <p:nvSpPr>
-          <p:cNvPr id="25" name="TextBox 24"/>
+          <p:cNvPr id="35" name="TextBox 34"/>
           <p:cNvSpPr txBox="1"/>
           <p:nvPr/>
         </p:nvSpPr>
@@ -21737,7 +24285,7 @@
                 </a:solidFill>
                 <a:latin typeface="Segoe UI"/>
               </a:rPr>
-              <a:t>9 / 11</a:t>
+              <a:t>9 / 12</a:t>
             </a:r>
           </a:p>
         </p:txBody>
